--- a/presentation/AI_Career_Coach_Workshop.pptx
+++ b/presentation/AI_Career_Coach_Workshop.pptx
@@ -19,9 +19,14 @@
     <p:sldId id="267" r:id="rId13"/>
     <p:sldId id="268" r:id="rId14"/>
     <p:sldId id="269" r:id="rId15"/>
+    <p:sldId id="270" r:id="rId16"/>
+    <p:sldId id="271" r:id="rId17"/>
+    <p:sldId id="272" r:id="rId18"/>
+    <p:sldId id="273" r:id="rId19"/>
+    <p:sldId id="274" r:id="rId20"/>
   </p:sldIdLst>
   <p:notesMasterIdLst>
-    <p:notesMasterId r:id="rId16"/>
+    <p:notesMasterId r:id="rId21"/>
   </p:notesMasterIdLst>
   <p:sldSz cx="12192000" cy="6858000"/>
   <p:notesSz cx="6858000" cy="12192000"/>
@@ -120,38 +125,43 @@
   <p:extLst>
     <p:ext uri="{521415D9-36F7-43E2-AB2F-B90AF26B5E84}">
       <p14:sectionLst xmlns:p14="http://schemas.microsoft.com/office/powerpoint/2010/main">
-        <p14:section name="Welcome" id="{444d3e4d-9e4d-7953-232a-71f6b048c481}">
+        <p14:section name="Welcome" id="{84df10ab-4af7-b205-3cf5-0b758dd4956c}">
           <p14:sldIdLst>
             <p14:sldId id="256"/>
             <p14:sldId id="257"/>
           </p14:sldIdLst>
         </p14:section>
-        <p14:section name="The Basics" id="{56203827-f86d-4b4b-3c2f-d42420adcf8f}">
+        <p14:section name="The Basics" id="{743762dc-03a2-003c-4bcb-6594af46acd5}">
           <p14:sldIdLst>
             <p14:sldId id="258"/>
             <p14:sldId id="259"/>
             <p14:sldId id="260"/>
           </p14:sldIdLst>
         </p14:section>
-        <p14:section name="The Project" id="{7477de16-9b8e-2e9b-9fb6-2fad3b2619dc}">
+        <p14:section name="The Project" id="{2dcbec02-2427-0db7-6484-e60897e67fbf}">
           <p14:sldIdLst>
             <p14:sldId id="261"/>
             <p14:sldId id="262"/>
             <p14:sldId id="263"/>
           </p14:sldIdLst>
         </p14:section>
-        <p14:section name="How It Works" id="{3bbcf936-7f86-b735-16e5-b0e14b94ae19}">
+        <p14:section name="How It Works" id="{2b47adbe-2cbc-f377-1f5e-bc59490c00ce}">
           <p14:sldIdLst>
             <p14:sldId id="264"/>
             <p14:sldId id="265"/>
-          </p14:sldIdLst>
-        </p14:section>
-        <p14:section name="Let's Build" id="{ab0aee60-eb4e-9bc7-97b8-54ece9506931}">
-          <p14:sldIdLst>
             <p14:sldId id="266"/>
             <p14:sldId id="267"/>
             <p14:sldId id="268"/>
             <p14:sldId id="269"/>
+            <p14:sldId id="270"/>
+          </p14:sldIdLst>
+        </p14:section>
+        <p14:section name="Let's Build" id="{58eadc16-5174-3c58-886d-013b76e71790}">
+          <p14:sldIdLst>
+            <p14:sldId id="271"/>
+            <p14:sldId id="272"/>
+            <p14:sldId id="273"/>
+            <p14:sldId id="274"/>
           </p14:sldIdLst>
         </p14:section>
       </p14:sectionLst>
@@ -646,7 +656,7 @@
           <a:p>
             <a:r>
               <a:rPr lang="en-US" dirty="0"/>
-              <a:t>Here is how one click travels. Think of a restaurant. You order at the website, which Amplify hosts. API Gateway is the server who carries your order to the kitchen. Lambda is the cook who turns your answers into clear instructions for the AI. Those instructions are called a prompt. Bedrock is the chef: the AI writes your plan. Then the plan travels back to your screen. The whole trip takes about five seconds.</a:t>
+              <a:t>Amplify is where our website lives. Our site is just three files. Amplify stores them and gives us a link that works on any phone or laptop. We don't set up any computers. We upload a zip file and Amplify does the rest. The link even starts with https, which means the connection is secure.</a:t>
             </a:r>
             <a:endParaRPr lang="en-US" dirty="0"/>
           </a:p>
@@ -734,7 +744,7 @@
           <a:p>
             <a:r>
               <a:rPr lang="en-US" dirty="0"/>
-              <a:t>Here's our plan. We'll go step by step, and we'll all move together. If you fall behind, that's okay. We have a backup link so everyone can still finish.</a:t>
+              <a:t>API Gateway is the front door. The website can't reach our code directly. Instead, it sends your answers to one web address, and API Gateway passes them to Lambda. It also brings the answer back. Because everything goes through one door, we can control who gets in and how often. API means a way for two programs to talk.</a:t>
             </a:r>
             <a:endParaRPr lang="en-US" dirty="0"/>
           </a:p>
@@ -822,7 +832,7 @@
           <a:p>
             <a:r>
               <a:rPr lang="en-US" dirty="0"/>
-              <a:t>You don't need any coding experience today. We'll copy and paste the code together. Every engineer sees error messages every day. They are clues, not failures. And we build better together, so help your neighbor.</a:t>
+              <a:t>Lambda is where our Python code runs. The code is short. It reads your answers, turns them into instructions for the AI, and sends back the result. Lambda only runs when someone clicks the button. The rest of the time, it costs nothing. This is called serverless. There are still computers, but AWS takes care of them, not us.</a:t>
             </a:r>
             <a:endParaRPr lang="en-US" dirty="0"/>
           </a:p>
@@ -910,7 +920,7 @@
           <a:p>
             <a:r>
               <a:rPr lang="en-US" dirty="0"/>
-              <a:t>The tools you touch today, like cloud services, APIs, serverless code, and AI models, are used every day in these jobs. Try the app with one of these goals and see your own roadmap.</a:t>
+              <a:t>Bedrock is the brain of our app. It gives us access to AI models from Amazon and other companies. We use one called Amazon Nova Pro. Our Lambda code sends Nova a prompt. A prompt is just the instructions you give an AI. Nova sends back your roadmap. Remember the playground at the start? That's Bedrock too.</a:t>
             </a:r>
             <a:endParaRPr lang="en-US" dirty="0"/>
           </a:p>
@@ -998,7 +1008,7 @@
           <a:p>
             <a:r>
               <a:rPr lang="en-US" dirty="0"/>
-              <a:t>Open the GitHub link on your laptop and download the files. Then sign in to the AWS console, and let's build your AI career coach together.</a:t>
+              <a:t>Two more AWS tools help in the background. IAM stands for Identity and Access Management. It controls permissions. Our Lambda code gets permission to use the Nova AI and nothing else. That's a good safety habit called least privilege. CloudWatch keeps logs. A log is a record of what happened. When something goes wrong, the logs tell us why.</a:t>
             </a:r>
             <a:endParaRPr lang="en-US" dirty="0"/>
           </a:p>
@@ -1022,6 +1032,446 @@
             <a:fld id="{F7021451-1387-4CA6-816F-3879F97B5CBC}" type="slidenum">
               <a:rPr lang="en-US"/>
               <a:t>14</a:t>
+            </a:fld>
+            <a:endParaRPr lang="en-US"/>
+          </a:p>
+        </p:txBody>
+      </p:sp>
+    </p:spTree>
+    <p:extLst>
+      <p:ext uri="{BB962C8B-B14F-4D97-AF65-F5344CB8AC3E}">
+        <p14:creationId xmlns:p14="http://schemas.microsoft.com/office/powerpoint/2010/main" val="1024086991"/>
+      </p:ext>
+    </p:extLst>
+  </p:cSld>
+  <p:clrMapOvr>
+    <a:masterClrMapping/>
+  </p:clrMapOvr>
+</p:notes>
+</file>
+
+<file path=ppt/notesSlides/notesSlide15.xml><?xml version="1.0" encoding="utf-8"?>
+<p:notes xmlns:a="http://schemas.openxmlformats.org/drawingml/2006/main" xmlns:r="http://schemas.openxmlformats.org/officeDocument/2006/relationships" xmlns:p="http://schemas.openxmlformats.org/presentationml/2006/main">
+  <p:cSld>
+    <p:spTree>
+      <p:nvGrpSpPr>
+        <p:cNvPr id="1" name=""/>
+        <p:cNvGrpSpPr/>
+        <p:nvPr/>
+      </p:nvGrpSpPr>
+      <p:grpSpPr>
+        <a:xfrm>
+          <a:off x="0" y="0"/>
+          <a:ext cx="0" cy="0"/>
+          <a:chOff x="0" y="0"/>
+          <a:chExt cx="0" cy="0"/>
+        </a:xfrm>
+      </p:grpSpPr>
+      <p:sp>
+        <p:nvSpPr>
+          <p:cNvPr id="2" name="Slide Image Placeholder 1"/>
+          <p:cNvSpPr>
+            <a:spLocks noGrp="1" noRot="1" noChangeAspect="1"/>
+          </p:cNvSpPr>
+          <p:nvPr>
+            <p:ph type="sldImg"/>
+          </p:nvPr>
+        </p:nvSpPr>
+        <p:spPr/>
+      </p:sp>
+      <p:sp>
+        <p:nvSpPr>
+          <p:cNvPr id="3" name="Notes Placeholder 2"/>
+          <p:cNvSpPr>
+            <a:spLocks noGrp="1"/>
+          </p:cNvSpPr>
+          <p:nvPr>
+            <p:ph type="body" idx="1"/>
+          </p:nvPr>
+        </p:nvSpPr>
+        <p:spPr/>
+        <p:txBody>
+          <a:bodyPr/>
+          <a:lstStyle/>
+          <a:p>
+            <a:r>
+              <a:rPr lang="en-US" dirty="0"/>
+              <a:t>Here is how one click travels. Think of a restaurant. You order at the website, which Amplify hosts. API Gateway is the server who carries your order to the kitchen. Lambda is the cook who turns your answers into clear instructions for the AI. Those instructions are called a prompt. Bedrock is the chef: the AI writes your plan. Then the plan travels back to your screen. The whole trip takes about five seconds.</a:t>
+            </a:r>
+            <a:endParaRPr lang="en-US" dirty="0"/>
+          </a:p>
+        </p:txBody>
+      </p:sp>
+      <p:sp>
+        <p:nvSpPr>
+          <p:cNvPr id="4" name="Slide Number Placeholder 3"/>
+          <p:cNvSpPr>
+            <a:spLocks noGrp="1"/>
+          </p:cNvSpPr>
+          <p:nvPr>
+            <p:ph type="sldNum" sz="quarter" idx="10"/>
+          </p:nvPr>
+        </p:nvSpPr>
+        <p:spPr/>
+        <p:txBody>
+          <a:bodyPr/>
+          <a:lstStyle/>
+          <a:p>
+            <a:fld id="{F7021451-1387-4CA6-816F-3879F97B5CBC}" type="slidenum">
+              <a:rPr lang="en-US"/>
+              <a:t>15</a:t>
+            </a:fld>
+            <a:endParaRPr lang="en-US"/>
+          </a:p>
+        </p:txBody>
+      </p:sp>
+    </p:spTree>
+    <p:extLst>
+      <p:ext uri="{BB962C8B-B14F-4D97-AF65-F5344CB8AC3E}">
+        <p14:creationId xmlns:p14="http://schemas.microsoft.com/office/powerpoint/2010/main" val="1024086991"/>
+      </p:ext>
+    </p:extLst>
+  </p:cSld>
+  <p:clrMapOvr>
+    <a:masterClrMapping/>
+  </p:clrMapOvr>
+</p:notes>
+</file>
+
+<file path=ppt/notesSlides/notesSlide16.xml><?xml version="1.0" encoding="utf-8"?>
+<p:notes xmlns:a="http://schemas.openxmlformats.org/drawingml/2006/main" xmlns:r="http://schemas.openxmlformats.org/officeDocument/2006/relationships" xmlns:p="http://schemas.openxmlformats.org/presentationml/2006/main">
+  <p:cSld>
+    <p:spTree>
+      <p:nvGrpSpPr>
+        <p:cNvPr id="1" name=""/>
+        <p:cNvGrpSpPr/>
+        <p:nvPr/>
+      </p:nvGrpSpPr>
+      <p:grpSpPr>
+        <a:xfrm>
+          <a:off x="0" y="0"/>
+          <a:ext cx="0" cy="0"/>
+          <a:chOff x="0" y="0"/>
+          <a:chExt cx="0" cy="0"/>
+        </a:xfrm>
+      </p:grpSpPr>
+      <p:sp>
+        <p:nvSpPr>
+          <p:cNvPr id="2" name="Slide Image Placeholder 1"/>
+          <p:cNvSpPr>
+            <a:spLocks noGrp="1" noRot="1" noChangeAspect="1"/>
+          </p:cNvSpPr>
+          <p:nvPr>
+            <p:ph type="sldImg"/>
+          </p:nvPr>
+        </p:nvSpPr>
+        <p:spPr/>
+      </p:sp>
+      <p:sp>
+        <p:nvSpPr>
+          <p:cNvPr id="3" name="Notes Placeholder 2"/>
+          <p:cNvSpPr>
+            <a:spLocks noGrp="1"/>
+          </p:cNvSpPr>
+          <p:nvPr>
+            <p:ph type="body" idx="1"/>
+          </p:nvPr>
+        </p:nvSpPr>
+        <p:spPr/>
+        <p:txBody>
+          <a:bodyPr/>
+          <a:lstStyle/>
+          <a:p>
+            <a:r>
+              <a:rPr lang="en-US" dirty="0"/>
+              <a:t>Here's our plan. We'll go step by step, and we'll all move together. If you fall behind, that's okay. We have a backup link so everyone can still finish.</a:t>
+            </a:r>
+            <a:endParaRPr lang="en-US" dirty="0"/>
+          </a:p>
+        </p:txBody>
+      </p:sp>
+      <p:sp>
+        <p:nvSpPr>
+          <p:cNvPr id="4" name="Slide Number Placeholder 3"/>
+          <p:cNvSpPr>
+            <a:spLocks noGrp="1"/>
+          </p:cNvSpPr>
+          <p:nvPr>
+            <p:ph type="sldNum" sz="quarter" idx="10"/>
+          </p:nvPr>
+        </p:nvSpPr>
+        <p:spPr/>
+        <p:txBody>
+          <a:bodyPr/>
+          <a:lstStyle/>
+          <a:p>
+            <a:fld id="{F7021451-1387-4CA6-816F-3879F97B5CBC}" type="slidenum">
+              <a:rPr lang="en-US"/>
+              <a:t>16</a:t>
+            </a:fld>
+            <a:endParaRPr lang="en-US"/>
+          </a:p>
+        </p:txBody>
+      </p:sp>
+    </p:spTree>
+    <p:extLst>
+      <p:ext uri="{BB962C8B-B14F-4D97-AF65-F5344CB8AC3E}">
+        <p14:creationId xmlns:p14="http://schemas.microsoft.com/office/powerpoint/2010/main" val="1024086991"/>
+      </p:ext>
+    </p:extLst>
+  </p:cSld>
+  <p:clrMapOvr>
+    <a:masterClrMapping/>
+  </p:clrMapOvr>
+</p:notes>
+</file>
+
+<file path=ppt/notesSlides/notesSlide17.xml><?xml version="1.0" encoding="utf-8"?>
+<p:notes xmlns:a="http://schemas.openxmlformats.org/drawingml/2006/main" xmlns:r="http://schemas.openxmlformats.org/officeDocument/2006/relationships" xmlns:p="http://schemas.openxmlformats.org/presentationml/2006/main">
+  <p:cSld>
+    <p:spTree>
+      <p:nvGrpSpPr>
+        <p:cNvPr id="1" name=""/>
+        <p:cNvGrpSpPr/>
+        <p:nvPr/>
+      </p:nvGrpSpPr>
+      <p:grpSpPr>
+        <a:xfrm>
+          <a:off x="0" y="0"/>
+          <a:ext cx="0" cy="0"/>
+          <a:chOff x="0" y="0"/>
+          <a:chExt cx="0" cy="0"/>
+        </a:xfrm>
+      </p:grpSpPr>
+      <p:sp>
+        <p:nvSpPr>
+          <p:cNvPr id="2" name="Slide Image Placeholder 1"/>
+          <p:cNvSpPr>
+            <a:spLocks noGrp="1" noRot="1" noChangeAspect="1"/>
+          </p:cNvSpPr>
+          <p:nvPr>
+            <p:ph type="sldImg"/>
+          </p:nvPr>
+        </p:nvSpPr>
+        <p:spPr/>
+      </p:sp>
+      <p:sp>
+        <p:nvSpPr>
+          <p:cNvPr id="3" name="Notes Placeholder 2"/>
+          <p:cNvSpPr>
+            <a:spLocks noGrp="1"/>
+          </p:cNvSpPr>
+          <p:nvPr>
+            <p:ph type="body" idx="1"/>
+          </p:nvPr>
+        </p:nvSpPr>
+        <p:spPr/>
+        <p:txBody>
+          <a:bodyPr/>
+          <a:lstStyle/>
+          <a:p>
+            <a:r>
+              <a:rPr lang="en-US" dirty="0"/>
+              <a:t>You don't need any coding experience today. We'll copy and paste the code together. Every engineer sees error messages every day. They are clues, not failures. And we build better together, so help your neighbor.</a:t>
+            </a:r>
+            <a:endParaRPr lang="en-US" dirty="0"/>
+          </a:p>
+        </p:txBody>
+      </p:sp>
+      <p:sp>
+        <p:nvSpPr>
+          <p:cNvPr id="4" name="Slide Number Placeholder 3"/>
+          <p:cNvSpPr>
+            <a:spLocks noGrp="1"/>
+          </p:cNvSpPr>
+          <p:nvPr>
+            <p:ph type="sldNum" sz="quarter" idx="10"/>
+          </p:nvPr>
+        </p:nvSpPr>
+        <p:spPr/>
+        <p:txBody>
+          <a:bodyPr/>
+          <a:lstStyle/>
+          <a:p>
+            <a:fld id="{F7021451-1387-4CA6-816F-3879F97B5CBC}" type="slidenum">
+              <a:rPr lang="en-US"/>
+              <a:t>17</a:t>
+            </a:fld>
+            <a:endParaRPr lang="en-US"/>
+          </a:p>
+        </p:txBody>
+      </p:sp>
+    </p:spTree>
+    <p:extLst>
+      <p:ext uri="{BB962C8B-B14F-4D97-AF65-F5344CB8AC3E}">
+        <p14:creationId xmlns:p14="http://schemas.microsoft.com/office/powerpoint/2010/main" val="1024086991"/>
+      </p:ext>
+    </p:extLst>
+  </p:cSld>
+  <p:clrMapOvr>
+    <a:masterClrMapping/>
+  </p:clrMapOvr>
+</p:notes>
+</file>
+
+<file path=ppt/notesSlides/notesSlide18.xml><?xml version="1.0" encoding="utf-8"?>
+<p:notes xmlns:a="http://schemas.openxmlformats.org/drawingml/2006/main" xmlns:r="http://schemas.openxmlformats.org/officeDocument/2006/relationships" xmlns:p="http://schemas.openxmlformats.org/presentationml/2006/main">
+  <p:cSld>
+    <p:spTree>
+      <p:nvGrpSpPr>
+        <p:cNvPr id="1" name=""/>
+        <p:cNvGrpSpPr/>
+        <p:nvPr/>
+      </p:nvGrpSpPr>
+      <p:grpSpPr>
+        <a:xfrm>
+          <a:off x="0" y="0"/>
+          <a:ext cx="0" cy="0"/>
+          <a:chOff x="0" y="0"/>
+          <a:chExt cx="0" cy="0"/>
+        </a:xfrm>
+      </p:grpSpPr>
+      <p:sp>
+        <p:nvSpPr>
+          <p:cNvPr id="2" name="Slide Image Placeholder 1"/>
+          <p:cNvSpPr>
+            <a:spLocks noGrp="1" noRot="1" noChangeAspect="1"/>
+          </p:cNvSpPr>
+          <p:nvPr>
+            <p:ph type="sldImg"/>
+          </p:nvPr>
+        </p:nvSpPr>
+        <p:spPr/>
+      </p:sp>
+      <p:sp>
+        <p:nvSpPr>
+          <p:cNvPr id="3" name="Notes Placeholder 2"/>
+          <p:cNvSpPr>
+            <a:spLocks noGrp="1"/>
+          </p:cNvSpPr>
+          <p:nvPr>
+            <p:ph type="body" idx="1"/>
+          </p:nvPr>
+        </p:nvSpPr>
+        <p:spPr/>
+        <p:txBody>
+          <a:bodyPr/>
+          <a:lstStyle/>
+          <a:p>
+            <a:r>
+              <a:rPr lang="en-US" dirty="0"/>
+              <a:t>The tools you touch today, like cloud services, APIs, serverless code, and AI models, are used every day in these jobs. Try the app with one of these goals and see your own roadmap.</a:t>
+            </a:r>
+            <a:endParaRPr lang="en-US" dirty="0"/>
+          </a:p>
+        </p:txBody>
+      </p:sp>
+      <p:sp>
+        <p:nvSpPr>
+          <p:cNvPr id="4" name="Slide Number Placeholder 3"/>
+          <p:cNvSpPr>
+            <a:spLocks noGrp="1"/>
+          </p:cNvSpPr>
+          <p:nvPr>
+            <p:ph type="sldNum" sz="quarter" idx="10"/>
+          </p:nvPr>
+        </p:nvSpPr>
+        <p:spPr/>
+        <p:txBody>
+          <a:bodyPr/>
+          <a:lstStyle/>
+          <a:p>
+            <a:fld id="{F7021451-1387-4CA6-816F-3879F97B5CBC}" type="slidenum">
+              <a:rPr lang="en-US"/>
+              <a:t>18</a:t>
+            </a:fld>
+            <a:endParaRPr lang="en-US"/>
+          </a:p>
+        </p:txBody>
+      </p:sp>
+    </p:spTree>
+    <p:extLst>
+      <p:ext uri="{BB962C8B-B14F-4D97-AF65-F5344CB8AC3E}">
+        <p14:creationId xmlns:p14="http://schemas.microsoft.com/office/powerpoint/2010/main" val="1024086991"/>
+      </p:ext>
+    </p:extLst>
+  </p:cSld>
+  <p:clrMapOvr>
+    <a:masterClrMapping/>
+  </p:clrMapOvr>
+</p:notes>
+</file>
+
+<file path=ppt/notesSlides/notesSlide19.xml><?xml version="1.0" encoding="utf-8"?>
+<p:notes xmlns:a="http://schemas.openxmlformats.org/drawingml/2006/main" xmlns:r="http://schemas.openxmlformats.org/officeDocument/2006/relationships" xmlns:p="http://schemas.openxmlformats.org/presentationml/2006/main">
+  <p:cSld>
+    <p:spTree>
+      <p:nvGrpSpPr>
+        <p:cNvPr id="1" name=""/>
+        <p:cNvGrpSpPr/>
+        <p:nvPr/>
+      </p:nvGrpSpPr>
+      <p:grpSpPr>
+        <a:xfrm>
+          <a:off x="0" y="0"/>
+          <a:ext cx="0" cy="0"/>
+          <a:chOff x="0" y="0"/>
+          <a:chExt cx="0" cy="0"/>
+        </a:xfrm>
+      </p:grpSpPr>
+      <p:sp>
+        <p:nvSpPr>
+          <p:cNvPr id="2" name="Slide Image Placeholder 1"/>
+          <p:cNvSpPr>
+            <a:spLocks noGrp="1" noRot="1" noChangeAspect="1"/>
+          </p:cNvSpPr>
+          <p:nvPr>
+            <p:ph type="sldImg"/>
+          </p:nvPr>
+        </p:nvSpPr>
+        <p:spPr/>
+      </p:sp>
+      <p:sp>
+        <p:nvSpPr>
+          <p:cNvPr id="3" name="Notes Placeholder 2"/>
+          <p:cNvSpPr>
+            <a:spLocks noGrp="1"/>
+          </p:cNvSpPr>
+          <p:nvPr>
+            <p:ph type="body" idx="1"/>
+          </p:nvPr>
+        </p:nvSpPr>
+        <p:spPr/>
+        <p:txBody>
+          <a:bodyPr/>
+          <a:lstStyle/>
+          <a:p>
+            <a:r>
+              <a:rPr lang="en-US" dirty="0"/>
+              <a:t>Open the GitHub link on your laptop and download the files. Then sign in to the AWS console, and let's build your AI career coach together.</a:t>
+            </a:r>
+            <a:endParaRPr lang="en-US" dirty="0"/>
+          </a:p>
+        </p:txBody>
+      </p:sp>
+      <p:sp>
+        <p:nvSpPr>
+          <p:cNvPr id="4" name="Slide Number Placeholder 3"/>
+          <p:cNvSpPr>
+            <a:spLocks noGrp="1"/>
+          </p:cNvSpPr>
+          <p:nvPr>
+            <p:ph type="sldNum" sz="quarter" idx="10"/>
+          </p:nvPr>
+        </p:nvSpPr>
+        <p:spPr/>
+        <p:txBody>
+          <a:bodyPr/>
+          <a:lstStyle/>
+          <a:p>
+            <a:fld id="{F7021451-1387-4CA6-816F-3879F97B5CBC}" type="slidenum">
+              <a:rPr lang="en-US"/>
+              <a:t>19</a:t>
             </a:fld>
             <a:endParaRPr lang="en-US"/>
           </a:p>
@@ -2534,7 +2984,7 @@
                   <a:schemeClr val="tx1"/>
                 </a:solidFill>
               </a:rPr>
-              <a:t>Follow one click: it's like a restaurant</a:t>
+              <a:t>AWS Amplify: a home for our website</a:t>
             </a:r>
             <a:endParaRPr lang="en-US" sz="3600" dirty="0"/>
           </a:p>
@@ -2542,14 +2992,36 @@
       </p:sp>
       <p:sp>
         <p:nvSpPr>
-          <p:cNvPr id="3" name="flow 1 circle"/>
+          <p:cNvPr id="3" name="amplify panel"/>
           <p:cNvSpPr/>
           <p:nvPr/>
         </p:nvSpPr>
         <p:spPr>
           <a:xfrm>
-            <a:off x="1051560" y="1554480"/>
-            <a:ext cx="1005840" cy="1005840"/>
+            <a:off x="548640" y="1463040"/>
+            <a:ext cx="3931920" cy="4480560"/>
+          </a:xfrm>
+          <a:prstGeom prst="roundRect">
+            <a:avLst>
+              <a:gd name="adj" fmla="val 3488"/>
+            </a:avLst>
+          </a:prstGeom>
+          <a:solidFill>
+            <a:schemeClr val="tx1"/>
+          </a:solidFill>
+          <a:ln/>
+        </p:spPr>
+      </p:sp>
+      <p:sp>
+        <p:nvSpPr>
+          <p:cNvPr id="4" name="amplify circle"/>
+          <p:cNvSpPr/>
+          <p:nvPr/>
+        </p:nvSpPr>
+        <p:spPr>
+          <a:xfrm>
+            <a:off x="914400" y="1783080"/>
+            <a:ext cx="1097280" cy="1097280"/>
           </a:xfrm>
           <a:prstGeom prst="ellipse">
             <a:avLst/>
@@ -2562,7 +3034,7 @@
       </p:sp>
       <p:pic>
         <p:nvPicPr>
-          <p:cNvPr id="4" name="flow 1 icon" descr="flow 1">    </p:cNvPr>
+          <p:cNvPr id="5" name="amplify icon" descr="amplify">    </p:cNvPr>
           <p:cNvPicPr>
             <a:picLocks noChangeAspect="1"/>
           </p:cNvPicPr>
@@ -2576,17 +3048,156 @@
         </p:blipFill>
         <p:spPr>
           <a:xfrm>
-            <a:off x="1303020" y="1805940"/>
-            <a:ext cx="502920" cy="502920"/>
+            <a:off x="1188720" y="2057400"/>
+            <a:ext cx="548640" cy="548640"/>
           </a:xfrm>
           <a:prstGeom prst="rect">
             <a:avLst/>
           </a:prstGeom>
         </p:spPr>
       </p:pic>
+      <p:sp>
+        <p:nvSpPr>
+          <p:cNvPr id="6" name="Text 3"/>
+          <p:cNvSpPr txBox="1"/>
+          <p:nvPr/>
+        </p:nvSpPr>
+        <p:spPr>
+          <a:xfrm>
+            <a:off x="914400" y="3063240"/>
+            <a:ext cx="3200400" cy="1188720"/>
+          </a:xfrm>
+          <a:prstGeom prst="rect">
+            <a:avLst/>
+          </a:prstGeom>
+          <a:noFill/>
+          <a:ln/>
+        </p:spPr>
+        <p:txBody>
+          <a:bodyPr wrap="square" lIns="0" tIns="0" rIns="0" bIns="0" rtlCol="0" anchor="t"/>
+          <a:lstStyle/>
+          <a:p>
+            <a:pPr indent="0" marL="0">
+              <a:buNone/>
+            </a:pPr>
+            <a:r>
+              <a:rPr lang="en-US" sz="2000" b="1" dirty="0">
+                <a:solidFill>
+                  <a:schemeClr val="bg1"/>
+                </a:solidFill>
+              </a:rPr>
+              <a:t>Amplify puts websites on the internet.</a:t>
+            </a:r>
+            <a:endParaRPr lang="en-US" sz="2000" dirty="0"/>
+          </a:p>
+        </p:txBody>
+      </p:sp>
+      <p:sp>
+        <p:nvSpPr>
+          <p:cNvPr id="7" name="Text 4"/>
+          <p:cNvSpPr txBox="1"/>
+          <p:nvPr/>
+        </p:nvSpPr>
+        <p:spPr>
+          <a:xfrm>
+            <a:off x="914400" y="4389120"/>
+            <a:ext cx="3200400" cy="320040"/>
+          </a:xfrm>
+          <a:prstGeom prst="rect">
+            <a:avLst/>
+          </a:prstGeom>
+          <a:noFill/>
+          <a:ln/>
+        </p:spPr>
+        <p:txBody>
+          <a:bodyPr wrap="square" lIns="0" tIns="0" rIns="0" bIns="0" rtlCol="0" anchor="t"/>
+          <a:lstStyle/>
+          <a:p>
+            <a:pPr indent="0" marL="0">
+              <a:buNone/>
+            </a:pPr>
+            <a:r>
+              <a:rPr lang="en-US" sz="1400" b="1" spc="200" kern="0" dirty="0">
+                <a:solidFill>
+                  <a:schemeClr val="accent1"/>
+                </a:solidFill>
+              </a:rPr>
+              <a:t>NEW WORD</a:t>
+            </a:r>
+            <a:endParaRPr lang="en-US" sz="1400" dirty="0"/>
+          </a:p>
+        </p:txBody>
+      </p:sp>
+      <p:sp>
+        <p:nvSpPr>
+          <p:cNvPr id="8" name="Text 5"/>
+          <p:cNvSpPr txBox="1"/>
+          <p:nvPr/>
+        </p:nvSpPr>
+        <p:spPr>
+          <a:xfrm>
+            <a:off x="914400" y="4709160"/>
+            <a:ext cx="3200400" cy="1097280"/>
+          </a:xfrm>
+          <a:prstGeom prst="rect">
+            <a:avLst/>
+          </a:prstGeom>
+          <a:noFill/>
+          <a:ln/>
+        </p:spPr>
+        <p:txBody>
+          <a:bodyPr wrap="square" lIns="0" tIns="0" rIns="0" bIns="0" rtlCol="0" anchor="t"/>
+          <a:lstStyle/>
+          <a:p>
+            <a:pPr indent="0" marL="0">
+              <a:buNone/>
+            </a:pPr>
+            <a:r>
+              <a:rPr lang="en-US" sz="1600" b="1" dirty="0">
+                <a:solidFill>
+                  <a:schemeClr val="bg1"/>
+                </a:solidFill>
+              </a:rPr>
+              <a:t>Hosting: </a:t>
+            </a:r>
+            <a:pPr indent="0" marL="0">
+              <a:buNone/>
+            </a:pPr>
+            <a:r>
+              <a:rPr lang="en-US" sz="1600" dirty="0">
+                <a:solidFill>
+                  <a:schemeClr val="bg1"/>
+                </a:solidFill>
+              </a:rPr>
+              <a:t>keeping a website online so people can visit it.</a:t>
+            </a:r>
+            <a:endParaRPr lang="en-US" sz="1600" dirty="0"/>
+          </a:p>
+        </p:txBody>
+      </p:sp>
+      <p:sp>
+        <p:nvSpPr>
+          <p:cNvPr id="9" name="amplify row 1 circle"/>
+          <p:cNvSpPr/>
+          <p:nvPr/>
+        </p:nvSpPr>
+        <p:spPr>
+          <a:xfrm>
+            <a:off x="4846320" y="1508760"/>
+            <a:ext cx="685800" cy="685800"/>
+          </a:xfrm>
+          <a:prstGeom prst="ellipse">
+            <a:avLst/>
+          </a:prstGeom>
+          <a:solidFill>
+            <a:schemeClr val="accent1"/>
+          </a:solidFill>
+          <a:ln/>
+        </p:spPr>
+      </p:sp>
       <p:pic>
         <p:nvPicPr>
-          <p:cNvPr id="5" name="flow arrow 1" descr="then">    </p:cNvPr>
+          <p:cNvPr id="10" name="amplify row 1 icon" descr="amplify row 1">    </p:cNvPr>
           <p:cNvPicPr>
             <a:picLocks noChangeAspect="1"/>
           </p:cNvPicPr>
@@ -2600,8 +3211,8 @@
         </p:blipFill>
         <p:spPr>
           <a:xfrm>
-            <a:off x="2423160" y="1874520"/>
-            <a:ext cx="365760" cy="365760"/>
+            <a:off x="5017770" y="1680210"/>
+            <a:ext cx="342900" cy="342900"/>
           </a:xfrm>
           <a:prstGeom prst="rect">
             <a:avLst/>
@@ -2610,14 +3221,14 @@
       </p:pic>
       <p:sp>
         <p:nvSpPr>
-          <p:cNvPr id="6" name="Text 2"/>
-          <p:cNvSpPr txBox="1"/>
-          <p:nvPr/>
-        </p:nvSpPr>
-        <p:spPr>
-          <a:xfrm>
-            <a:off x="548640" y="2743200"/>
-            <a:ext cx="2011680" cy="457200"/>
+          <p:cNvPr id="11" name="Text 7"/>
+          <p:cNvSpPr txBox="1"/>
+          <p:nvPr/>
+        </p:nvSpPr>
+        <p:spPr>
+          <a:xfrm>
+            <a:off x="5760720" y="1463040"/>
+            <a:ext cx="5852160" cy="411480"/>
           </a:xfrm>
           <a:prstGeom prst="rect">
             <a:avLst/>
@@ -2629,7 +3240,7 @@
           <a:bodyPr wrap="square" lIns="0" tIns="0" rIns="0" bIns="0" rtlCol="0" anchor="t"/>
           <a:lstStyle/>
           <a:p>
-            <a:pPr algn="ctr" indent="0" marL="0">
+            <a:pPr indent="0" marL="0">
               <a:buNone/>
             </a:pPr>
             <a:r>
@@ -2638,7 +3249,7 @@
                   <a:schemeClr val="tx1"/>
                 </a:solidFill>
               </a:rPr>
-              <a:t>You</a:t>
+              <a:t>What it does in our app</a:t>
             </a:r>
             <a:endParaRPr lang="en-US" sz="2000" dirty="0"/>
           </a:p>
@@ -2646,14 +3257,14 @@
       </p:sp>
       <p:sp>
         <p:nvSpPr>
-          <p:cNvPr id="7" name="Text 3"/>
-          <p:cNvSpPr txBox="1"/>
-          <p:nvPr/>
-        </p:nvSpPr>
-        <p:spPr>
-          <a:xfrm>
-            <a:off x="548640" y="3200400"/>
-            <a:ext cx="2011680" cy="411480"/>
+          <p:cNvPr id="12" name="Text 8"/>
+          <p:cNvSpPr txBox="1"/>
+          <p:nvPr/>
+        </p:nvSpPr>
+        <p:spPr>
+          <a:xfrm>
+            <a:off x="5760720" y="1920240"/>
+            <a:ext cx="5852160" cy="1005840"/>
           </a:xfrm>
           <a:prstGeom prst="rect">
             <a:avLst/>
@@ -2665,67 +3276,31 @@
           <a:bodyPr wrap="square" lIns="0" tIns="0" rIns="0" bIns="0" rtlCol="0" anchor="t"/>
           <a:lstStyle/>
           <a:p>
-            <a:pPr algn="ctr" indent="0" marL="0">
-              <a:buNone/>
-            </a:pPr>
-            <a:r>
-              <a:rPr lang="en-US" sz="1600" b="1" dirty="0">
-                <a:solidFill>
-                  <a:schemeClr val="accent3"/>
-                </a:solidFill>
-              </a:rPr>
-              <a:t>Order</a:t>
-            </a:r>
-            <a:endParaRPr lang="en-US" sz="1600" dirty="0"/>
-          </a:p>
-        </p:txBody>
-      </p:sp>
-      <p:sp>
-        <p:nvSpPr>
-          <p:cNvPr id="8" name="Text 4"/>
-          <p:cNvSpPr txBox="1"/>
-          <p:nvPr/>
-        </p:nvSpPr>
-        <p:spPr>
-          <a:xfrm>
-            <a:off x="548640" y="3657600"/>
-            <a:ext cx="2011680" cy="1097280"/>
-          </a:xfrm>
-          <a:prstGeom prst="rect">
-            <a:avLst/>
-          </a:prstGeom>
-          <a:noFill/>
-          <a:ln/>
-        </p:spPr>
-        <p:txBody>
-          <a:bodyPr wrap="square" lIns="0" tIns="0" rIns="0" bIns="0" rtlCol="0" anchor="t"/>
-          <a:lstStyle/>
-          <a:p>
-            <a:pPr algn="ctr" indent="0" marL="0">
-              <a:buNone/>
-            </a:pPr>
-            <a:r>
-              <a:rPr lang="en-US" sz="1500" dirty="0">
+            <a:pPr indent="0" marL="0">
+              <a:buNone/>
+            </a:pPr>
+            <a:r>
+              <a:rPr lang="en-US" sz="1700" dirty="0">
                 <a:solidFill>
                   <a:schemeClr val="tx2"/>
                 </a:solidFill>
               </a:rPr>
-              <a:t>You fill out the form and click Generate.</a:t>
-            </a:r>
-            <a:endParaRPr lang="en-US" sz="1500" dirty="0"/>
-          </a:p>
-        </p:txBody>
-      </p:sp>
-      <p:sp>
-        <p:nvSpPr>
-          <p:cNvPr id="9" name="flow 2 circle"/>
+              <a:t>It holds our 3 website files and gives us a web link that anyone can open.</a:t>
+            </a:r>
+            <a:endParaRPr lang="en-US" sz="1700" dirty="0"/>
+          </a:p>
+        </p:txBody>
+      </p:sp>
+      <p:sp>
+        <p:nvSpPr>
+          <p:cNvPr id="13" name="amplify row 2 circle"/>
           <p:cNvSpPr/>
           <p:nvPr/>
         </p:nvSpPr>
         <p:spPr>
           <a:xfrm>
-            <a:off x="3337560" y="1554480"/>
-            <a:ext cx="1005840" cy="1005840"/>
+            <a:off x="4846320" y="3063240"/>
+            <a:ext cx="685800" cy="685800"/>
           </a:xfrm>
           <a:prstGeom prst="ellipse">
             <a:avLst/>
@@ -2738,7 +3313,7 @@
       </p:sp>
       <p:pic>
         <p:nvPicPr>
-          <p:cNvPr id="10" name="flow 2 icon" descr="flow 2">    </p:cNvPr>
+          <p:cNvPr id="14" name="amplify row 2 icon" descr="amplify row 2">    </p:cNvPr>
           <p:cNvPicPr>
             <a:picLocks noChangeAspect="1"/>
           </p:cNvPicPr>
@@ -2752,17 +3327,109 @@
         </p:blipFill>
         <p:spPr>
           <a:xfrm>
-            <a:off x="3589020" y="1805940"/>
-            <a:ext cx="502920" cy="502920"/>
+            <a:off x="5017770" y="3234690"/>
+            <a:ext cx="342900" cy="342900"/>
           </a:xfrm>
           <a:prstGeom prst="rect">
             <a:avLst/>
           </a:prstGeom>
         </p:spPr>
       </p:pic>
+      <p:sp>
+        <p:nvSpPr>
+          <p:cNvPr id="15" name="Text 10"/>
+          <p:cNvSpPr txBox="1"/>
+          <p:nvPr/>
+        </p:nvSpPr>
+        <p:spPr>
+          <a:xfrm>
+            <a:off x="5760720" y="3017520"/>
+            <a:ext cx="5852160" cy="411480"/>
+          </a:xfrm>
+          <a:prstGeom prst="rect">
+            <a:avLst/>
+          </a:prstGeom>
+          <a:noFill/>
+          <a:ln/>
+        </p:spPr>
+        <p:txBody>
+          <a:bodyPr wrap="square" lIns="0" tIns="0" rIns="0" bIns="0" rtlCol="0" anchor="t"/>
+          <a:lstStyle/>
+          <a:p>
+            <a:pPr indent="0" marL="0">
+              <a:buNone/>
+            </a:pPr>
+            <a:r>
+              <a:rPr lang="en-US" sz="2000" b="1" dirty="0">
+                <a:solidFill>
+                  <a:schemeClr val="tx1"/>
+                </a:solidFill>
+              </a:rPr>
+              <a:t>Think of it like</a:t>
+            </a:r>
+            <a:endParaRPr lang="en-US" sz="2000" dirty="0"/>
+          </a:p>
+        </p:txBody>
+      </p:sp>
+      <p:sp>
+        <p:nvSpPr>
+          <p:cNvPr id="16" name="Text 11"/>
+          <p:cNvSpPr txBox="1"/>
+          <p:nvPr/>
+        </p:nvSpPr>
+        <p:spPr>
+          <a:xfrm>
+            <a:off x="5760720" y="3474720"/>
+            <a:ext cx="5852160" cy="1005840"/>
+          </a:xfrm>
+          <a:prstGeom prst="rect">
+            <a:avLst/>
+          </a:prstGeom>
+          <a:noFill/>
+          <a:ln/>
+        </p:spPr>
+        <p:txBody>
+          <a:bodyPr wrap="square" lIns="0" tIns="0" rIns="0" bIns="0" rtlCol="0" anchor="t"/>
+          <a:lstStyle/>
+          <a:p>
+            <a:pPr indent="0" marL="0">
+              <a:buNone/>
+            </a:pPr>
+            <a:r>
+              <a:rPr lang="en-US" sz="1700" dirty="0">
+                <a:solidFill>
+                  <a:schemeClr val="tx2"/>
+                </a:solidFill>
+              </a:rPr>
+              <a:t>Renting a storefront on a busy street. People can walk in any time, day or night.</a:t>
+            </a:r>
+            <a:endParaRPr lang="en-US" sz="1700" dirty="0"/>
+          </a:p>
+        </p:txBody>
+      </p:sp>
+      <p:sp>
+        <p:nvSpPr>
+          <p:cNvPr id="17" name="amplify row 3 circle"/>
+          <p:cNvSpPr/>
+          <p:nvPr/>
+        </p:nvSpPr>
+        <p:spPr>
+          <a:xfrm>
+            <a:off x="4846320" y="4617720"/>
+            <a:ext cx="685800" cy="685800"/>
+          </a:xfrm>
+          <a:prstGeom prst="ellipse">
+            <a:avLst/>
+          </a:prstGeom>
+          <a:solidFill>
+            <a:schemeClr val="accent1"/>
+          </a:solidFill>
+          <a:ln/>
+        </p:spPr>
+      </p:sp>
       <p:pic>
         <p:nvPicPr>
-          <p:cNvPr id="11" name="flow arrow 2" descr="then">    </p:cNvPr>
+          <p:cNvPr id="18" name="amplify row 3 icon" descr="amplify row 3">    </p:cNvPr>
           <p:cNvPicPr>
             <a:picLocks noChangeAspect="1"/>
           </p:cNvPicPr>
@@ -2776,8 +3443,8 @@
         </p:blipFill>
         <p:spPr>
           <a:xfrm>
-            <a:off x="4709160" y="1874520"/>
-            <a:ext cx="365760" cy="365760"/>
+            <a:off x="5017770" y="4789170"/>
+            <a:ext cx="342900" cy="342900"/>
           </a:xfrm>
           <a:prstGeom prst="rect">
             <a:avLst/>
@@ -2786,14 +3453,14 @@
       </p:pic>
       <p:sp>
         <p:nvSpPr>
-          <p:cNvPr id="12" name="Text 6"/>
-          <p:cNvSpPr txBox="1"/>
-          <p:nvPr/>
-        </p:nvSpPr>
-        <p:spPr>
-          <a:xfrm>
-            <a:off x="2834640" y="2743200"/>
-            <a:ext cx="2011680" cy="457200"/>
+          <p:cNvPr id="19" name="Text 13"/>
+          <p:cNvSpPr txBox="1"/>
+          <p:nvPr/>
+        </p:nvSpPr>
+        <p:spPr>
+          <a:xfrm>
+            <a:off x="5760720" y="4572000"/>
+            <a:ext cx="5852160" cy="411480"/>
           </a:xfrm>
           <a:prstGeom prst="rect">
             <a:avLst/>
@@ -2805,7 +3472,7 @@
           <a:bodyPr wrap="square" lIns="0" tIns="0" rIns="0" bIns="0" rtlCol="0" anchor="t"/>
           <a:lstStyle/>
           <a:p>
-            <a:pPr algn="ctr" indent="0" marL="0">
+            <a:pPr indent="0" marL="0">
               <a:buNone/>
             </a:pPr>
             <a:r>
@@ -2814,7 +3481,7 @@
                   <a:schemeClr val="tx1"/>
                 </a:solidFill>
               </a:rPr>
-              <a:t>Amplify</a:t>
+              <a:t>Why it helps</a:t>
             </a:r>
             <a:endParaRPr lang="en-US" sz="2000" dirty="0"/>
           </a:p>
@@ -2822,14 +3489,14 @@
       </p:sp>
       <p:sp>
         <p:nvSpPr>
-          <p:cNvPr id="13" name="Text 7"/>
-          <p:cNvSpPr txBox="1"/>
-          <p:nvPr/>
-        </p:nvSpPr>
-        <p:spPr>
-          <a:xfrm>
-            <a:off x="2834640" y="3200400"/>
-            <a:ext cx="2011680" cy="411480"/>
+          <p:cNvPr id="20" name="Text 14"/>
+          <p:cNvSpPr txBox="1"/>
+          <p:nvPr/>
+        </p:nvSpPr>
+        <p:spPr>
+          <a:xfrm>
+            <a:off x="5760720" y="5029200"/>
+            <a:ext cx="5852160" cy="1005840"/>
           </a:xfrm>
           <a:prstGeom prst="rect">
             <a:avLst/>
@@ -2841,616 +3508,18 @@
           <a:bodyPr wrap="square" lIns="0" tIns="0" rIns="0" bIns="0" rtlCol="0" anchor="t"/>
           <a:lstStyle/>
           <a:p>
-            <a:pPr algn="ctr" indent="0" marL="0">
-              <a:buNone/>
-            </a:pPr>
-            <a:r>
-              <a:rPr lang="en-US" sz="1600" b="1" dirty="0">
-                <a:solidFill>
-                  <a:schemeClr val="accent3"/>
-                </a:solidFill>
-              </a:rPr>
-              <a:t>The dining room</a:t>
-            </a:r>
-            <a:endParaRPr lang="en-US" sz="1600" dirty="0"/>
-          </a:p>
-        </p:txBody>
-      </p:sp>
-      <p:sp>
-        <p:nvSpPr>
-          <p:cNvPr id="14" name="Text 8"/>
-          <p:cNvSpPr txBox="1"/>
-          <p:nvPr/>
-        </p:nvSpPr>
-        <p:spPr>
-          <a:xfrm>
-            <a:off x="2834640" y="3657600"/>
-            <a:ext cx="2011680" cy="1097280"/>
-          </a:xfrm>
-          <a:prstGeom prst="rect">
-            <a:avLst/>
-          </a:prstGeom>
-          <a:noFill/>
-          <a:ln/>
-        </p:spPr>
-        <p:txBody>
-          <a:bodyPr wrap="square" lIns="0" tIns="0" rIns="0" bIns="0" rtlCol="0" anchor="t"/>
-          <a:lstStyle/>
-          <a:p>
-            <a:pPr algn="ctr" indent="0" marL="0">
-              <a:buNone/>
-            </a:pPr>
-            <a:r>
-              <a:rPr lang="en-US" sz="1500" dirty="0">
+            <a:pPr indent="0" marL="0">
+              <a:buNone/>
+            </a:pPr>
+            <a:r>
+              <a:rPr lang="en-US" sz="1700" dirty="0">
                 <a:solidFill>
                   <a:schemeClr val="tx2"/>
                 </a:solidFill>
               </a:rPr>
-              <a:t>The website where you place your order.</a:t>
-            </a:r>
-            <a:endParaRPr lang="en-US" sz="1500" dirty="0"/>
-          </a:p>
-        </p:txBody>
-      </p:sp>
-      <p:sp>
-        <p:nvSpPr>
-          <p:cNvPr id="15" name="flow 3 circle"/>
-          <p:cNvSpPr/>
-          <p:nvPr/>
-        </p:nvSpPr>
-        <p:spPr>
-          <a:xfrm>
-            <a:off x="5623560" y="1554480"/>
-            <a:ext cx="1005840" cy="1005840"/>
-          </a:xfrm>
-          <a:prstGeom prst="ellipse">
-            <a:avLst/>
-          </a:prstGeom>
-          <a:solidFill>
-            <a:schemeClr val="accent1"/>
-          </a:solidFill>
-          <a:ln/>
-        </p:spPr>
-      </p:sp>
-      <p:pic>
-        <p:nvPicPr>
-          <p:cNvPr id="16" name="flow 3 icon" descr="flow 3">    </p:cNvPr>
-          <p:cNvPicPr>
-            <a:picLocks noChangeAspect="1"/>
-          </p:cNvPicPr>
-          <p:nvPr/>
-        </p:nvPicPr>
-        <p:blipFill>
-          <a:blip r:embed="rId5"/>
-          <a:stretch>
-            <a:fillRect/>
-          </a:stretch>
-        </p:blipFill>
-        <p:spPr>
-          <a:xfrm>
-            <a:off x="5875020" y="1805940"/>
-            <a:ext cx="502920" cy="502920"/>
-          </a:xfrm>
-          <a:prstGeom prst="rect">
-            <a:avLst/>
-          </a:prstGeom>
-        </p:spPr>
-      </p:pic>
-      <p:pic>
-        <p:nvPicPr>
-          <p:cNvPr id="17" name="flow arrow 3" descr="then">    </p:cNvPr>
-          <p:cNvPicPr>
-            <a:picLocks noChangeAspect="1"/>
-          </p:cNvPicPr>
-          <p:nvPr/>
-        </p:nvPicPr>
-        <p:blipFill>
-          <a:blip r:embed="rId6"/>
-          <a:stretch>
-            <a:fillRect/>
-          </a:stretch>
-        </p:blipFill>
-        <p:spPr>
-          <a:xfrm>
-            <a:off x="6995160" y="1874520"/>
-            <a:ext cx="365760" cy="365760"/>
-          </a:xfrm>
-          <a:prstGeom prst="rect">
-            <a:avLst/>
-          </a:prstGeom>
-        </p:spPr>
-      </p:pic>
-      <p:sp>
-        <p:nvSpPr>
-          <p:cNvPr id="18" name="Text 10"/>
-          <p:cNvSpPr txBox="1"/>
-          <p:nvPr/>
-        </p:nvSpPr>
-        <p:spPr>
-          <a:xfrm>
-            <a:off x="5120640" y="2743200"/>
-            <a:ext cx="2011680" cy="457200"/>
-          </a:xfrm>
-          <a:prstGeom prst="rect">
-            <a:avLst/>
-          </a:prstGeom>
-          <a:noFill/>
-          <a:ln/>
-        </p:spPr>
-        <p:txBody>
-          <a:bodyPr wrap="square" lIns="0" tIns="0" rIns="0" bIns="0" rtlCol="0" anchor="t"/>
-          <a:lstStyle/>
-          <a:p>
-            <a:pPr algn="ctr" indent="0" marL="0">
-              <a:buNone/>
-            </a:pPr>
-            <a:r>
-              <a:rPr lang="en-US" sz="2000" b="1" dirty="0">
-                <a:solidFill>
-                  <a:schemeClr val="tx1"/>
-                </a:solidFill>
-              </a:rPr>
-              <a:t>API Gateway</a:t>
-            </a:r>
-            <a:endParaRPr lang="en-US" sz="2000" dirty="0"/>
-          </a:p>
-        </p:txBody>
-      </p:sp>
-      <p:sp>
-        <p:nvSpPr>
-          <p:cNvPr id="19" name="Text 11"/>
-          <p:cNvSpPr txBox="1"/>
-          <p:nvPr/>
-        </p:nvSpPr>
-        <p:spPr>
-          <a:xfrm>
-            <a:off x="5120640" y="3200400"/>
-            <a:ext cx="2011680" cy="411480"/>
-          </a:xfrm>
-          <a:prstGeom prst="rect">
-            <a:avLst/>
-          </a:prstGeom>
-          <a:noFill/>
-          <a:ln/>
-        </p:spPr>
-        <p:txBody>
-          <a:bodyPr wrap="square" lIns="0" tIns="0" rIns="0" bIns="0" rtlCol="0" anchor="t"/>
-          <a:lstStyle/>
-          <a:p>
-            <a:pPr algn="ctr" indent="0" marL="0">
-              <a:buNone/>
-            </a:pPr>
-            <a:r>
-              <a:rPr lang="en-US" sz="1600" b="1" dirty="0">
-                <a:solidFill>
-                  <a:schemeClr val="accent3"/>
-                </a:solidFill>
-              </a:rPr>
-              <a:t>The server</a:t>
-            </a:r>
-            <a:endParaRPr lang="en-US" sz="1600" dirty="0"/>
-          </a:p>
-        </p:txBody>
-      </p:sp>
-      <p:sp>
-        <p:nvSpPr>
-          <p:cNvPr id="20" name="Text 12"/>
-          <p:cNvSpPr txBox="1"/>
-          <p:nvPr/>
-        </p:nvSpPr>
-        <p:spPr>
-          <a:xfrm>
-            <a:off x="5120640" y="3657600"/>
-            <a:ext cx="2011680" cy="1097280"/>
-          </a:xfrm>
-          <a:prstGeom prst="rect">
-            <a:avLst/>
-          </a:prstGeom>
-          <a:noFill/>
-          <a:ln/>
-        </p:spPr>
-        <p:txBody>
-          <a:bodyPr wrap="square" lIns="0" tIns="0" rIns="0" bIns="0" rtlCol="0" anchor="t"/>
-          <a:lstStyle/>
-          <a:p>
-            <a:pPr algn="ctr" indent="0" marL="0">
-              <a:buNone/>
-            </a:pPr>
-            <a:r>
-              <a:rPr lang="en-US" sz="1500" dirty="0">
-                <a:solidFill>
-                  <a:schemeClr val="tx2"/>
-                </a:solidFill>
-              </a:rPr>
-              <a:t>Takes your order to the kitchen.</a:t>
-            </a:r>
-            <a:endParaRPr lang="en-US" sz="1500" dirty="0"/>
-          </a:p>
-        </p:txBody>
-      </p:sp>
-      <p:sp>
-        <p:nvSpPr>
-          <p:cNvPr id="21" name="flow 4 circle"/>
-          <p:cNvSpPr/>
-          <p:nvPr/>
-        </p:nvSpPr>
-        <p:spPr>
-          <a:xfrm>
-            <a:off x="7909560" y="1554480"/>
-            <a:ext cx="1005840" cy="1005840"/>
-          </a:xfrm>
-          <a:prstGeom prst="ellipse">
-            <a:avLst/>
-          </a:prstGeom>
-          <a:solidFill>
-            <a:schemeClr val="accent1"/>
-          </a:solidFill>
-          <a:ln/>
-        </p:spPr>
-      </p:sp>
-      <p:pic>
-        <p:nvPicPr>
-          <p:cNvPr id="22" name="flow 4 icon" descr="flow 4">    </p:cNvPr>
-          <p:cNvPicPr>
-            <a:picLocks noChangeAspect="1"/>
-          </p:cNvPicPr>
-          <p:nvPr/>
-        </p:nvPicPr>
-        <p:blipFill>
-          <a:blip r:embed="rId7"/>
-          <a:stretch>
-            <a:fillRect/>
-          </a:stretch>
-        </p:blipFill>
-        <p:spPr>
-          <a:xfrm>
-            <a:off x="8161020" y="1805940"/>
-            <a:ext cx="502920" cy="502920"/>
-          </a:xfrm>
-          <a:prstGeom prst="rect">
-            <a:avLst/>
-          </a:prstGeom>
-        </p:spPr>
-      </p:pic>
-      <p:pic>
-        <p:nvPicPr>
-          <p:cNvPr id="23" name="flow arrow 4" descr="then">    </p:cNvPr>
-          <p:cNvPicPr>
-            <a:picLocks noChangeAspect="1"/>
-          </p:cNvPicPr>
-          <p:nvPr/>
-        </p:nvPicPr>
-        <p:blipFill>
-          <a:blip r:embed="rId8"/>
-          <a:stretch>
-            <a:fillRect/>
-          </a:stretch>
-        </p:blipFill>
-        <p:spPr>
-          <a:xfrm>
-            <a:off x="9281160" y="1874520"/>
-            <a:ext cx="365760" cy="365760"/>
-          </a:xfrm>
-          <a:prstGeom prst="rect">
-            <a:avLst/>
-          </a:prstGeom>
-        </p:spPr>
-      </p:pic>
-      <p:sp>
-        <p:nvSpPr>
-          <p:cNvPr id="24" name="Text 14"/>
-          <p:cNvSpPr txBox="1"/>
-          <p:nvPr/>
-        </p:nvSpPr>
-        <p:spPr>
-          <a:xfrm>
-            <a:off x="7406640" y="2743200"/>
-            <a:ext cx="2011680" cy="457200"/>
-          </a:xfrm>
-          <a:prstGeom prst="rect">
-            <a:avLst/>
-          </a:prstGeom>
-          <a:noFill/>
-          <a:ln/>
-        </p:spPr>
-        <p:txBody>
-          <a:bodyPr wrap="square" lIns="0" tIns="0" rIns="0" bIns="0" rtlCol="0" anchor="t"/>
-          <a:lstStyle/>
-          <a:p>
-            <a:pPr algn="ctr" indent="0" marL="0">
-              <a:buNone/>
-            </a:pPr>
-            <a:r>
-              <a:rPr lang="en-US" sz="2000" b="1" dirty="0">
-                <a:solidFill>
-                  <a:schemeClr val="tx1"/>
-                </a:solidFill>
-              </a:rPr>
-              <a:t>Lambda</a:t>
-            </a:r>
-            <a:endParaRPr lang="en-US" sz="2000" dirty="0"/>
-          </a:p>
-        </p:txBody>
-      </p:sp>
-      <p:sp>
-        <p:nvSpPr>
-          <p:cNvPr id="25" name="Text 15"/>
-          <p:cNvSpPr txBox="1"/>
-          <p:nvPr/>
-        </p:nvSpPr>
-        <p:spPr>
-          <a:xfrm>
-            <a:off x="7406640" y="3200400"/>
-            <a:ext cx="2011680" cy="411480"/>
-          </a:xfrm>
-          <a:prstGeom prst="rect">
-            <a:avLst/>
-          </a:prstGeom>
-          <a:noFill/>
-          <a:ln/>
-        </p:spPr>
-        <p:txBody>
-          <a:bodyPr wrap="square" lIns="0" tIns="0" rIns="0" bIns="0" rtlCol="0" anchor="t"/>
-          <a:lstStyle/>
-          <a:p>
-            <a:pPr algn="ctr" indent="0" marL="0">
-              <a:buNone/>
-            </a:pPr>
-            <a:r>
-              <a:rPr lang="en-US" sz="1600" b="1" dirty="0">
-                <a:solidFill>
-                  <a:schemeClr val="accent3"/>
-                </a:solidFill>
-              </a:rPr>
-              <a:t>The cook</a:t>
-            </a:r>
-            <a:endParaRPr lang="en-US" sz="1600" dirty="0"/>
-          </a:p>
-        </p:txBody>
-      </p:sp>
-      <p:sp>
-        <p:nvSpPr>
-          <p:cNvPr id="26" name="Text 16"/>
-          <p:cNvSpPr txBox="1"/>
-          <p:nvPr/>
-        </p:nvSpPr>
-        <p:spPr>
-          <a:xfrm>
-            <a:off x="7406640" y="3657600"/>
-            <a:ext cx="2011680" cy="1097280"/>
-          </a:xfrm>
-          <a:prstGeom prst="rect">
-            <a:avLst/>
-          </a:prstGeom>
-          <a:noFill/>
-          <a:ln/>
-        </p:spPr>
-        <p:txBody>
-          <a:bodyPr wrap="square" lIns="0" tIns="0" rIns="0" bIns="0" rtlCol="0" anchor="t"/>
-          <a:lstStyle/>
-          <a:p>
-            <a:pPr algn="ctr" indent="0" marL="0">
-              <a:buNone/>
-            </a:pPr>
-            <a:r>
-              <a:rPr lang="en-US" sz="1500" dirty="0">
-                <a:solidFill>
-                  <a:schemeClr val="tx2"/>
-                </a:solidFill>
-              </a:rPr>
-              <a:t>Gets the order ready for the chef.</a:t>
-            </a:r>
-            <a:endParaRPr lang="en-US" sz="1500" dirty="0"/>
-          </a:p>
-        </p:txBody>
-      </p:sp>
-      <p:sp>
-        <p:nvSpPr>
-          <p:cNvPr id="27" name="flow 5 circle"/>
-          <p:cNvSpPr/>
-          <p:nvPr/>
-        </p:nvSpPr>
-        <p:spPr>
-          <a:xfrm>
-            <a:off x="10195560" y="1554480"/>
-            <a:ext cx="1005840" cy="1005840"/>
-          </a:xfrm>
-          <a:prstGeom prst="ellipse">
-            <a:avLst/>
-          </a:prstGeom>
-          <a:solidFill>
-            <a:schemeClr val="accent1"/>
-          </a:solidFill>
-          <a:ln/>
-        </p:spPr>
-      </p:sp>
-      <p:pic>
-        <p:nvPicPr>
-          <p:cNvPr id="28" name="flow 5 icon" descr="flow 5">    </p:cNvPr>
-          <p:cNvPicPr>
-            <a:picLocks noChangeAspect="1"/>
-          </p:cNvPicPr>
-          <p:nvPr/>
-        </p:nvPicPr>
-        <p:blipFill>
-          <a:blip r:embed="rId9"/>
-          <a:stretch>
-            <a:fillRect/>
-          </a:stretch>
-        </p:blipFill>
-        <p:spPr>
-          <a:xfrm>
-            <a:off x="10447020" y="1805940"/>
-            <a:ext cx="502920" cy="502920"/>
-          </a:xfrm>
-          <a:prstGeom prst="rect">
-            <a:avLst/>
-          </a:prstGeom>
-        </p:spPr>
-      </p:pic>
-      <p:sp>
-        <p:nvSpPr>
-          <p:cNvPr id="29" name="Text 18"/>
-          <p:cNvSpPr txBox="1"/>
-          <p:nvPr/>
-        </p:nvSpPr>
-        <p:spPr>
-          <a:xfrm>
-            <a:off x="9692640" y="2743200"/>
-            <a:ext cx="2011680" cy="457200"/>
-          </a:xfrm>
-          <a:prstGeom prst="rect">
-            <a:avLst/>
-          </a:prstGeom>
-          <a:noFill/>
-          <a:ln/>
-        </p:spPr>
-        <p:txBody>
-          <a:bodyPr wrap="square" lIns="0" tIns="0" rIns="0" bIns="0" rtlCol="0" anchor="t"/>
-          <a:lstStyle/>
-          <a:p>
-            <a:pPr algn="ctr" indent="0" marL="0">
-              <a:buNone/>
-            </a:pPr>
-            <a:r>
-              <a:rPr lang="en-US" sz="2000" b="1" dirty="0">
-                <a:solidFill>
-                  <a:schemeClr val="tx1"/>
-                </a:solidFill>
-              </a:rPr>
-              <a:t>Bedrock</a:t>
-            </a:r>
-            <a:endParaRPr lang="en-US" sz="2000" dirty="0"/>
-          </a:p>
-        </p:txBody>
-      </p:sp>
-      <p:sp>
-        <p:nvSpPr>
-          <p:cNvPr id="30" name="Text 19"/>
-          <p:cNvSpPr txBox="1"/>
-          <p:nvPr/>
-        </p:nvSpPr>
-        <p:spPr>
-          <a:xfrm>
-            <a:off x="9692640" y="3200400"/>
-            <a:ext cx="2011680" cy="411480"/>
-          </a:xfrm>
-          <a:prstGeom prst="rect">
-            <a:avLst/>
-          </a:prstGeom>
-          <a:noFill/>
-          <a:ln/>
-        </p:spPr>
-        <p:txBody>
-          <a:bodyPr wrap="square" lIns="0" tIns="0" rIns="0" bIns="0" rtlCol="0" anchor="t"/>
-          <a:lstStyle/>
-          <a:p>
-            <a:pPr algn="ctr" indent="0" marL="0">
-              <a:buNone/>
-            </a:pPr>
-            <a:r>
-              <a:rPr lang="en-US" sz="1600" b="1" dirty="0">
-                <a:solidFill>
-                  <a:schemeClr val="accent3"/>
-                </a:solidFill>
-              </a:rPr>
-              <a:t>The chef</a:t>
-            </a:r>
-            <a:endParaRPr lang="en-US" sz="1600" dirty="0"/>
-          </a:p>
-        </p:txBody>
-      </p:sp>
-      <p:sp>
-        <p:nvSpPr>
-          <p:cNvPr id="31" name="Text 20"/>
-          <p:cNvSpPr txBox="1"/>
-          <p:nvPr/>
-        </p:nvSpPr>
-        <p:spPr>
-          <a:xfrm>
-            <a:off x="9692640" y="3657600"/>
-            <a:ext cx="2011680" cy="1097280"/>
-          </a:xfrm>
-          <a:prstGeom prst="rect">
-            <a:avLst/>
-          </a:prstGeom>
-          <a:noFill/>
-          <a:ln/>
-        </p:spPr>
-        <p:txBody>
-          <a:bodyPr wrap="square" lIns="0" tIns="0" rIns="0" bIns="0" rtlCol="0" anchor="t"/>
-          <a:lstStyle/>
-          <a:p>
-            <a:pPr algn="ctr" indent="0" marL="0">
-              <a:buNone/>
-            </a:pPr>
-            <a:r>
-              <a:rPr lang="en-US" sz="1500" dirty="0">
-                <a:solidFill>
-                  <a:schemeClr val="tx2"/>
-                </a:solidFill>
-              </a:rPr>
-              <a:t>The AI creates your plan.</a:t>
-            </a:r>
-            <a:endParaRPr lang="en-US" sz="1500" dirty="0"/>
-          </a:p>
-        </p:txBody>
-      </p:sp>
-      <p:sp>
-        <p:nvSpPr>
-          <p:cNvPr id="32" name="result card"/>
-          <p:cNvSpPr/>
-          <p:nvPr/>
-        </p:nvSpPr>
-        <p:spPr>
-          <a:xfrm>
-            <a:off x="548640" y="5074920"/>
-            <a:ext cx="11064240" cy="868680"/>
-          </a:xfrm>
-          <a:prstGeom prst="roundRect">
-            <a:avLst>
-              <a:gd name="adj" fmla="val 15789"/>
-            </a:avLst>
-          </a:prstGeom>
-          <a:solidFill>
-            <a:schemeClr val="tx1"/>
-          </a:solidFill>
-          <a:ln/>
-        </p:spPr>
-      </p:sp>
-      <p:sp>
-        <p:nvSpPr>
-          <p:cNvPr id="33" name="Text 22"/>
-          <p:cNvSpPr txBox="1"/>
-          <p:nvPr/>
-        </p:nvSpPr>
-        <p:spPr>
-          <a:xfrm>
-            <a:off x="868680" y="5074920"/>
-            <a:ext cx="10424160" cy="868680"/>
-          </a:xfrm>
-          <a:prstGeom prst="rect">
-            <a:avLst/>
-          </a:prstGeom>
-          <a:noFill/>
-          <a:ln/>
-        </p:spPr>
-        <p:txBody>
-          <a:bodyPr wrap="square" lIns="0" tIns="0" rIns="0" bIns="0" rtlCol="0" anchor="ctr"/>
-          <a:lstStyle/>
-          <a:p>
-            <a:pPr indent="0" marL="0">
-              <a:buNone/>
-            </a:pPr>
-            <a:r>
-              <a:rPr lang="en-US" sz="1800" b="1" dirty="0">
-                <a:solidFill>
-                  <a:schemeClr val="bg1"/>
-                </a:solidFill>
-              </a:rPr>
-              <a:t>Then your meal comes back the same way: your roadmap shows up on screen in about 5 seconds.</a:t>
-            </a:r>
-            <a:endParaRPr lang="en-US" sz="1800" dirty="0"/>
+              <a:t>You just upload a zip file. Amplify keeps the site fast and secure for you.</a:t>
+            </a:r>
+            <a:endParaRPr lang="en-US" sz="1700" dirty="0"/>
           </a:p>
         </p:txBody>
       </p:sp>
@@ -3556,7 +3625,7 @@
                   <a:schemeClr val="tx1"/>
                 </a:solidFill>
               </a:rPr>
-              <a:t>Our plan for the next 45 minutes</a:t>
+              <a:t>API Gateway: the front door</a:t>
             </a:r>
             <a:endParaRPr lang="en-US" sz="3600" dirty="0"/>
           </a:p>
@@ -3564,36 +3633,36 @@
       </p:sp>
       <p:sp>
         <p:nvSpPr>
-          <p:cNvPr id="3" name="step 1 card"/>
+          <p:cNvPr id="3" name="api gateway panel"/>
           <p:cNvSpPr/>
           <p:nvPr/>
         </p:nvSpPr>
         <p:spPr>
           <a:xfrm>
             <a:off x="548640" y="1463040"/>
-            <a:ext cx="5440680" cy="960120"/>
+            <a:ext cx="3931920" cy="4480560"/>
           </a:xfrm>
           <a:prstGeom prst="roundRect">
             <a:avLst>
-              <a:gd name="adj" fmla="val 14286"/>
+              <a:gd name="adj" fmla="val 3488"/>
             </a:avLst>
           </a:prstGeom>
           <a:solidFill>
-            <a:schemeClr val="bg2"/>
+            <a:schemeClr val="tx1"/>
           </a:solidFill>
           <a:ln/>
         </p:spPr>
       </p:sp>
       <p:sp>
         <p:nvSpPr>
-          <p:cNvPr id="4" name="step 1 number"/>
+          <p:cNvPr id="4" name="api gateway circle"/>
           <p:cNvSpPr/>
           <p:nvPr/>
         </p:nvSpPr>
         <p:spPr>
           <a:xfrm>
-            <a:off x="731520" y="1600200"/>
-            <a:ext cx="685800" cy="685800"/>
+            <a:off x="914400" y="1783080"/>
+            <a:ext cx="1097280" cy="1097280"/>
           </a:xfrm>
           <a:prstGeom prst="ellipse">
             <a:avLst/>
@@ -3604,37 +3673,61 @@
           <a:ln/>
         </p:spPr>
       </p:sp>
-      <p:sp>
-        <p:nvSpPr>
-          <p:cNvPr id="5" name="Text 3"/>
-          <p:cNvSpPr txBox="1"/>
-          <p:nvPr/>
-        </p:nvSpPr>
-        <p:spPr>
-          <a:xfrm>
-            <a:off x="731520" y="1600200"/>
-            <a:ext cx="685800" cy="685800"/>
-          </a:xfrm>
-          <a:prstGeom prst="rect">
-            <a:avLst/>
-          </a:prstGeom>
-          <a:noFill/>
-          <a:ln/>
-        </p:spPr>
-        <p:txBody>
-          <a:bodyPr wrap="square" lIns="0" tIns="0" rIns="0" bIns="0" rtlCol="0" anchor="ctr"/>
-          <a:lstStyle/>
-          <a:p>
-            <a:pPr algn="ctr" indent="0" marL="0">
+      <p:pic>
+        <p:nvPicPr>
+          <p:cNvPr id="5" name="api gateway icon" descr="api gateway">    </p:cNvPr>
+          <p:cNvPicPr>
+            <a:picLocks noChangeAspect="1"/>
+          </p:cNvPicPr>
+          <p:nvPr/>
+        </p:nvPicPr>
+        <p:blipFill>
+          <a:blip r:embed="rId1"/>
+          <a:stretch>
+            <a:fillRect/>
+          </a:stretch>
+        </p:blipFill>
+        <p:spPr>
+          <a:xfrm>
+            <a:off x="1188720" y="2057400"/>
+            <a:ext cx="548640" cy="548640"/>
+          </a:xfrm>
+          <a:prstGeom prst="rect">
+            <a:avLst/>
+          </a:prstGeom>
+        </p:spPr>
+      </p:pic>
+      <p:sp>
+        <p:nvSpPr>
+          <p:cNvPr id="6" name="Text 3"/>
+          <p:cNvSpPr txBox="1"/>
+          <p:nvPr/>
+        </p:nvSpPr>
+        <p:spPr>
+          <a:xfrm>
+            <a:off x="914400" y="3063240"/>
+            <a:ext cx="3200400" cy="1188720"/>
+          </a:xfrm>
+          <a:prstGeom prst="rect">
+            <a:avLst/>
+          </a:prstGeom>
+          <a:noFill/>
+          <a:ln/>
+        </p:spPr>
+        <p:txBody>
+          <a:bodyPr wrap="square" lIns="0" tIns="0" rIns="0" bIns="0" rtlCol="0" anchor="t"/>
+          <a:lstStyle/>
+          <a:p>
+            <a:pPr indent="0" marL="0">
               <a:buNone/>
             </a:pPr>
             <a:r>
               <a:rPr lang="en-US" sz="2000" b="1" dirty="0">
                 <a:solidFill>
-                  <a:schemeClr val="tx1"/>
-                </a:solidFill>
-              </a:rPr>
-              <a:t>1</a:t>
+                  <a:schemeClr val="bg1"/>
+                </a:solidFill>
+              </a:rPr>
+              <a:t>API Gateway lets websites and apps talk to our code.</a:t>
             </a:r>
             <a:endParaRPr lang="en-US" sz="2000" dirty="0"/>
           </a:p>
@@ -3642,23 +3735,59 @@
       </p:sp>
       <p:sp>
         <p:nvSpPr>
-          <p:cNvPr id="6" name="Text 4"/>
-          <p:cNvSpPr txBox="1"/>
-          <p:nvPr/>
-        </p:nvSpPr>
-        <p:spPr>
-          <a:xfrm>
-            <a:off x="1645920" y="1600200"/>
-            <a:ext cx="1143000" cy="685800"/>
-          </a:xfrm>
-          <a:prstGeom prst="rect">
-            <a:avLst/>
-          </a:prstGeom>
-          <a:noFill/>
-          <a:ln/>
-        </p:spPr>
-        <p:txBody>
-          <a:bodyPr wrap="square" lIns="0" tIns="0" rIns="0" bIns="0" rtlCol="0" anchor="ctr"/>
+          <p:cNvPr id="7" name="Text 4"/>
+          <p:cNvSpPr txBox="1"/>
+          <p:nvPr/>
+        </p:nvSpPr>
+        <p:spPr>
+          <a:xfrm>
+            <a:off x="914400" y="4389120"/>
+            <a:ext cx="3200400" cy="320040"/>
+          </a:xfrm>
+          <a:prstGeom prst="rect">
+            <a:avLst/>
+          </a:prstGeom>
+          <a:noFill/>
+          <a:ln/>
+        </p:spPr>
+        <p:txBody>
+          <a:bodyPr wrap="square" lIns="0" tIns="0" rIns="0" bIns="0" rtlCol="0" anchor="t"/>
+          <a:lstStyle/>
+          <a:p>
+            <a:pPr indent="0" marL="0">
+              <a:buNone/>
+            </a:pPr>
+            <a:r>
+              <a:rPr lang="en-US" sz="1400" b="1" spc="200" kern="0" dirty="0">
+                <a:solidFill>
+                  <a:schemeClr val="accent1"/>
+                </a:solidFill>
+              </a:rPr>
+              <a:t>NEW WORD</a:t>
+            </a:r>
+            <a:endParaRPr lang="en-US" sz="1400" dirty="0"/>
+          </a:p>
+        </p:txBody>
+      </p:sp>
+      <p:sp>
+        <p:nvSpPr>
+          <p:cNvPr id="8" name="Text 5"/>
+          <p:cNvSpPr txBox="1"/>
+          <p:nvPr/>
+        </p:nvSpPr>
+        <p:spPr>
+          <a:xfrm>
+            <a:off x="914400" y="4709160"/>
+            <a:ext cx="3200400" cy="1097280"/>
+          </a:xfrm>
+          <a:prstGeom prst="rect">
+            <a:avLst/>
+          </a:prstGeom>
+          <a:noFill/>
+          <a:ln/>
+        </p:spPr>
+        <p:txBody>
+          <a:bodyPr wrap="square" lIns="0" tIns="0" rIns="0" bIns="0" rtlCol="0" anchor="t"/>
           <a:lstStyle/>
           <a:p>
             <a:pPr indent="0" marL="0">
@@ -3667,10 +3796,21 @@
             <a:r>
               <a:rPr lang="en-US" sz="1600" b="1" dirty="0">
                 <a:solidFill>
-                  <a:schemeClr val="accent2"/>
-                </a:solidFill>
-              </a:rPr>
-              <a:t>0-5 min</a:t>
+                  <a:schemeClr val="bg1"/>
+                </a:solidFill>
+              </a:rPr>
+              <a:t>API: </a:t>
+            </a:r>
+            <a:pPr indent="0" marL="0">
+              <a:buNone/>
+            </a:pPr>
+            <a:r>
+              <a:rPr lang="en-US" sz="1600" dirty="0">
+                <a:solidFill>
+                  <a:schemeClr val="bg1"/>
+                </a:solidFill>
+              </a:rPr>
+              <a:t>a way for two computer programs to talk to each other.</a:t>
             </a:r>
             <a:endParaRPr lang="en-US" sz="1600" dirty="0"/>
           </a:p>
@@ -3678,71 +3818,13 @@
       </p:sp>
       <p:sp>
         <p:nvSpPr>
-          <p:cNvPr id="7" name="Text 5"/>
-          <p:cNvSpPr txBox="1"/>
-          <p:nvPr/>
-        </p:nvSpPr>
-        <p:spPr>
-          <a:xfrm>
-            <a:off x="2788920" y="1600200"/>
-            <a:ext cx="3063240" cy="685800"/>
-          </a:xfrm>
-          <a:prstGeom prst="rect">
-            <a:avLst/>
-          </a:prstGeom>
-          <a:noFill/>
-          <a:ln/>
-        </p:spPr>
-        <p:txBody>
-          <a:bodyPr wrap="square" lIns="0" tIns="0" rIns="0" bIns="0" rtlCol="0" anchor="ctr"/>
-          <a:lstStyle/>
-          <a:p>
-            <a:pPr indent="0" marL="0">
-              <a:buNone/>
-            </a:pPr>
-            <a:r>
-              <a:rPr lang="en-US" sz="1800" dirty="0">
-                <a:solidFill>
-                  <a:schemeClr val="tx1"/>
-                </a:solidFill>
-              </a:rPr>
-              <a:t>Learn how cloud AI apps work</a:t>
-            </a:r>
-            <a:endParaRPr lang="en-US" sz="1800" dirty="0"/>
-          </a:p>
-        </p:txBody>
-      </p:sp>
-      <p:sp>
-        <p:nvSpPr>
-          <p:cNvPr id="8" name="step 2 card"/>
+          <p:cNvPr id="9" name="api gateway row 1 circle"/>
           <p:cNvSpPr/>
           <p:nvPr/>
         </p:nvSpPr>
         <p:spPr>
           <a:xfrm>
-            <a:off x="548640" y="2606040"/>
-            <a:ext cx="5440680" cy="960120"/>
-          </a:xfrm>
-          <a:prstGeom prst="roundRect">
-            <a:avLst>
-              <a:gd name="adj" fmla="val 14286"/>
-            </a:avLst>
-          </a:prstGeom>
-          <a:solidFill>
-            <a:schemeClr val="bg1"/>
-          </a:solidFill>
-          <a:ln/>
-        </p:spPr>
-      </p:sp>
-      <p:sp>
-        <p:nvSpPr>
-          <p:cNvPr id="9" name="step 2 number"/>
-          <p:cNvSpPr/>
-          <p:nvPr/>
-        </p:nvSpPr>
-        <p:spPr>
-          <a:xfrm>
-            <a:off x="731520" y="2743200"/>
+            <a:off x="4846320" y="1508760"/>
             <a:ext cx="685800" cy="685800"/>
           </a:xfrm>
           <a:prstGeom prst="ellipse">
@@ -3754,28 +3836,52 @@
           <a:ln/>
         </p:spPr>
       </p:sp>
-      <p:sp>
-        <p:nvSpPr>
-          <p:cNvPr id="10" name="Text 8"/>
-          <p:cNvSpPr txBox="1"/>
-          <p:nvPr/>
-        </p:nvSpPr>
-        <p:spPr>
-          <a:xfrm>
-            <a:off x="731520" y="2743200"/>
-            <a:ext cx="685800" cy="685800"/>
-          </a:xfrm>
-          <a:prstGeom prst="rect">
-            <a:avLst/>
-          </a:prstGeom>
-          <a:noFill/>
-          <a:ln/>
-        </p:spPr>
-        <p:txBody>
-          <a:bodyPr wrap="square" lIns="0" tIns="0" rIns="0" bIns="0" rtlCol="0" anchor="ctr"/>
-          <a:lstStyle/>
-          <a:p>
-            <a:pPr algn="ctr" indent="0" marL="0">
+      <p:pic>
+        <p:nvPicPr>
+          <p:cNvPr id="10" name="api gateway row 1 icon" descr="api gateway row 1">    </p:cNvPr>
+          <p:cNvPicPr>
+            <a:picLocks noChangeAspect="1"/>
+          </p:cNvPicPr>
+          <p:nvPr/>
+        </p:nvPicPr>
+        <p:blipFill>
+          <a:blip r:embed="rId2"/>
+          <a:stretch>
+            <a:fillRect/>
+          </a:stretch>
+        </p:blipFill>
+        <p:spPr>
+          <a:xfrm>
+            <a:off x="5017770" y="1680210"/>
+            <a:ext cx="342900" cy="342900"/>
+          </a:xfrm>
+          <a:prstGeom prst="rect">
+            <a:avLst/>
+          </a:prstGeom>
+        </p:spPr>
+      </p:pic>
+      <p:sp>
+        <p:nvSpPr>
+          <p:cNvPr id="11" name="Text 7"/>
+          <p:cNvSpPr txBox="1"/>
+          <p:nvPr/>
+        </p:nvSpPr>
+        <p:spPr>
+          <a:xfrm>
+            <a:off x="5760720" y="1463040"/>
+            <a:ext cx="5852160" cy="411480"/>
+          </a:xfrm>
+          <a:prstGeom prst="rect">
+            <a:avLst/>
+          </a:prstGeom>
+          <a:noFill/>
+          <a:ln/>
+        </p:spPr>
+        <p:txBody>
+          <a:bodyPr wrap="square" lIns="0" tIns="0" rIns="0" bIns="0" rtlCol="0" anchor="t"/>
+          <a:lstStyle/>
+          <a:p>
+            <a:pPr indent="0" marL="0">
               <a:buNone/>
             </a:pPr>
             <a:r>
@@ -3784,7 +3890,7 @@
                   <a:schemeClr val="tx1"/>
                 </a:solidFill>
               </a:rPr>
-              <a:t>2</a:t>
+              <a:t>What it does in our app</a:t>
             </a:r>
             <a:endParaRPr lang="en-US" sz="2000" dirty="0"/>
           </a:p>
@@ -3792,107 +3898,49 @@
       </p:sp>
       <p:sp>
         <p:nvSpPr>
-          <p:cNvPr id="11" name="Text 9"/>
-          <p:cNvSpPr txBox="1"/>
-          <p:nvPr/>
-        </p:nvSpPr>
-        <p:spPr>
-          <a:xfrm>
-            <a:off x="1645920" y="2743200"/>
-            <a:ext cx="1143000" cy="685800"/>
-          </a:xfrm>
-          <a:prstGeom prst="rect">
-            <a:avLst/>
-          </a:prstGeom>
-          <a:noFill/>
-          <a:ln/>
-        </p:spPr>
-        <p:txBody>
-          <a:bodyPr wrap="square" lIns="0" tIns="0" rIns="0" bIns="0" rtlCol="0" anchor="ctr"/>
-          <a:lstStyle/>
-          <a:p>
-            <a:pPr indent="0" marL="0">
-              <a:buNone/>
-            </a:pPr>
-            <a:r>
-              <a:rPr lang="en-US" sz="1600" b="1" dirty="0">
-                <a:solidFill>
-                  <a:schemeClr val="accent2"/>
-                </a:solidFill>
-              </a:rPr>
-              <a:t>5-10 min</a:t>
-            </a:r>
-            <a:endParaRPr lang="en-US" sz="1600" dirty="0"/>
-          </a:p>
-        </p:txBody>
-      </p:sp>
-      <p:sp>
-        <p:nvSpPr>
-          <p:cNvPr id="12" name="Text 10"/>
-          <p:cNvSpPr txBox="1"/>
-          <p:nvPr/>
-        </p:nvSpPr>
-        <p:spPr>
-          <a:xfrm>
-            <a:off x="2788920" y="2743200"/>
-            <a:ext cx="3063240" cy="685800"/>
-          </a:xfrm>
-          <a:prstGeom prst="rect">
-            <a:avLst/>
-          </a:prstGeom>
-          <a:noFill/>
-          <a:ln/>
-        </p:spPr>
-        <p:txBody>
-          <a:bodyPr wrap="square" lIns="0" tIns="0" rIns="0" bIns="0" rtlCol="0" anchor="ctr"/>
-          <a:lstStyle/>
-          <a:p>
-            <a:pPr indent="0" marL="0">
-              <a:buNone/>
-            </a:pPr>
-            <a:r>
-              <a:rPr lang="en-US" sz="1800" dirty="0">
-                <a:solidFill>
-                  <a:schemeClr val="tx1"/>
-                </a:solidFill>
-              </a:rPr>
-              <a:t>Try the AI in Amazon Bedrock</a:t>
-            </a:r>
-            <a:endParaRPr lang="en-US" sz="1800" dirty="0"/>
-          </a:p>
-        </p:txBody>
-      </p:sp>
-      <p:sp>
-        <p:nvSpPr>
-          <p:cNvPr id="13" name="step 3 card"/>
+          <p:cNvPr id="12" name="Text 8"/>
+          <p:cNvSpPr txBox="1"/>
+          <p:nvPr/>
+        </p:nvSpPr>
+        <p:spPr>
+          <a:xfrm>
+            <a:off x="5760720" y="1920240"/>
+            <a:ext cx="5852160" cy="1005840"/>
+          </a:xfrm>
+          <a:prstGeom prst="rect">
+            <a:avLst/>
+          </a:prstGeom>
+          <a:noFill/>
+          <a:ln/>
+        </p:spPr>
+        <p:txBody>
+          <a:bodyPr wrap="square" lIns="0" tIns="0" rIns="0" bIns="0" rtlCol="0" anchor="t"/>
+          <a:lstStyle/>
+          <a:p>
+            <a:pPr indent="0" marL="0">
+              <a:buNone/>
+            </a:pPr>
+            <a:r>
+              <a:rPr lang="en-US" sz="1700" dirty="0">
+                <a:solidFill>
+                  <a:schemeClr val="tx2"/>
+                </a:solidFill>
+              </a:rPr>
+              <a:t>When you click Generate, the website sends your answers to one web address. API Gateway receives them and passes them to Lambda.</a:t>
+            </a:r>
+            <a:endParaRPr lang="en-US" sz="1700" dirty="0"/>
+          </a:p>
+        </p:txBody>
+      </p:sp>
+      <p:sp>
+        <p:nvSpPr>
+          <p:cNvPr id="13" name="api gateway row 2 circle"/>
           <p:cNvSpPr/>
           <p:nvPr/>
         </p:nvSpPr>
         <p:spPr>
           <a:xfrm>
-            <a:off x="548640" y="3749040"/>
-            <a:ext cx="5440680" cy="960120"/>
-          </a:xfrm>
-          <a:prstGeom prst="roundRect">
-            <a:avLst>
-              <a:gd name="adj" fmla="val 14286"/>
-            </a:avLst>
-          </a:prstGeom>
-          <a:solidFill>
-            <a:schemeClr val="bg2"/>
-          </a:solidFill>
-          <a:ln/>
-        </p:spPr>
-      </p:sp>
-      <p:sp>
-        <p:nvSpPr>
-          <p:cNvPr id="14" name="step 3 number"/>
-          <p:cNvSpPr/>
-          <p:nvPr/>
-        </p:nvSpPr>
-        <p:spPr>
-          <a:xfrm>
-            <a:off x="731520" y="3886200"/>
+            <a:off x="4846320" y="3063240"/>
             <a:ext cx="685800" cy="685800"/>
           </a:xfrm>
           <a:prstGeom prst="ellipse">
@@ -3904,28 +3952,52 @@
           <a:ln/>
         </p:spPr>
       </p:sp>
-      <p:sp>
-        <p:nvSpPr>
-          <p:cNvPr id="15" name="Text 13"/>
-          <p:cNvSpPr txBox="1"/>
-          <p:nvPr/>
-        </p:nvSpPr>
-        <p:spPr>
-          <a:xfrm>
-            <a:off x="731520" y="3886200"/>
-            <a:ext cx="685800" cy="685800"/>
-          </a:xfrm>
-          <a:prstGeom prst="rect">
-            <a:avLst/>
-          </a:prstGeom>
-          <a:noFill/>
-          <a:ln/>
-        </p:spPr>
-        <p:txBody>
-          <a:bodyPr wrap="square" lIns="0" tIns="0" rIns="0" bIns="0" rtlCol="0" anchor="ctr"/>
-          <a:lstStyle/>
-          <a:p>
-            <a:pPr algn="ctr" indent="0" marL="0">
+      <p:pic>
+        <p:nvPicPr>
+          <p:cNvPr id="14" name="api gateway row 2 icon" descr="api gateway row 2">    </p:cNvPr>
+          <p:cNvPicPr>
+            <a:picLocks noChangeAspect="1"/>
+          </p:cNvPicPr>
+          <p:nvPr/>
+        </p:nvPicPr>
+        <p:blipFill>
+          <a:blip r:embed="rId3"/>
+          <a:stretch>
+            <a:fillRect/>
+          </a:stretch>
+        </p:blipFill>
+        <p:spPr>
+          <a:xfrm>
+            <a:off x="5017770" y="3234690"/>
+            <a:ext cx="342900" cy="342900"/>
+          </a:xfrm>
+          <a:prstGeom prst="rect">
+            <a:avLst/>
+          </a:prstGeom>
+        </p:spPr>
+      </p:pic>
+      <p:sp>
+        <p:nvSpPr>
+          <p:cNvPr id="15" name="Text 10"/>
+          <p:cNvSpPr txBox="1"/>
+          <p:nvPr/>
+        </p:nvSpPr>
+        <p:spPr>
+          <a:xfrm>
+            <a:off x="5760720" y="3017520"/>
+            <a:ext cx="5852160" cy="411480"/>
+          </a:xfrm>
+          <a:prstGeom prst="rect">
+            <a:avLst/>
+          </a:prstGeom>
+          <a:noFill/>
+          <a:ln/>
+        </p:spPr>
+        <p:txBody>
+          <a:bodyPr wrap="square" lIns="0" tIns="0" rIns="0" bIns="0" rtlCol="0" anchor="t"/>
+          <a:lstStyle/>
+          <a:p>
+            <a:pPr indent="0" marL="0">
               <a:buNone/>
             </a:pPr>
             <a:r>
@@ -3934,7 +4006,7 @@
                   <a:schemeClr val="tx1"/>
                 </a:solidFill>
               </a:rPr>
-              <a:t>3</a:t>
+              <a:t>Think of it like</a:t>
             </a:r>
             <a:endParaRPr lang="en-US" sz="2000" dirty="0"/>
           </a:p>
@@ -3942,107 +4014,49 @@
       </p:sp>
       <p:sp>
         <p:nvSpPr>
-          <p:cNvPr id="16" name="Text 14"/>
-          <p:cNvSpPr txBox="1"/>
-          <p:nvPr/>
-        </p:nvSpPr>
-        <p:spPr>
-          <a:xfrm>
-            <a:off x="1645920" y="3886200"/>
-            <a:ext cx="1143000" cy="685800"/>
-          </a:xfrm>
-          <a:prstGeom prst="rect">
-            <a:avLst/>
-          </a:prstGeom>
-          <a:noFill/>
-          <a:ln/>
-        </p:spPr>
-        <p:txBody>
-          <a:bodyPr wrap="square" lIns="0" tIns="0" rIns="0" bIns="0" rtlCol="0" anchor="ctr"/>
-          <a:lstStyle/>
-          <a:p>
-            <a:pPr indent="0" marL="0">
-              <a:buNone/>
-            </a:pPr>
-            <a:r>
-              <a:rPr lang="en-US" sz="1600" b="1" dirty="0">
-                <a:solidFill>
-                  <a:schemeClr val="accent2"/>
-                </a:solidFill>
-              </a:rPr>
-              <a:t>10-20 min</a:t>
-            </a:r>
-            <a:endParaRPr lang="en-US" sz="1600" dirty="0"/>
-          </a:p>
-        </p:txBody>
-      </p:sp>
-      <p:sp>
-        <p:nvSpPr>
-          <p:cNvPr id="17" name="Text 15"/>
-          <p:cNvSpPr txBox="1"/>
-          <p:nvPr/>
-        </p:nvSpPr>
-        <p:spPr>
-          <a:xfrm>
-            <a:off x="2788920" y="3886200"/>
-            <a:ext cx="3063240" cy="685800"/>
-          </a:xfrm>
-          <a:prstGeom prst="rect">
-            <a:avLst/>
-          </a:prstGeom>
-          <a:noFill/>
-          <a:ln/>
-        </p:spPr>
-        <p:txBody>
-          <a:bodyPr wrap="square" lIns="0" tIns="0" rIns="0" bIns="0" rtlCol="0" anchor="ctr"/>
-          <a:lstStyle/>
-          <a:p>
-            <a:pPr indent="0" marL="0">
-              <a:buNone/>
-            </a:pPr>
-            <a:r>
-              <a:rPr lang="en-US" sz="1800" dirty="0">
-                <a:solidFill>
-                  <a:schemeClr val="tx1"/>
-                </a:solidFill>
-              </a:rPr>
-              <a:t>Build the Lambda function</a:t>
-            </a:r>
-            <a:endParaRPr lang="en-US" sz="1800" dirty="0"/>
-          </a:p>
-        </p:txBody>
-      </p:sp>
-      <p:sp>
-        <p:nvSpPr>
-          <p:cNvPr id="18" name="step 4 card"/>
+          <p:cNvPr id="16" name="Text 11"/>
+          <p:cNvSpPr txBox="1"/>
+          <p:nvPr/>
+        </p:nvSpPr>
+        <p:spPr>
+          <a:xfrm>
+            <a:off x="5760720" y="3474720"/>
+            <a:ext cx="5852160" cy="1005840"/>
+          </a:xfrm>
+          <a:prstGeom prst="rect">
+            <a:avLst/>
+          </a:prstGeom>
+          <a:noFill/>
+          <a:ln/>
+        </p:spPr>
+        <p:txBody>
+          <a:bodyPr wrap="square" lIns="0" tIns="0" rIns="0" bIns="0" rtlCol="0" anchor="t"/>
+          <a:lstStyle/>
+          <a:p>
+            <a:pPr indent="0" marL="0">
+              <a:buNone/>
+            </a:pPr>
+            <a:r>
+              <a:rPr lang="en-US" sz="1700" dirty="0">
+                <a:solidFill>
+                  <a:schemeClr val="tx2"/>
+                </a:solidFill>
+              </a:rPr>
+              <a:t>The front desk of a building. It greets visitors and sends them to the right room.</a:t>
+            </a:r>
+            <a:endParaRPr lang="en-US" sz="1700" dirty="0"/>
+          </a:p>
+        </p:txBody>
+      </p:sp>
+      <p:sp>
+        <p:nvSpPr>
+          <p:cNvPr id="17" name="api gateway row 3 circle"/>
           <p:cNvSpPr/>
           <p:nvPr/>
         </p:nvSpPr>
         <p:spPr>
           <a:xfrm>
-            <a:off x="548640" y="4892040"/>
-            <a:ext cx="5440680" cy="960120"/>
-          </a:xfrm>
-          <a:prstGeom prst="roundRect">
-            <a:avLst>
-              <a:gd name="adj" fmla="val 14286"/>
-            </a:avLst>
-          </a:prstGeom>
-          <a:solidFill>
-            <a:schemeClr val="bg1"/>
-          </a:solidFill>
-          <a:ln/>
-        </p:spPr>
-      </p:sp>
-      <p:sp>
-        <p:nvSpPr>
-          <p:cNvPr id="19" name="step 4 number"/>
-          <p:cNvSpPr/>
-          <p:nvPr/>
-        </p:nvSpPr>
-        <p:spPr>
-          <a:xfrm>
-            <a:off x="731520" y="5029200"/>
+            <a:off x="4846320" y="4617720"/>
             <a:ext cx="685800" cy="685800"/>
           </a:xfrm>
           <a:prstGeom prst="ellipse">
@@ -4054,28 +4068,52 @@
           <a:ln/>
         </p:spPr>
       </p:sp>
-      <p:sp>
-        <p:nvSpPr>
-          <p:cNvPr id="20" name="Text 18"/>
-          <p:cNvSpPr txBox="1"/>
-          <p:nvPr/>
-        </p:nvSpPr>
-        <p:spPr>
-          <a:xfrm>
-            <a:off x="731520" y="5029200"/>
-            <a:ext cx="685800" cy="685800"/>
-          </a:xfrm>
-          <a:prstGeom prst="rect">
-            <a:avLst/>
-          </a:prstGeom>
-          <a:noFill/>
-          <a:ln/>
-        </p:spPr>
-        <p:txBody>
-          <a:bodyPr wrap="square" lIns="0" tIns="0" rIns="0" bIns="0" rtlCol="0" anchor="ctr"/>
-          <a:lstStyle/>
-          <a:p>
-            <a:pPr algn="ctr" indent="0" marL="0">
+      <p:pic>
+        <p:nvPicPr>
+          <p:cNvPr id="18" name="api gateway row 3 icon" descr="api gateway row 3">    </p:cNvPr>
+          <p:cNvPicPr>
+            <a:picLocks noChangeAspect="1"/>
+          </p:cNvPicPr>
+          <p:nvPr/>
+        </p:nvPicPr>
+        <p:blipFill>
+          <a:blip r:embed="rId4"/>
+          <a:stretch>
+            <a:fillRect/>
+          </a:stretch>
+        </p:blipFill>
+        <p:spPr>
+          <a:xfrm>
+            <a:off x="5017770" y="4789170"/>
+            <a:ext cx="342900" cy="342900"/>
+          </a:xfrm>
+          <a:prstGeom prst="rect">
+            <a:avLst/>
+          </a:prstGeom>
+        </p:spPr>
+      </p:pic>
+      <p:sp>
+        <p:nvSpPr>
+          <p:cNvPr id="19" name="Text 13"/>
+          <p:cNvSpPr txBox="1"/>
+          <p:nvPr/>
+        </p:nvSpPr>
+        <p:spPr>
+          <a:xfrm>
+            <a:off x="5760720" y="4572000"/>
+            <a:ext cx="5852160" cy="411480"/>
+          </a:xfrm>
+          <a:prstGeom prst="rect">
+            <a:avLst/>
+          </a:prstGeom>
+          <a:noFill/>
+          <a:ln/>
+        </p:spPr>
+        <p:txBody>
+          <a:bodyPr wrap="square" lIns="0" tIns="0" rIns="0" bIns="0" rtlCol="0" anchor="t"/>
+          <a:lstStyle/>
+          <a:p>
+            <a:pPr indent="0" marL="0">
               <a:buNone/>
             </a:pPr>
             <a:r>
@@ -4084,7 +4122,7 @@
                   <a:schemeClr val="tx1"/>
                 </a:solidFill>
               </a:rPr>
-              <a:t>4</a:t>
+              <a:t>Why it helps</a:t>
             </a:r>
             <a:endParaRPr lang="en-US" sz="2000" dirty="0"/>
           </a:p>
@@ -4092,673 +4130,37 @@
       </p:sp>
       <p:sp>
         <p:nvSpPr>
-          <p:cNvPr id="21" name="Text 19"/>
-          <p:cNvSpPr txBox="1"/>
-          <p:nvPr/>
-        </p:nvSpPr>
-        <p:spPr>
-          <a:xfrm>
-            <a:off x="1645920" y="5029200"/>
-            <a:ext cx="1143000" cy="685800"/>
-          </a:xfrm>
-          <a:prstGeom prst="rect">
-            <a:avLst/>
-          </a:prstGeom>
-          <a:noFill/>
-          <a:ln/>
-        </p:spPr>
-        <p:txBody>
-          <a:bodyPr wrap="square" lIns="0" tIns="0" rIns="0" bIns="0" rtlCol="0" anchor="ctr"/>
-          <a:lstStyle/>
-          <a:p>
-            <a:pPr indent="0" marL="0">
-              <a:buNone/>
-            </a:pPr>
-            <a:r>
-              <a:rPr lang="en-US" sz="1600" b="1" dirty="0">
-                <a:solidFill>
-                  <a:schemeClr val="accent2"/>
-                </a:solidFill>
-              </a:rPr>
-              <a:t>20-28 min</a:t>
-            </a:r>
-            <a:endParaRPr lang="en-US" sz="1600" dirty="0"/>
-          </a:p>
-        </p:txBody>
-      </p:sp>
-      <p:sp>
-        <p:nvSpPr>
-          <p:cNvPr id="22" name="Text 20"/>
-          <p:cNvSpPr txBox="1"/>
-          <p:nvPr/>
-        </p:nvSpPr>
-        <p:spPr>
-          <a:xfrm>
-            <a:off x="2788920" y="5029200"/>
-            <a:ext cx="3063240" cy="685800"/>
-          </a:xfrm>
-          <a:prstGeom prst="rect">
-            <a:avLst/>
-          </a:prstGeom>
-          <a:noFill/>
-          <a:ln/>
-        </p:spPr>
-        <p:txBody>
-          <a:bodyPr wrap="square" lIns="0" tIns="0" rIns="0" bIns="0" rtlCol="0" anchor="ctr"/>
-          <a:lstStyle/>
-          <a:p>
-            <a:pPr indent="0" marL="0">
-              <a:buNone/>
-            </a:pPr>
-            <a:r>
-              <a:rPr lang="en-US" sz="1800" dirty="0">
-                <a:solidFill>
-                  <a:schemeClr val="tx1"/>
-                </a:solidFill>
-              </a:rPr>
-              <a:t>Connect API Gateway</a:t>
-            </a:r>
-            <a:endParaRPr lang="en-US" sz="1800" dirty="0"/>
-          </a:p>
-        </p:txBody>
-      </p:sp>
-      <p:sp>
-        <p:nvSpPr>
-          <p:cNvPr id="23" name="step 5 card"/>
-          <p:cNvSpPr/>
-          <p:nvPr/>
-        </p:nvSpPr>
-        <p:spPr>
-          <a:xfrm>
-            <a:off x="6172200" y="1463040"/>
-            <a:ext cx="5440680" cy="960120"/>
-          </a:xfrm>
-          <a:prstGeom prst="roundRect">
-            <a:avLst>
-              <a:gd name="adj" fmla="val 14286"/>
-            </a:avLst>
-          </a:prstGeom>
-          <a:solidFill>
-            <a:schemeClr val="bg2"/>
-          </a:solidFill>
-          <a:ln/>
-        </p:spPr>
-      </p:sp>
-      <p:sp>
-        <p:nvSpPr>
-          <p:cNvPr id="24" name="step 5 number"/>
-          <p:cNvSpPr/>
-          <p:nvPr/>
-        </p:nvSpPr>
-        <p:spPr>
-          <a:xfrm>
-            <a:off x="6355080" y="1600200"/>
-            <a:ext cx="685800" cy="685800"/>
-          </a:xfrm>
-          <a:prstGeom prst="ellipse">
-            <a:avLst/>
-          </a:prstGeom>
-          <a:solidFill>
-            <a:schemeClr val="accent1"/>
-          </a:solidFill>
-          <a:ln/>
-        </p:spPr>
-      </p:sp>
-      <p:sp>
-        <p:nvSpPr>
-          <p:cNvPr id="25" name="Text 23"/>
-          <p:cNvSpPr txBox="1"/>
-          <p:nvPr/>
-        </p:nvSpPr>
-        <p:spPr>
-          <a:xfrm>
-            <a:off x="6355080" y="1600200"/>
-            <a:ext cx="685800" cy="685800"/>
-          </a:xfrm>
-          <a:prstGeom prst="rect">
-            <a:avLst/>
-          </a:prstGeom>
-          <a:noFill/>
-          <a:ln/>
-        </p:spPr>
-        <p:txBody>
-          <a:bodyPr wrap="square" lIns="0" tIns="0" rIns="0" bIns="0" rtlCol="0" anchor="ctr"/>
-          <a:lstStyle/>
-          <a:p>
-            <a:pPr algn="ctr" indent="0" marL="0">
-              <a:buNone/>
-            </a:pPr>
-            <a:r>
-              <a:rPr lang="en-US" sz="2000" b="1" dirty="0">
-                <a:solidFill>
-                  <a:schemeClr val="tx1"/>
-                </a:solidFill>
-              </a:rPr>
-              <a:t>5</a:t>
-            </a:r>
-            <a:endParaRPr lang="en-US" sz="2000" dirty="0"/>
-          </a:p>
-        </p:txBody>
-      </p:sp>
-      <p:sp>
-        <p:nvSpPr>
-          <p:cNvPr id="26" name="Text 24"/>
-          <p:cNvSpPr txBox="1"/>
-          <p:nvPr/>
-        </p:nvSpPr>
-        <p:spPr>
-          <a:xfrm>
-            <a:off x="7269480" y="1600200"/>
-            <a:ext cx="1143000" cy="685800"/>
-          </a:xfrm>
-          <a:prstGeom prst="rect">
-            <a:avLst/>
-          </a:prstGeom>
-          <a:noFill/>
-          <a:ln/>
-        </p:spPr>
-        <p:txBody>
-          <a:bodyPr wrap="square" lIns="0" tIns="0" rIns="0" bIns="0" rtlCol="0" anchor="ctr"/>
-          <a:lstStyle/>
-          <a:p>
-            <a:pPr indent="0" marL="0">
-              <a:buNone/>
-            </a:pPr>
-            <a:r>
-              <a:rPr lang="en-US" sz="1600" b="1" dirty="0">
-                <a:solidFill>
-                  <a:schemeClr val="accent2"/>
-                </a:solidFill>
-              </a:rPr>
-              <a:t>28-37 min</a:t>
-            </a:r>
-            <a:endParaRPr lang="en-US" sz="1600" dirty="0"/>
-          </a:p>
-        </p:txBody>
-      </p:sp>
-      <p:sp>
-        <p:nvSpPr>
-          <p:cNvPr id="27" name="Text 25"/>
-          <p:cNvSpPr txBox="1"/>
-          <p:nvPr/>
-        </p:nvSpPr>
-        <p:spPr>
-          <a:xfrm>
-            <a:off x="8412480" y="1600200"/>
-            <a:ext cx="3063240" cy="685800"/>
-          </a:xfrm>
-          <a:prstGeom prst="rect">
-            <a:avLst/>
-          </a:prstGeom>
-          <a:noFill/>
-          <a:ln/>
-        </p:spPr>
-        <p:txBody>
-          <a:bodyPr wrap="square" lIns="0" tIns="0" rIns="0" bIns="0" rtlCol="0" anchor="ctr"/>
-          <a:lstStyle/>
-          <a:p>
-            <a:pPr indent="0" marL="0">
-              <a:buNone/>
-            </a:pPr>
-            <a:r>
-              <a:rPr lang="en-US" sz="1800" dirty="0">
-                <a:solidFill>
-                  <a:schemeClr val="tx1"/>
-                </a:solidFill>
-              </a:rPr>
-              <a:t>Connect the website</a:t>
-            </a:r>
-            <a:endParaRPr lang="en-US" sz="1800" dirty="0"/>
-          </a:p>
-        </p:txBody>
-      </p:sp>
-      <p:sp>
-        <p:nvSpPr>
-          <p:cNvPr id="28" name="step 6 card"/>
-          <p:cNvSpPr/>
-          <p:nvPr/>
-        </p:nvSpPr>
-        <p:spPr>
-          <a:xfrm>
-            <a:off x="6172200" y="2606040"/>
-            <a:ext cx="5440680" cy="960120"/>
-          </a:xfrm>
-          <a:prstGeom prst="roundRect">
-            <a:avLst>
-              <a:gd name="adj" fmla="val 14286"/>
-            </a:avLst>
-          </a:prstGeom>
-          <a:solidFill>
-            <a:schemeClr val="bg1"/>
-          </a:solidFill>
-          <a:ln/>
-        </p:spPr>
-      </p:sp>
-      <p:sp>
-        <p:nvSpPr>
-          <p:cNvPr id="29" name="step 6 number"/>
-          <p:cNvSpPr/>
-          <p:nvPr/>
-        </p:nvSpPr>
-        <p:spPr>
-          <a:xfrm>
-            <a:off x="6355080" y="2743200"/>
-            <a:ext cx="685800" cy="685800"/>
-          </a:xfrm>
-          <a:prstGeom prst="ellipse">
-            <a:avLst/>
-          </a:prstGeom>
-          <a:solidFill>
-            <a:schemeClr val="accent1"/>
-          </a:solidFill>
-          <a:ln/>
-        </p:spPr>
-      </p:sp>
-      <p:sp>
-        <p:nvSpPr>
-          <p:cNvPr id="30" name="Text 28"/>
-          <p:cNvSpPr txBox="1"/>
-          <p:nvPr/>
-        </p:nvSpPr>
-        <p:spPr>
-          <a:xfrm>
-            <a:off x="6355080" y="2743200"/>
-            <a:ext cx="685800" cy="685800"/>
-          </a:xfrm>
-          <a:prstGeom prst="rect">
-            <a:avLst/>
-          </a:prstGeom>
-          <a:noFill/>
-          <a:ln/>
-        </p:spPr>
-        <p:txBody>
-          <a:bodyPr wrap="square" lIns="0" tIns="0" rIns="0" bIns="0" rtlCol="0" anchor="ctr"/>
-          <a:lstStyle/>
-          <a:p>
-            <a:pPr algn="ctr" indent="0" marL="0">
-              <a:buNone/>
-            </a:pPr>
-            <a:r>
-              <a:rPr lang="en-US" sz="2000" b="1" dirty="0">
-                <a:solidFill>
-                  <a:schemeClr val="tx1"/>
-                </a:solidFill>
-              </a:rPr>
-              <a:t>6</a:t>
-            </a:r>
-            <a:endParaRPr lang="en-US" sz="2000" dirty="0"/>
-          </a:p>
-        </p:txBody>
-      </p:sp>
-      <p:sp>
-        <p:nvSpPr>
-          <p:cNvPr id="31" name="Text 29"/>
-          <p:cNvSpPr txBox="1"/>
-          <p:nvPr/>
-        </p:nvSpPr>
-        <p:spPr>
-          <a:xfrm>
-            <a:off x="7269480" y="2743200"/>
-            <a:ext cx="1143000" cy="685800"/>
-          </a:xfrm>
-          <a:prstGeom prst="rect">
-            <a:avLst/>
-          </a:prstGeom>
-          <a:noFill/>
-          <a:ln/>
-        </p:spPr>
-        <p:txBody>
-          <a:bodyPr wrap="square" lIns="0" tIns="0" rIns="0" bIns="0" rtlCol="0" anchor="ctr"/>
-          <a:lstStyle/>
-          <a:p>
-            <a:pPr indent="0" marL="0">
-              <a:buNone/>
-            </a:pPr>
-            <a:r>
-              <a:rPr lang="en-US" sz="1600" b="1" dirty="0">
-                <a:solidFill>
-                  <a:schemeClr val="accent2"/>
-                </a:solidFill>
-              </a:rPr>
-              <a:t>37-41 min</a:t>
-            </a:r>
-            <a:endParaRPr lang="en-US" sz="1600" dirty="0"/>
-          </a:p>
-        </p:txBody>
-      </p:sp>
-      <p:sp>
-        <p:nvSpPr>
-          <p:cNvPr id="32" name="Text 30"/>
-          <p:cNvSpPr txBox="1"/>
-          <p:nvPr/>
-        </p:nvSpPr>
-        <p:spPr>
-          <a:xfrm>
-            <a:off x="8412480" y="2743200"/>
-            <a:ext cx="3063240" cy="685800"/>
-          </a:xfrm>
-          <a:prstGeom prst="rect">
-            <a:avLst/>
-          </a:prstGeom>
-          <a:noFill/>
-          <a:ln/>
-        </p:spPr>
-        <p:txBody>
-          <a:bodyPr wrap="square" lIns="0" tIns="0" rIns="0" bIns="0" rtlCol="0" anchor="ctr"/>
-          <a:lstStyle/>
-          <a:p>
-            <a:pPr indent="0" marL="0">
-              <a:buNone/>
-            </a:pPr>
-            <a:r>
-              <a:rPr lang="en-US" sz="1800" dirty="0">
-                <a:solidFill>
-                  <a:schemeClr val="tx1"/>
-                </a:solidFill>
-              </a:rPr>
-              <a:t>Test your app</a:t>
-            </a:r>
-            <a:endParaRPr lang="en-US" sz="1800" dirty="0"/>
-          </a:p>
-        </p:txBody>
-      </p:sp>
-      <p:sp>
-        <p:nvSpPr>
-          <p:cNvPr id="33" name="step 7 card"/>
-          <p:cNvSpPr/>
-          <p:nvPr/>
-        </p:nvSpPr>
-        <p:spPr>
-          <a:xfrm>
-            <a:off x="6172200" y="3749040"/>
-            <a:ext cx="5440680" cy="960120"/>
-          </a:xfrm>
-          <a:prstGeom prst="roundRect">
-            <a:avLst>
-              <a:gd name="adj" fmla="val 14286"/>
-            </a:avLst>
-          </a:prstGeom>
-          <a:solidFill>
-            <a:schemeClr val="bg2"/>
-          </a:solidFill>
-          <a:ln/>
-        </p:spPr>
-      </p:sp>
-      <p:sp>
-        <p:nvSpPr>
-          <p:cNvPr id="34" name="step 7 number"/>
-          <p:cNvSpPr/>
-          <p:nvPr/>
-        </p:nvSpPr>
-        <p:spPr>
-          <a:xfrm>
-            <a:off x="6355080" y="3886200"/>
-            <a:ext cx="685800" cy="685800"/>
-          </a:xfrm>
-          <a:prstGeom prst="ellipse">
-            <a:avLst/>
-          </a:prstGeom>
-          <a:solidFill>
-            <a:schemeClr val="accent1"/>
-          </a:solidFill>
-          <a:ln/>
-        </p:spPr>
-      </p:sp>
-      <p:sp>
-        <p:nvSpPr>
-          <p:cNvPr id="35" name="Text 33"/>
-          <p:cNvSpPr txBox="1"/>
-          <p:nvPr/>
-        </p:nvSpPr>
-        <p:spPr>
-          <a:xfrm>
-            <a:off x="6355080" y="3886200"/>
-            <a:ext cx="685800" cy="685800"/>
-          </a:xfrm>
-          <a:prstGeom prst="rect">
-            <a:avLst/>
-          </a:prstGeom>
-          <a:noFill/>
-          <a:ln/>
-        </p:spPr>
-        <p:txBody>
-          <a:bodyPr wrap="square" lIns="0" tIns="0" rIns="0" bIns="0" rtlCol="0" anchor="ctr"/>
-          <a:lstStyle/>
-          <a:p>
-            <a:pPr algn="ctr" indent="0" marL="0">
-              <a:buNone/>
-            </a:pPr>
-            <a:r>
-              <a:rPr lang="en-US" sz="2000" b="1" dirty="0">
-                <a:solidFill>
-                  <a:schemeClr val="tx1"/>
-                </a:solidFill>
-              </a:rPr>
-              <a:t>7</a:t>
-            </a:r>
-            <a:endParaRPr lang="en-US" sz="2000" dirty="0"/>
-          </a:p>
-        </p:txBody>
-      </p:sp>
-      <p:sp>
-        <p:nvSpPr>
-          <p:cNvPr id="36" name="Text 34"/>
-          <p:cNvSpPr txBox="1"/>
-          <p:nvPr/>
-        </p:nvSpPr>
-        <p:spPr>
-          <a:xfrm>
-            <a:off x="7269480" y="3886200"/>
-            <a:ext cx="1143000" cy="685800"/>
-          </a:xfrm>
-          <a:prstGeom prst="rect">
-            <a:avLst/>
-          </a:prstGeom>
-          <a:noFill/>
-          <a:ln/>
-        </p:spPr>
-        <p:txBody>
-          <a:bodyPr wrap="square" lIns="0" tIns="0" rIns="0" bIns="0" rtlCol="0" anchor="ctr"/>
-          <a:lstStyle/>
-          <a:p>
-            <a:pPr indent="0" marL="0">
-              <a:buNone/>
-            </a:pPr>
-            <a:r>
-              <a:rPr lang="en-US" sz="1600" b="1" dirty="0">
-                <a:solidFill>
-                  <a:schemeClr val="accent2"/>
-                </a:solidFill>
-              </a:rPr>
-              <a:t>41-44 min</a:t>
-            </a:r>
-            <a:endParaRPr lang="en-US" sz="1600" dirty="0"/>
-          </a:p>
-        </p:txBody>
-      </p:sp>
-      <p:sp>
-        <p:nvSpPr>
-          <p:cNvPr id="37" name="Text 35"/>
-          <p:cNvSpPr txBox="1"/>
-          <p:nvPr/>
-        </p:nvSpPr>
-        <p:spPr>
-          <a:xfrm>
-            <a:off x="8412480" y="3886200"/>
-            <a:ext cx="3063240" cy="685800"/>
-          </a:xfrm>
-          <a:prstGeom prst="rect">
-            <a:avLst/>
-          </a:prstGeom>
-          <a:noFill/>
-          <a:ln/>
-        </p:spPr>
-        <p:txBody>
-          <a:bodyPr wrap="square" lIns="0" tIns="0" rIns="0" bIns="0" rtlCol="0" anchor="ctr"/>
-          <a:lstStyle/>
-          <a:p>
-            <a:pPr indent="0" marL="0">
-              <a:buNone/>
-            </a:pPr>
-            <a:r>
-              <a:rPr lang="en-US" sz="1800" dirty="0">
-                <a:solidFill>
-                  <a:schemeClr val="tx1"/>
-                </a:solidFill>
-              </a:rPr>
-              <a:t>Put it online with Amplify</a:t>
-            </a:r>
-            <a:endParaRPr lang="en-US" sz="1800" dirty="0"/>
-          </a:p>
-        </p:txBody>
-      </p:sp>
-      <p:sp>
-        <p:nvSpPr>
-          <p:cNvPr id="38" name="step 8 card"/>
-          <p:cNvSpPr/>
-          <p:nvPr/>
-        </p:nvSpPr>
-        <p:spPr>
-          <a:xfrm>
-            <a:off x="6172200" y="4892040"/>
-            <a:ext cx="5440680" cy="960120"/>
-          </a:xfrm>
-          <a:prstGeom prst="roundRect">
-            <a:avLst>
-              <a:gd name="adj" fmla="val 14286"/>
-            </a:avLst>
-          </a:prstGeom>
-          <a:solidFill>
-            <a:schemeClr val="bg1"/>
-          </a:solidFill>
-          <a:ln/>
-        </p:spPr>
-      </p:sp>
-      <p:sp>
-        <p:nvSpPr>
-          <p:cNvPr id="39" name="step 8 number"/>
-          <p:cNvSpPr/>
-          <p:nvPr/>
-        </p:nvSpPr>
-        <p:spPr>
-          <a:xfrm>
-            <a:off x="6355080" y="5029200"/>
-            <a:ext cx="685800" cy="685800"/>
-          </a:xfrm>
-          <a:prstGeom prst="ellipse">
-            <a:avLst/>
-          </a:prstGeom>
-          <a:solidFill>
-            <a:schemeClr val="accent1"/>
-          </a:solidFill>
-          <a:ln/>
-        </p:spPr>
-      </p:sp>
-      <p:sp>
-        <p:nvSpPr>
-          <p:cNvPr id="40" name="Text 38"/>
-          <p:cNvSpPr txBox="1"/>
-          <p:nvPr/>
-        </p:nvSpPr>
-        <p:spPr>
-          <a:xfrm>
-            <a:off x="6355080" y="5029200"/>
-            <a:ext cx="685800" cy="685800"/>
-          </a:xfrm>
-          <a:prstGeom prst="rect">
-            <a:avLst/>
-          </a:prstGeom>
-          <a:noFill/>
-          <a:ln/>
-        </p:spPr>
-        <p:txBody>
-          <a:bodyPr wrap="square" lIns="0" tIns="0" rIns="0" bIns="0" rtlCol="0" anchor="ctr"/>
-          <a:lstStyle/>
-          <a:p>
-            <a:pPr algn="ctr" indent="0" marL="0">
-              <a:buNone/>
-            </a:pPr>
-            <a:r>
-              <a:rPr lang="en-US" sz="2000" b="1" dirty="0">
-                <a:solidFill>
-                  <a:schemeClr val="tx1"/>
-                </a:solidFill>
-              </a:rPr>
-              <a:t>8</a:t>
-            </a:r>
-            <a:endParaRPr lang="en-US" sz="2000" dirty="0"/>
-          </a:p>
-        </p:txBody>
-      </p:sp>
-      <p:sp>
-        <p:nvSpPr>
-          <p:cNvPr id="41" name="Text 39"/>
-          <p:cNvSpPr txBox="1"/>
-          <p:nvPr/>
-        </p:nvSpPr>
-        <p:spPr>
-          <a:xfrm>
-            <a:off x="7269480" y="5029200"/>
-            <a:ext cx="1143000" cy="685800"/>
-          </a:xfrm>
-          <a:prstGeom prst="rect">
-            <a:avLst/>
-          </a:prstGeom>
-          <a:noFill/>
-          <a:ln/>
-        </p:spPr>
-        <p:txBody>
-          <a:bodyPr wrap="square" lIns="0" tIns="0" rIns="0" bIns="0" rtlCol="0" anchor="ctr"/>
-          <a:lstStyle/>
-          <a:p>
-            <a:pPr indent="0" marL="0">
-              <a:buNone/>
-            </a:pPr>
-            <a:r>
-              <a:rPr lang="en-US" sz="1600" b="1" dirty="0">
-                <a:solidFill>
-                  <a:schemeClr val="accent2"/>
-                </a:solidFill>
-              </a:rPr>
-              <a:t>44-45 min</a:t>
-            </a:r>
-            <a:endParaRPr lang="en-US" sz="1600" dirty="0"/>
-          </a:p>
-        </p:txBody>
-      </p:sp>
-      <p:sp>
-        <p:nvSpPr>
-          <p:cNvPr id="42" name="Text 40"/>
-          <p:cNvSpPr txBox="1"/>
-          <p:nvPr/>
-        </p:nvSpPr>
-        <p:spPr>
-          <a:xfrm>
-            <a:off x="8412480" y="5029200"/>
-            <a:ext cx="3063240" cy="685800"/>
-          </a:xfrm>
-          <a:prstGeom prst="rect">
-            <a:avLst/>
-          </a:prstGeom>
-          <a:noFill/>
-          <a:ln/>
-        </p:spPr>
-        <p:txBody>
-          <a:bodyPr wrap="square" lIns="0" tIns="0" rIns="0" bIns="0" rtlCol="0" anchor="ctr"/>
-          <a:lstStyle/>
-          <a:p>
-            <a:pPr indent="0" marL="0">
-              <a:buNone/>
-            </a:pPr>
-            <a:r>
-              <a:rPr lang="en-US" sz="1800" dirty="0">
-                <a:solidFill>
-                  <a:schemeClr val="tx1"/>
-                </a:solidFill>
-              </a:rPr>
-              <a:t>Wrap up and celebrate</a:t>
-            </a:r>
-            <a:endParaRPr lang="en-US" sz="1800" dirty="0"/>
+          <p:cNvPr id="20" name="Text 14"/>
+          <p:cNvSpPr txBox="1"/>
+          <p:nvPr/>
+        </p:nvSpPr>
+        <p:spPr>
+          <a:xfrm>
+            <a:off x="5760720" y="5029200"/>
+            <a:ext cx="5852160" cy="1005840"/>
+          </a:xfrm>
+          <a:prstGeom prst="rect">
+            <a:avLst/>
+          </a:prstGeom>
+          <a:noFill/>
+          <a:ln/>
+        </p:spPr>
+        <p:txBody>
+          <a:bodyPr wrap="square" lIns="0" tIns="0" rIns="0" bIns="0" rtlCol="0" anchor="t"/>
+          <a:lstStyle/>
+          <a:p>
+            <a:pPr indent="0" marL="0">
+              <a:buNone/>
+            </a:pPr>
+            <a:r>
+              <a:rPr lang="en-US" sz="1700" dirty="0">
+                <a:solidFill>
+                  <a:schemeClr val="tx2"/>
+                </a:solidFill>
+              </a:rPr>
+              <a:t>It keeps our code safe behind one door. It can also limit how many requests come in at once.</a:t>
+            </a:r>
+            <a:endParaRPr lang="en-US" sz="1700" dirty="0"/>
           </a:p>
         </p:txBody>
       </p:sp>
@@ -4864,7 +4266,7 @@
                   <a:schemeClr val="tx1"/>
                 </a:solidFill>
               </a:rPr>
-              <a:t>You don't need to be an expert</a:t>
+              <a:t>AWS Lambda: our code, ready when needed</a:t>
             </a:r>
             <a:endParaRPr lang="en-US" sz="3600" dirty="0"/>
           </a:p>
@@ -4872,36 +4274,36 @@
       </p:sp>
       <p:sp>
         <p:nvSpPr>
-          <p:cNvPr id="3" name="need 1 card"/>
+          <p:cNvPr id="3" name="lambda panel"/>
           <p:cNvSpPr/>
           <p:nvPr/>
         </p:nvSpPr>
         <p:spPr>
           <a:xfrm>
-            <a:off x="548640" y="1645920"/>
-            <a:ext cx="3520440" cy="3474720"/>
+            <a:off x="548640" y="1463040"/>
+            <a:ext cx="3931920" cy="4480560"/>
           </a:xfrm>
           <a:prstGeom prst="roundRect">
             <a:avLst>
-              <a:gd name="adj" fmla="val 3947"/>
+              <a:gd name="adj" fmla="val 3488"/>
             </a:avLst>
           </a:prstGeom>
           <a:solidFill>
-            <a:schemeClr val="bg2"/>
+            <a:schemeClr val="tx1"/>
           </a:solidFill>
           <a:ln/>
         </p:spPr>
       </p:sp>
       <p:sp>
         <p:nvSpPr>
-          <p:cNvPr id="4" name="need 1 circle"/>
+          <p:cNvPr id="4" name="lambda circle"/>
           <p:cNvSpPr/>
           <p:nvPr/>
         </p:nvSpPr>
         <p:spPr>
           <a:xfrm>
-            <a:off x="822960" y="1920240"/>
-            <a:ext cx="731520" cy="731520"/>
+            <a:off x="914400" y="1783080"/>
+            <a:ext cx="1097280" cy="1097280"/>
           </a:xfrm>
           <a:prstGeom prst="ellipse">
             <a:avLst/>
@@ -4914,7 +4316,7 @@
       </p:sp>
       <p:pic>
         <p:nvPicPr>
-          <p:cNvPr id="5" name="need 1 icon" descr="need 1">    </p:cNvPr>
+          <p:cNvPr id="5" name="lambda icon" descr="lambda">    </p:cNvPr>
           <p:cNvPicPr>
             <a:picLocks noChangeAspect="1"/>
           </p:cNvPicPr>
@@ -4928,8 +4330,8 @@
         </p:blipFill>
         <p:spPr>
           <a:xfrm>
-            <a:off x="1005840" y="2103120"/>
-            <a:ext cx="365760" cy="365760"/>
+            <a:off x="1188720" y="2057400"/>
+            <a:ext cx="548640" cy="548640"/>
           </a:xfrm>
           <a:prstGeom prst="rect">
             <a:avLst/>
@@ -4938,14 +4340,14 @@
       </p:pic>
       <p:sp>
         <p:nvSpPr>
-          <p:cNvPr id="6" name="need 1 head"/>
-          <p:cNvSpPr txBox="1"/>
-          <p:nvPr/>
-        </p:nvSpPr>
-        <p:spPr>
-          <a:xfrm>
-            <a:off x="822960" y="2834640"/>
-            <a:ext cx="2971800" cy="457200"/>
+          <p:cNvPr id="6" name="Text 3"/>
+          <p:cNvSpPr txBox="1"/>
+          <p:nvPr/>
+        </p:nvSpPr>
+        <p:spPr>
+          <a:xfrm>
+            <a:off x="914400" y="3063240"/>
+            <a:ext cx="3200400" cy="1188720"/>
           </a:xfrm>
           <a:prstGeom prst="rect">
             <a:avLst/>
@@ -4961,27 +4363,27 @@
               <a:buNone/>
             </a:pPr>
             <a:r>
-              <a:rPr lang="en-US" sz="2200" b="1" dirty="0">
-                <a:solidFill>
-                  <a:schemeClr val="tx1"/>
-                </a:solidFill>
-              </a:rPr>
-              <a:t>What you need</a:t>
-            </a:r>
-            <a:endParaRPr lang="en-US" sz="2200" dirty="0"/>
-          </a:p>
-        </p:txBody>
-      </p:sp>
-      <p:sp>
-        <p:nvSpPr>
-          <p:cNvPr id="7" name="need 1 body"/>
-          <p:cNvSpPr txBox="1"/>
-          <p:nvPr/>
-        </p:nvSpPr>
-        <p:spPr>
-          <a:xfrm>
-            <a:off x="822960" y="3337560"/>
-            <a:ext cx="2971800" cy="1554480"/>
+              <a:rPr lang="en-US" sz="2000" b="1" dirty="0">
+                <a:solidFill>
+                  <a:schemeClr val="bg1"/>
+                </a:solidFill>
+              </a:rPr>
+              <a:t>Lambda runs code without you owning a computer.</a:t>
+            </a:r>
+            <a:endParaRPr lang="en-US" sz="2000" dirty="0"/>
+          </a:p>
+        </p:txBody>
+      </p:sp>
+      <p:sp>
+        <p:nvSpPr>
+          <p:cNvPr id="7" name="Text 4"/>
+          <p:cNvSpPr txBox="1"/>
+          <p:nvPr/>
+        </p:nvSpPr>
+        <p:spPr>
+          <a:xfrm>
+            <a:off x="914400" y="4389120"/>
+            <a:ext cx="3200400" cy="320040"/>
           </a:xfrm>
           <a:prstGeom prst="rect">
             <a:avLst/>
@@ -4997,49 +4399,74 @@
               <a:buNone/>
             </a:pPr>
             <a:r>
-              <a:rPr lang="en-US" sz="1800" dirty="0">
-                <a:solidFill>
-                  <a:schemeClr val="tx2"/>
-                </a:solidFill>
-              </a:rPr>
-              <a:t>A laptop, an AWS account, and your curiosity. That's it.</a:t>
-            </a:r>
-            <a:endParaRPr lang="en-US" sz="1800" dirty="0"/>
-          </a:p>
-        </p:txBody>
-      </p:sp>
-      <p:sp>
-        <p:nvSpPr>
-          <p:cNvPr id="8" name="need 2 card"/>
+              <a:rPr lang="en-US" sz="1400" b="1" spc="200" kern="0" dirty="0">
+                <a:solidFill>
+                  <a:schemeClr val="accent1"/>
+                </a:solidFill>
+              </a:rPr>
+              <a:t>NEW WORD</a:t>
+            </a:r>
+            <a:endParaRPr lang="en-US" sz="1400" dirty="0"/>
+          </a:p>
+        </p:txBody>
+      </p:sp>
+      <p:sp>
+        <p:nvSpPr>
+          <p:cNvPr id="8" name="Text 5"/>
+          <p:cNvSpPr txBox="1"/>
+          <p:nvPr/>
+        </p:nvSpPr>
+        <p:spPr>
+          <a:xfrm>
+            <a:off x="914400" y="4709160"/>
+            <a:ext cx="3200400" cy="1097280"/>
+          </a:xfrm>
+          <a:prstGeom prst="rect">
+            <a:avLst/>
+          </a:prstGeom>
+          <a:noFill/>
+          <a:ln/>
+        </p:spPr>
+        <p:txBody>
+          <a:bodyPr wrap="square" lIns="0" tIns="0" rIns="0" bIns="0" rtlCol="0" anchor="t"/>
+          <a:lstStyle/>
+          <a:p>
+            <a:pPr indent="0" marL="0">
+              <a:buNone/>
+            </a:pPr>
+            <a:r>
+              <a:rPr lang="en-US" sz="1600" b="1" dirty="0">
+                <a:solidFill>
+                  <a:schemeClr val="bg1"/>
+                </a:solidFill>
+              </a:rPr>
+              <a:t>Serverless: </a:t>
+            </a:r>
+            <a:pPr indent="0" marL="0">
+              <a:buNone/>
+            </a:pPr>
+            <a:r>
+              <a:rPr lang="en-US" sz="1600" dirty="0">
+                <a:solidFill>
+                  <a:schemeClr val="bg1"/>
+                </a:solidFill>
+              </a:rPr>
+              <a:t>you don't manage any servers. AWS does it for you.</a:t>
+            </a:r>
+            <a:endParaRPr lang="en-US" sz="1600" dirty="0"/>
+          </a:p>
+        </p:txBody>
+      </p:sp>
+      <p:sp>
+        <p:nvSpPr>
+          <p:cNvPr id="9" name="lambda row 1 circle"/>
           <p:cNvSpPr/>
           <p:nvPr/>
         </p:nvSpPr>
         <p:spPr>
           <a:xfrm>
-            <a:off x="4343400" y="1645920"/>
-            <a:ext cx="3520440" cy="3474720"/>
-          </a:xfrm>
-          <a:prstGeom prst="roundRect">
-            <a:avLst>
-              <a:gd name="adj" fmla="val 3947"/>
-            </a:avLst>
-          </a:prstGeom>
-          <a:solidFill>
-            <a:schemeClr val="bg2"/>
-          </a:solidFill>
-          <a:ln/>
-        </p:spPr>
-      </p:sp>
-      <p:sp>
-        <p:nvSpPr>
-          <p:cNvPr id="9" name="need 2 circle"/>
-          <p:cNvSpPr/>
-          <p:nvPr/>
-        </p:nvSpPr>
-        <p:spPr>
-          <a:xfrm>
-            <a:off x="4617720" y="1920240"/>
-            <a:ext cx="731520" cy="731520"/>
+            <a:off x="4846320" y="1508760"/>
+            <a:ext cx="685800" cy="685800"/>
           </a:xfrm>
           <a:prstGeom prst="ellipse">
             <a:avLst/>
@@ -5052,7 +4479,7 @@
       </p:sp>
       <p:pic>
         <p:nvPicPr>
-          <p:cNvPr id="10" name="need 2 icon" descr="need 2">    </p:cNvPr>
+          <p:cNvPr id="10" name="lambda row 1 icon" descr="lambda row 1">    </p:cNvPr>
           <p:cNvPicPr>
             <a:picLocks noChangeAspect="1"/>
           </p:cNvPicPr>
@@ -5066,8 +4493,8 @@
         </p:blipFill>
         <p:spPr>
           <a:xfrm>
-            <a:off x="4800600" y="2103120"/>
-            <a:ext cx="365760" cy="365760"/>
+            <a:off x="5017770" y="1680210"/>
+            <a:ext cx="342900" cy="342900"/>
           </a:xfrm>
           <a:prstGeom prst="rect">
             <a:avLst/>
@@ -5076,14 +4503,14 @@
       </p:pic>
       <p:sp>
         <p:nvSpPr>
-          <p:cNvPr id="11" name="need 2 head"/>
-          <p:cNvSpPr txBox="1"/>
-          <p:nvPr/>
-        </p:nvSpPr>
-        <p:spPr>
-          <a:xfrm>
-            <a:off x="4617720" y="2834640"/>
-            <a:ext cx="2971800" cy="457200"/>
+          <p:cNvPr id="11" name="Text 7"/>
+          <p:cNvSpPr txBox="1"/>
+          <p:nvPr/>
+        </p:nvSpPr>
+        <p:spPr>
+          <a:xfrm>
+            <a:off x="5760720" y="1463040"/>
+            <a:ext cx="5852160" cy="411480"/>
           </a:xfrm>
           <a:prstGeom prst="rect">
             <a:avLst/>
@@ -5099,27 +4526,27 @@
               <a:buNone/>
             </a:pPr>
             <a:r>
-              <a:rPr lang="en-US" sz="2200" b="1" dirty="0">
+              <a:rPr lang="en-US" sz="2000" b="1" dirty="0">
                 <a:solidFill>
                   <a:schemeClr val="tx1"/>
                 </a:solidFill>
               </a:rPr>
-              <a:t>Errors are clues</a:t>
-            </a:r>
-            <a:endParaRPr lang="en-US" sz="2200" dirty="0"/>
-          </a:p>
-        </p:txBody>
-      </p:sp>
-      <p:sp>
-        <p:nvSpPr>
-          <p:cNvPr id="12" name="need 2 body"/>
-          <p:cNvSpPr txBox="1"/>
-          <p:nvPr/>
-        </p:nvSpPr>
-        <p:spPr>
-          <a:xfrm>
-            <a:off x="4617720" y="3337560"/>
-            <a:ext cx="2971800" cy="1554480"/>
+              <a:t>What it does in our app</a:t>
+            </a:r>
+            <a:endParaRPr lang="en-US" sz="2000" dirty="0"/>
+          </a:p>
+        </p:txBody>
+      </p:sp>
+      <p:sp>
+        <p:nvSpPr>
+          <p:cNvPr id="12" name="Text 8"/>
+          <p:cNvSpPr txBox="1"/>
+          <p:nvPr/>
+        </p:nvSpPr>
+        <p:spPr>
+          <a:xfrm>
+            <a:off x="5760720" y="1920240"/>
+            <a:ext cx="5852160" cy="1005840"/>
           </a:xfrm>
           <a:prstGeom prst="rect">
             <a:avLst/>
@@ -5135,49 +4562,27 @@
               <a:buNone/>
             </a:pPr>
             <a:r>
-              <a:rPr lang="en-US" sz="1800" dirty="0">
+              <a:rPr lang="en-US" sz="1700" dirty="0">
                 <a:solidFill>
                   <a:schemeClr val="tx2"/>
                 </a:solidFill>
               </a:rPr>
-              <a:t>Red error messages are normal. They tell us what to fix. They don't mean you failed.</a:t>
-            </a:r>
-            <a:endParaRPr lang="en-US" sz="1800" dirty="0"/>
-          </a:p>
-        </p:txBody>
-      </p:sp>
-      <p:sp>
-        <p:nvSpPr>
-          <p:cNvPr id="13" name="need 3 card"/>
+              <a:t>Our Python code reads your answers, writes clear instructions for the AI, and sends the AI's answer back to you.</a:t>
+            </a:r>
+            <a:endParaRPr lang="en-US" sz="1700" dirty="0"/>
+          </a:p>
+        </p:txBody>
+      </p:sp>
+      <p:sp>
+        <p:nvSpPr>
+          <p:cNvPr id="13" name="lambda row 2 circle"/>
           <p:cNvSpPr/>
           <p:nvPr/>
         </p:nvSpPr>
         <p:spPr>
           <a:xfrm>
-            <a:off x="8138160" y="1645920"/>
-            <a:ext cx="3520440" cy="3474720"/>
-          </a:xfrm>
-          <a:prstGeom prst="roundRect">
-            <a:avLst>
-              <a:gd name="adj" fmla="val 3947"/>
-            </a:avLst>
-          </a:prstGeom>
-          <a:solidFill>
-            <a:schemeClr val="bg2"/>
-          </a:solidFill>
-          <a:ln/>
-        </p:spPr>
-      </p:sp>
-      <p:sp>
-        <p:nvSpPr>
-          <p:cNvPr id="14" name="need 3 circle"/>
-          <p:cNvSpPr/>
-          <p:nvPr/>
-        </p:nvSpPr>
-        <p:spPr>
-          <a:xfrm>
-            <a:off x="8412480" y="1920240"/>
-            <a:ext cx="731520" cy="731520"/>
+            <a:off x="4846320" y="3063240"/>
+            <a:ext cx="685800" cy="685800"/>
           </a:xfrm>
           <a:prstGeom prst="ellipse">
             <a:avLst/>
@@ -5190,7 +4595,7 @@
       </p:sp>
       <p:pic>
         <p:nvPicPr>
-          <p:cNvPr id="15" name="need 3 icon" descr="need 3">    </p:cNvPr>
+          <p:cNvPr id="14" name="lambda row 2 icon" descr="lambda row 2">    </p:cNvPr>
           <p:cNvPicPr>
             <a:picLocks noChangeAspect="1"/>
           </p:cNvPicPr>
@@ -5204,8 +4609,8 @@
         </p:blipFill>
         <p:spPr>
           <a:xfrm>
-            <a:off x="8595360" y="2103120"/>
-            <a:ext cx="365760" cy="365760"/>
+            <a:off x="5017770" y="3234690"/>
+            <a:ext cx="342900" cy="342900"/>
           </a:xfrm>
           <a:prstGeom prst="rect">
             <a:avLst/>
@@ -5214,14 +4619,14 @@
       </p:pic>
       <p:sp>
         <p:nvSpPr>
-          <p:cNvPr id="16" name="need 3 head"/>
-          <p:cNvSpPr txBox="1"/>
-          <p:nvPr/>
-        </p:nvSpPr>
-        <p:spPr>
-          <a:xfrm>
-            <a:off x="8412480" y="2834640"/>
-            <a:ext cx="2971800" cy="457200"/>
+          <p:cNvPr id="15" name="Text 10"/>
+          <p:cNvSpPr txBox="1"/>
+          <p:nvPr/>
+        </p:nvSpPr>
+        <p:spPr>
+          <a:xfrm>
+            <a:off x="5760720" y="3017520"/>
+            <a:ext cx="5852160" cy="411480"/>
           </a:xfrm>
           <a:prstGeom prst="rect">
             <a:avLst/>
@@ -5237,27 +4642,27 @@
               <a:buNone/>
             </a:pPr>
             <a:r>
-              <a:rPr lang="en-US" sz="2200" b="1" dirty="0">
+              <a:rPr lang="en-US" sz="2000" b="1" dirty="0">
                 <a:solidFill>
                   <a:schemeClr val="tx1"/>
                 </a:solidFill>
               </a:rPr>
-              <a:t>Help each other</a:t>
-            </a:r>
-            <a:endParaRPr lang="en-US" sz="2200" dirty="0"/>
-          </a:p>
-        </p:txBody>
-      </p:sp>
-      <p:sp>
-        <p:nvSpPr>
-          <p:cNvPr id="17" name="need 3 body"/>
-          <p:cNvSpPr txBox="1"/>
-          <p:nvPr/>
-        </p:nvSpPr>
-        <p:spPr>
-          <a:xfrm>
-            <a:off x="8412480" y="3337560"/>
-            <a:ext cx="2971800" cy="1554480"/>
+              <a:t>Think of it like</a:t>
+            </a:r>
+            <a:endParaRPr lang="en-US" sz="2000" dirty="0"/>
+          </a:p>
+        </p:txBody>
+      </p:sp>
+      <p:sp>
+        <p:nvSpPr>
+          <p:cNvPr id="16" name="Text 11"/>
+          <p:cNvSpPr txBox="1"/>
+          <p:nvPr/>
+        </p:nvSpPr>
+        <p:spPr>
+          <a:xfrm>
+            <a:off x="5760720" y="3474720"/>
+            <a:ext cx="5852160" cy="1005840"/>
           </a:xfrm>
           <a:prstGeom prst="rect">
             <a:avLst/>
@@ -5273,14 +4678,130 @@
               <a:buNone/>
             </a:pPr>
             <a:r>
-              <a:rPr lang="en-US" sz="1800" dirty="0">
+              <a:rPr lang="en-US" sz="1700" dirty="0">
                 <a:solidFill>
                   <a:schemeClr val="tx2"/>
                 </a:solidFill>
               </a:rPr>
-              <a:t>Stuck? Raise your hand. Finished early? Help your neighbor.</a:t>
-            </a:r>
-            <a:endParaRPr lang="en-US" sz="1800" dirty="0"/>
+              <a:t>A cook who only comes in when an order arrives. No orders means no cost.</a:t>
+            </a:r>
+            <a:endParaRPr lang="en-US" sz="1700" dirty="0"/>
+          </a:p>
+        </p:txBody>
+      </p:sp>
+      <p:sp>
+        <p:nvSpPr>
+          <p:cNvPr id="17" name="lambda row 3 circle"/>
+          <p:cNvSpPr/>
+          <p:nvPr/>
+        </p:nvSpPr>
+        <p:spPr>
+          <a:xfrm>
+            <a:off x="4846320" y="4617720"/>
+            <a:ext cx="685800" cy="685800"/>
+          </a:xfrm>
+          <a:prstGeom prst="ellipse">
+            <a:avLst/>
+          </a:prstGeom>
+          <a:solidFill>
+            <a:schemeClr val="accent1"/>
+          </a:solidFill>
+          <a:ln/>
+        </p:spPr>
+      </p:sp>
+      <p:pic>
+        <p:nvPicPr>
+          <p:cNvPr id="18" name="lambda row 3 icon" descr="lambda row 3">    </p:cNvPr>
+          <p:cNvPicPr>
+            <a:picLocks noChangeAspect="1"/>
+          </p:cNvPicPr>
+          <p:nvPr/>
+        </p:nvPicPr>
+        <p:blipFill>
+          <a:blip r:embed="rId4"/>
+          <a:stretch>
+            <a:fillRect/>
+          </a:stretch>
+        </p:blipFill>
+        <p:spPr>
+          <a:xfrm>
+            <a:off x="5017770" y="4789170"/>
+            <a:ext cx="342900" cy="342900"/>
+          </a:xfrm>
+          <a:prstGeom prst="rect">
+            <a:avLst/>
+          </a:prstGeom>
+        </p:spPr>
+      </p:pic>
+      <p:sp>
+        <p:nvSpPr>
+          <p:cNvPr id="19" name="Text 13"/>
+          <p:cNvSpPr txBox="1"/>
+          <p:nvPr/>
+        </p:nvSpPr>
+        <p:spPr>
+          <a:xfrm>
+            <a:off x="5760720" y="4572000"/>
+            <a:ext cx="5852160" cy="411480"/>
+          </a:xfrm>
+          <a:prstGeom prst="rect">
+            <a:avLst/>
+          </a:prstGeom>
+          <a:noFill/>
+          <a:ln/>
+        </p:spPr>
+        <p:txBody>
+          <a:bodyPr wrap="square" lIns="0" tIns="0" rIns="0" bIns="0" rtlCol="0" anchor="t"/>
+          <a:lstStyle/>
+          <a:p>
+            <a:pPr indent="0" marL="0">
+              <a:buNone/>
+            </a:pPr>
+            <a:r>
+              <a:rPr lang="en-US" sz="2000" b="1" dirty="0">
+                <a:solidFill>
+                  <a:schemeClr val="tx1"/>
+                </a:solidFill>
+              </a:rPr>
+              <a:t>Why it helps</a:t>
+            </a:r>
+            <a:endParaRPr lang="en-US" sz="2000" dirty="0"/>
+          </a:p>
+        </p:txBody>
+      </p:sp>
+      <p:sp>
+        <p:nvSpPr>
+          <p:cNvPr id="20" name="Text 14"/>
+          <p:cNvSpPr txBox="1"/>
+          <p:nvPr/>
+        </p:nvSpPr>
+        <p:spPr>
+          <a:xfrm>
+            <a:off x="5760720" y="5029200"/>
+            <a:ext cx="5852160" cy="1005840"/>
+          </a:xfrm>
+          <a:prstGeom prst="rect">
+            <a:avLst/>
+          </a:prstGeom>
+          <a:noFill/>
+          <a:ln/>
+        </p:spPr>
+        <p:txBody>
+          <a:bodyPr wrap="square" lIns="0" tIns="0" rIns="0" bIns="0" rtlCol="0" anchor="t"/>
+          <a:lstStyle/>
+          <a:p>
+            <a:pPr indent="0" marL="0">
+              <a:buNone/>
+            </a:pPr>
+            <a:r>
+              <a:rPr lang="en-US" sz="1700" dirty="0">
+                <a:solidFill>
+                  <a:schemeClr val="tx2"/>
+                </a:solidFill>
+              </a:rPr>
+              <a:t>No servers to buy or fix. You only pay for the time your code is running.</a:t>
+            </a:r>
+            <a:endParaRPr lang="en-US" sz="1700" dirty="0"/>
           </a:p>
         </p:txBody>
       </p:sp>
@@ -5386,7 +4907,7 @@
                   <a:schemeClr val="tx1"/>
                 </a:solidFill>
               </a:rPr>
-              <a:t>Where these skills can take you</a:t>
+              <a:t>Amazon Bedrock: the AI brain</a:t>
             </a:r>
             <a:endParaRPr lang="en-US" sz="3600" dirty="0"/>
           </a:p>
@@ -5394,36 +4915,36 @@
       </p:sp>
       <p:sp>
         <p:nvSpPr>
-          <p:cNvPr id="3" name="job 1 card"/>
+          <p:cNvPr id="3" name="bedrock panel"/>
           <p:cNvSpPr/>
           <p:nvPr/>
         </p:nvSpPr>
         <p:spPr>
           <a:xfrm>
-            <a:off x="548640" y="1645920"/>
-            <a:ext cx="3520440" cy="1737360"/>
+            <a:off x="548640" y="1463040"/>
+            <a:ext cx="3931920" cy="4480560"/>
           </a:xfrm>
           <a:prstGeom prst="roundRect">
             <a:avLst>
-              <a:gd name="adj" fmla="val 7895"/>
+              <a:gd name="adj" fmla="val 3488"/>
             </a:avLst>
           </a:prstGeom>
           <a:solidFill>
-            <a:schemeClr val="bg2"/>
+            <a:schemeClr val="tx1"/>
           </a:solidFill>
           <a:ln/>
         </p:spPr>
       </p:sp>
       <p:sp>
         <p:nvSpPr>
-          <p:cNvPr id="4" name="job 1 circle"/>
+          <p:cNvPr id="4" name="bedrock circle"/>
           <p:cNvSpPr/>
           <p:nvPr/>
         </p:nvSpPr>
         <p:spPr>
           <a:xfrm>
-            <a:off x="822960" y="2057400"/>
-            <a:ext cx="914400" cy="914400"/>
+            <a:off x="914400" y="1783080"/>
+            <a:ext cx="1097280" cy="1097280"/>
           </a:xfrm>
           <a:prstGeom prst="ellipse">
             <a:avLst/>
@@ -5436,7 +4957,7 @@
       </p:sp>
       <p:pic>
         <p:nvPicPr>
-          <p:cNvPr id="5" name="job 1 icon" descr="job 1">    </p:cNvPr>
+          <p:cNvPr id="5" name="bedrock icon" descr="bedrock">    </p:cNvPr>
           <p:cNvPicPr>
             <a:picLocks noChangeAspect="1"/>
           </p:cNvPicPr>
@@ -5450,8 +4971,8 @@
         </p:blipFill>
         <p:spPr>
           <a:xfrm>
-            <a:off x="1051560" y="2286000"/>
-            <a:ext cx="457200" cy="457200"/>
+            <a:off x="1188720" y="2057400"/>
+            <a:ext cx="548640" cy="548640"/>
           </a:xfrm>
           <a:prstGeom prst="rect">
             <a:avLst/>
@@ -5466,17 +4987,17 @@
         </p:nvSpPr>
         <p:spPr>
           <a:xfrm>
-            <a:off x="1965960" y="2057400"/>
-            <a:ext cx="1965960" cy="914400"/>
-          </a:xfrm>
-          <a:prstGeom prst="rect">
-            <a:avLst/>
-          </a:prstGeom>
-          <a:noFill/>
-          <a:ln/>
-        </p:spPr>
-        <p:txBody>
-          <a:bodyPr wrap="square" lIns="0" tIns="0" rIns="0" bIns="0" rtlCol="0" anchor="ctr"/>
+            <a:off x="914400" y="3063240"/>
+            <a:ext cx="3200400" cy="1188720"/>
+          </a:xfrm>
+          <a:prstGeom prst="rect">
+            <a:avLst/>
+          </a:prstGeom>
+          <a:noFill/>
+          <a:ln/>
+        </p:spPr>
+        <p:txBody>
+          <a:bodyPr wrap="square" lIns="0" tIns="0" rIns="0" bIns="0" rtlCol="0" anchor="t"/>
           <a:lstStyle/>
           <a:p>
             <a:pPr indent="0" marL="0">
@@ -5485,10 +5006,10 @@
             <a:r>
               <a:rPr lang="en-US" sz="2000" b="1" dirty="0">
                 <a:solidFill>
-                  <a:schemeClr val="tx1"/>
-                </a:solidFill>
-              </a:rPr>
-              <a:t>Cloud Engineer</a:t>
+                  <a:schemeClr val="bg1"/>
+                </a:solidFill>
+              </a:rPr>
+              <a:t>Bedrock lets apps use powerful AI models.</a:t>
             </a:r>
             <a:endParaRPr lang="en-US" sz="2000" dirty="0"/>
           </a:p>
@@ -5496,36 +5017,97 @@
       </p:sp>
       <p:sp>
         <p:nvSpPr>
-          <p:cNvPr id="7" name="job 2 card"/>
+          <p:cNvPr id="7" name="Text 4"/>
+          <p:cNvSpPr txBox="1"/>
+          <p:nvPr/>
+        </p:nvSpPr>
+        <p:spPr>
+          <a:xfrm>
+            <a:off x="914400" y="4389120"/>
+            <a:ext cx="3200400" cy="320040"/>
+          </a:xfrm>
+          <a:prstGeom prst="rect">
+            <a:avLst/>
+          </a:prstGeom>
+          <a:noFill/>
+          <a:ln/>
+        </p:spPr>
+        <p:txBody>
+          <a:bodyPr wrap="square" lIns="0" tIns="0" rIns="0" bIns="0" rtlCol="0" anchor="t"/>
+          <a:lstStyle/>
+          <a:p>
+            <a:pPr indent="0" marL="0">
+              <a:buNone/>
+            </a:pPr>
+            <a:r>
+              <a:rPr lang="en-US" sz="1400" b="1" spc="200" kern="0" dirty="0">
+                <a:solidFill>
+                  <a:schemeClr val="accent1"/>
+                </a:solidFill>
+              </a:rPr>
+              <a:t>NEW WORD</a:t>
+            </a:r>
+            <a:endParaRPr lang="en-US" sz="1400" dirty="0"/>
+          </a:p>
+        </p:txBody>
+      </p:sp>
+      <p:sp>
+        <p:nvSpPr>
+          <p:cNvPr id="8" name="Text 5"/>
+          <p:cNvSpPr txBox="1"/>
+          <p:nvPr/>
+        </p:nvSpPr>
+        <p:spPr>
+          <a:xfrm>
+            <a:off x="914400" y="4709160"/>
+            <a:ext cx="3200400" cy="1097280"/>
+          </a:xfrm>
+          <a:prstGeom prst="rect">
+            <a:avLst/>
+          </a:prstGeom>
+          <a:noFill/>
+          <a:ln/>
+        </p:spPr>
+        <p:txBody>
+          <a:bodyPr wrap="square" lIns="0" tIns="0" rIns="0" bIns="0" rtlCol="0" anchor="t"/>
+          <a:lstStyle/>
+          <a:p>
+            <a:pPr indent="0" marL="0">
+              <a:buNone/>
+            </a:pPr>
+            <a:r>
+              <a:rPr lang="en-US" sz="1600" b="1" dirty="0">
+                <a:solidFill>
+                  <a:schemeClr val="bg1"/>
+                </a:solidFill>
+              </a:rPr>
+              <a:t>Prompt: </a:t>
+            </a:r>
+            <a:pPr indent="0" marL="0">
+              <a:buNone/>
+            </a:pPr>
+            <a:r>
+              <a:rPr lang="en-US" sz="1600" dirty="0">
+                <a:solidFill>
+                  <a:schemeClr val="bg1"/>
+                </a:solidFill>
+              </a:rPr>
+              <a:t>the instructions you give an AI.</a:t>
+            </a:r>
+            <a:endParaRPr lang="en-US" sz="1600" dirty="0"/>
+          </a:p>
+        </p:txBody>
+      </p:sp>
+      <p:sp>
+        <p:nvSpPr>
+          <p:cNvPr id="9" name="bedrock row 1 circle"/>
           <p:cNvSpPr/>
           <p:nvPr/>
         </p:nvSpPr>
         <p:spPr>
           <a:xfrm>
-            <a:off x="4343400" y="1645920"/>
-            <a:ext cx="3520440" cy="1737360"/>
-          </a:xfrm>
-          <a:prstGeom prst="roundRect">
-            <a:avLst>
-              <a:gd name="adj" fmla="val 7895"/>
-            </a:avLst>
-          </a:prstGeom>
-          <a:solidFill>
-            <a:schemeClr val="bg2"/>
-          </a:solidFill>
-          <a:ln/>
-        </p:spPr>
-      </p:sp>
-      <p:sp>
-        <p:nvSpPr>
-          <p:cNvPr id="8" name="job 2 circle"/>
-          <p:cNvSpPr/>
-          <p:nvPr/>
-        </p:nvSpPr>
-        <p:spPr>
-          <a:xfrm>
-            <a:off x="4617720" y="2057400"/>
-            <a:ext cx="914400" cy="914400"/>
+            <a:off x="4846320" y="1508760"/>
+            <a:ext cx="685800" cy="685800"/>
           </a:xfrm>
           <a:prstGeom prst="ellipse">
             <a:avLst/>
@@ -5538,7 +5120,7 @@
       </p:sp>
       <p:pic>
         <p:nvPicPr>
-          <p:cNvPr id="9" name="job 2 icon" descr="job 2">    </p:cNvPr>
+          <p:cNvPr id="10" name="bedrock row 1 icon" descr="bedrock row 1">    </p:cNvPr>
           <p:cNvPicPr>
             <a:picLocks noChangeAspect="1"/>
           </p:cNvPicPr>
@@ -5552,8 +5134,8 @@
         </p:blipFill>
         <p:spPr>
           <a:xfrm>
-            <a:off x="4846320" y="2286000"/>
-            <a:ext cx="457200" cy="457200"/>
+            <a:off x="5017770" y="1680210"/>
+            <a:ext cx="342900" cy="342900"/>
           </a:xfrm>
           <a:prstGeom prst="rect">
             <a:avLst/>
@@ -5562,23 +5144,23 @@
       </p:pic>
       <p:sp>
         <p:nvSpPr>
-          <p:cNvPr id="10" name="Text 6"/>
-          <p:cNvSpPr txBox="1"/>
-          <p:nvPr/>
-        </p:nvSpPr>
-        <p:spPr>
-          <a:xfrm>
-            <a:off x="5760720" y="2057400"/>
-            <a:ext cx="1965960" cy="914400"/>
-          </a:xfrm>
-          <a:prstGeom prst="rect">
-            <a:avLst/>
-          </a:prstGeom>
-          <a:noFill/>
-          <a:ln/>
-        </p:spPr>
-        <p:txBody>
-          <a:bodyPr wrap="square" lIns="0" tIns="0" rIns="0" bIns="0" rtlCol="0" anchor="ctr"/>
+          <p:cNvPr id="11" name="Text 7"/>
+          <p:cNvSpPr txBox="1"/>
+          <p:nvPr/>
+        </p:nvSpPr>
+        <p:spPr>
+          <a:xfrm>
+            <a:off x="5760720" y="1463040"/>
+            <a:ext cx="5852160" cy="411480"/>
+          </a:xfrm>
+          <a:prstGeom prst="rect">
+            <a:avLst/>
+          </a:prstGeom>
+          <a:noFill/>
+          <a:ln/>
+        </p:spPr>
+        <p:txBody>
+          <a:bodyPr wrap="square" lIns="0" tIns="0" rIns="0" bIns="0" rtlCol="0" anchor="t"/>
           <a:lstStyle/>
           <a:p>
             <a:pPr indent="0" marL="0">
@@ -5590,7 +5172,7 @@
                   <a:schemeClr val="tx1"/>
                 </a:solidFill>
               </a:rPr>
-              <a:t>AI Engineer</a:t>
+              <a:t>What it does in our app</a:t>
             </a:r>
             <a:endParaRPr lang="en-US" sz="2000" dirty="0"/>
           </a:p>
@@ -5598,36 +5180,50 @@
       </p:sp>
       <p:sp>
         <p:nvSpPr>
-          <p:cNvPr id="11" name="job 3 card"/>
+          <p:cNvPr id="12" name="Text 8"/>
+          <p:cNvSpPr txBox="1"/>
+          <p:nvPr/>
+        </p:nvSpPr>
+        <p:spPr>
+          <a:xfrm>
+            <a:off x="5760720" y="1920240"/>
+            <a:ext cx="5852160" cy="1005840"/>
+          </a:xfrm>
+          <a:prstGeom prst="rect">
+            <a:avLst/>
+          </a:prstGeom>
+          <a:noFill/>
+          <a:ln/>
+        </p:spPr>
+        <p:txBody>
+          <a:bodyPr wrap="square" lIns="0" tIns="0" rIns="0" bIns="0" rtlCol="0" anchor="t"/>
+          <a:lstStyle/>
+          <a:p>
+            <a:pPr indent="0" marL="0">
+              <a:buNone/>
+            </a:pPr>
+            <a:r>
+              <a:rPr lang="en-US" sz="1700" dirty="0">
+                <a:solidFill>
+                  <a:schemeClr val="tx2"/>
+                </a:solidFill>
+              </a:rPr>
+              <a:t>It sends our instructions to an AI model called Amazon Nova Pro. Nova writes your skills, certifications, projects, and 90-day plan.</a:t>
+            </a:r>
+            <a:endParaRPr lang="en-US" sz="1700" dirty="0"/>
+          </a:p>
+        </p:txBody>
+      </p:sp>
+      <p:sp>
+        <p:nvSpPr>
+          <p:cNvPr id="13" name="bedrock row 2 circle"/>
           <p:cNvSpPr/>
           <p:nvPr/>
         </p:nvSpPr>
         <p:spPr>
           <a:xfrm>
-            <a:off x="8138160" y="1645920"/>
-            <a:ext cx="3520440" cy="1737360"/>
-          </a:xfrm>
-          <a:prstGeom prst="roundRect">
-            <a:avLst>
-              <a:gd name="adj" fmla="val 7895"/>
-            </a:avLst>
-          </a:prstGeom>
-          <a:solidFill>
-            <a:schemeClr val="bg2"/>
-          </a:solidFill>
-          <a:ln/>
-        </p:spPr>
-      </p:sp>
-      <p:sp>
-        <p:nvSpPr>
-          <p:cNvPr id="12" name="job 3 circle"/>
-          <p:cNvSpPr/>
-          <p:nvPr/>
-        </p:nvSpPr>
-        <p:spPr>
-          <a:xfrm>
-            <a:off x="8412480" y="2057400"/>
-            <a:ext cx="914400" cy="914400"/>
+            <a:off x="4846320" y="3063240"/>
+            <a:ext cx="685800" cy="685800"/>
           </a:xfrm>
           <a:prstGeom prst="ellipse">
             <a:avLst/>
@@ -5640,7 +5236,7 @@
       </p:sp>
       <p:pic>
         <p:nvPicPr>
-          <p:cNvPr id="13" name="job 3 icon" descr="job 3">    </p:cNvPr>
+          <p:cNvPr id="14" name="bedrock row 2 icon" descr="bedrock row 2">    </p:cNvPr>
           <p:cNvPicPr>
             <a:picLocks noChangeAspect="1"/>
           </p:cNvPicPr>
@@ -5654,8 +5250,8 @@
         </p:blipFill>
         <p:spPr>
           <a:xfrm>
-            <a:off x="8641080" y="2286000"/>
-            <a:ext cx="457200" cy="457200"/>
+            <a:off x="5017770" y="3234690"/>
+            <a:ext cx="342900" cy="342900"/>
           </a:xfrm>
           <a:prstGeom prst="rect">
             <a:avLst/>
@@ -5664,23 +5260,23 @@
       </p:pic>
       <p:sp>
         <p:nvSpPr>
-          <p:cNvPr id="14" name="Text 9"/>
-          <p:cNvSpPr txBox="1"/>
-          <p:nvPr/>
-        </p:nvSpPr>
-        <p:spPr>
-          <a:xfrm>
-            <a:off x="9555480" y="2057400"/>
-            <a:ext cx="1965960" cy="914400"/>
-          </a:xfrm>
-          <a:prstGeom prst="rect">
-            <a:avLst/>
-          </a:prstGeom>
-          <a:noFill/>
-          <a:ln/>
-        </p:spPr>
-        <p:txBody>
-          <a:bodyPr wrap="square" lIns="0" tIns="0" rIns="0" bIns="0" rtlCol="0" anchor="ctr"/>
+          <p:cNvPr id="15" name="Text 10"/>
+          <p:cNvSpPr txBox="1"/>
+          <p:nvPr/>
+        </p:nvSpPr>
+        <p:spPr>
+          <a:xfrm>
+            <a:off x="5760720" y="3017520"/>
+            <a:ext cx="5852160" cy="411480"/>
+          </a:xfrm>
+          <a:prstGeom prst="rect">
+            <a:avLst/>
+          </a:prstGeom>
+          <a:noFill/>
+          <a:ln/>
+        </p:spPr>
+        <p:txBody>
+          <a:bodyPr wrap="square" lIns="0" tIns="0" rIns="0" bIns="0" rtlCol="0" anchor="t"/>
           <a:lstStyle/>
           <a:p>
             <a:pPr indent="0" marL="0">
@@ -5692,7 +5288,7 @@
                   <a:schemeClr val="tx1"/>
                 </a:solidFill>
               </a:rPr>
-              <a:t>Cybersecurity Analyst</a:t>
+              <a:t>Think of it like</a:t>
             </a:r>
             <a:endParaRPr lang="en-US" sz="2000" dirty="0"/>
           </a:p>
@@ -5700,36 +5296,50 @@
       </p:sp>
       <p:sp>
         <p:nvSpPr>
-          <p:cNvPr id="15" name="job 4 card"/>
+          <p:cNvPr id="16" name="Text 11"/>
+          <p:cNvSpPr txBox="1"/>
+          <p:nvPr/>
+        </p:nvSpPr>
+        <p:spPr>
+          <a:xfrm>
+            <a:off x="5760720" y="3474720"/>
+            <a:ext cx="5852160" cy="1005840"/>
+          </a:xfrm>
+          <a:prstGeom prst="rect">
+            <a:avLst/>
+          </a:prstGeom>
+          <a:noFill/>
+          <a:ln/>
+        </p:spPr>
+        <p:txBody>
+          <a:bodyPr wrap="square" lIns="0" tIns="0" rIns="0" bIns="0" rtlCol="0" anchor="t"/>
+          <a:lstStyle/>
+          <a:p>
+            <a:pPr indent="0" marL="0">
+              <a:buNone/>
+            </a:pPr>
+            <a:r>
+              <a:rPr lang="en-US" sz="1700" dirty="0">
+                <a:solidFill>
+                  <a:schemeClr val="tx2"/>
+                </a:solidFill>
+              </a:rPr>
+              <a:t>A team of expert chefs. You pick one, tell them what you want, and they create it.</a:t>
+            </a:r>
+            <a:endParaRPr lang="en-US" sz="1700" dirty="0"/>
+          </a:p>
+        </p:txBody>
+      </p:sp>
+      <p:sp>
+        <p:nvSpPr>
+          <p:cNvPr id="17" name="bedrock row 3 circle"/>
           <p:cNvSpPr/>
           <p:nvPr/>
         </p:nvSpPr>
         <p:spPr>
           <a:xfrm>
-            <a:off x="548640" y="3657600"/>
-            <a:ext cx="3520440" cy="1737360"/>
-          </a:xfrm>
-          <a:prstGeom prst="roundRect">
-            <a:avLst>
-              <a:gd name="adj" fmla="val 7895"/>
-            </a:avLst>
-          </a:prstGeom>
-          <a:solidFill>
-            <a:schemeClr val="bg2"/>
-          </a:solidFill>
-          <a:ln/>
-        </p:spPr>
-      </p:sp>
-      <p:sp>
-        <p:nvSpPr>
-          <p:cNvPr id="16" name="job 4 circle"/>
-          <p:cNvSpPr/>
-          <p:nvPr/>
-        </p:nvSpPr>
-        <p:spPr>
-          <a:xfrm>
-            <a:off x="822960" y="4069080"/>
-            <a:ext cx="914400" cy="914400"/>
+            <a:off x="4846320" y="4617720"/>
+            <a:ext cx="685800" cy="685800"/>
           </a:xfrm>
           <a:prstGeom prst="ellipse">
             <a:avLst/>
@@ -5742,7 +5352,7 @@
       </p:sp>
       <p:pic>
         <p:nvPicPr>
-          <p:cNvPr id="17" name="job 4 icon" descr="job 4">    </p:cNvPr>
+          <p:cNvPr id="18" name="bedrock row 3 icon" descr="bedrock row 3">    </p:cNvPr>
           <p:cNvPicPr>
             <a:picLocks noChangeAspect="1"/>
           </p:cNvPicPr>
@@ -5756,8 +5366,8 @@
         </p:blipFill>
         <p:spPr>
           <a:xfrm>
-            <a:off x="1051560" y="4297680"/>
-            <a:ext cx="457200" cy="457200"/>
+            <a:off x="5017770" y="4789170"/>
+            <a:ext cx="342900" cy="342900"/>
           </a:xfrm>
           <a:prstGeom prst="rect">
             <a:avLst/>
@@ -5766,23 +5376,23 @@
       </p:pic>
       <p:sp>
         <p:nvSpPr>
-          <p:cNvPr id="18" name="Text 12"/>
-          <p:cNvSpPr txBox="1"/>
-          <p:nvPr/>
-        </p:nvSpPr>
-        <p:spPr>
-          <a:xfrm>
-            <a:off x="1965960" y="4069080"/>
-            <a:ext cx="1965960" cy="914400"/>
-          </a:xfrm>
-          <a:prstGeom prst="rect">
-            <a:avLst/>
-          </a:prstGeom>
-          <a:noFill/>
-          <a:ln/>
-        </p:spPr>
-        <p:txBody>
-          <a:bodyPr wrap="square" lIns="0" tIns="0" rIns="0" bIns="0" rtlCol="0" anchor="ctr"/>
+          <p:cNvPr id="19" name="Text 13"/>
+          <p:cNvSpPr txBox="1"/>
+          <p:nvPr/>
+        </p:nvSpPr>
+        <p:spPr>
+          <a:xfrm>
+            <a:off x="5760720" y="4572000"/>
+            <a:ext cx="5852160" cy="411480"/>
+          </a:xfrm>
+          <a:prstGeom prst="rect">
+            <a:avLst/>
+          </a:prstGeom>
+          <a:noFill/>
+          <a:ln/>
+        </p:spPr>
+        <p:txBody>
+          <a:bodyPr wrap="square" lIns="0" tIns="0" rIns="0" bIns="0" rtlCol="0" anchor="t"/>
           <a:lstStyle/>
           <a:p>
             <a:pPr indent="0" marL="0">
@@ -5794,7 +5404,7 @@
                   <a:schemeClr val="tx1"/>
                 </a:solidFill>
               </a:rPr>
-              <a:t>Data Analyst</a:t>
+              <a:t>Why it helps</a:t>
             </a:r>
             <a:endParaRPr lang="en-US" sz="2000" dirty="0"/>
           </a:p>
@@ -5802,218 +5412,14 @@
       </p:sp>
       <p:sp>
         <p:nvSpPr>
-          <p:cNvPr id="19" name="job 5 card"/>
-          <p:cNvSpPr/>
-          <p:nvPr/>
-        </p:nvSpPr>
-        <p:spPr>
-          <a:xfrm>
-            <a:off x="4343400" y="3657600"/>
-            <a:ext cx="3520440" cy="1737360"/>
-          </a:xfrm>
-          <a:prstGeom prst="roundRect">
-            <a:avLst>
-              <a:gd name="adj" fmla="val 7895"/>
-            </a:avLst>
-          </a:prstGeom>
-          <a:solidFill>
-            <a:schemeClr val="bg2"/>
-          </a:solidFill>
-          <a:ln/>
-        </p:spPr>
-      </p:sp>
-      <p:sp>
-        <p:nvSpPr>
-          <p:cNvPr id="20" name="job 5 circle"/>
-          <p:cNvSpPr/>
-          <p:nvPr/>
-        </p:nvSpPr>
-        <p:spPr>
-          <a:xfrm>
-            <a:off x="4617720" y="4069080"/>
-            <a:ext cx="914400" cy="914400"/>
-          </a:xfrm>
-          <a:prstGeom prst="ellipse">
-            <a:avLst/>
-          </a:prstGeom>
-          <a:solidFill>
-            <a:schemeClr val="accent1"/>
-          </a:solidFill>
-          <a:ln/>
-        </p:spPr>
-      </p:sp>
-      <p:pic>
-        <p:nvPicPr>
-          <p:cNvPr id="21" name="job 5 icon" descr="job 5">    </p:cNvPr>
-          <p:cNvPicPr>
-            <a:picLocks noChangeAspect="1"/>
-          </p:cNvPicPr>
-          <p:nvPr/>
-        </p:nvPicPr>
-        <p:blipFill>
-          <a:blip r:embed="rId5"/>
-          <a:stretch>
-            <a:fillRect/>
-          </a:stretch>
-        </p:blipFill>
-        <p:spPr>
-          <a:xfrm>
-            <a:off x="4846320" y="4297680"/>
-            <a:ext cx="457200" cy="457200"/>
-          </a:xfrm>
-          <a:prstGeom prst="rect">
-            <a:avLst/>
-          </a:prstGeom>
-        </p:spPr>
-      </p:pic>
-      <p:sp>
-        <p:nvSpPr>
-          <p:cNvPr id="22" name="Text 15"/>
-          <p:cNvSpPr txBox="1"/>
-          <p:nvPr/>
-        </p:nvSpPr>
-        <p:spPr>
-          <a:xfrm>
-            <a:off x="5760720" y="4069080"/>
-            <a:ext cx="1965960" cy="914400"/>
-          </a:xfrm>
-          <a:prstGeom prst="rect">
-            <a:avLst/>
-          </a:prstGeom>
-          <a:noFill/>
-          <a:ln/>
-        </p:spPr>
-        <p:txBody>
-          <a:bodyPr wrap="square" lIns="0" tIns="0" rIns="0" bIns="0" rtlCol="0" anchor="ctr"/>
-          <a:lstStyle/>
-          <a:p>
-            <a:pPr indent="0" marL="0">
-              <a:buNone/>
-            </a:pPr>
-            <a:r>
-              <a:rPr lang="en-US" sz="2000" b="1" dirty="0">
-                <a:solidFill>
-                  <a:schemeClr val="tx1"/>
-                </a:solidFill>
-              </a:rPr>
-              <a:t>Solutions Architect</a:t>
-            </a:r>
-            <a:endParaRPr lang="en-US" sz="2000" dirty="0"/>
-          </a:p>
-        </p:txBody>
-      </p:sp>
-      <p:sp>
-        <p:nvSpPr>
-          <p:cNvPr id="23" name="job 6 card"/>
-          <p:cNvSpPr/>
-          <p:nvPr/>
-        </p:nvSpPr>
-        <p:spPr>
-          <a:xfrm>
-            <a:off x="8138160" y="3657600"/>
-            <a:ext cx="3520440" cy="1737360"/>
-          </a:xfrm>
-          <a:prstGeom prst="roundRect">
-            <a:avLst>
-              <a:gd name="adj" fmla="val 7895"/>
-            </a:avLst>
-          </a:prstGeom>
-          <a:solidFill>
-            <a:schemeClr val="bg2"/>
-          </a:solidFill>
-          <a:ln/>
-        </p:spPr>
-      </p:sp>
-      <p:sp>
-        <p:nvSpPr>
-          <p:cNvPr id="24" name="job 6 circle"/>
-          <p:cNvSpPr/>
-          <p:nvPr/>
-        </p:nvSpPr>
-        <p:spPr>
-          <a:xfrm>
-            <a:off x="8412480" y="4069080"/>
-            <a:ext cx="914400" cy="914400"/>
-          </a:xfrm>
-          <a:prstGeom prst="ellipse">
-            <a:avLst/>
-          </a:prstGeom>
-          <a:solidFill>
-            <a:schemeClr val="accent1"/>
-          </a:solidFill>
-          <a:ln/>
-        </p:spPr>
-      </p:sp>
-      <p:pic>
-        <p:nvPicPr>
-          <p:cNvPr id="25" name="job 6 icon" descr="job 6">    </p:cNvPr>
-          <p:cNvPicPr>
-            <a:picLocks noChangeAspect="1"/>
-          </p:cNvPicPr>
-          <p:nvPr/>
-        </p:nvPicPr>
-        <p:blipFill>
-          <a:blip r:embed="rId6"/>
-          <a:stretch>
-            <a:fillRect/>
-          </a:stretch>
-        </p:blipFill>
-        <p:spPr>
-          <a:xfrm>
-            <a:off x="8641080" y="4297680"/>
-            <a:ext cx="457200" cy="457200"/>
-          </a:xfrm>
-          <a:prstGeom prst="rect">
-            <a:avLst/>
-          </a:prstGeom>
-        </p:spPr>
-      </p:pic>
-      <p:sp>
-        <p:nvSpPr>
-          <p:cNvPr id="26" name="Text 18"/>
-          <p:cNvSpPr txBox="1"/>
-          <p:nvPr/>
-        </p:nvSpPr>
-        <p:spPr>
-          <a:xfrm>
-            <a:off x="9555480" y="4069080"/>
-            <a:ext cx="1965960" cy="914400"/>
-          </a:xfrm>
-          <a:prstGeom prst="rect">
-            <a:avLst/>
-          </a:prstGeom>
-          <a:noFill/>
-          <a:ln/>
-        </p:spPr>
-        <p:txBody>
-          <a:bodyPr wrap="square" lIns="0" tIns="0" rIns="0" bIns="0" rtlCol="0" anchor="ctr"/>
-          <a:lstStyle/>
-          <a:p>
-            <a:pPr indent="0" marL="0">
-              <a:buNone/>
-            </a:pPr>
-            <a:r>
-              <a:rPr lang="en-US" sz="2000" b="1" dirty="0">
-                <a:solidFill>
-                  <a:schemeClr val="tx1"/>
-                </a:solidFill>
-              </a:rPr>
-              <a:t>Software Developer</a:t>
-            </a:r>
-            <a:endParaRPr lang="en-US" sz="2000" dirty="0"/>
-          </a:p>
-        </p:txBody>
-      </p:sp>
-      <p:sp>
-        <p:nvSpPr>
-          <p:cNvPr id="27" name="Text 19"/>
-          <p:cNvSpPr txBox="1"/>
-          <p:nvPr/>
-        </p:nvSpPr>
-        <p:spPr>
-          <a:xfrm>
-            <a:off x="548640" y="5623560"/>
-            <a:ext cx="11064240" cy="548640"/>
+          <p:cNvPr id="20" name="Text 14"/>
+          <p:cNvSpPr txBox="1"/>
+          <p:nvPr/>
+        </p:nvSpPr>
+        <p:spPr>
+          <a:xfrm>
+            <a:off x="5760720" y="5029200"/>
+            <a:ext cx="5852160" cy="1005840"/>
           </a:xfrm>
           <a:prstGeom prst="rect">
             <a:avLst/>
@@ -6029,14 +5435,14 @@
               <a:buNone/>
             </a:pPr>
             <a:r>
-              <a:rPr lang="en-US" sz="1800" i="1" dirty="0">
+              <a:rPr lang="en-US" sz="1700" dirty="0">
                 <a:solidFill>
                   <a:schemeClr val="tx2"/>
                 </a:solidFill>
               </a:rPr>
-              <a:t>Today you use the same kinds of tools people in these jobs use.</a:t>
-            </a:r>
-            <a:endParaRPr lang="en-US" sz="1800" dirty="0"/>
+              <a:t>We don't have to train our own AI, which costs millions. Each answer costs a tiny amount.</a:t>
+            </a:r>
+            <a:endParaRPr lang="en-US" sz="1700" dirty="0"/>
           </a:p>
         </p:txBody>
       </p:sp>
@@ -6096,6 +5502,4164 @@
 <file path=ppt/slides/slide14.xml><?xml version="1.0" encoding="utf-8"?>
 <p:sld xmlns:a="http://schemas.openxmlformats.org/drawingml/2006/main" xmlns:r="http://schemas.openxmlformats.org/officeDocument/2006/relationships" xmlns:p="http://schemas.openxmlformats.org/presentationml/2006/main">
   <p:cSld name="Slide 14">
+    <p:spTree>
+      <p:nvGrpSpPr>
+        <p:cNvPr id="1" name=""/>
+        <p:cNvGrpSpPr/>
+        <p:nvPr/>
+      </p:nvGrpSpPr>
+      <p:grpSpPr>
+        <a:xfrm>
+          <a:off x="0" y="0"/>
+          <a:ext cx="0" cy="0"/>
+          <a:chOff x="0" y="0"/>
+          <a:chExt cx="0" cy="0"/>
+        </a:xfrm>
+      </p:grpSpPr>
+      <p:sp>
+        <p:nvSpPr>
+          <p:cNvPr id="2" name="Text 0"/>
+          <p:cNvSpPr/>
+          <p:nvPr>
+            <p:ph idx="100" type="title" hasCustomPrompt="1"/>
+          </p:nvPr>
+        </p:nvSpPr>
+        <p:spPr>
+          <a:xfrm>
+            <a:off x="548640" y="365760"/>
+            <a:ext cx="11064240" cy="822960"/>
+          </a:xfrm>
+          <a:prstGeom prst="rect">
+            <a:avLst/>
+          </a:prstGeom>
+          <a:noFill/>
+          <a:ln/>
+        </p:spPr>
+        <p:txBody>
+          <a:bodyPr wrap="square" lIns="0" tIns="0" rIns="0" bIns="0" rtlCol="0" anchor="ctr"/>
+          <a:lstStyle/>
+          <a:p>
+            <a:pPr indent="0" marL="0">
+              <a:buNone/>
+            </a:pPr>
+            <a:r>
+              <a:rPr lang="en-US" sz="3600" b="1" dirty="0">
+                <a:solidFill>
+                  <a:schemeClr val="tx1"/>
+                </a:solidFill>
+              </a:rPr>
+              <a:t>Two helpers working behind the scenes</a:t>
+            </a:r>
+            <a:endParaRPr lang="en-US" sz="3600" dirty="0"/>
+          </a:p>
+        </p:txBody>
+      </p:sp>
+      <p:sp>
+        <p:nvSpPr>
+          <p:cNvPr id="3" name="helper 1 card"/>
+          <p:cNvSpPr/>
+          <p:nvPr/>
+        </p:nvSpPr>
+        <p:spPr>
+          <a:xfrm>
+            <a:off x="548640" y="1463040"/>
+            <a:ext cx="5440680" cy="4480560"/>
+          </a:xfrm>
+          <a:prstGeom prst="roundRect">
+            <a:avLst>
+              <a:gd name="adj" fmla="val 3061"/>
+            </a:avLst>
+          </a:prstGeom>
+          <a:solidFill>
+            <a:schemeClr val="bg2"/>
+          </a:solidFill>
+          <a:ln/>
+        </p:spPr>
+      </p:sp>
+      <p:sp>
+        <p:nvSpPr>
+          <p:cNvPr id="4" name="helper 1 circle"/>
+          <p:cNvSpPr/>
+          <p:nvPr/>
+        </p:nvSpPr>
+        <p:spPr>
+          <a:xfrm>
+            <a:off x="868680" y="1783080"/>
+            <a:ext cx="914400" cy="914400"/>
+          </a:xfrm>
+          <a:prstGeom prst="ellipse">
+            <a:avLst/>
+          </a:prstGeom>
+          <a:solidFill>
+            <a:schemeClr val="accent1"/>
+          </a:solidFill>
+          <a:ln/>
+        </p:spPr>
+      </p:sp>
+      <p:pic>
+        <p:nvPicPr>
+          <p:cNvPr id="5" name="helper 1 icon" descr="helper 1">    </p:cNvPr>
+          <p:cNvPicPr>
+            <a:picLocks noChangeAspect="1"/>
+          </p:cNvPicPr>
+          <p:nvPr/>
+        </p:nvPicPr>
+        <p:blipFill>
+          <a:blip r:embed="rId1"/>
+          <a:stretch>
+            <a:fillRect/>
+          </a:stretch>
+        </p:blipFill>
+        <p:spPr>
+          <a:xfrm>
+            <a:off x="1097280" y="2011680"/>
+            <a:ext cx="457200" cy="457200"/>
+          </a:xfrm>
+          <a:prstGeom prst="rect">
+            <a:avLst/>
+          </a:prstGeom>
+        </p:spPr>
+      </p:pic>
+      <p:sp>
+        <p:nvSpPr>
+          <p:cNvPr id="6" name="Text 3"/>
+          <p:cNvSpPr txBox="1"/>
+          <p:nvPr/>
+        </p:nvSpPr>
+        <p:spPr>
+          <a:xfrm>
+            <a:off x="2011680" y="1783080"/>
+            <a:ext cx="3749040" cy="457200"/>
+          </a:xfrm>
+          <a:prstGeom prst="rect">
+            <a:avLst/>
+          </a:prstGeom>
+          <a:noFill/>
+          <a:ln/>
+        </p:spPr>
+        <p:txBody>
+          <a:bodyPr wrap="square" lIns="0" tIns="0" rIns="0" bIns="0" rtlCol="0" anchor="t"/>
+          <a:lstStyle/>
+          <a:p>
+            <a:pPr indent="0" marL="0">
+              <a:buNone/>
+            </a:pPr>
+            <a:r>
+              <a:rPr lang="en-US" sz="2400" b="1" dirty="0">
+                <a:solidFill>
+                  <a:schemeClr val="tx1"/>
+                </a:solidFill>
+              </a:rPr>
+              <a:t>AWS IAM</a:t>
+            </a:r>
+            <a:endParaRPr lang="en-US" sz="2400" dirty="0"/>
+          </a:p>
+        </p:txBody>
+      </p:sp>
+      <p:sp>
+        <p:nvSpPr>
+          <p:cNvPr id="7" name="Text 4"/>
+          <p:cNvSpPr txBox="1"/>
+          <p:nvPr/>
+        </p:nvSpPr>
+        <p:spPr>
+          <a:xfrm>
+            <a:off x="2011680" y="2286000"/>
+            <a:ext cx="3749040" cy="457200"/>
+          </a:xfrm>
+          <a:prstGeom prst="rect">
+            <a:avLst/>
+          </a:prstGeom>
+          <a:noFill/>
+          <a:ln/>
+        </p:spPr>
+        <p:txBody>
+          <a:bodyPr wrap="square" lIns="0" tIns="0" rIns="0" bIns="0" rtlCol="0" anchor="t"/>
+          <a:lstStyle/>
+          <a:p>
+            <a:pPr indent="0" marL="0">
+              <a:buNone/>
+            </a:pPr>
+            <a:r>
+              <a:rPr lang="en-US" sz="1800" b="1" dirty="0">
+                <a:solidFill>
+                  <a:schemeClr val="accent2"/>
+                </a:solidFill>
+              </a:rPr>
+              <a:t>Decides who is allowed to do what.</a:t>
+            </a:r>
+            <a:endParaRPr lang="en-US" sz="1800" dirty="0"/>
+          </a:p>
+        </p:txBody>
+      </p:sp>
+      <p:sp>
+        <p:nvSpPr>
+          <p:cNvPr id="8" name="Text 5"/>
+          <p:cNvSpPr txBox="1"/>
+          <p:nvPr/>
+        </p:nvSpPr>
+        <p:spPr>
+          <a:xfrm>
+            <a:off x="868680" y="3063240"/>
+            <a:ext cx="4800600" cy="1188720"/>
+          </a:xfrm>
+          <a:prstGeom prst="rect">
+            <a:avLst/>
+          </a:prstGeom>
+          <a:noFill/>
+          <a:ln/>
+        </p:spPr>
+        <p:txBody>
+          <a:bodyPr wrap="square" lIns="0" tIns="0" rIns="0" bIns="0" rtlCol="0" anchor="t"/>
+          <a:lstStyle/>
+          <a:p>
+            <a:pPr indent="0" marL="0">
+              <a:buNone/>
+            </a:pPr>
+            <a:r>
+              <a:rPr lang="en-US" sz="1800" dirty="0">
+                <a:solidFill>
+                  <a:schemeClr val="tx2"/>
+                </a:solidFill>
+              </a:rPr>
+              <a:t>We give Lambda a permission that says: you may use the Nova AI. Nothing else.</a:t>
+            </a:r>
+            <a:endParaRPr lang="en-US" sz="1800" dirty="0"/>
+          </a:p>
+        </p:txBody>
+      </p:sp>
+      <p:sp>
+        <p:nvSpPr>
+          <p:cNvPr id="9" name="Text 6"/>
+          <p:cNvSpPr txBox="1"/>
+          <p:nvPr/>
+        </p:nvSpPr>
+        <p:spPr>
+          <a:xfrm>
+            <a:off x="868680" y="4480560"/>
+            <a:ext cx="4800600" cy="1097280"/>
+          </a:xfrm>
+          <a:prstGeom prst="rect">
+            <a:avLst/>
+          </a:prstGeom>
+          <a:noFill/>
+          <a:ln/>
+        </p:spPr>
+        <p:txBody>
+          <a:bodyPr wrap="square" lIns="0" tIns="0" rIns="0" bIns="0" rtlCol="0" anchor="t"/>
+          <a:lstStyle/>
+          <a:p>
+            <a:pPr indent="0" marL="0">
+              <a:buNone/>
+            </a:pPr>
+            <a:r>
+              <a:rPr lang="en-US" sz="1800" b="1" dirty="0">
+                <a:solidFill>
+                  <a:schemeClr val="tx1"/>
+                </a:solidFill>
+              </a:rPr>
+              <a:t>Think of it like: </a:t>
+            </a:r>
+            <a:pPr indent="0" marL="0">
+              <a:buNone/>
+            </a:pPr>
+            <a:r>
+              <a:rPr lang="en-US" sz="1800" i="1" dirty="0">
+                <a:solidFill>
+                  <a:schemeClr val="tx1"/>
+                </a:solidFill>
+              </a:rPr>
+              <a:t>A key card that only opens certain doors.</a:t>
+            </a:r>
+            <a:endParaRPr lang="en-US" sz="1800" dirty="0"/>
+          </a:p>
+        </p:txBody>
+      </p:sp>
+      <p:sp>
+        <p:nvSpPr>
+          <p:cNvPr id="10" name="helper 2 card"/>
+          <p:cNvSpPr/>
+          <p:nvPr/>
+        </p:nvSpPr>
+        <p:spPr>
+          <a:xfrm>
+            <a:off x="6172200" y="1463040"/>
+            <a:ext cx="5440680" cy="4480560"/>
+          </a:xfrm>
+          <a:prstGeom prst="roundRect">
+            <a:avLst>
+              <a:gd name="adj" fmla="val 3061"/>
+            </a:avLst>
+          </a:prstGeom>
+          <a:solidFill>
+            <a:schemeClr val="bg2"/>
+          </a:solidFill>
+          <a:ln/>
+        </p:spPr>
+      </p:sp>
+      <p:sp>
+        <p:nvSpPr>
+          <p:cNvPr id="11" name="helper 2 circle"/>
+          <p:cNvSpPr/>
+          <p:nvPr/>
+        </p:nvSpPr>
+        <p:spPr>
+          <a:xfrm>
+            <a:off x="6492240" y="1783080"/>
+            <a:ext cx="914400" cy="914400"/>
+          </a:xfrm>
+          <a:prstGeom prst="ellipse">
+            <a:avLst/>
+          </a:prstGeom>
+          <a:solidFill>
+            <a:schemeClr val="accent1"/>
+          </a:solidFill>
+          <a:ln/>
+        </p:spPr>
+      </p:sp>
+      <p:pic>
+        <p:nvPicPr>
+          <p:cNvPr id="12" name="helper 2 icon" descr="helper 2">    </p:cNvPr>
+          <p:cNvPicPr>
+            <a:picLocks noChangeAspect="1"/>
+          </p:cNvPicPr>
+          <p:nvPr/>
+        </p:nvPicPr>
+        <p:blipFill>
+          <a:blip r:embed="rId2"/>
+          <a:stretch>
+            <a:fillRect/>
+          </a:stretch>
+        </p:blipFill>
+        <p:spPr>
+          <a:xfrm>
+            <a:off x="6720840" y="2011680"/>
+            <a:ext cx="457200" cy="457200"/>
+          </a:xfrm>
+          <a:prstGeom prst="rect">
+            <a:avLst/>
+          </a:prstGeom>
+        </p:spPr>
+      </p:pic>
+      <p:sp>
+        <p:nvSpPr>
+          <p:cNvPr id="13" name="Text 9"/>
+          <p:cNvSpPr txBox="1"/>
+          <p:nvPr/>
+        </p:nvSpPr>
+        <p:spPr>
+          <a:xfrm>
+            <a:off x="7635240" y="1783080"/>
+            <a:ext cx="3749040" cy="457200"/>
+          </a:xfrm>
+          <a:prstGeom prst="rect">
+            <a:avLst/>
+          </a:prstGeom>
+          <a:noFill/>
+          <a:ln/>
+        </p:spPr>
+        <p:txBody>
+          <a:bodyPr wrap="square" lIns="0" tIns="0" rIns="0" bIns="0" rtlCol="0" anchor="t"/>
+          <a:lstStyle/>
+          <a:p>
+            <a:pPr indent="0" marL="0">
+              <a:buNone/>
+            </a:pPr>
+            <a:r>
+              <a:rPr lang="en-US" sz="2400" b="1" dirty="0">
+                <a:solidFill>
+                  <a:schemeClr val="tx1"/>
+                </a:solidFill>
+              </a:rPr>
+              <a:t>Amazon CloudWatch</a:t>
+            </a:r>
+            <a:endParaRPr lang="en-US" sz="2400" dirty="0"/>
+          </a:p>
+        </p:txBody>
+      </p:sp>
+      <p:sp>
+        <p:nvSpPr>
+          <p:cNvPr id="14" name="Text 10"/>
+          <p:cNvSpPr txBox="1"/>
+          <p:nvPr/>
+        </p:nvSpPr>
+        <p:spPr>
+          <a:xfrm>
+            <a:off x="7635240" y="2286000"/>
+            <a:ext cx="3749040" cy="457200"/>
+          </a:xfrm>
+          <a:prstGeom prst="rect">
+            <a:avLst/>
+          </a:prstGeom>
+          <a:noFill/>
+          <a:ln/>
+        </p:spPr>
+        <p:txBody>
+          <a:bodyPr wrap="square" lIns="0" tIns="0" rIns="0" bIns="0" rtlCol="0" anchor="t"/>
+          <a:lstStyle/>
+          <a:p>
+            <a:pPr indent="0" marL="0">
+              <a:buNone/>
+            </a:pPr>
+            <a:r>
+              <a:rPr lang="en-US" sz="1800" b="1" dirty="0">
+                <a:solidFill>
+                  <a:schemeClr val="accent2"/>
+                </a:solidFill>
+              </a:rPr>
+              <a:t>Keeps a record of what our code did.</a:t>
+            </a:r>
+            <a:endParaRPr lang="en-US" sz="1800" dirty="0"/>
+          </a:p>
+        </p:txBody>
+      </p:sp>
+      <p:sp>
+        <p:nvSpPr>
+          <p:cNvPr id="15" name="Text 11"/>
+          <p:cNvSpPr txBox="1"/>
+          <p:nvPr/>
+        </p:nvSpPr>
+        <p:spPr>
+          <a:xfrm>
+            <a:off x="6492240" y="3063240"/>
+            <a:ext cx="4800600" cy="1188720"/>
+          </a:xfrm>
+          <a:prstGeom prst="rect">
+            <a:avLst/>
+          </a:prstGeom>
+          <a:noFill/>
+          <a:ln/>
+        </p:spPr>
+        <p:txBody>
+          <a:bodyPr wrap="square" lIns="0" tIns="0" rIns="0" bIns="0" rtlCol="0" anchor="t"/>
+          <a:lstStyle/>
+          <a:p>
+            <a:pPr indent="0" marL="0">
+              <a:buNone/>
+            </a:pPr>
+            <a:r>
+              <a:rPr lang="en-US" sz="1800" dirty="0">
+                <a:solidFill>
+                  <a:schemeClr val="tx2"/>
+                </a:solidFill>
+              </a:rPr>
+              <a:t>If something breaks, we read these records, called logs, to find out why.</a:t>
+            </a:r>
+            <a:endParaRPr lang="en-US" sz="1800" dirty="0"/>
+          </a:p>
+        </p:txBody>
+      </p:sp>
+      <p:sp>
+        <p:nvSpPr>
+          <p:cNvPr id="16" name="Text 12"/>
+          <p:cNvSpPr txBox="1"/>
+          <p:nvPr/>
+        </p:nvSpPr>
+        <p:spPr>
+          <a:xfrm>
+            <a:off x="6492240" y="4480560"/>
+            <a:ext cx="4800600" cy="1097280"/>
+          </a:xfrm>
+          <a:prstGeom prst="rect">
+            <a:avLst/>
+          </a:prstGeom>
+          <a:noFill/>
+          <a:ln/>
+        </p:spPr>
+        <p:txBody>
+          <a:bodyPr wrap="square" lIns="0" tIns="0" rIns="0" bIns="0" rtlCol="0" anchor="t"/>
+          <a:lstStyle/>
+          <a:p>
+            <a:pPr indent="0" marL="0">
+              <a:buNone/>
+            </a:pPr>
+            <a:r>
+              <a:rPr lang="en-US" sz="1800" b="1" dirty="0">
+                <a:solidFill>
+                  <a:schemeClr val="tx1"/>
+                </a:solidFill>
+              </a:rPr>
+              <a:t>Think of it like: </a:t>
+            </a:r>
+            <a:pPr indent="0" marL="0">
+              <a:buNone/>
+            </a:pPr>
+            <a:r>
+              <a:rPr lang="en-US" sz="1800" i="1" dirty="0">
+                <a:solidFill>
+                  <a:schemeClr val="tx1"/>
+                </a:solidFill>
+              </a:rPr>
+              <a:t>A notebook that writes down everything that happens.</a:t>
+            </a:r>
+            <a:endParaRPr lang="en-US" sz="1800" dirty="0"/>
+          </a:p>
+        </p:txBody>
+      </p:sp>
+      <p:sp>
+        <p:nvSpPr>
+          <p:cNvPr id="25" name="Slide Number Placeholder 0"/>
+          <p:cNvSpPr>
+            <a:spLocks noGrp="1"/>
+          </p:cNvSpPr>
+          <p:nvPr>
+            <p:ph type="sldNum" sz="quarter" idx="4294967295"/>
+          </p:nvPr>
+        </p:nvSpPr>
+        <p:spPr>
+          <a:xfrm>
+            <a:off x="11247120" y="6400800"/>
+            <a:ext cx="457200" cy="274320"/>
+          </a:xfrm>
+          <a:prstGeom prst="rect">
+            <a:avLst/>
+          </a:prstGeom>
+          <a:extLst>
+            <a:ext uri="{C572A759-6A51-4108-AA02-DFA0A04FC94B}">
+              <ma14:wrappingTextBoxFlag xmlns:ma14="http://schemas.microsoft.com/office/mac/drawingml/2011/main" val="0"/>
+            </a:ext>
+          </a:extLst>
+        </p:spPr>
+        <p:txBody>
+          <a:bodyPr/>
+          <a:lstStyle>
+            <a:lvl1pPr>
+              <a:defRPr sz="1000">
+                <a:solidFill>
+                  <a:schemeClr val="tx2"/>
+                </a:solidFill>
+              </a:defRPr>
+            </a:lvl1pPr>
+          </a:lstStyle>
+          <a:p>
+            <a:pPr algn="r"/>
+            <a:fld id="{F7021451-1387-4CA6-816F-3879F97B5CBC}" type="slidenum">
+              <a:rPr b="0" lang="en-US"/>
+              <a:t>14</a:t>
+            </a:fld>
+            <a:endParaRPr lang="en-US"/>
+          </a:p>
+        </p:txBody>
+      </p:sp>
+    </p:spTree>
+  </p:cSld>
+  <p:clrMapOvr>
+    <a:masterClrMapping/>
+  </p:clrMapOvr>
+</p:sld>
+</file>
+
+<file path=ppt/slides/slide15.xml><?xml version="1.0" encoding="utf-8"?>
+<p:sld xmlns:a="http://schemas.openxmlformats.org/drawingml/2006/main" xmlns:r="http://schemas.openxmlformats.org/officeDocument/2006/relationships" xmlns:p="http://schemas.openxmlformats.org/presentationml/2006/main">
+  <p:cSld name="Slide 15">
+    <p:spTree>
+      <p:nvGrpSpPr>
+        <p:cNvPr id="1" name=""/>
+        <p:cNvGrpSpPr/>
+        <p:nvPr/>
+      </p:nvGrpSpPr>
+      <p:grpSpPr>
+        <a:xfrm>
+          <a:off x="0" y="0"/>
+          <a:ext cx="0" cy="0"/>
+          <a:chOff x="0" y="0"/>
+          <a:chExt cx="0" cy="0"/>
+        </a:xfrm>
+      </p:grpSpPr>
+      <p:sp>
+        <p:nvSpPr>
+          <p:cNvPr id="2" name="Text 0"/>
+          <p:cNvSpPr/>
+          <p:nvPr>
+            <p:ph idx="100" type="title" hasCustomPrompt="1"/>
+          </p:nvPr>
+        </p:nvSpPr>
+        <p:spPr>
+          <a:xfrm>
+            <a:off x="548640" y="365760"/>
+            <a:ext cx="11064240" cy="822960"/>
+          </a:xfrm>
+          <a:prstGeom prst="rect">
+            <a:avLst/>
+          </a:prstGeom>
+          <a:noFill/>
+          <a:ln/>
+        </p:spPr>
+        <p:txBody>
+          <a:bodyPr wrap="square" lIns="0" tIns="0" rIns="0" bIns="0" rtlCol="0" anchor="ctr"/>
+          <a:lstStyle/>
+          <a:p>
+            <a:pPr indent="0" marL="0">
+              <a:buNone/>
+            </a:pPr>
+            <a:r>
+              <a:rPr lang="en-US" sz="3600" b="1" dirty="0">
+                <a:solidFill>
+                  <a:schemeClr val="tx1"/>
+                </a:solidFill>
+              </a:rPr>
+              <a:t>Putting it together: it's like a restaurant</a:t>
+            </a:r>
+            <a:endParaRPr lang="en-US" sz="3600" dirty="0"/>
+          </a:p>
+        </p:txBody>
+      </p:sp>
+      <p:sp>
+        <p:nvSpPr>
+          <p:cNvPr id="3" name="flow 1 circle"/>
+          <p:cNvSpPr/>
+          <p:nvPr/>
+        </p:nvSpPr>
+        <p:spPr>
+          <a:xfrm>
+            <a:off x="1051560" y="1554480"/>
+            <a:ext cx="1005840" cy="1005840"/>
+          </a:xfrm>
+          <a:prstGeom prst="ellipse">
+            <a:avLst/>
+          </a:prstGeom>
+          <a:solidFill>
+            <a:schemeClr val="accent1"/>
+          </a:solidFill>
+          <a:ln/>
+        </p:spPr>
+      </p:sp>
+      <p:pic>
+        <p:nvPicPr>
+          <p:cNvPr id="4" name="flow 1 icon" descr="flow 1">    </p:cNvPr>
+          <p:cNvPicPr>
+            <a:picLocks noChangeAspect="1"/>
+          </p:cNvPicPr>
+          <p:nvPr/>
+        </p:nvPicPr>
+        <p:blipFill>
+          <a:blip r:embed="rId1"/>
+          <a:stretch>
+            <a:fillRect/>
+          </a:stretch>
+        </p:blipFill>
+        <p:spPr>
+          <a:xfrm>
+            <a:off x="1303020" y="1805940"/>
+            <a:ext cx="502920" cy="502920"/>
+          </a:xfrm>
+          <a:prstGeom prst="rect">
+            <a:avLst/>
+          </a:prstGeom>
+        </p:spPr>
+      </p:pic>
+      <p:pic>
+        <p:nvPicPr>
+          <p:cNvPr id="5" name="flow arrow 1" descr="then">    </p:cNvPr>
+          <p:cNvPicPr>
+            <a:picLocks noChangeAspect="1"/>
+          </p:cNvPicPr>
+          <p:nvPr/>
+        </p:nvPicPr>
+        <p:blipFill>
+          <a:blip r:embed="rId2"/>
+          <a:stretch>
+            <a:fillRect/>
+          </a:stretch>
+        </p:blipFill>
+        <p:spPr>
+          <a:xfrm>
+            <a:off x="2423160" y="1874520"/>
+            <a:ext cx="365760" cy="365760"/>
+          </a:xfrm>
+          <a:prstGeom prst="rect">
+            <a:avLst/>
+          </a:prstGeom>
+        </p:spPr>
+      </p:pic>
+      <p:sp>
+        <p:nvSpPr>
+          <p:cNvPr id="6" name="Text 2"/>
+          <p:cNvSpPr txBox="1"/>
+          <p:nvPr/>
+        </p:nvSpPr>
+        <p:spPr>
+          <a:xfrm>
+            <a:off x="548640" y="2743200"/>
+            <a:ext cx="2011680" cy="457200"/>
+          </a:xfrm>
+          <a:prstGeom prst="rect">
+            <a:avLst/>
+          </a:prstGeom>
+          <a:noFill/>
+          <a:ln/>
+        </p:spPr>
+        <p:txBody>
+          <a:bodyPr wrap="square" lIns="0" tIns="0" rIns="0" bIns="0" rtlCol="0" anchor="t"/>
+          <a:lstStyle/>
+          <a:p>
+            <a:pPr algn="ctr" indent="0" marL="0">
+              <a:buNone/>
+            </a:pPr>
+            <a:r>
+              <a:rPr lang="en-US" sz="2000" b="1" dirty="0">
+                <a:solidFill>
+                  <a:schemeClr val="tx1"/>
+                </a:solidFill>
+              </a:rPr>
+              <a:t>You</a:t>
+            </a:r>
+            <a:endParaRPr lang="en-US" sz="2000" dirty="0"/>
+          </a:p>
+        </p:txBody>
+      </p:sp>
+      <p:sp>
+        <p:nvSpPr>
+          <p:cNvPr id="7" name="Text 3"/>
+          <p:cNvSpPr txBox="1"/>
+          <p:nvPr/>
+        </p:nvSpPr>
+        <p:spPr>
+          <a:xfrm>
+            <a:off x="548640" y="3200400"/>
+            <a:ext cx="2011680" cy="411480"/>
+          </a:xfrm>
+          <a:prstGeom prst="rect">
+            <a:avLst/>
+          </a:prstGeom>
+          <a:noFill/>
+          <a:ln/>
+        </p:spPr>
+        <p:txBody>
+          <a:bodyPr wrap="square" lIns="0" tIns="0" rIns="0" bIns="0" rtlCol="0" anchor="t"/>
+          <a:lstStyle/>
+          <a:p>
+            <a:pPr algn="ctr" indent="0" marL="0">
+              <a:buNone/>
+            </a:pPr>
+            <a:r>
+              <a:rPr lang="en-US" sz="1600" b="1" dirty="0">
+                <a:solidFill>
+                  <a:schemeClr val="accent3"/>
+                </a:solidFill>
+              </a:rPr>
+              <a:t>Order</a:t>
+            </a:r>
+            <a:endParaRPr lang="en-US" sz="1600" dirty="0"/>
+          </a:p>
+        </p:txBody>
+      </p:sp>
+      <p:sp>
+        <p:nvSpPr>
+          <p:cNvPr id="8" name="Text 4"/>
+          <p:cNvSpPr txBox="1"/>
+          <p:nvPr/>
+        </p:nvSpPr>
+        <p:spPr>
+          <a:xfrm>
+            <a:off x="548640" y="3657600"/>
+            <a:ext cx="2011680" cy="1097280"/>
+          </a:xfrm>
+          <a:prstGeom prst="rect">
+            <a:avLst/>
+          </a:prstGeom>
+          <a:noFill/>
+          <a:ln/>
+        </p:spPr>
+        <p:txBody>
+          <a:bodyPr wrap="square" lIns="0" tIns="0" rIns="0" bIns="0" rtlCol="0" anchor="t"/>
+          <a:lstStyle/>
+          <a:p>
+            <a:pPr algn="ctr" indent="0" marL="0">
+              <a:buNone/>
+            </a:pPr>
+            <a:r>
+              <a:rPr lang="en-US" sz="1500" dirty="0">
+                <a:solidFill>
+                  <a:schemeClr val="tx2"/>
+                </a:solidFill>
+              </a:rPr>
+              <a:t>You fill out the form and click Generate.</a:t>
+            </a:r>
+            <a:endParaRPr lang="en-US" sz="1500" dirty="0"/>
+          </a:p>
+        </p:txBody>
+      </p:sp>
+      <p:sp>
+        <p:nvSpPr>
+          <p:cNvPr id="9" name="flow 2 circle"/>
+          <p:cNvSpPr/>
+          <p:nvPr/>
+        </p:nvSpPr>
+        <p:spPr>
+          <a:xfrm>
+            <a:off x="3337560" y="1554480"/>
+            <a:ext cx="1005840" cy="1005840"/>
+          </a:xfrm>
+          <a:prstGeom prst="ellipse">
+            <a:avLst/>
+          </a:prstGeom>
+          <a:solidFill>
+            <a:schemeClr val="accent1"/>
+          </a:solidFill>
+          <a:ln/>
+        </p:spPr>
+      </p:sp>
+      <p:pic>
+        <p:nvPicPr>
+          <p:cNvPr id="10" name="flow 2 icon" descr="flow 2">    </p:cNvPr>
+          <p:cNvPicPr>
+            <a:picLocks noChangeAspect="1"/>
+          </p:cNvPicPr>
+          <p:nvPr/>
+        </p:nvPicPr>
+        <p:blipFill>
+          <a:blip r:embed="rId3"/>
+          <a:stretch>
+            <a:fillRect/>
+          </a:stretch>
+        </p:blipFill>
+        <p:spPr>
+          <a:xfrm>
+            <a:off x="3589020" y="1805940"/>
+            <a:ext cx="502920" cy="502920"/>
+          </a:xfrm>
+          <a:prstGeom prst="rect">
+            <a:avLst/>
+          </a:prstGeom>
+        </p:spPr>
+      </p:pic>
+      <p:pic>
+        <p:nvPicPr>
+          <p:cNvPr id="11" name="flow arrow 2" descr="then">    </p:cNvPr>
+          <p:cNvPicPr>
+            <a:picLocks noChangeAspect="1"/>
+          </p:cNvPicPr>
+          <p:nvPr/>
+        </p:nvPicPr>
+        <p:blipFill>
+          <a:blip r:embed="rId4"/>
+          <a:stretch>
+            <a:fillRect/>
+          </a:stretch>
+        </p:blipFill>
+        <p:spPr>
+          <a:xfrm>
+            <a:off x="4709160" y="1874520"/>
+            <a:ext cx="365760" cy="365760"/>
+          </a:xfrm>
+          <a:prstGeom prst="rect">
+            <a:avLst/>
+          </a:prstGeom>
+        </p:spPr>
+      </p:pic>
+      <p:sp>
+        <p:nvSpPr>
+          <p:cNvPr id="12" name="Text 6"/>
+          <p:cNvSpPr txBox="1"/>
+          <p:nvPr/>
+        </p:nvSpPr>
+        <p:spPr>
+          <a:xfrm>
+            <a:off x="2834640" y="2743200"/>
+            <a:ext cx="2011680" cy="457200"/>
+          </a:xfrm>
+          <a:prstGeom prst="rect">
+            <a:avLst/>
+          </a:prstGeom>
+          <a:noFill/>
+          <a:ln/>
+        </p:spPr>
+        <p:txBody>
+          <a:bodyPr wrap="square" lIns="0" tIns="0" rIns="0" bIns="0" rtlCol="0" anchor="t"/>
+          <a:lstStyle/>
+          <a:p>
+            <a:pPr algn="ctr" indent="0" marL="0">
+              <a:buNone/>
+            </a:pPr>
+            <a:r>
+              <a:rPr lang="en-US" sz="2000" b="1" dirty="0">
+                <a:solidFill>
+                  <a:schemeClr val="tx1"/>
+                </a:solidFill>
+              </a:rPr>
+              <a:t>Amplify</a:t>
+            </a:r>
+            <a:endParaRPr lang="en-US" sz="2000" dirty="0"/>
+          </a:p>
+        </p:txBody>
+      </p:sp>
+      <p:sp>
+        <p:nvSpPr>
+          <p:cNvPr id="13" name="Text 7"/>
+          <p:cNvSpPr txBox="1"/>
+          <p:nvPr/>
+        </p:nvSpPr>
+        <p:spPr>
+          <a:xfrm>
+            <a:off x="2834640" y="3200400"/>
+            <a:ext cx="2011680" cy="411480"/>
+          </a:xfrm>
+          <a:prstGeom prst="rect">
+            <a:avLst/>
+          </a:prstGeom>
+          <a:noFill/>
+          <a:ln/>
+        </p:spPr>
+        <p:txBody>
+          <a:bodyPr wrap="square" lIns="0" tIns="0" rIns="0" bIns="0" rtlCol="0" anchor="t"/>
+          <a:lstStyle/>
+          <a:p>
+            <a:pPr algn="ctr" indent="0" marL="0">
+              <a:buNone/>
+            </a:pPr>
+            <a:r>
+              <a:rPr lang="en-US" sz="1600" b="1" dirty="0">
+                <a:solidFill>
+                  <a:schemeClr val="accent3"/>
+                </a:solidFill>
+              </a:rPr>
+              <a:t>The dining room</a:t>
+            </a:r>
+            <a:endParaRPr lang="en-US" sz="1600" dirty="0"/>
+          </a:p>
+        </p:txBody>
+      </p:sp>
+      <p:sp>
+        <p:nvSpPr>
+          <p:cNvPr id="14" name="Text 8"/>
+          <p:cNvSpPr txBox="1"/>
+          <p:nvPr/>
+        </p:nvSpPr>
+        <p:spPr>
+          <a:xfrm>
+            <a:off x="2834640" y="3657600"/>
+            <a:ext cx="2011680" cy="1097280"/>
+          </a:xfrm>
+          <a:prstGeom prst="rect">
+            <a:avLst/>
+          </a:prstGeom>
+          <a:noFill/>
+          <a:ln/>
+        </p:spPr>
+        <p:txBody>
+          <a:bodyPr wrap="square" lIns="0" tIns="0" rIns="0" bIns="0" rtlCol="0" anchor="t"/>
+          <a:lstStyle/>
+          <a:p>
+            <a:pPr algn="ctr" indent="0" marL="0">
+              <a:buNone/>
+            </a:pPr>
+            <a:r>
+              <a:rPr lang="en-US" sz="1500" dirty="0">
+                <a:solidFill>
+                  <a:schemeClr val="tx2"/>
+                </a:solidFill>
+              </a:rPr>
+              <a:t>The website where you place your order.</a:t>
+            </a:r>
+            <a:endParaRPr lang="en-US" sz="1500" dirty="0"/>
+          </a:p>
+        </p:txBody>
+      </p:sp>
+      <p:sp>
+        <p:nvSpPr>
+          <p:cNvPr id="15" name="flow 3 circle"/>
+          <p:cNvSpPr/>
+          <p:nvPr/>
+        </p:nvSpPr>
+        <p:spPr>
+          <a:xfrm>
+            <a:off x="5623560" y="1554480"/>
+            <a:ext cx="1005840" cy="1005840"/>
+          </a:xfrm>
+          <a:prstGeom prst="ellipse">
+            <a:avLst/>
+          </a:prstGeom>
+          <a:solidFill>
+            <a:schemeClr val="accent1"/>
+          </a:solidFill>
+          <a:ln/>
+        </p:spPr>
+      </p:sp>
+      <p:pic>
+        <p:nvPicPr>
+          <p:cNvPr id="16" name="flow 3 icon" descr="flow 3">    </p:cNvPr>
+          <p:cNvPicPr>
+            <a:picLocks noChangeAspect="1"/>
+          </p:cNvPicPr>
+          <p:nvPr/>
+        </p:nvPicPr>
+        <p:blipFill>
+          <a:blip r:embed="rId5"/>
+          <a:stretch>
+            <a:fillRect/>
+          </a:stretch>
+        </p:blipFill>
+        <p:spPr>
+          <a:xfrm>
+            <a:off x="5875020" y="1805940"/>
+            <a:ext cx="502920" cy="502920"/>
+          </a:xfrm>
+          <a:prstGeom prst="rect">
+            <a:avLst/>
+          </a:prstGeom>
+        </p:spPr>
+      </p:pic>
+      <p:pic>
+        <p:nvPicPr>
+          <p:cNvPr id="17" name="flow arrow 3" descr="then">    </p:cNvPr>
+          <p:cNvPicPr>
+            <a:picLocks noChangeAspect="1"/>
+          </p:cNvPicPr>
+          <p:nvPr/>
+        </p:nvPicPr>
+        <p:blipFill>
+          <a:blip r:embed="rId6"/>
+          <a:stretch>
+            <a:fillRect/>
+          </a:stretch>
+        </p:blipFill>
+        <p:spPr>
+          <a:xfrm>
+            <a:off x="6995160" y="1874520"/>
+            <a:ext cx="365760" cy="365760"/>
+          </a:xfrm>
+          <a:prstGeom prst="rect">
+            <a:avLst/>
+          </a:prstGeom>
+        </p:spPr>
+      </p:pic>
+      <p:sp>
+        <p:nvSpPr>
+          <p:cNvPr id="18" name="Text 10"/>
+          <p:cNvSpPr txBox="1"/>
+          <p:nvPr/>
+        </p:nvSpPr>
+        <p:spPr>
+          <a:xfrm>
+            <a:off x="5120640" y="2743200"/>
+            <a:ext cx="2011680" cy="457200"/>
+          </a:xfrm>
+          <a:prstGeom prst="rect">
+            <a:avLst/>
+          </a:prstGeom>
+          <a:noFill/>
+          <a:ln/>
+        </p:spPr>
+        <p:txBody>
+          <a:bodyPr wrap="square" lIns="0" tIns="0" rIns="0" bIns="0" rtlCol="0" anchor="t"/>
+          <a:lstStyle/>
+          <a:p>
+            <a:pPr algn="ctr" indent="0" marL="0">
+              <a:buNone/>
+            </a:pPr>
+            <a:r>
+              <a:rPr lang="en-US" sz="2000" b="1" dirty="0">
+                <a:solidFill>
+                  <a:schemeClr val="tx1"/>
+                </a:solidFill>
+              </a:rPr>
+              <a:t>API Gateway</a:t>
+            </a:r>
+            <a:endParaRPr lang="en-US" sz="2000" dirty="0"/>
+          </a:p>
+        </p:txBody>
+      </p:sp>
+      <p:sp>
+        <p:nvSpPr>
+          <p:cNvPr id="19" name="Text 11"/>
+          <p:cNvSpPr txBox="1"/>
+          <p:nvPr/>
+        </p:nvSpPr>
+        <p:spPr>
+          <a:xfrm>
+            <a:off x="5120640" y="3200400"/>
+            <a:ext cx="2011680" cy="411480"/>
+          </a:xfrm>
+          <a:prstGeom prst="rect">
+            <a:avLst/>
+          </a:prstGeom>
+          <a:noFill/>
+          <a:ln/>
+        </p:spPr>
+        <p:txBody>
+          <a:bodyPr wrap="square" lIns="0" tIns="0" rIns="0" bIns="0" rtlCol="0" anchor="t"/>
+          <a:lstStyle/>
+          <a:p>
+            <a:pPr algn="ctr" indent="0" marL="0">
+              <a:buNone/>
+            </a:pPr>
+            <a:r>
+              <a:rPr lang="en-US" sz="1600" b="1" dirty="0">
+                <a:solidFill>
+                  <a:schemeClr val="accent3"/>
+                </a:solidFill>
+              </a:rPr>
+              <a:t>The server</a:t>
+            </a:r>
+            <a:endParaRPr lang="en-US" sz="1600" dirty="0"/>
+          </a:p>
+        </p:txBody>
+      </p:sp>
+      <p:sp>
+        <p:nvSpPr>
+          <p:cNvPr id="20" name="Text 12"/>
+          <p:cNvSpPr txBox="1"/>
+          <p:nvPr/>
+        </p:nvSpPr>
+        <p:spPr>
+          <a:xfrm>
+            <a:off x="5120640" y="3657600"/>
+            <a:ext cx="2011680" cy="1097280"/>
+          </a:xfrm>
+          <a:prstGeom prst="rect">
+            <a:avLst/>
+          </a:prstGeom>
+          <a:noFill/>
+          <a:ln/>
+        </p:spPr>
+        <p:txBody>
+          <a:bodyPr wrap="square" lIns="0" tIns="0" rIns="0" bIns="0" rtlCol="0" anchor="t"/>
+          <a:lstStyle/>
+          <a:p>
+            <a:pPr algn="ctr" indent="0" marL="0">
+              <a:buNone/>
+            </a:pPr>
+            <a:r>
+              <a:rPr lang="en-US" sz="1500" dirty="0">
+                <a:solidFill>
+                  <a:schemeClr val="tx2"/>
+                </a:solidFill>
+              </a:rPr>
+              <a:t>Takes your order to the kitchen.</a:t>
+            </a:r>
+            <a:endParaRPr lang="en-US" sz="1500" dirty="0"/>
+          </a:p>
+        </p:txBody>
+      </p:sp>
+      <p:sp>
+        <p:nvSpPr>
+          <p:cNvPr id="21" name="flow 4 circle"/>
+          <p:cNvSpPr/>
+          <p:nvPr/>
+        </p:nvSpPr>
+        <p:spPr>
+          <a:xfrm>
+            <a:off x="7909560" y="1554480"/>
+            <a:ext cx="1005840" cy="1005840"/>
+          </a:xfrm>
+          <a:prstGeom prst="ellipse">
+            <a:avLst/>
+          </a:prstGeom>
+          <a:solidFill>
+            <a:schemeClr val="accent1"/>
+          </a:solidFill>
+          <a:ln/>
+        </p:spPr>
+      </p:sp>
+      <p:pic>
+        <p:nvPicPr>
+          <p:cNvPr id="22" name="flow 4 icon" descr="flow 4">    </p:cNvPr>
+          <p:cNvPicPr>
+            <a:picLocks noChangeAspect="1"/>
+          </p:cNvPicPr>
+          <p:nvPr/>
+        </p:nvPicPr>
+        <p:blipFill>
+          <a:blip r:embed="rId7"/>
+          <a:stretch>
+            <a:fillRect/>
+          </a:stretch>
+        </p:blipFill>
+        <p:spPr>
+          <a:xfrm>
+            <a:off x="8161020" y="1805940"/>
+            <a:ext cx="502920" cy="502920"/>
+          </a:xfrm>
+          <a:prstGeom prst="rect">
+            <a:avLst/>
+          </a:prstGeom>
+        </p:spPr>
+      </p:pic>
+      <p:pic>
+        <p:nvPicPr>
+          <p:cNvPr id="23" name="flow arrow 4" descr="then">    </p:cNvPr>
+          <p:cNvPicPr>
+            <a:picLocks noChangeAspect="1"/>
+          </p:cNvPicPr>
+          <p:nvPr/>
+        </p:nvPicPr>
+        <p:blipFill>
+          <a:blip r:embed="rId8"/>
+          <a:stretch>
+            <a:fillRect/>
+          </a:stretch>
+        </p:blipFill>
+        <p:spPr>
+          <a:xfrm>
+            <a:off x="9281160" y="1874520"/>
+            <a:ext cx="365760" cy="365760"/>
+          </a:xfrm>
+          <a:prstGeom prst="rect">
+            <a:avLst/>
+          </a:prstGeom>
+        </p:spPr>
+      </p:pic>
+      <p:sp>
+        <p:nvSpPr>
+          <p:cNvPr id="24" name="Text 14"/>
+          <p:cNvSpPr txBox="1"/>
+          <p:nvPr/>
+        </p:nvSpPr>
+        <p:spPr>
+          <a:xfrm>
+            <a:off x="7406640" y="2743200"/>
+            <a:ext cx="2011680" cy="457200"/>
+          </a:xfrm>
+          <a:prstGeom prst="rect">
+            <a:avLst/>
+          </a:prstGeom>
+          <a:noFill/>
+          <a:ln/>
+        </p:spPr>
+        <p:txBody>
+          <a:bodyPr wrap="square" lIns="0" tIns="0" rIns="0" bIns="0" rtlCol="0" anchor="t"/>
+          <a:lstStyle/>
+          <a:p>
+            <a:pPr algn="ctr" indent="0" marL="0">
+              <a:buNone/>
+            </a:pPr>
+            <a:r>
+              <a:rPr lang="en-US" sz="2000" b="1" dirty="0">
+                <a:solidFill>
+                  <a:schemeClr val="tx1"/>
+                </a:solidFill>
+              </a:rPr>
+              <a:t>Lambda</a:t>
+            </a:r>
+            <a:endParaRPr lang="en-US" sz="2000" dirty="0"/>
+          </a:p>
+        </p:txBody>
+      </p:sp>
+      <p:sp>
+        <p:nvSpPr>
+          <p:cNvPr id="25" name="Text 15"/>
+          <p:cNvSpPr txBox="1"/>
+          <p:nvPr/>
+        </p:nvSpPr>
+        <p:spPr>
+          <a:xfrm>
+            <a:off x="7406640" y="3200400"/>
+            <a:ext cx="2011680" cy="411480"/>
+          </a:xfrm>
+          <a:prstGeom prst="rect">
+            <a:avLst/>
+          </a:prstGeom>
+          <a:noFill/>
+          <a:ln/>
+        </p:spPr>
+        <p:txBody>
+          <a:bodyPr wrap="square" lIns="0" tIns="0" rIns="0" bIns="0" rtlCol="0" anchor="t"/>
+          <a:lstStyle/>
+          <a:p>
+            <a:pPr algn="ctr" indent="0" marL="0">
+              <a:buNone/>
+            </a:pPr>
+            <a:r>
+              <a:rPr lang="en-US" sz="1600" b="1" dirty="0">
+                <a:solidFill>
+                  <a:schemeClr val="accent3"/>
+                </a:solidFill>
+              </a:rPr>
+              <a:t>The cook</a:t>
+            </a:r>
+            <a:endParaRPr lang="en-US" sz="1600" dirty="0"/>
+          </a:p>
+        </p:txBody>
+      </p:sp>
+      <p:sp>
+        <p:nvSpPr>
+          <p:cNvPr id="26" name="Text 16"/>
+          <p:cNvSpPr txBox="1"/>
+          <p:nvPr/>
+        </p:nvSpPr>
+        <p:spPr>
+          <a:xfrm>
+            <a:off x="7406640" y="3657600"/>
+            <a:ext cx="2011680" cy="1097280"/>
+          </a:xfrm>
+          <a:prstGeom prst="rect">
+            <a:avLst/>
+          </a:prstGeom>
+          <a:noFill/>
+          <a:ln/>
+        </p:spPr>
+        <p:txBody>
+          <a:bodyPr wrap="square" lIns="0" tIns="0" rIns="0" bIns="0" rtlCol="0" anchor="t"/>
+          <a:lstStyle/>
+          <a:p>
+            <a:pPr algn="ctr" indent="0" marL="0">
+              <a:buNone/>
+            </a:pPr>
+            <a:r>
+              <a:rPr lang="en-US" sz="1500" dirty="0">
+                <a:solidFill>
+                  <a:schemeClr val="tx2"/>
+                </a:solidFill>
+              </a:rPr>
+              <a:t>Gets the order ready for the chef.</a:t>
+            </a:r>
+            <a:endParaRPr lang="en-US" sz="1500" dirty="0"/>
+          </a:p>
+        </p:txBody>
+      </p:sp>
+      <p:sp>
+        <p:nvSpPr>
+          <p:cNvPr id="27" name="flow 5 circle"/>
+          <p:cNvSpPr/>
+          <p:nvPr/>
+        </p:nvSpPr>
+        <p:spPr>
+          <a:xfrm>
+            <a:off x="10195560" y="1554480"/>
+            <a:ext cx="1005840" cy="1005840"/>
+          </a:xfrm>
+          <a:prstGeom prst="ellipse">
+            <a:avLst/>
+          </a:prstGeom>
+          <a:solidFill>
+            <a:schemeClr val="accent1"/>
+          </a:solidFill>
+          <a:ln/>
+        </p:spPr>
+      </p:sp>
+      <p:pic>
+        <p:nvPicPr>
+          <p:cNvPr id="28" name="flow 5 icon" descr="flow 5">    </p:cNvPr>
+          <p:cNvPicPr>
+            <a:picLocks noChangeAspect="1"/>
+          </p:cNvPicPr>
+          <p:nvPr/>
+        </p:nvPicPr>
+        <p:blipFill>
+          <a:blip r:embed="rId9"/>
+          <a:stretch>
+            <a:fillRect/>
+          </a:stretch>
+        </p:blipFill>
+        <p:spPr>
+          <a:xfrm>
+            <a:off x="10447020" y="1805940"/>
+            <a:ext cx="502920" cy="502920"/>
+          </a:xfrm>
+          <a:prstGeom prst="rect">
+            <a:avLst/>
+          </a:prstGeom>
+        </p:spPr>
+      </p:pic>
+      <p:sp>
+        <p:nvSpPr>
+          <p:cNvPr id="29" name="Text 18"/>
+          <p:cNvSpPr txBox="1"/>
+          <p:nvPr/>
+        </p:nvSpPr>
+        <p:spPr>
+          <a:xfrm>
+            <a:off x="9692640" y="2743200"/>
+            <a:ext cx="2011680" cy="457200"/>
+          </a:xfrm>
+          <a:prstGeom prst="rect">
+            <a:avLst/>
+          </a:prstGeom>
+          <a:noFill/>
+          <a:ln/>
+        </p:spPr>
+        <p:txBody>
+          <a:bodyPr wrap="square" lIns="0" tIns="0" rIns="0" bIns="0" rtlCol="0" anchor="t"/>
+          <a:lstStyle/>
+          <a:p>
+            <a:pPr algn="ctr" indent="0" marL="0">
+              <a:buNone/>
+            </a:pPr>
+            <a:r>
+              <a:rPr lang="en-US" sz="2000" b="1" dirty="0">
+                <a:solidFill>
+                  <a:schemeClr val="tx1"/>
+                </a:solidFill>
+              </a:rPr>
+              <a:t>Bedrock</a:t>
+            </a:r>
+            <a:endParaRPr lang="en-US" sz="2000" dirty="0"/>
+          </a:p>
+        </p:txBody>
+      </p:sp>
+      <p:sp>
+        <p:nvSpPr>
+          <p:cNvPr id="30" name="Text 19"/>
+          <p:cNvSpPr txBox="1"/>
+          <p:nvPr/>
+        </p:nvSpPr>
+        <p:spPr>
+          <a:xfrm>
+            <a:off x="9692640" y="3200400"/>
+            <a:ext cx="2011680" cy="411480"/>
+          </a:xfrm>
+          <a:prstGeom prst="rect">
+            <a:avLst/>
+          </a:prstGeom>
+          <a:noFill/>
+          <a:ln/>
+        </p:spPr>
+        <p:txBody>
+          <a:bodyPr wrap="square" lIns="0" tIns="0" rIns="0" bIns="0" rtlCol="0" anchor="t"/>
+          <a:lstStyle/>
+          <a:p>
+            <a:pPr algn="ctr" indent="0" marL="0">
+              <a:buNone/>
+            </a:pPr>
+            <a:r>
+              <a:rPr lang="en-US" sz="1600" b="1" dirty="0">
+                <a:solidFill>
+                  <a:schemeClr val="accent3"/>
+                </a:solidFill>
+              </a:rPr>
+              <a:t>The chef</a:t>
+            </a:r>
+            <a:endParaRPr lang="en-US" sz="1600" dirty="0"/>
+          </a:p>
+        </p:txBody>
+      </p:sp>
+      <p:sp>
+        <p:nvSpPr>
+          <p:cNvPr id="31" name="Text 20"/>
+          <p:cNvSpPr txBox="1"/>
+          <p:nvPr/>
+        </p:nvSpPr>
+        <p:spPr>
+          <a:xfrm>
+            <a:off x="9692640" y="3657600"/>
+            <a:ext cx="2011680" cy="1097280"/>
+          </a:xfrm>
+          <a:prstGeom prst="rect">
+            <a:avLst/>
+          </a:prstGeom>
+          <a:noFill/>
+          <a:ln/>
+        </p:spPr>
+        <p:txBody>
+          <a:bodyPr wrap="square" lIns="0" tIns="0" rIns="0" bIns="0" rtlCol="0" anchor="t"/>
+          <a:lstStyle/>
+          <a:p>
+            <a:pPr algn="ctr" indent="0" marL="0">
+              <a:buNone/>
+            </a:pPr>
+            <a:r>
+              <a:rPr lang="en-US" sz="1500" dirty="0">
+                <a:solidFill>
+                  <a:schemeClr val="tx2"/>
+                </a:solidFill>
+              </a:rPr>
+              <a:t>The AI creates your plan.</a:t>
+            </a:r>
+            <a:endParaRPr lang="en-US" sz="1500" dirty="0"/>
+          </a:p>
+        </p:txBody>
+      </p:sp>
+      <p:sp>
+        <p:nvSpPr>
+          <p:cNvPr id="32" name="result card"/>
+          <p:cNvSpPr/>
+          <p:nvPr/>
+        </p:nvSpPr>
+        <p:spPr>
+          <a:xfrm>
+            <a:off x="548640" y="5074920"/>
+            <a:ext cx="11064240" cy="868680"/>
+          </a:xfrm>
+          <a:prstGeom prst="roundRect">
+            <a:avLst>
+              <a:gd name="adj" fmla="val 15789"/>
+            </a:avLst>
+          </a:prstGeom>
+          <a:solidFill>
+            <a:schemeClr val="tx1"/>
+          </a:solidFill>
+          <a:ln/>
+        </p:spPr>
+      </p:sp>
+      <p:sp>
+        <p:nvSpPr>
+          <p:cNvPr id="33" name="Text 22"/>
+          <p:cNvSpPr txBox="1"/>
+          <p:nvPr/>
+        </p:nvSpPr>
+        <p:spPr>
+          <a:xfrm>
+            <a:off x="868680" y="5074920"/>
+            <a:ext cx="10424160" cy="868680"/>
+          </a:xfrm>
+          <a:prstGeom prst="rect">
+            <a:avLst/>
+          </a:prstGeom>
+          <a:noFill/>
+          <a:ln/>
+        </p:spPr>
+        <p:txBody>
+          <a:bodyPr wrap="square" lIns="0" tIns="0" rIns="0" bIns="0" rtlCol="0" anchor="ctr"/>
+          <a:lstStyle/>
+          <a:p>
+            <a:pPr indent="0" marL="0">
+              <a:buNone/>
+            </a:pPr>
+            <a:r>
+              <a:rPr lang="en-US" sz="1800" b="1" dirty="0">
+                <a:solidFill>
+                  <a:schemeClr val="bg1"/>
+                </a:solidFill>
+              </a:rPr>
+              <a:t>Then your meal comes back the same way: your roadmap shows up on screen in about 5 seconds.</a:t>
+            </a:r>
+            <a:endParaRPr lang="en-US" sz="1800" dirty="0"/>
+          </a:p>
+        </p:txBody>
+      </p:sp>
+      <p:sp>
+        <p:nvSpPr>
+          <p:cNvPr id="25" name="Slide Number Placeholder 0"/>
+          <p:cNvSpPr>
+            <a:spLocks noGrp="1"/>
+          </p:cNvSpPr>
+          <p:nvPr>
+            <p:ph type="sldNum" sz="quarter" idx="4294967295"/>
+          </p:nvPr>
+        </p:nvSpPr>
+        <p:spPr>
+          <a:xfrm>
+            <a:off x="11247120" y="6400800"/>
+            <a:ext cx="457200" cy="274320"/>
+          </a:xfrm>
+          <a:prstGeom prst="rect">
+            <a:avLst/>
+          </a:prstGeom>
+          <a:extLst>
+            <a:ext uri="{C572A759-6A51-4108-AA02-DFA0A04FC94B}">
+              <ma14:wrappingTextBoxFlag xmlns:ma14="http://schemas.microsoft.com/office/mac/drawingml/2011/main" val="0"/>
+            </a:ext>
+          </a:extLst>
+        </p:spPr>
+        <p:txBody>
+          <a:bodyPr/>
+          <a:lstStyle>
+            <a:lvl1pPr>
+              <a:defRPr sz="1000">
+                <a:solidFill>
+                  <a:schemeClr val="tx2"/>
+                </a:solidFill>
+              </a:defRPr>
+            </a:lvl1pPr>
+          </a:lstStyle>
+          <a:p>
+            <a:pPr algn="r"/>
+            <a:fld id="{F7021451-1387-4CA6-816F-3879F97B5CBC}" type="slidenum">
+              <a:rPr b="0" lang="en-US"/>
+              <a:t>15</a:t>
+            </a:fld>
+            <a:endParaRPr lang="en-US"/>
+          </a:p>
+        </p:txBody>
+      </p:sp>
+    </p:spTree>
+  </p:cSld>
+  <p:clrMapOvr>
+    <a:masterClrMapping/>
+  </p:clrMapOvr>
+</p:sld>
+</file>
+
+<file path=ppt/slides/slide16.xml><?xml version="1.0" encoding="utf-8"?>
+<p:sld xmlns:a="http://schemas.openxmlformats.org/drawingml/2006/main" xmlns:r="http://schemas.openxmlformats.org/officeDocument/2006/relationships" xmlns:p="http://schemas.openxmlformats.org/presentationml/2006/main">
+  <p:cSld name="Slide 16">
+    <p:spTree>
+      <p:nvGrpSpPr>
+        <p:cNvPr id="1" name=""/>
+        <p:cNvGrpSpPr/>
+        <p:nvPr/>
+      </p:nvGrpSpPr>
+      <p:grpSpPr>
+        <a:xfrm>
+          <a:off x="0" y="0"/>
+          <a:ext cx="0" cy="0"/>
+          <a:chOff x="0" y="0"/>
+          <a:chExt cx="0" cy="0"/>
+        </a:xfrm>
+      </p:grpSpPr>
+      <p:sp>
+        <p:nvSpPr>
+          <p:cNvPr id="2" name="Text 0"/>
+          <p:cNvSpPr/>
+          <p:nvPr>
+            <p:ph idx="100" type="title" hasCustomPrompt="1"/>
+          </p:nvPr>
+        </p:nvSpPr>
+        <p:spPr>
+          <a:xfrm>
+            <a:off x="548640" y="365760"/>
+            <a:ext cx="11064240" cy="822960"/>
+          </a:xfrm>
+          <a:prstGeom prst="rect">
+            <a:avLst/>
+          </a:prstGeom>
+          <a:noFill/>
+          <a:ln/>
+        </p:spPr>
+        <p:txBody>
+          <a:bodyPr wrap="square" lIns="0" tIns="0" rIns="0" bIns="0" rtlCol="0" anchor="ctr"/>
+          <a:lstStyle/>
+          <a:p>
+            <a:pPr indent="0" marL="0">
+              <a:buNone/>
+            </a:pPr>
+            <a:r>
+              <a:rPr lang="en-US" sz="3600" b="1" dirty="0">
+                <a:solidFill>
+                  <a:schemeClr val="tx1"/>
+                </a:solidFill>
+              </a:rPr>
+              <a:t>Our plan for the next 45 minutes</a:t>
+            </a:r>
+            <a:endParaRPr lang="en-US" sz="3600" dirty="0"/>
+          </a:p>
+        </p:txBody>
+      </p:sp>
+      <p:sp>
+        <p:nvSpPr>
+          <p:cNvPr id="3" name="step 1 card"/>
+          <p:cNvSpPr/>
+          <p:nvPr/>
+        </p:nvSpPr>
+        <p:spPr>
+          <a:xfrm>
+            <a:off x="548640" y="1463040"/>
+            <a:ext cx="5440680" cy="960120"/>
+          </a:xfrm>
+          <a:prstGeom prst="roundRect">
+            <a:avLst>
+              <a:gd name="adj" fmla="val 14286"/>
+            </a:avLst>
+          </a:prstGeom>
+          <a:solidFill>
+            <a:schemeClr val="bg2"/>
+          </a:solidFill>
+          <a:ln/>
+        </p:spPr>
+      </p:sp>
+      <p:sp>
+        <p:nvSpPr>
+          <p:cNvPr id="4" name="step 1 number"/>
+          <p:cNvSpPr/>
+          <p:nvPr/>
+        </p:nvSpPr>
+        <p:spPr>
+          <a:xfrm>
+            <a:off x="731520" y="1600200"/>
+            <a:ext cx="685800" cy="685800"/>
+          </a:xfrm>
+          <a:prstGeom prst="ellipse">
+            <a:avLst/>
+          </a:prstGeom>
+          <a:solidFill>
+            <a:schemeClr val="accent1"/>
+          </a:solidFill>
+          <a:ln/>
+        </p:spPr>
+      </p:sp>
+      <p:sp>
+        <p:nvSpPr>
+          <p:cNvPr id="5" name="Text 3"/>
+          <p:cNvSpPr txBox="1"/>
+          <p:nvPr/>
+        </p:nvSpPr>
+        <p:spPr>
+          <a:xfrm>
+            <a:off x="731520" y="1600200"/>
+            <a:ext cx="685800" cy="685800"/>
+          </a:xfrm>
+          <a:prstGeom prst="rect">
+            <a:avLst/>
+          </a:prstGeom>
+          <a:noFill/>
+          <a:ln/>
+        </p:spPr>
+        <p:txBody>
+          <a:bodyPr wrap="square" lIns="0" tIns="0" rIns="0" bIns="0" rtlCol="0" anchor="ctr"/>
+          <a:lstStyle/>
+          <a:p>
+            <a:pPr algn="ctr" indent="0" marL="0">
+              <a:buNone/>
+            </a:pPr>
+            <a:r>
+              <a:rPr lang="en-US" sz="2000" b="1" dirty="0">
+                <a:solidFill>
+                  <a:schemeClr val="tx1"/>
+                </a:solidFill>
+              </a:rPr>
+              <a:t>1</a:t>
+            </a:r>
+            <a:endParaRPr lang="en-US" sz="2000" dirty="0"/>
+          </a:p>
+        </p:txBody>
+      </p:sp>
+      <p:sp>
+        <p:nvSpPr>
+          <p:cNvPr id="6" name="Text 4"/>
+          <p:cNvSpPr txBox="1"/>
+          <p:nvPr/>
+        </p:nvSpPr>
+        <p:spPr>
+          <a:xfrm>
+            <a:off x="1645920" y="1600200"/>
+            <a:ext cx="1143000" cy="685800"/>
+          </a:xfrm>
+          <a:prstGeom prst="rect">
+            <a:avLst/>
+          </a:prstGeom>
+          <a:noFill/>
+          <a:ln/>
+        </p:spPr>
+        <p:txBody>
+          <a:bodyPr wrap="square" lIns="0" tIns="0" rIns="0" bIns="0" rtlCol="0" anchor="ctr"/>
+          <a:lstStyle/>
+          <a:p>
+            <a:pPr indent="0" marL="0">
+              <a:buNone/>
+            </a:pPr>
+            <a:r>
+              <a:rPr lang="en-US" sz="1600" b="1" dirty="0">
+                <a:solidFill>
+                  <a:schemeClr val="accent2"/>
+                </a:solidFill>
+              </a:rPr>
+              <a:t>0-5 min</a:t>
+            </a:r>
+            <a:endParaRPr lang="en-US" sz="1600" dirty="0"/>
+          </a:p>
+        </p:txBody>
+      </p:sp>
+      <p:sp>
+        <p:nvSpPr>
+          <p:cNvPr id="7" name="Text 5"/>
+          <p:cNvSpPr txBox="1"/>
+          <p:nvPr/>
+        </p:nvSpPr>
+        <p:spPr>
+          <a:xfrm>
+            <a:off x="2788920" y="1600200"/>
+            <a:ext cx="3063240" cy="685800"/>
+          </a:xfrm>
+          <a:prstGeom prst="rect">
+            <a:avLst/>
+          </a:prstGeom>
+          <a:noFill/>
+          <a:ln/>
+        </p:spPr>
+        <p:txBody>
+          <a:bodyPr wrap="square" lIns="0" tIns="0" rIns="0" bIns="0" rtlCol="0" anchor="ctr"/>
+          <a:lstStyle/>
+          <a:p>
+            <a:pPr indent="0" marL="0">
+              <a:buNone/>
+            </a:pPr>
+            <a:r>
+              <a:rPr lang="en-US" sz="1800" dirty="0">
+                <a:solidFill>
+                  <a:schemeClr val="tx1"/>
+                </a:solidFill>
+              </a:rPr>
+              <a:t>Learn how cloud AI apps work</a:t>
+            </a:r>
+            <a:endParaRPr lang="en-US" sz="1800" dirty="0"/>
+          </a:p>
+        </p:txBody>
+      </p:sp>
+      <p:sp>
+        <p:nvSpPr>
+          <p:cNvPr id="8" name="step 2 card"/>
+          <p:cNvSpPr/>
+          <p:nvPr/>
+        </p:nvSpPr>
+        <p:spPr>
+          <a:xfrm>
+            <a:off x="548640" y="2606040"/>
+            <a:ext cx="5440680" cy="960120"/>
+          </a:xfrm>
+          <a:prstGeom prst="roundRect">
+            <a:avLst>
+              <a:gd name="adj" fmla="val 14286"/>
+            </a:avLst>
+          </a:prstGeom>
+          <a:solidFill>
+            <a:schemeClr val="bg1"/>
+          </a:solidFill>
+          <a:ln/>
+        </p:spPr>
+      </p:sp>
+      <p:sp>
+        <p:nvSpPr>
+          <p:cNvPr id="9" name="step 2 number"/>
+          <p:cNvSpPr/>
+          <p:nvPr/>
+        </p:nvSpPr>
+        <p:spPr>
+          <a:xfrm>
+            <a:off x="731520" y="2743200"/>
+            <a:ext cx="685800" cy="685800"/>
+          </a:xfrm>
+          <a:prstGeom prst="ellipse">
+            <a:avLst/>
+          </a:prstGeom>
+          <a:solidFill>
+            <a:schemeClr val="accent1"/>
+          </a:solidFill>
+          <a:ln/>
+        </p:spPr>
+      </p:sp>
+      <p:sp>
+        <p:nvSpPr>
+          <p:cNvPr id="10" name="Text 8"/>
+          <p:cNvSpPr txBox="1"/>
+          <p:nvPr/>
+        </p:nvSpPr>
+        <p:spPr>
+          <a:xfrm>
+            <a:off x="731520" y="2743200"/>
+            <a:ext cx="685800" cy="685800"/>
+          </a:xfrm>
+          <a:prstGeom prst="rect">
+            <a:avLst/>
+          </a:prstGeom>
+          <a:noFill/>
+          <a:ln/>
+        </p:spPr>
+        <p:txBody>
+          <a:bodyPr wrap="square" lIns="0" tIns="0" rIns="0" bIns="0" rtlCol="0" anchor="ctr"/>
+          <a:lstStyle/>
+          <a:p>
+            <a:pPr algn="ctr" indent="0" marL="0">
+              <a:buNone/>
+            </a:pPr>
+            <a:r>
+              <a:rPr lang="en-US" sz="2000" b="1" dirty="0">
+                <a:solidFill>
+                  <a:schemeClr val="tx1"/>
+                </a:solidFill>
+              </a:rPr>
+              <a:t>2</a:t>
+            </a:r>
+            <a:endParaRPr lang="en-US" sz="2000" dirty="0"/>
+          </a:p>
+        </p:txBody>
+      </p:sp>
+      <p:sp>
+        <p:nvSpPr>
+          <p:cNvPr id="11" name="Text 9"/>
+          <p:cNvSpPr txBox="1"/>
+          <p:nvPr/>
+        </p:nvSpPr>
+        <p:spPr>
+          <a:xfrm>
+            <a:off x="1645920" y="2743200"/>
+            <a:ext cx="1143000" cy="685800"/>
+          </a:xfrm>
+          <a:prstGeom prst="rect">
+            <a:avLst/>
+          </a:prstGeom>
+          <a:noFill/>
+          <a:ln/>
+        </p:spPr>
+        <p:txBody>
+          <a:bodyPr wrap="square" lIns="0" tIns="0" rIns="0" bIns="0" rtlCol="0" anchor="ctr"/>
+          <a:lstStyle/>
+          <a:p>
+            <a:pPr indent="0" marL="0">
+              <a:buNone/>
+            </a:pPr>
+            <a:r>
+              <a:rPr lang="en-US" sz="1600" b="1" dirty="0">
+                <a:solidFill>
+                  <a:schemeClr val="accent2"/>
+                </a:solidFill>
+              </a:rPr>
+              <a:t>5-10 min</a:t>
+            </a:r>
+            <a:endParaRPr lang="en-US" sz="1600" dirty="0"/>
+          </a:p>
+        </p:txBody>
+      </p:sp>
+      <p:sp>
+        <p:nvSpPr>
+          <p:cNvPr id="12" name="Text 10"/>
+          <p:cNvSpPr txBox="1"/>
+          <p:nvPr/>
+        </p:nvSpPr>
+        <p:spPr>
+          <a:xfrm>
+            <a:off x="2788920" y="2743200"/>
+            <a:ext cx="3063240" cy="685800"/>
+          </a:xfrm>
+          <a:prstGeom prst="rect">
+            <a:avLst/>
+          </a:prstGeom>
+          <a:noFill/>
+          <a:ln/>
+        </p:spPr>
+        <p:txBody>
+          <a:bodyPr wrap="square" lIns="0" tIns="0" rIns="0" bIns="0" rtlCol="0" anchor="ctr"/>
+          <a:lstStyle/>
+          <a:p>
+            <a:pPr indent="0" marL="0">
+              <a:buNone/>
+            </a:pPr>
+            <a:r>
+              <a:rPr lang="en-US" sz="1800" dirty="0">
+                <a:solidFill>
+                  <a:schemeClr val="tx1"/>
+                </a:solidFill>
+              </a:rPr>
+              <a:t>Try the AI in Amazon Bedrock</a:t>
+            </a:r>
+            <a:endParaRPr lang="en-US" sz="1800" dirty="0"/>
+          </a:p>
+        </p:txBody>
+      </p:sp>
+      <p:sp>
+        <p:nvSpPr>
+          <p:cNvPr id="13" name="step 3 card"/>
+          <p:cNvSpPr/>
+          <p:nvPr/>
+        </p:nvSpPr>
+        <p:spPr>
+          <a:xfrm>
+            <a:off x="548640" y="3749040"/>
+            <a:ext cx="5440680" cy="960120"/>
+          </a:xfrm>
+          <a:prstGeom prst="roundRect">
+            <a:avLst>
+              <a:gd name="adj" fmla="val 14286"/>
+            </a:avLst>
+          </a:prstGeom>
+          <a:solidFill>
+            <a:schemeClr val="bg2"/>
+          </a:solidFill>
+          <a:ln/>
+        </p:spPr>
+      </p:sp>
+      <p:sp>
+        <p:nvSpPr>
+          <p:cNvPr id="14" name="step 3 number"/>
+          <p:cNvSpPr/>
+          <p:nvPr/>
+        </p:nvSpPr>
+        <p:spPr>
+          <a:xfrm>
+            <a:off x="731520" y="3886200"/>
+            <a:ext cx="685800" cy="685800"/>
+          </a:xfrm>
+          <a:prstGeom prst="ellipse">
+            <a:avLst/>
+          </a:prstGeom>
+          <a:solidFill>
+            <a:schemeClr val="accent1"/>
+          </a:solidFill>
+          <a:ln/>
+        </p:spPr>
+      </p:sp>
+      <p:sp>
+        <p:nvSpPr>
+          <p:cNvPr id="15" name="Text 13"/>
+          <p:cNvSpPr txBox="1"/>
+          <p:nvPr/>
+        </p:nvSpPr>
+        <p:spPr>
+          <a:xfrm>
+            <a:off x="731520" y="3886200"/>
+            <a:ext cx="685800" cy="685800"/>
+          </a:xfrm>
+          <a:prstGeom prst="rect">
+            <a:avLst/>
+          </a:prstGeom>
+          <a:noFill/>
+          <a:ln/>
+        </p:spPr>
+        <p:txBody>
+          <a:bodyPr wrap="square" lIns="0" tIns="0" rIns="0" bIns="0" rtlCol="0" anchor="ctr"/>
+          <a:lstStyle/>
+          <a:p>
+            <a:pPr algn="ctr" indent="0" marL="0">
+              <a:buNone/>
+            </a:pPr>
+            <a:r>
+              <a:rPr lang="en-US" sz="2000" b="1" dirty="0">
+                <a:solidFill>
+                  <a:schemeClr val="tx1"/>
+                </a:solidFill>
+              </a:rPr>
+              <a:t>3</a:t>
+            </a:r>
+            <a:endParaRPr lang="en-US" sz="2000" dirty="0"/>
+          </a:p>
+        </p:txBody>
+      </p:sp>
+      <p:sp>
+        <p:nvSpPr>
+          <p:cNvPr id="16" name="Text 14"/>
+          <p:cNvSpPr txBox="1"/>
+          <p:nvPr/>
+        </p:nvSpPr>
+        <p:spPr>
+          <a:xfrm>
+            <a:off x="1645920" y="3886200"/>
+            <a:ext cx="1143000" cy="685800"/>
+          </a:xfrm>
+          <a:prstGeom prst="rect">
+            <a:avLst/>
+          </a:prstGeom>
+          <a:noFill/>
+          <a:ln/>
+        </p:spPr>
+        <p:txBody>
+          <a:bodyPr wrap="square" lIns="0" tIns="0" rIns="0" bIns="0" rtlCol="0" anchor="ctr"/>
+          <a:lstStyle/>
+          <a:p>
+            <a:pPr indent="0" marL="0">
+              <a:buNone/>
+            </a:pPr>
+            <a:r>
+              <a:rPr lang="en-US" sz="1600" b="1" dirty="0">
+                <a:solidFill>
+                  <a:schemeClr val="accent2"/>
+                </a:solidFill>
+              </a:rPr>
+              <a:t>10-20 min</a:t>
+            </a:r>
+            <a:endParaRPr lang="en-US" sz="1600" dirty="0"/>
+          </a:p>
+        </p:txBody>
+      </p:sp>
+      <p:sp>
+        <p:nvSpPr>
+          <p:cNvPr id="17" name="Text 15"/>
+          <p:cNvSpPr txBox="1"/>
+          <p:nvPr/>
+        </p:nvSpPr>
+        <p:spPr>
+          <a:xfrm>
+            <a:off x="2788920" y="3886200"/>
+            <a:ext cx="3063240" cy="685800"/>
+          </a:xfrm>
+          <a:prstGeom prst="rect">
+            <a:avLst/>
+          </a:prstGeom>
+          <a:noFill/>
+          <a:ln/>
+        </p:spPr>
+        <p:txBody>
+          <a:bodyPr wrap="square" lIns="0" tIns="0" rIns="0" bIns="0" rtlCol="0" anchor="ctr"/>
+          <a:lstStyle/>
+          <a:p>
+            <a:pPr indent="0" marL="0">
+              <a:buNone/>
+            </a:pPr>
+            <a:r>
+              <a:rPr lang="en-US" sz="1800" dirty="0">
+                <a:solidFill>
+                  <a:schemeClr val="tx1"/>
+                </a:solidFill>
+              </a:rPr>
+              <a:t>Build the Lambda function</a:t>
+            </a:r>
+            <a:endParaRPr lang="en-US" sz="1800" dirty="0"/>
+          </a:p>
+        </p:txBody>
+      </p:sp>
+      <p:sp>
+        <p:nvSpPr>
+          <p:cNvPr id="18" name="step 4 card"/>
+          <p:cNvSpPr/>
+          <p:nvPr/>
+        </p:nvSpPr>
+        <p:spPr>
+          <a:xfrm>
+            <a:off x="548640" y="4892040"/>
+            <a:ext cx="5440680" cy="960120"/>
+          </a:xfrm>
+          <a:prstGeom prst="roundRect">
+            <a:avLst>
+              <a:gd name="adj" fmla="val 14286"/>
+            </a:avLst>
+          </a:prstGeom>
+          <a:solidFill>
+            <a:schemeClr val="bg1"/>
+          </a:solidFill>
+          <a:ln/>
+        </p:spPr>
+      </p:sp>
+      <p:sp>
+        <p:nvSpPr>
+          <p:cNvPr id="19" name="step 4 number"/>
+          <p:cNvSpPr/>
+          <p:nvPr/>
+        </p:nvSpPr>
+        <p:spPr>
+          <a:xfrm>
+            <a:off x="731520" y="5029200"/>
+            <a:ext cx="685800" cy="685800"/>
+          </a:xfrm>
+          <a:prstGeom prst="ellipse">
+            <a:avLst/>
+          </a:prstGeom>
+          <a:solidFill>
+            <a:schemeClr val="accent1"/>
+          </a:solidFill>
+          <a:ln/>
+        </p:spPr>
+      </p:sp>
+      <p:sp>
+        <p:nvSpPr>
+          <p:cNvPr id="20" name="Text 18"/>
+          <p:cNvSpPr txBox="1"/>
+          <p:nvPr/>
+        </p:nvSpPr>
+        <p:spPr>
+          <a:xfrm>
+            <a:off x="731520" y="5029200"/>
+            <a:ext cx="685800" cy="685800"/>
+          </a:xfrm>
+          <a:prstGeom prst="rect">
+            <a:avLst/>
+          </a:prstGeom>
+          <a:noFill/>
+          <a:ln/>
+        </p:spPr>
+        <p:txBody>
+          <a:bodyPr wrap="square" lIns="0" tIns="0" rIns="0" bIns="0" rtlCol="0" anchor="ctr"/>
+          <a:lstStyle/>
+          <a:p>
+            <a:pPr algn="ctr" indent="0" marL="0">
+              <a:buNone/>
+            </a:pPr>
+            <a:r>
+              <a:rPr lang="en-US" sz="2000" b="1" dirty="0">
+                <a:solidFill>
+                  <a:schemeClr val="tx1"/>
+                </a:solidFill>
+              </a:rPr>
+              <a:t>4</a:t>
+            </a:r>
+            <a:endParaRPr lang="en-US" sz="2000" dirty="0"/>
+          </a:p>
+        </p:txBody>
+      </p:sp>
+      <p:sp>
+        <p:nvSpPr>
+          <p:cNvPr id="21" name="Text 19"/>
+          <p:cNvSpPr txBox="1"/>
+          <p:nvPr/>
+        </p:nvSpPr>
+        <p:spPr>
+          <a:xfrm>
+            <a:off x="1645920" y="5029200"/>
+            <a:ext cx="1143000" cy="685800"/>
+          </a:xfrm>
+          <a:prstGeom prst="rect">
+            <a:avLst/>
+          </a:prstGeom>
+          <a:noFill/>
+          <a:ln/>
+        </p:spPr>
+        <p:txBody>
+          <a:bodyPr wrap="square" lIns="0" tIns="0" rIns="0" bIns="0" rtlCol="0" anchor="ctr"/>
+          <a:lstStyle/>
+          <a:p>
+            <a:pPr indent="0" marL="0">
+              <a:buNone/>
+            </a:pPr>
+            <a:r>
+              <a:rPr lang="en-US" sz="1600" b="1" dirty="0">
+                <a:solidFill>
+                  <a:schemeClr val="accent2"/>
+                </a:solidFill>
+              </a:rPr>
+              <a:t>20-28 min</a:t>
+            </a:r>
+            <a:endParaRPr lang="en-US" sz="1600" dirty="0"/>
+          </a:p>
+        </p:txBody>
+      </p:sp>
+      <p:sp>
+        <p:nvSpPr>
+          <p:cNvPr id="22" name="Text 20"/>
+          <p:cNvSpPr txBox="1"/>
+          <p:nvPr/>
+        </p:nvSpPr>
+        <p:spPr>
+          <a:xfrm>
+            <a:off x="2788920" y="5029200"/>
+            <a:ext cx="3063240" cy="685800"/>
+          </a:xfrm>
+          <a:prstGeom prst="rect">
+            <a:avLst/>
+          </a:prstGeom>
+          <a:noFill/>
+          <a:ln/>
+        </p:spPr>
+        <p:txBody>
+          <a:bodyPr wrap="square" lIns="0" tIns="0" rIns="0" bIns="0" rtlCol="0" anchor="ctr"/>
+          <a:lstStyle/>
+          <a:p>
+            <a:pPr indent="0" marL="0">
+              <a:buNone/>
+            </a:pPr>
+            <a:r>
+              <a:rPr lang="en-US" sz="1800" dirty="0">
+                <a:solidFill>
+                  <a:schemeClr val="tx1"/>
+                </a:solidFill>
+              </a:rPr>
+              <a:t>Connect API Gateway</a:t>
+            </a:r>
+            <a:endParaRPr lang="en-US" sz="1800" dirty="0"/>
+          </a:p>
+        </p:txBody>
+      </p:sp>
+      <p:sp>
+        <p:nvSpPr>
+          <p:cNvPr id="23" name="step 5 card"/>
+          <p:cNvSpPr/>
+          <p:nvPr/>
+        </p:nvSpPr>
+        <p:spPr>
+          <a:xfrm>
+            <a:off x="6172200" y="1463040"/>
+            <a:ext cx="5440680" cy="960120"/>
+          </a:xfrm>
+          <a:prstGeom prst="roundRect">
+            <a:avLst>
+              <a:gd name="adj" fmla="val 14286"/>
+            </a:avLst>
+          </a:prstGeom>
+          <a:solidFill>
+            <a:schemeClr val="bg2"/>
+          </a:solidFill>
+          <a:ln/>
+        </p:spPr>
+      </p:sp>
+      <p:sp>
+        <p:nvSpPr>
+          <p:cNvPr id="24" name="step 5 number"/>
+          <p:cNvSpPr/>
+          <p:nvPr/>
+        </p:nvSpPr>
+        <p:spPr>
+          <a:xfrm>
+            <a:off x="6355080" y="1600200"/>
+            <a:ext cx="685800" cy="685800"/>
+          </a:xfrm>
+          <a:prstGeom prst="ellipse">
+            <a:avLst/>
+          </a:prstGeom>
+          <a:solidFill>
+            <a:schemeClr val="accent1"/>
+          </a:solidFill>
+          <a:ln/>
+        </p:spPr>
+      </p:sp>
+      <p:sp>
+        <p:nvSpPr>
+          <p:cNvPr id="25" name="Text 23"/>
+          <p:cNvSpPr txBox="1"/>
+          <p:nvPr/>
+        </p:nvSpPr>
+        <p:spPr>
+          <a:xfrm>
+            <a:off x="6355080" y="1600200"/>
+            <a:ext cx="685800" cy="685800"/>
+          </a:xfrm>
+          <a:prstGeom prst="rect">
+            <a:avLst/>
+          </a:prstGeom>
+          <a:noFill/>
+          <a:ln/>
+        </p:spPr>
+        <p:txBody>
+          <a:bodyPr wrap="square" lIns="0" tIns="0" rIns="0" bIns="0" rtlCol="0" anchor="ctr"/>
+          <a:lstStyle/>
+          <a:p>
+            <a:pPr algn="ctr" indent="0" marL="0">
+              <a:buNone/>
+            </a:pPr>
+            <a:r>
+              <a:rPr lang="en-US" sz="2000" b="1" dirty="0">
+                <a:solidFill>
+                  <a:schemeClr val="tx1"/>
+                </a:solidFill>
+              </a:rPr>
+              <a:t>5</a:t>
+            </a:r>
+            <a:endParaRPr lang="en-US" sz="2000" dirty="0"/>
+          </a:p>
+        </p:txBody>
+      </p:sp>
+      <p:sp>
+        <p:nvSpPr>
+          <p:cNvPr id="26" name="Text 24"/>
+          <p:cNvSpPr txBox="1"/>
+          <p:nvPr/>
+        </p:nvSpPr>
+        <p:spPr>
+          <a:xfrm>
+            <a:off x="7269480" y="1600200"/>
+            <a:ext cx="1143000" cy="685800"/>
+          </a:xfrm>
+          <a:prstGeom prst="rect">
+            <a:avLst/>
+          </a:prstGeom>
+          <a:noFill/>
+          <a:ln/>
+        </p:spPr>
+        <p:txBody>
+          <a:bodyPr wrap="square" lIns="0" tIns="0" rIns="0" bIns="0" rtlCol="0" anchor="ctr"/>
+          <a:lstStyle/>
+          <a:p>
+            <a:pPr indent="0" marL="0">
+              <a:buNone/>
+            </a:pPr>
+            <a:r>
+              <a:rPr lang="en-US" sz="1600" b="1" dirty="0">
+                <a:solidFill>
+                  <a:schemeClr val="accent2"/>
+                </a:solidFill>
+              </a:rPr>
+              <a:t>28-37 min</a:t>
+            </a:r>
+            <a:endParaRPr lang="en-US" sz="1600" dirty="0"/>
+          </a:p>
+        </p:txBody>
+      </p:sp>
+      <p:sp>
+        <p:nvSpPr>
+          <p:cNvPr id="27" name="Text 25"/>
+          <p:cNvSpPr txBox="1"/>
+          <p:nvPr/>
+        </p:nvSpPr>
+        <p:spPr>
+          <a:xfrm>
+            <a:off x="8412480" y="1600200"/>
+            <a:ext cx="3063240" cy="685800"/>
+          </a:xfrm>
+          <a:prstGeom prst="rect">
+            <a:avLst/>
+          </a:prstGeom>
+          <a:noFill/>
+          <a:ln/>
+        </p:spPr>
+        <p:txBody>
+          <a:bodyPr wrap="square" lIns="0" tIns="0" rIns="0" bIns="0" rtlCol="0" anchor="ctr"/>
+          <a:lstStyle/>
+          <a:p>
+            <a:pPr indent="0" marL="0">
+              <a:buNone/>
+            </a:pPr>
+            <a:r>
+              <a:rPr lang="en-US" sz="1800" dirty="0">
+                <a:solidFill>
+                  <a:schemeClr val="tx1"/>
+                </a:solidFill>
+              </a:rPr>
+              <a:t>Connect the website</a:t>
+            </a:r>
+            <a:endParaRPr lang="en-US" sz="1800" dirty="0"/>
+          </a:p>
+        </p:txBody>
+      </p:sp>
+      <p:sp>
+        <p:nvSpPr>
+          <p:cNvPr id="28" name="step 6 card"/>
+          <p:cNvSpPr/>
+          <p:nvPr/>
+        </p:nvSpPr>
+        <p:spPr>
+          <a:xfrm>
+            <a:off x="6172200" y="2606040"/>
+            <a:ext cx="5440680" cy="960120"/>
+          </a:xfrm>
+          <a:prstGeom prst="roundRect">
+            <a:avLst>
+              <a:gd name="adj" fmla="val 14286"/>
+            </a:avLst>
+          </a:prstGeom>
+          <a:solidFill>
+            <a:schemeClr val="bg1"/>
+          </a:solidFill>
+          <a:ln/>
+        </p:spPr>
+      </p:sp>
+      <p:sp>
+        <p:nvSpPr>
+          <p:cNvPr id="29" name="step 6 number"/>
+          <p:cNvSpPr/>
+          <p:nvPr/>
+        </p:nvSpPr>
+        <p:spPr>
+          <a:xfrm>
+            <a:off x="6355080" y="2743200"/>
+            <a:ext cx="685800" cy="685800"/>
+          </a:xfrm>
+          <a:prstGeom prst="ellipse">
+            <a:avLst/>
+          </a:prstGeom>
+          <a:solidFill>
+            <a:schemeClr val="accent1"/>
+          </a:solidFill>
+          <a:ln/>
+        </p:spPr>
+      </p:sp>
+      <p:sp>
+        <p:nvSpPr>
+          <p:cNvPr id="30" name="Text 28"/>
+          <p:cNvSpPr txBox="1"/>
+          <p:nvPr/>
+        </p:nvSpPr>
+        <p:spPr>
+          <a:xfrm>
+            <a:off x="6355080" y="2743200"/>
+            <a:ext cx="685800" cy="685800"/>
+          </a:xfrm>
+          <a:prstGeom prst="rect">
+            <a:avLst/>
+          </a:prstGeom>
+          <a:noFill/>
+          <a:ln/>
+        </p:spPr>
+        <p:txBody>
+          <a:bodyPr wrap="square" lIns="0" tIns="0" rIns="0" bIns="0" rtlCol="0" anchor="ctr"/>
+          <a:lstStyle/>
+          <a:p>
+            <a:pPr algn="ctr" indent="0" marL="0">
+              <a:buNone/>
+            </a:pPr>
+            <a:r>
+              <a:rPr lang="en-US" sz="2000" b="1" dirty="0">
+                <a:solidFill>
+                  <a:schemeClr val="tx1"/>
+                </a:solidFill>
+              </a:rPr>
+              <a:t>6</a:t>
+            </a:r>
+            <a:endParaRPr lang="en-US" sz="2000" dirty="0"/>
+          </a:p>
+        </p:txBody>
+      </p:sp>
+      <p:sp>
+        <p:nvSpPr>
+          <p:cNvPr id="31" name="Text 29"/>
+          <p:cNvSpPr txBox="1"/>
+          <p:nvPr/>
+        </p:nvSpPr>
+        <p:spPr>
+          <a:xfrm>
+            <a:off x="7269480" y="2743200"/>
+            <a:ext cx="1143000" cy="685800"/>
+          </a:xfrm>
+          <a:prstGeom prst="rect">
+            <a:avLst/>
+          </a:prstGeom>
+          <a:noFill/>
+          <a:ln/>
+        </p:spPr>
+        <p:txBody>
+          <a:bodyPr wrap="square" lIns="0" tIns="0" rIns="0" bIns="0" rtlCol="0" anchor="ctr"/>
+          <a:lstStyle/>
+          <a:p>
+            <a:pPr indent="0" marL="0">
+              <a:buNone/>
+            </a:pPr>
+            <a:r>
+              <a:rPr lang="en-US" sz="1600" b="1" dirty="0">
+                <a:solidFill>
+                  <a:schemeClr val="accent2"/>
+                </a:solidFill>
+              </a:rPr>
+              <a:t>37-41 min</a:t>
+            </a:r>
+            <a:endParaRPr lang="en-US" sz="1600" dirty="0"/>
+          </a:p>
+        </p:txBody>
+      </p:sp>
+      <p:sp>
+        <p:nvSpPr>
+          <p:cNvPr id="32" name="Text 30"/>
+          <p:cNvSpPr txBox="1"/>
+          <p:nvPr/>
+        </p:nvSpPr>
+        <p:spPr>
+          <a:xfrm>
+            <a:off x="8412480" y="2743200"/>
+            <a:ext cx="3063240" cy="685800"/>
+          </a:xfrm>
+          <a:prstGeom prst="rect">
+            <a:avLst/>
+          </a:prstGeom>
+          <a:noFill/>
+          <a:ln/>
+        </p:spPr>
+        <p:txBody>
+          <a:bodyPr wrap="square" lIns="0" tIns="0" rIns="0" bIns="0" rtlCol="0" anchor="ctr"/>
+          <a:lstStyle/>
+          <a:p>
+            <a:pPr indent="0" marL="0">
+              <a:buNone/>
+            </a:pPr>
+            <a:r>
+              <a:rPr lang="en-US" sz="1800" dirty="0">
+                <a:solidFill>
+                  <a:schemeClr val="tx1"/>
+                </a:solidFill>
+              </a:rPr>
+              <a:t>Test your app</a:t>
+            </a:r>
+            <a:endParaRPr lang="en-US" sz="1800" dirty="0"/>
+          </a:p>
+        </p:txBody>
+      </p:sp>
+      <p:sp>
+        <p:nvSpPr>
+          <p:cNvPr id="33" name="step 7 card"/>
+          <p:cNvSpPr/>
+          <p:nvPr/>
+        </p:nvSpPr>
+        <p:spPr>
+          <a:xfrm>
+            <a:off x="6172200" y="3749040"/>
+            <a:ext cx="5440680" cy="960120"/>
+          </a:xfrm>
+          <a:prstGeom prst="roundRect">
+            <a:avLst>
+              <a:gd name="adj" fmla="val 14286"/>
+            </a:avLst>
+          </a:prstGeom>
+          <a:solidFill>
+            <a:schemeClr val="bg2"/>
+          </a:solidFill>
+          <a:ln/>
+        </p:spPr>
+      </p:sp>
+      <p:sp>
+        <p:nvSpPr>
+          <p:cNvPr id="34" name="step 7 number"/>
+          <p:cNvSpPr/>
+          <p:nvPr/>
+        </p:nvSpPr>
+        <p:spPr>
+          <a:xfrm>
+            <a:off x="6355080" y="3886200"/>
+            <a:ext cx="685800" cy="685800"/>
+          </a:xfrm>
+          <a:prstGeom prst="ellipse">
+            <a:avLst/>
+          </a:prstGeom>
+          <a:solidFill>
+            <a:schemeClr val="accent1"/>
+          </a:solidFill>
+          <a:ln/>
+        </p:spPr>
+      </p:sp>
+      <p:sp>
+        <p:nvSpPr>
+          <p:cNvPr id="35" name="Text 33"/>
+          <p:cNvSpPr txBox="1"/>
+          <p:nvPr/>
+        </p:nvSpPr>
+        <p:spPr>
+          <a:xfrm>
+            <a:off x="6355080" y="3886200"/>
+            <a:ext cx="685800" cy="685800"/>
+          </a:xfrm>
+          <a:prstGeom prst="rect">
+            <a:avLst/>
+          </a:prstGeom>
+          <a:noFill/>
+          <a:ln/>
+        </p:spPr>
+        <p:txBody>
+          <a:bodyPr wrap="square" lIns="0" tIns="0" rIns="0" bIns="0" rtlCol="0" anchor="ctr"/>
+          <a:lstStyle/>
+          <a:p>
+            <a:pPr algn="ctr" indent="0" marL="0">
+              <a:buNone/>
+            </a:pPr>
+            <a:r>
+              <a:rPr lang="en-US" sz="2000" b="1" dirty="0">
+                <a:solidFill>
+                  <a:schemeClr val="tx1"/>
+                </a:solidFill>
+              </a:rPr>
+              <a:t>7</a:t>
+            </a:r>
+            <a:endParaRPr lang="en-US" sz="2000" dirty="0"/>
+          </a:p>
+        </p:txBody>
+      </p:sp>
+      <p:sp>
+        <p:nvSpPr>
+          <p:cNvPr id="36" name="Text 34"/>
+          <p:cNvSpPr txBox="1"/>
+          <p:nvPr/>
+        </p:nvSpPr>
+        <p:spPr>
+          <a:xfrm>
+            <a:off x="7269480" y="3886200"/>
+            <a:ext cx="1143000" cy="685800"/>
+          </a:xfrm>
+          <a:prstGeom prst="rect">
+            <a:avLst/>
+          </a:prstGeom>
+          <a:noFill/>
+          <a:ln/>
+        </p:spPr>
+        <p:txBody>
+          <a:bodyPr wrap="square" lIns="0" tIns="0" rIns="0" bIns="0" rtlCol="0" anchor="ctr"/>
+          <a:lstStyle/>
+          <a:p>
+            <a:pPr indent="0" marL="0">
+              <a:buNone/>
+            </a:pPr>
+            <a:r>
+              <a:rPr lang="en-US" sz="1600" b="1" dirty="0">
+                <a:solidFill>
+                  <a:schemeClr val="accent2"/>
+                </a:solidFill>
+              </a:rPr>
+              <a:t>41-44 min</a:t>
+            </a:r>
+            <a:endParaRPr lang="en-US" sz="1600" dirty="0"/>
+          </a:p>
+        </p:txBody>
+      </p:sp>
+      <p:sp>
+        <p:nvSpPr>
+          <p:cNvPr id="37" name="Text 35"/>
+          <p:cNvSpPr txBox="1"/>
+          <p:nvPr/>
+        </p:nvSpPr>
+        <p:spPr>
+          <a:xfrm>
+            <a:off x="8412480" y="3886200"/>
+            <a:ext cx="3063240" cy="685800"/>
+          </a:xfrm>
+          <a:prstGeom prst="rect">
+            <a:avLst/>
+          </a:prstGeom>
+          <a:noFill/>
+          <a:ln/>
+        </p:spPr>
+        <p:txBody>
+          <a:bodyPr wrap="square" lIns="0" tIns="0" rIns="0" bIns="0" rtlCol="0" anchor="ctr"/>
+          <a:lstStyle/>
+          <a:p>
+            <a:pPr indent="0" marL="0">
+              <a:buNone/>
+            </a:pPr>
+            <a:r>
+              <a:rPr lang="en-US" sz="1800" dirty="0">
+                <a:solidFill>
+                  <a:schemeClr val="tx1"/>
+                </a:solidFill>
+              </a:rPr>
+              <a:t>Put it online with Amplify</a:t>
+            </a:r>
+            <a:endParaRPr lang="en-US" sz="1800" dirty="0"/>
+          </a:p>
+        </p:txBody>
+      </p:sp>
+      <p:sp>
+        <p:nvSpPr>
+          <p:cNvPr id="38" name="step 8 card"/>
+          <p:cNvSpPr/>
+          <p:nvPr/>
+        </p:nvSpPr>
+        <p:spPr>
+          <a:xfrm>
+            <a:off x="6172200" y="4892040"/>
+            <a:ext cx="5440680" cy="960120"/>
+          </a:xfrm>
+          <a:prstGeom prst="roundRect">
+            <a:avLst>
+              <a:gd name="adj" fmla="val 14286"/>
+            </a:avLst>
+          </a:prstGeom>
+          <a:solidFill>
+            <a:schemeClr val="bg1"/>
+          </a:solidFill>
+          <a:ln/>
+        </p:spPr>
+      </p:sp>
+      <p:sp>
+        <p:nvSpPr>
+          <p:cNvPr id="39" name="step 8 number"/>
+          <p:cNvSpPr/>
+          <p:nvPr/>
+        </p:nvSpPr>
+        <p:spPr>
+          <a:xfrm>
+            <a:off x="6355080" y="5029200"/>
+            <a:ext cx="685800" cy="685800"/>
+          </a:xfrm>
+          <a:prstGeom prst="ellipse">
+            <a:avLst/>
+          </a:prstGeom>
+          <a:solidFill>
+            <a:schemeClr val="accent1"/>
+          </a:solidFill>
+          <a:ln/>
+        </p:spPr>
+      </p:sp>
+      <p:sp>
+        <p:nvSpPr>
+          <p:cNvPr id="40" name="Text 38"/>
+          <p:cNvSpPr txBox="1"/>
+          <p:nvPr/>
+        </p:nvSpPr>
+        <p:spPr>
+          <a:xfrm>
+            <a:off x="6355080" y="5029200"/>
+            <a:ext cx="685800" cy="685800"/>
+          </a:xfrm>
+          <a:prstGeom prst="rect">
+            <a:avLst/>
+          </a:prstGeom>
+          <a:noFill/>
+          <a:ln/>
+        </p:spPr>
+        <p:txBody>
+          <a:bodyPr wrap="square" lIns="0" tIns="0" rIns="0" bIns="0" rtlCol="0" anchor="ctr"/>
+          <a:lstStyle/>
+          <a:p>
+            <a:pPr algn="ctr" indent="0" marL="0">
+              <a:buNone/>
+            </a:pPr>
+            <a:r>
+              <a:rPr lang="en-US" sz="2000" b="1" dirty="0">
+                <a:solidFill>
+                  <a:schemeClr val="tx1"/>
+                </a:solidFill>
+              </a:rPr>
+              <a:t>8</a:t>
+            </a:r>
+            <a:endParaRPr lang="en-US" sz="2000" dirty="0"/>
+          </a:p>
+        </p:txBody>
+      </p:sp>
+      <p:sp>
+        <p:nvSpPr>
+          <p:cNvPr id="41" name="Text 39"/>
+          <p:cNvSpPr txBox="1"/>
+          <p:nvPr/>
+        </p:nvSpPr>
+        <p:spPr>
+          <a:xfrm>
+            <a:off x="7269480" y="5029200"/>
+            <a:ext cx="1143000" cy="685800"/>
+          </a:xfrm>
+          <a:prstGeom prst="rect">
+            <a:avLst/>
+          </a:prstGeom>
+          <a:noFill/>
+          <a:ln/>
+        </p:spPr>
+        <p:txBody>
+          <a:bodyPr wrap="square" lIns="0" tIns="0" rIns="0" bIns="0" rtlCol="0" anchor="ctr"/>
+          <a:lstStyle/>
+          <a:p>
+            <a:pPr indent="0" marL="0">
+              <a:buNone/>
+            </a:pPr>
+            <a:r>
+              <a:rPr lang="en-US" sz="1600" b="1" dirty="0">
+                <a:solidFill>
+                  <a:schemeClr val="accent2"/>
+                </a:solidFill>
+              </a:rPr>
+              <a:t>44-45 min</a:t>
+            </a:r>
+            <a:endParaRPr lang="en-US" sz="1600" dirty="0"/>
+          </a:p>
+        </p:txBody>
+      </p:sp>
+      <p:sp>
+        <p:nvSpPr>
+          <p:cNvPr id="42" name="Text 40"/>
+          <p:cNvSpPr txBox="1"/>
+          <p:nvPr/>
+        </p:nvSpPr>
+        <p:spPr>
+          <a:xfrm>
+            <a:off x="8412480" y="5029200"/>
+            <a:ext cx="3063240" cy="685800"/>
+          </a:xfrm>
+          <a:prstGeom prst="rect">
+            <a:avLst/>
+          </a:prstGeom>
+          <a:noFill/>
+          <a:ln/>
+        </p:spPr>
+        <p:txBody>
+          <a:bodyPr wrap="square" lIns="0" tIns="0" rIns="0" bIns="0" rtlCol="0" anchor="ctr"/>
+          <a:lstStyle/>
+          <a:p>
+            <a:pPr indent="0" marL="0">
+              <a:buNone/>
+            </a:pPr>
+            <a:r>
+              <a:rPr lang="en-US" sz="1800" dirty="0">
+                <a:solidFill>
+                  <a:schemeClr val="tx1"/>
+                </a:solidFill>
+              </a:rPr>
+              <a:t>Wrap up and celebrate</a:t>
+            </a:r>
+            <a:endParaRPr lang="en-US" sz="1800" dirty="0"/>
+          </a:p>
+        </p:txBody>
+      </p:sp>
+      <p:sp>
+        <p:nvSpPr>
+          <p:cNvPr id="25" name="Slide Number Placeholder 0"/>
+          <p:cNvSpPr>
+            <a:spLocks noGrp="1"/>
+          </p:cNvSpPr>
+          <p:nvPr>
+            <p:ph type="sldNum" sz="quarter" idx="4294967295"/>
+          </p:nvPr>
+        </p:nvSpPr>
+        <p:spPr>
+          <a:xfrm>
+            <a:off x="11247120" y="6400800"/>
+            <a:ext cx="457200" cy="274320"/>
+          </a:xfrm>
+          <a:prstGeom prst="rect">
+            <a:avLst/>
+          </a:prstGeom>
+          <a:extLst>
+            <a:ext uri="{C572A759-6A51-4108-AA02-DFA0A04FC94B}">
+              <ma14:wrappingTextBoxFlag xmlns:ma14="http://schemas.microsoft.com/office/mac/drawingml/2011/main" val="0"/>
+            </a:ext>
+          </a:extLst>
+        </p:spPr>
+        <p:txBody>
+          <a:bodyPr/>
+          <a:lstStyle>
+            <a:lvl1pPr>
+              <a:defRPr sz="1000">
+                <a:solidFill>
+                  <a:schemeClr val="tx2"/>
+                </a:solidFill>
+              </a:defRPr>
+            </a:lvl1pPr>
+          </a:lstStyle>
+          <a:p>
+            <a:pPr algn="r"/>
+            <a:fld id="{F7021451-1387-4CA6-816F-3879F97B5CBC}" type="slidenum">
+              <a:rPr b="0" lang="en-US"/>
+              <a:t>16</a:t>
+            </a:fld>
+            <a:endParaRPr lang="en-US"/>
+          </a:p>
+        </p:txBody>
+      </p:sp>
+    </p:spTree>
+  </p:cSld>
+  <p:clrMapOvr>
+    <a:masterClrMapping/>
+  </p:clrMapOvr>
+</p:sld>
+</file>
+
+<file path=ppt/slides/slide17.xml><?xml version="1.0" encoding="utf-8"?>
+<p:sld xmlns:a="http://schemas.openxmlformats.org/drawingml/2006/main" xmlns:r="http://schemas.openxmlformats.org/officeDocument/2006/relationships" xmlns:p="http://schemas.openxmlformats.org/presentationml/2006/main">
+  <p:cSld name="Slide 17">
+    <p:spTree>
+      <p:nvGrpSpPr>
+        <p:cNvPr id="1" name=""/>
+        <p:cNvGrpSpPr/>
+        <p:nvPr/>
+      </p:nvGrpSpPr>
+      <p:grpSpPr>
+        <a:xfrm>
+          <a:off x="0" y="0"/>
+          <a:ext cx="0" cy="0"/>
+          <a:chOff x="0" y="0"/>
+          <a:chExt cx="0" cy="0"/>
+        </a:xfrm>
+      </p:grpSpPr>
+      <p:sp>
+        <p:nvSpPr>
+          <p:cNvPr id="2" name="Text 0"/>
+          <p:cNvSpPr/>
+          <p:nvPr>
+            <p:ph idx="100" type="title" hasCustomPrompt="1"/>
+          </p:nvPr>
+        </p:nvSpPr>
+        <p:spPr>
+          <a:xfrm>
+            <a:off x="548640" y="365760"/>
+            <a:ext cx="11064240" cy="822960"/>
+          </a:xfrm>
+          <a:prstGeom prst="rect">
+            <a:avLst/>
+          </a:prstGeom>
+          <a:noFill/>
+          <a:ln/>
+        </p:spPr>
+        <p:txBody>
+          <a:bodyPr wrap="square" lIns="0" tIns="0" rIns="0" bIns="0" rtlCol="0" anchor="ctr"/>
+          <a:lstStyle/>
+          <a:p>
+            <a:pPr indent="0" marL="0">
+              <a:buNone/>
+            </a:pPr>
+            <a:r>
+              <a:rPr lang="en-US" sz="3600" b="1" dirty="0">
+                <a:solidFill>
+                  <a:schemeClr val="tx1"/>
+                </a:solidFill>
+              </a:rPr>
+              <a:t>You don't need to be an expert</a:t>
+            </a:r>
+            <a:endParaRPr lang="en-US" sz="3600" dirty="0"/>
+          </a:p>
+        </p:txBody>
+      </p:sp>
+      <p:sp>
+        <p:nvSpPr>
+          <p:cNvPr id="3" name="need 1 card"/>
+          <p:cNvSpPr/>
+          <p:nvPr/>
+        </p:nvSpPr>
+        <p:spPr>
+          <a:xfrm>
+            <a:off x="548640" y="1645920"/>
+            <a:ext cx="3520440" cy="3474720"/>
+          </a:xfrm>
+          <a:prstGeom prst="roundRect">
+            <a:avLst>
+              <a:gd name="adj" fmla="val 3947"/>
+            </a:avLst>
+          </a:prstGeom>
+          <a:solidFill>
+            <a:schemeClr val="bg2"/>
+          </a:solidFill>
+          <a:ln/>
+        </p:spPr>
+      </p:sp>
+      <p:sp>
+        <p:nvSpPr>
+          <p:cNvPr id="4" name="need 1 circle"/>
+          <p:cNvSpPr/>
+          <p:nvPr/>
+        </p:nvSpPr>
+        <p:spPr>
+          <a:xfrm>
+            <a:off x="822960" y="1920240"/>
+            <a:ext cx="731520" cy="731520"/>
+          </a:xfrm>
+          <a:prstGeom prst="ellipse">
+            <a:avLst/>
+          </a:prstGeom>
+          <a:solidFill>
+            <a:schemeClr val="accent1"/>
+          </a:solidFill>
+          <a:ln/>
+        </p:spPr>
+      </p:sp>
+      <p:pic>
+        <p:nvPicPr>
+          <p:cNvPr id="5" name="need 1 icon" descr="need 1">    </p:cNvPr>
+          <p:cNvPicPr>
+            <a:picLocks noChangeAspect="1"/>
+          </p:cNvPicPr>
+          <p:nvPr/>
+        </p:nvPicPr>
+        <p:blipFill>
+          <a:blip r:embed="rId1"/>
+          <a:stretch>
+            <a:fillRect/>
+          </a:stretch>
+        </p:blipFill>
+        <p:spPr>
+          <a:xfrm>
+            <a:off x="1005840" y="2103120"/>
+            <a:ext cx="365760" cy="365760"/>
+          </a:xfrm>
+          <a:prstGeom prst="rect">
+            <a:avLst/>
+          </a:prstGeom>
+        </p:spPr>
+      </p:pic>
+      <p:sp>
+        <p:nvSpPr>
+          <p:cNvPr id="6" name="need 1 head"/>
+          <p:cNvSpPr txBox="1"/>
+          <p:nvPr/>
+        </p:nvSpPr>
+        <p:spPr>
+          <a:xfrm>
+            <a:off x="822960" y="2834640"/>
+            <a:ext cx="2971800" cy="457200"/>
+          </a:xfrm>
+          <a:prstGeom prst="rect">
+            <a:avLst/>
+          </a:prstGeom>
+          <a:noFill/>
+          <a:ln/>
+        </p:spPr>
+        <p:txBody>
+          <a:bodyPr wrap="square" lIns="0" tIns="0" rIns="0" bIns="0" rtlCol="0" anchor="t"/>
+          <a:lstStyle/>
+          <a:p>
+            <a:pPr indent="0" marL="0">
+              <a:buNone/>
+            </a:pPr>
+            <a:r>
+              <a:rPr lang="en-US" sz="2200" b="1" dirty="0">
+                <a:solidFill>
+                  <a:schemeClr val="tx1"/>
+                </a:solidFill>
+              </a:rPr>
+              <a:t>What you need</a:t>
+            </a:r>
+            <a:endParaRPr lang="en-US" sz="2200" dirty="0"/>
+          </a:p>
+        </p:txBody>
+      </p:sp>
+      <p:sp>
+        <p:nvSpPr>
+          <p:cNvPr id="7" name="need 1 body"/>
+          <p:cNvSpPr txBox="1"/>
+          <p:nvPr/>
+        </p:nvSpPr>
+        <p:spPr>
+          <a:xfrm>
+            <a:off x="822960" y="3337560"/>
+            <a:ext cx="2971800" cy="1554480"/>
+          </a:xfrm>
+          <a:prstGeom prst="rect">
+            <a:avLst/>
+          </a:prstGeom>
+          <a:noFill/>
+          <a:ln/>
+        </p:spPr>
+        <p:txBody>
+          <a:bodyPr wrap="square" lIns="0" tIns="0" rIns="0" bIns="0" rtlCol="0" anchor="t"/>
+          <a:lstStyle/>
+          <a:p>
+            <a:pPr indent="0" marL="0">
+              <a:buNone/>
+            </a:pPr>
+            <a:r>
+              <a:rPr lang="en-US" sz="1800" dirty="0">
+                <a:solidFill>
+                  <a:schemeClr val="tx2"/>
+                </a:solidFill>
+              </a:rPr>
+              <a:t>A laptop, an AWS account, and your curiosity. That's it.</a:t>
+            </a:r>
+            <a:endParaRPr lang="en-US" sz="1800" dirty="0"/>
+          </a:p>
+        </p:txBody>
+      </p:sp>
+      <p:sp>
+        <p:nvSpPr>
+          <p:cNvPr id="8" name="need 2 card"/>
+          <p:cNvSpPr/>
+          <p:nvPr/>
+        </p:nvSpPr>
+        <p:spPr>
+          <a:xfrm>
+            <a:off x="4343400" y="1645920"/>
+            <a:ext cx="3520440" cy="3474720"/>
+          </a:xfrm>
+          <a:prstGeom prst="roundRect">
+            <a:avLst>
+              <a:gd name="adj" fmla="val 3947"/>
+            </a:avLst>
+          </a:prstGeom>
+          <a:solidFill>
+            <a:schemeClr val="bg2"/>
+          </a:solidFill>
+          <a:ln/>
+        </p:spPr>
+      </p:sp>
+      <p:sp>
+        <p:nvSpPr>
+          <p:cNvPr id="9" name="need 2 circle"/>
+          <p:cNvSpPr/>
+          <p:nvPr/>
+        </p:nvSpPr>
+        <p:spPr>
+          <a:xfrm>
+            <a:off x="4617720" y="1920240"/>
+            <a:ext cx="731520" cy="731520"/>
+          </a:xfrm>
+          <a:prstGeom prst="ellipse">
+            <a:avLst/>
+          </a:prstGeom>
+          <a:solidFill>
+            <a:schemeClr val="accent1"/>
+          </a:solidFill>
+          <a:ln/>
+        </p:spPr>
+      </p:sp>
+      <p:pic>
+        <p:nvPicPr>
+          <p:cNvPr id="10" name="need 2 icon" descr="need 2">    </p:cNvPr>
+          <p:cNvPicPr>
+            <a:picLocks noChangeAspect="1"/>
+          </p:cNvPicPr>
+          <p:nvPr/>
+        </p:nvPicPr>
+        <p:blipFill>
+          <a:blip r:embed="rId2"/>
+          <a:stretch>
+            <a:fillRect/>
+          </a:stretch>
+        </p:blipFill>
+        <p:spPr>
+          <a:xfrm>
+            <a:off x="4800600" y="2103120"/>
+            <a:ext cx="365760" cy="365760"/>
+          </a:xfrm>
+          <a:prstGeom prst="rect">
+            <a:avLst/>
+          </a:prstGeom>
+        </p:spPr>
+      </p:pic>
+      <p:sp>
+        <p:nvSpPr>
+          <p:cNvPr id="11" name="need 2 head"/>
+          <p:cNvSpPr txBox="1"/>
+          <p:nvPr/>
+        </p:nvSpPr>
+        <p:spPr>
+          <a:xfrm>
+            <a:off x="4617720" y="2834640"/>
+            <a:ext cx="2971800" cy="457200"/>
+          </a:xfrm>
+          <a:prstGeom prst="rect">
+            <a:avLst/>
+          </a:prstGeom>
+          <a:noFill/>
+          <a:ln/>
+        </p:spPr>
+        <p:txBody>
+          <a:bodyPr wrap="square" lIns="0" tIns="0" rIns="0" bIns="0" rtlCol="0" anchor="t"/>
+          <a:lstStyle/>
+          <a:p>
+            <a:pPr indent="0" marL="0">
+              <a:buNone/>
+            </a:pPr>
+            <a:r>
+              <a:rPr lang="en-US" sz="2200" b="1" dirty="0">
+                <a:solidFill>
+                  <a:schemeClr val="tx1"/>
+                </a:solidFill>
+              </a:rPr>
+              <a:t>Errors are clues</a:t>
+            </a:r>
+            <a:endParaRPr lang="en-US" sz="2200" dirty="0"/>
+          </a:p>
+        </p:txBody>
+      </p:sp>
+      <p:sp>
+        <p:nvSpPr>
+          <p:cNvPr id="12" name="need 2 body"/>
+          <p:cNvSpPr txBox="1"/>
+          <p:nvPr/>
+        </p:nvSpPr>
+        <p:spPr>
+          <a:xfrm>
+            <a:off x="4617720" y="3337560"/>
+            <a:ext cx="2971800" cy="1554480"/>
+          </a:xfrm>
+          <a:prstGeom prst="rect">
+            <a:avLst/>
+          </a:prstGeom>
+          <a:noFill/>
+          <a:ln/>
+        </p:spPr>
+        <p:txBody>
+          <a:bodyPr wrap="square" lIns="0" tIns="0" rIns="0" bIns="0" rtlCol="0" anchor="t"/>
+          <a:lstStyle/>
+          <a:p>
+            <a:pPr indent="0" marL="0">
+              <a:buNone/>
+            </a:pPr>
+            <a:r>
+              <a:rPr lang="en-US" sz="1800" dirty="0">
+                <a:solidFill>
+                  <a:schemeClr val="tx2"/>
+                </a:solidFill>
+              </a:rPr>
+              <a:t>Red error messages are normal. They tell us what to fix. They don't mean you failed.</a:t>
+            </a:r>
+            <a:endParaRPr lang="en-US" sz="1800" dirty="0"/>
+          </a:p>
+        </p:txBody>
+      </p:sp>
+      <p:sp>
+        <p:nvSpPr>
+          <p:cNvPr id="13" name="need 3 card"/>
+          <p:cNvSpPr/>
+          <p:nvPr/>
+        </p:nvSpPr>
+        <p:spPr>
+          <a:xfrm>
+            <a:off x="8138160" y="1645920"/>
+            <a:ext cx="3520440" cy="3474720"/>
+          </a:xfrm>
+          <a:prstGeom prst="roundRect">
+            <a:avLst>
+              <a:gd name="adj" fmla="val 3947"/>
+            </a:avLst>
+          </a:prstGeom>
+          <a:solidFill>
+            <a:schemeClr val="bg2"/>
+          </a:solidFill>
+          <a:ln/>
+        </p:spPr>
+      </p:sp>
+      <p:sp>
+        <p:nvSpPr>
+          <p:cNvPr id="14" name="need 3 circle"/>
+          <p:cNvSpPr/>
+          <p:nvPr/>
+        </p:nvSpPr>
+        <p:spPr>
+          <a:xfrm>
+            <a:off x="8412480" y="1920240"/>
+            <a:ext cx="731520" cy="731520"/>
+          </a:xfrm>
+          <a:prstGeom prst="ellipse">
+            <a:avLst/>
+          </a:prstGeom>
+          <a:solidFill>
+            <a:schemeClr val="accent1"/>
+          </a:solidFill>
+          <a:ln/>
+        </p:spPr>
+      </p:sp>
+      <p:pic>
+        <p:nvPicPr>
+          <p:cNvPr id="15" name="need 3 icon" descr="need 3">    </p:cNvPr>
+          <p:cNvPicPr>
+            <a:picLocks noChangeAspect="1"/>
+          </p:cNvPicPr>
+          <p:nvPr/>
+        </p:nvPicPr>
+        <p:blipFill>
+          <a:blip r:embed="rId3"/>
+          <a:stretch>
+            <a:fillRect/>
+          </a:stretch>
+        </p:blipFill>
+        <p:spPr>
+          <a:xfrm>
+            <a:off x="8595360" y="2103120"/>
+            <a:ext cx="365760" cy="365760"/>
+          </a:xfrm>
+          <a:prstGeom prst="rect">
+            <a:avLst/>
+          </a:prstGeom>
+        </p:spPr>
+      </p:pic>
+      <p:sp>
+        <p:nvSpPr>
+          <p:cNvPr id="16" name="need 3 head"/>
+          <p:cNvSpPr txBox="1"/>
+          <p:nvPr/>
+        </p:nvSpPr>
+        <p:spPr>
+          <a:xfrm>
+            <a:off x="8412480" y="2834640"/>
+            <a:ext cx="2971800" cy="457200"/>
+          </a:xfrm>
+          <a:prstGeom prst="rect">
+            <a:avLst/>
+          </a:prstGeom>
+          <a:noFill/>
+          <a:ln/>
+        </p:spPr>
+        <p:txBody>
+          <a:bodyPr wrap="square" lIns="0" tIns="0" rIns="0" bIns="0" rtlCol="0" anchor="t"/>
+          <a:lstStyle/>
+          <a:p>
+            <a:pPr indent="0" marL="0">
+              <a:buNone/>
+            </a:pPr>
+            <a:r>
+              <a:rPr lang="en-US" sz="2200" b="1" dirty="0">
+                <a:solidFill>
+                  <a:schemeClr val="tx1"/>
+                </a:solidFill>
+              </a:rPr>
+              <a:t>Help each other</a:t>
+            </a:r>
+            <a:endParaRPr lang="en-US" sz="2200" dirty="0"/>
+          </a:p>
+        </p:txBody>
+      </p:sp>
+      <p:sp>
+        <p:nvSpPr>
+          <p:cNvPr id="17" name="need 3 body"/>
+          <p:cNvSpPr txBox="1"/>
+          <p:nvPr/>
+        </p:nvSpPr>
+        <p:spPr>
+          <a:xfrm>
+            <a:off x="8412480" y="3337560"/>
+            <a:ext cx="2971800" cy="1554480"/>
+          </a:xfrm>
+          <a:prstGeom prst="rect">
+            <a:avLst/>
+          </a:prstGeom>
+          <a:noFill/>
+          <a:ln/>
+        </p:spPr>
+        <p:txBody>
+          <a:bodyPr wrap="square" lIns="0" tIns="0" rIns="0" bIns="0" rtlCol="0" anchor="t"/>
+          <a:lstStyle/>
+          <a:p>
+            <a:pPr indent="0" marL="0">
+              <a:buNone/>
+            </a:pPr>
+            <a:r>
+              <a:rPr lang="en-US" sz="1800" dirty="0">
+                <a:solidFill>
+                  <a:schemeClr val="tx2"/>
+                </a:solidFill>
+              </a:rPr>
+              <a:t>Stuck? Raise your hand. Finished early? Help your neighbor.</a:t>
+            </a:r>
+            <a:endParaRPr lang="en-US" sz="1800" dirty="0"/>
+          </a:p>
+        </p:txBody>
+      </p:sp>
+      <p:sp>
+        <p:nvSpPr>
+          <p:cNvPr id="25" name="Slide Number Placeholder 0"/>
+          <p:cNvSpPr>
+            <a:spLocks noGrp="1"/>
+          </p:cNvSpPr>
+          <p:nvPr>
+            <p:ph type="sldNum" sz="quarter" idx="4294967295"/>
+          </p:nvPr>
+        </p:nvSpPr>
+        <p:spPr>
+          <a:xfrm>
+            <a:off x="11247120" y="6400800"/>
+            <a:ext cx="457200" cy="274320"/>
+          </a:xfrm>
+          <a:prstGeom prst="rect">
+            <a:avLst/>
+          </a:prstGeom>
+          <a:extLst>
+            <a:ext uri="{C572A759-6A51-4108-AA02-DFA0A04FC94B}">
+              <ma14:wrappingTextBoxFlag xmlns:ma14="http://schemas.microsoft.com/office/mac/drawingml/2011/main" val="0"/>
+            </a:ext>
+          </a:extLst>
+        </p:spPr>
+        <p:txBody>
+          <a:bodyPr/>
+          <a:lstStyle>
+            <a:lvl1pPr>
+              <a:defRPr sz="1000">
+                <a:solidFill>
+                  <a:schemeClr val="tx2"/>
+                </a:solidFill>
+              </a:defRPr>
+            </a:lvl1pPr>
+          </a:lstStyle>
+          <a:p>
+            <a:pPr algn="r"/>
+            <a:fld id="{F7021451-1387-4CA6-816F-3879F97B5CBC}" type="slidenum">
+              <a:rPr b="0" lang="en-US"/>
+              <a:t>17</a:t>
+            </a:fld>
+            <a:endParaRPr lang="en-US"/>
+          </a:p>
+        </p:txBody>
+      </p:sp>
+    </p:spTree>
+  </p:cSld>
+  <p:clrMapOvr>
+    <a:masterClrMapping/>
+  </p:clrMapOvr>
+</p:sld>
+</file>
+
+<file path=ppt/slides/slide18.xml><?xml version="1.0" encoding="utf-8"?>
+<p:sld xmlns:a="http://schemas.openxmlformats.org/drawingml/2006/main" xmlns:r="http://schemas.openxmlformats.org/officeDocument/2006/relationships" xmlns:p="http://schemas.openxmlformats.org/presentationml/2006/main">
+  <p:cSld name="Slide 18">
+    <p:spTree>
+      <p:nvGrpSpPr>
+        <p:cNvPr id="1" name=""/>
+        <p:cNvGrpSpPr/>
+        <p:nvPr/>
+      </p:nvGrpSpPr>
+      <p:grpSpPr>
+        <a:xfrm>
+          <a:off x="0" y="0"/>
+          <a:ext cx="0" cy="0"/>
+          <a:chOff x="0" y="0"/>
+          <a:chExt cx="0" cy="0"/>
+        </a:xfrm>
+      </p:grpSpPr>
+      <p:sp>
+        <p:nvSpPr>
+          <p:cNvPr id="2" name="Text 0"/>
+          <p:cNvSpPr/>
+          <p:nvPr>
+            <p:ph idx="100" type="title" hasCustomPrompt="1"/>
+          </p:nvPr>
+        </p:nvSpPr>
+        <p:spPr>
+          <a:xfrm>
+            <a:off x="548640" y="365760"/>
+            <a:ext cx="11064240" cy="822960"/>
+          </a:xfrm>
+          <a:prstGeom prst="rect">
+            <a:avLst/>
+          </a:prstGeom>
+          <a:noFill/>
+          <a:ln/>
+        </p:spPr>
+        <p:txBody>
+          <a:bodyPr wrap="square" lIns="0" tIns="0" rIns="0" bIns="0" rtlCol="0" anchor="ctr"/>
+          <a:lstStyle/>
+          <a:p>
+            <a:pPr indent="0" marL="0">
+              <a:buNone/>
+            </a:pPr>
+            <a:r>
+              <a:rPr lang="en-US" sz="3600" b="1" dirty="0">
+                <a:solidFill>
+                  <a:schemeClr val="tx1"/>
+                </a:solidFill>
+              </a:rPr>
+              <a:t>Where these skills can take you</a:t>
+            </a:r>
+            <a:endParaRPr lang="en-US" sz="3600" dirty="0"/>
+          </a:p>
+        </p:txBody>
+      </p:sp>
+      <p:sp>
+        <p:nvSpPr>
+          <p:cNvPr id="3" name="job 1 card"/>
+          <p:cNvSpPr/>
+          <p:nvPr/>
+        </p:nvSpPr>
+        <p:spPr>
+          <a:xfrm>
+            <a:off x="548640" y="1645920"/>
+            <a:ext cx="3520440" cy="1737360"/>
+          </a:xfrm>
+          <a:prstGeom prst="roundRect">
+            <a:avLst>
+              <a:gd name="adj" fmla="val 7895"/>
+            </a:avLst>
+          </a:prstGeom>
+          <a:solidFill>
+            <a:schemeClr val="bg2"/>
+          </a:solidFill>
+          <a:ln/>
+        </p:spPr>
+      </p:sp>
+      <p:sp>
+        <p:nvSpPr>
+          <p:cNvPr id="4" name="job 1 circle"/>
+          <p:cNvSpPr/>
+          <p:nvPr/>
+        </p:nvSpPr>
+        <p:spPr>
+          <a:xfrm>
+            <a:off x="822960" y="2057400"/>
+            <a:ext cx="914400" cy="914400"/>
+          </a:xfrm>
+          <a:prstGeom prst="ellipse">
+            <a:avLst/>
+          </a:prstGeom>
+          <a:solidFill>
+            <a:schemeClr val="accent1"/>
+          </a:solidFill>
+          <a:ln/>
+        </p:spPr>
+      </p:sp>
+      <p:pic>
+        <p:nvPicPr>
+          <p:cNvPr id="5" name="job 1 icon" descr="job 1">    </p:cNvPr>
+          <p:cNvPicPr>
+            <a:picLocks noChangeAspect="1"/>
+          </p:cNvPicPr>
+          <p:nvPr/>
+        </p:nvPicPr>
+        <p:blipFill>
+          <a:blip r:embed="rId1"/>
+          <a:stretch>
+            <a:fillRect/>
+          </a:stretch>
+        </p:blipFill>
+        <p:spPr>
+          <a:xfrm>
+            <a:off x="1051560" y="2286000"/>
+            <a:ext cx="457200" cy="457200"/>
+          </a:xfrm>
+          <a:prstGeom prst="rect">
+            <a:avLst/>
+          </a:prstGeom>
+        </p:spPr>
+      </p:pic>
+      <p:sp>
+        <p:nvSpPr>
+          <p:cNvPr id="6" name="Text 3"/>
+          <p:cNvSpPr txBox="1"/>
+          <p:nvPr/>
+        </p:nvSpPr>
+        <p:spPr>
+          <a:xfrm>
+            <a:off x="1965960" y="2057400"/>
+            <a:ext cx="1965960" cy="914400"/>
+          </a:xfrm>
+          <a:prstGeom prst="rect">
+            <a:avLst/>
+          </a:prstGeom>
+          <a:noFill/>
+          <a:ln/>
+        </p:spPr>
+        <p:txBody>
+          <a:bodyPr wrap="square" lIns="0" tIns="0" rIns="0" bIns="0" rtlCol="0" anchor="ctr"/>
+          <a:lstStyle/>
+          <a:p>
+            <a:pPr indent="0" marL="0">
+              <a:buNone/>
+            </a:pPr>
+            <a:r>
+              <a:rPr lang="en-US" sz="2000" b="1" dirty="0">
+                <a:solidFill>
+                  <a:schemeClr val="tx1"/>
+                </a:solidFill>
+              </a:rPr>
+              <a:t>Cloud Engineer</a:t>
+            </a:r>
+            <a:endParaRPr lang="en-US" sz="2000" dirty="0"/>
+          </a:p>
+        </p:txBody>
+      </p:sp>
+      <p:sp>
+        <p:nvSpPr>
+          <p:cNvPr id="7" name="job 2 card"/>
+          <p:cNvSpPr/>
+          <p:nvPr/>
+        </p:nvSpPr>
+        <p:spPr>
+          <a:xfrm>
+            <a:off x="4343400" y="1645920"/>
+            <a:ext cx="3520440" cy="1737360"/>
+          </a:xfrm>
+          <a:prstGeom prst="roundRect">
+            <a:avLst>
+              <a:gd name="adj" fmla="val 7895"/>
+            </a:avLst>
+          </a:prstGeom>
+          <a:solidFill>
+            <a:schemeClr val="bg2"/>
+          </a:solidFill>
+          <a:ln/>
+        </p:spPr>
+      </p:sp>
+      <p:sp>
+        <p:nvSpPr>
+          <p:cNvPr id="8" name="job 2 circle"/>
+          <p:cNvSpPr/>
+          <p:nvPr/>
+        </p:nvSpPr>
+        <p:spPr>
+          <a:xfrm>
+            <a:off x="4617720" y="2057400"/>
+            <a:ext cx="914400" cy="914400"/>
+          </a:xfrm>
+          <a:prstGeom prst="ellipse">
+            <a:avLst/>
+          </a:prstGeom>
+          <a:solidFill>
+            <a:schemeClr val="accent1"/>
+          </a:solidFill>
+          <a:ln/>
+        </p:spPr>
+      </p:sp>
+      <p:pic>
+        <p:nvPicPr>
+          <p:cNvPr id="9" name="job 2 icon" descr="job 2">    </p:cNvPr>
+          <p:cNvPicPr>
+            <a:picLocks noChangeAspect="1"/>
+          </p:cNvPicPr>
+          <p:nvPr/>
+        </p:nvPicPr>
+        <p:blipFill>
+          <a:blip r:embed="rId2"/>
+          <a:stretch>
+            <a:fillRect/>
+          </a:stretch>
+        </p:blipFill>
+        <p:spPr>
+          <a:xfrm>
+            <a:off x="4846320" y="2286000"/>
+            <a:ext cx="457200" cy="457200"/>
+          </a:xfrm>
+          <a:prstGeom prst="rect">
+            <a:avLst/>
+          </a:prstGeom>
+        </p:spPr>
+      </p:pic>
+      <p:sp>
+        <p:nvSpPr>
+          <p:cNvPr id="10" name="Text 6"/>
+          <p:cNvSpPr txBox="1"/>
+          <p:nvPr/>
+        </p:nvSpPr>
+        <p:spPr>
+          <a:xfrm>
+            <a:off x="5760720" y="2057400"/>
+            <a:ext cx="1965960" cy="914400"/>
+          </a:xfrm>
+          <a:prstGeom prst="rect">
+            <a:avLst/>
+          </a:prstGeom>
+          <a:noFill/>
+          <a:ln/>
+        </p:spPr>
+        <p:txBody>
+          <a:bodyPr wrap="square" lIns="0" tIns="0" rIns="0" bIns="0" rtlCol="0" anchor="ctr"/>
+          <a:lstStyle/>
+          <a:p>
+            <a:pPr indent="0" marL="0">
+              <a:buNone/>
+            </a:pPr>
+            <a:r>
+              <a:rPr lang="en-US" sz="2000" b="1" dirty="0">
+                <a:solidFill>
+                  <a:schemeClr val="tx1"/>
+                </a:solidFill>
+              </a:rPr>
+              <a:t>AI Engineer</a:t>
+            </a:r>
+            <a:endParaRPr lang="en-US" sz="2000" dirty="0"/>
+          </a:p>
+        </p:txBody>
+      </p:sp>
+      <p:sp>
+        <p:nvSpPr>
+          <p:cNvPr id="11" name="job 3 card"/>
+          <p:cNvSpPr/>
+          <p:nvPr/>
+        </p:nvSpPr>
+        <p:spPr>
+          <a:xfrm>
+            <a:off x="8138160" y="1645920"/>
+            <a:ext cx="3520440" cy="1737360"/>
+          </a:xfrm>
+          <a:prstGeom prst="roundRect">
+            <a:avLst>
+              <a:gd name="adj" fmla="val 7895"/>
+            </a:avLst>
+          </a:prstGeom>
+          <a:solidFill>
+            <a:schemeClr val="bg2"/>
+          </a:solidFill>
+          <a:ln/>
+        </p:spPr>
+      </p:sp>
+      <p:sp>
+        <p:nvSpPr>
+          <p:cNvPr id="12" name="job 3 circle"/>
+          <p:cNvSpPr/>
+          <p:nvPr/>
+        </p:nvSpPr>
+        <p:spPr>
+          <a:xfrm>
+            <a:off x="8412480" y="2057400"/>
+            <a:ext cx="914400" cy="914400"/>
+          </a:xfrm>
+          <a:prstGeom prst="ellipse">
+            <a:avLst/>
+          </a:prstGeom>
+          <a:solidFill>
+            <a:schemeClr val="accent1"/>
+          </a:solidFill>
+          <a:ln/>
+        </p:spPr>
+      </p:sp>
+      <p:pic>
+        <p:nvPicPr>
+          <p:cNvPr id="13" name="job 3 icon" descr="job 3">    </p:cNvPr>
+          <p:cNvPicPr>
+            <a:picLocks noChangeAspect="1"/>
+          </p:cNvPicPr>
+          <p:nvPr/>
+        </p:nvPicPr>
+        <p:blipFill>
+          <a:blip r:embed="rId3"/>
+          <a:stretch>
+            <a:fillRect/>
+          </a:stretch>
+        </p:blipFill>
+        <p:spPr>
+          <a:xfrm>
+            <a:off x="8641080" y="2286000"/>
+            <a:ext cx="457200" cy="457200"/>
+          </a:xfrm>
+          <a:prstGeom prst="rect">
+            <a:avLst/>
+          </a:prstGeom>
+        </p:spPr>
+      </p:pic>
+      <p:sp>
+        <p:nvSpPr>
+          <p:cNvPr id="14" name="Text 9"/>
+          <p:cNvSpPr txBox="1"/>
+          <p:nvPr/>
+        </p:nvSpPr>
+        <p:spPr>
+          <a:xfrm>
+            <a:off x="9555480" y="2057400"/>
+            <a:ext cx="1965960" cy="914400"/>
+          </a:xfrm>
+          <a:prstGeom prst="rect">
+            <a:avLst/>
+          </a:prstGeom>
+          <a:noFill/>
+          <a:ln/>
+        </p:spPr>
+        <p:txBody>
+          <a:bodyPr wrap="square" lIns="0" tIns="0" rIns="0" bIns="0" rtlCol="0" anchor="ctr"/>
+          <a:lstStyle/>
+          <a:p>
+            <a:pPr indent="0" marL="0">
+              <a:buNone/>
+            </a:pPr>
+            <a:r>
+              <a:rPr lang="en-US" sz="2000" b="1" dirty="0">
+                <a:solidFill>
+                  <a:schemeClr val="tx1"/>
+                </a:solidFill>
+              </a:rPr>
+              <a:t>Cybersecurity Analyst</a:t>
+            </a:r>
+            <a:endParaRPr lang="en-US" sz="2000" dirty="0"/>
+          </a:p>
+        </p:txBody>
+      </p:sp>
+      <p:sp>
+        <p:nvSpPr>
+          <p:cNvPr id="15" name="job 4 card"/>
+          <p:cNvSpPr/>
+          <p:nvPr/>
+        </p:nvSpPr>
+        <p:spPr>
+          <a:xfrm>
+            <a:off x="548640" y="3657600"/>
+            <a:ext cx="3520440" cy="1737360"/>
+          </a:xfrm>
+          <a:prstGeom prst="roundRect">
+            <a:avLst>
+              <a:gd name="adj" fmla="val 7895"/>
+            </a:avLst>
+          </a:prstGeom>
+          <a:solidFill>
+            <a:schemeClr val="bg2"/>
+          </a:solidFill>
+          <a:ln/>
+        </p:spPr>
+      </p:sp>
+      <p:sp>
+        <p:nvSpPr>
+          <p:cNvPr id="16" name="job 4 circle"/>
+          <p:cNvSpPr/>
+          <p:nvPr/>
+        </p:nvSpPr>
+        <p:spPr>
+          <a:xfrm>
+            <a:off x="822960" y="4069080"/>
+            <a:ext cx="914400" cy="914400"/>
+          </a:xfrm>
+          <a:prstGeom prst="ellipse">
+            <a:avLst/>
+          </a:prstGeom>
+          <a:solidFill>
+            <a:schemeClr val="accent1"/>
+          </a:solidFill>
+          <a:ln/>
+        </p:spPr>
+      </p:sp>
+      <p:pic>
+        <p:nvPicPr>
+          <p:cNvPr id="17" name="job 4 icon" descr="job 4">    </p:cNvPr>
+          <p:cNvPicPr>
+            <a:picLocks noChangeAspect="1"/>
+          </p:cNvPicPr>
+          <p:nvPr/>
+        </p:nvPicPr>
+        <p:blipFill>
+          <a:blip r:embed="rId4"/>
+          <a:stretch>
+            <a:fillRect/>
+          </a:stretch>
+        </p:blipFill>
+        <p:spPr>
+          <a:xfrm>
+            <a:off x="1051560" y="4297680"/>
+            <a:ext cx="457200" cy="457200"/>
+          </a:xfrm>
+          <a:prstGeom prst="rect">
+            <a:avLst/>
+          </a:prstGeom>
+        </p:spPr>
+      </p:pic>
+      <p:sp>
+        <p:nvSpPr>
+          <p:cNvPr id="18" name="Text 12"/>
+          <p:cNvSpPr txBox="1"/>
+          <p:nvPr/>
+        </p:nvSpPr>
+        <p:spPr>
+          <a:xfrm>
+            <a:off x="1965960" y="4069080"/>
+            <a:ext cx="1965960" cy="914400"/>
+          </a:xfrm>
+          <a:prstGeom prst="rect">
+            <a:avLst/>
+          </a:prstGeom>
+          <a:noFill/>
+          <a:ln/>
+        </p:spPr>
+        <p:txBody>
+          <a:bodyPr wrap="square" lIns="0" tIns="0" rIns="0" bIns="0" rtlCol="0" anchor="ctr"/>
+          <a:lstStyle/>
+          <a:p>
+            <a:pPr indent="0" marL="0">
+              <a:buNone/>
+            </a:pPr>
+            <a:r>
+              <a:rPr lang="en-US" sz="2000" b="1" dirty="0">
+                <a:solidFill>
+                  <a:schemeClr val="tx1"/>
+                </a:solidFill>
+              </a:rPr>
+              <a:t>Data Analyst</a:t>
+            </a:r>
+            <a:endParaRPr lang="en-US" sz="2000" dirty="0"/>
+          </a:p>
+        </p:txBody>
+      </p:sp>
+      <p:sp>
+        <p:nvSpPr>
+          <p:cNvPr id="19" name="job 5 card"/>
+          <p:cNvSpPr/>
+          <p:nvPr/>
+        </p:nvSpPr>
+        <p:spPr>
+          <a:xfrm>
+            <a:off x="4343400" y="3657600"/>
+            <a:ext cx="3520440" cy="1737360"/>
+          </a:xfrm>
+          <a:prstGeom prst="roundRect">
+            <a:avLst>
+              <a:gd name="adj" fmla="val 7895"/>
+            </a:avLst>
+          </a:prstGeom>
+          <a:solidFill>
+            <a:schemeClr val="bg2"/>
+          </a:solidFill>
+          <a:ln/>
+        </p:spPr>
+      </p:sp>
+      <p:sp>
+        <p:nvSpPr>
+          <p:cNvPr id="20" name="job 5 circle"/>
+          <p:cNvSpPr/>
+          <p:nvPr/>
+        </p:nvSpPr>
+        <p:spPr>
+          <a:xfrm>
+            <a:off x="4617720" y="4069080"/>
+            <a:ext cx="914400" cy="914400"/>
+          </a:xfrm>
+          <a:prstGeom prst="ellipse">
+            <a:avLst/>
+          </a:prstGeom>
+          <a:solidFill>
+            <a:schemeClr val="accent1"/>
+          </a:solidFill>
+          <a:ln/>
+        </p:spPr>
+      </p:sp>
+      <p:pic>
+        <p:nvPicPr>
+          <p:cNvPr id="21" name="job 5 icon" descr="job 5">    </p:cNvPr>
+          <p:cNvPicPr>
+            <a:picLocks noChangeAspect="1"/>
+          </p:cNvPicPr>
+          <p:nvPr/>
+        </p:nvPicPr>
+        <p:blipFill>
+          <a:blip r:embed="rId5"/>
+          <a:stretch>
+            <a:fillRect/>
+          </a:stretch>
+        </p:blipFill>
+        <p:spPr>
+          <a:xfrm>
+            <a:off x="4846320" y="4297680"/>
+            <a:ext cx="457200" cy="457200"/>
+          </a:xfrm>
+          <a:prstGeom prst="rect">
+            <a:avLst/>
+          </a:prstGeom>
+        </p:spPr>
+      </p:pic>
+      <p:sp>
+        <p:nvSpPr>
+          <p:cNvPr id="22" name="Text 15"/>
+          <p:cNvSpPr txBox="1"/>
+          <p:nvPr/>
+        </p:nvSpPr>
+        <p:spPr>
+          <a:xfrm>
+            <a:off x="5760720" y="4069080"/>
+            <a:ext cx="1965960" cy="914400"/>
+          </a:xfrm>
+          <a:prstGeom prst="rect">
+            <a:avLst/>
+          </a:prstGeom>
+          <a:noFill/>
+          <a:ln/>
+        </p:spPr>
+        <p:txBody>
+          <a:bodyPr wrap="square" lIns="0" tIns="0" rIns="0" bIns="0" rtlCol="0" anchor="ctr"/>
+          <a:lstStyle/>
+          <a:p>
+            <a:pPr indent="0" marL="0">
+              <a:buNone/>
+            </a:pPr>
+            <a:r>
+              <a:rPr lang="en-US" sz="2000" b="1" dirty="0">
+                <a:solidFill>
+                  <a:schemeClr val="tx1"/>
+                </a:solidFill>
+              </a:rPr>
+              <a:t>Solutions Architect</a:t>
+            </a:r>
+            <a:endParaRPr lang="en-US" sz="2000" dirty="0"/>
+          </a:p>
+        </p:txBody>
+      </p:sp>
+      <p:sp>
+        <p:nvSpPr>
+          <p:cNvPr id="23" name="job 6 card"/>
+          <p:cNvSpPr/>
+          <p:nvPr/>
+        </p:nvSpPr>
+        <p:spPr>
+          <a:xfrm>
+            <a:off x="8138160" y="3657600"/>
+            <a:ext cx="3520440" cy="1737360"/>
+          </a:xfrm>
+          <a:prstGeom prst="roundRect">
+            <a:avLst>
+              <a:gd name="adj" fmla="val 7895"/>
+            </a:avLst>
+          </a:prstGeom>
+          <a:solidFill>
+            <a:schemeClr val="bg2"/>
+          </a:solidFill>
+          <a:ln/>
+        </p:spPr>
+      </p:sp>
+      <p:sp>
+        <p:nvSpPr>
+          <p:cNvPr id="24" name="job 6 circle"/>
+          <p:cNvSpPr/>
+          <p:nvPr/>
+        </p:nvSpPr>
+        <p:spPr>
+          <a:xfrm>
+            <a:off x="8412480" y="4069080"/>
+            <a:ext cx="914400" cy="914400"/>
+          </a:xfrm>
+          <a:prstGeom prst="ellipse">
+            <a:avLst/>
+          </a:prstGeom>
+          <a:solidFill>
+            <a:schemeClr val="accent1"/>
+          </a:solidFill>
+          <a:ln/>
+        </p:spPr>
+      </p:sp>
+      <p:pic>
+        <p:nvPicPr>
+          <p:cNvPr id="25" name="job 6 icon" descr="job 6">    </p:cNvPr>
+          <p:cNvPicPr>
+            <a:picLocks noChangeAspect="1"/>
+          </p:cNvPicPr>
+          <p:nvPr/>
+        </p:nvPicPr>
+        <p:blipFill>
+          <a:blip r:embed="rId6"/>
+          <a:stretch>
+            <a:fillRect/>
+          </a:stretch>
+        </p:blipFill>
+        <p:spPr>
+          <a:xfrm>
+            <a:off x="8641080" y="4297680"/>
+            <a:ext cx="457200" cy="457200"/>
+          </a:xfrm>
+          <a:prstGeom prst="rect">
+            <a:avLst/>
+          </a:prstGeom>
+        </p:spPr>
+      </p:pic>
+      <p:sp>
+        <p:nvSpPr>
+          <p:cNvPr id="26" name="Text 18"/>
+          <p:cNvSpPr txBox="1"/>
+          <p:nvPr/>
+        </p:nvSpPr>
+        <p:spPr>
+          <a:xfrm>
+            <a:off x="9555480" y="4069080"/>
+            <a:ext cx="1965960" cy="914400"/>
+          </a:xfrm>
+          <a:prstGeom prst="rect">
+            <a:avLst/>
+          </a:prstGeom>
+          <a:noFill/>
+          <a:ln/>
+        </p:spPr>
+        <p:txBody>
+          <a:bodyPr wrap="square" lIns="0" tIns="0" rIns="0" bIns="0" rtlCol="0" anchor="ctr"/>
+          <a:lstStyle/>
+          <a:p>
+            <a:pPr indent="0" marL="0">
+              <a:buNone/>
+            </a:pPr>
+            <a:r>
+              <a:rPr lang="en-US" sz="2000" b="1" dirty="0">
+                <a:solidFill>
+                  <a:schemeClr val="tx1"/>
+                </a:solidFill>
+              </a:rPr>
+              <a:t>Software Developer</a:t>
+            </a:r>
+            <a:endParaRPr lang="en-US" sz="2000" dirty="0"/>
+          </a:p>
+        </p:txBody>
+      </p:sp>
+      <p:sp>
+        <p:nvSpPr>
+          <p:cNvPr id="27" name="Text 19"/>
+          <p:cNvSpPr txBox="1"/>
+          <p:nvPr/>
+        </p:nvSpPr>
+        <p:spPr>
+          <a:xfrm>
+            <a:off x="548640" y="5623560"/>
+            <a:ext cx="11064240" cy="548640"/>
+          </a:xfrm>
+          <a:prstGeom prst="rect">
+            <a:avLst/>
+          </a:prstGeom>
+          <a:noFill/>
+          <a:ln/>
+        </p:spPr>
+        <p:txBody>
+          <a:bodyPr wrap="square" lIns="0" tIns="0" rIns="0" bIns="0" rtlCol="0" anchor="t"/>
+          <a:lstStyle/>
+          <a:p>
+            <a:pPr indent="0" marL="0">
+              <a:buNone/>
+            </a:pPr>
+            <a:r>
+              <a:rPr lang="en-US" sz="1800" i="1" dirty="0">
+                <a:solidFill>
+                  <a:schemeClr val="tx2"/>
+                </a:solidFill>
+              </a:rPr>
+              <a:t>Today you use the same kinds of tools people in these jobs use.</a:t>
+            </a:r>
+            <a:endParaRPr lang="en-US" sz="1800" dirty="0"/>
+          </a:p>
+        </p:txBody>
+      </p:sp>
+      <p:sp>
+        <p:nvSpPr>
+          <p:cNvPr id="25" name="Slide Number Placeholder 0"/>
+          <p:cNvSpPr>
+            <a:spLocks noGrp="1"/>
+          </p:cNvSpPr>
+          <p:nvPr>
+            <p:ph type="sldNum" sz="quarter" idx="4294967295"/>
+          </p:nvPr>
+        </p:nvSpPr>
+        <p:spPr>
+          <a:xfrm>
+            <a:off x="11247120" y="6400800"/>
+            <a:ext cx="457200" cy="274320"/>
+          </a:xfrm>
+          <a:prstGeom prst="rect">
+            <a:avLst/>
+          </a:prstGeom>
+          <a:extLst>
+            <a:ext uri="{C572A759-6A51-4108-AA02-DFA0A04FC94B}">
+              <ma14:wrappingTextBoxFlag xmlns:ma14="http://schemas.microsoft.com/office/mac/drawingml/2011/main" val="0"/>
+            </a:ext>
+          </a:extLst>
+        </p:spPr>
+        <p:txBody>
+          <a:bodyPr/>
+          <a:lstStyle>
+            <a:lvl1pPr>
+              <a:defRPr sz="1000">
+                <a:solidFill>
+                  <a:schemeClr val="tx2"/>
+                </a:solidFill>
+              </a:defRPr>
+            </a:lvl1pPr>
+          </a:lstStyle>
+          <a:p>
+            <a:pPr algn="r"/>
+            <a:fld id="{F7021451-1387-4CA6-816F-3879F97B5CBC}" type="slidenum">
+              <a:rPr b="0" lang="en-US"/>
+              <a:t>18</a:t>
+            </a:fld>
+            <a:endParaRPr lang="en-US"/>
+          </a:p>
+        </p:txBody>
+      </p:sp>
+    </p:spTree>
+  </p:cSld>
+  <p:clrMapOvr>
+    <a:masterClrMapping/>
+  </p:clrMapOvr>
+</p:sld>
+</file>
+
+<file path=ppt/slides/slide19.xml><?xml version="1.0" encoding="utf-8"?>
+<p:sld xmlns:a="http://schemas.openxmlformats.org/drawingml/2006/main" xmlns:r="http://schemas.openxmlformats.org/officeDocument/2006/relationships" xmlns:p="http://schemas.openxmlformats.org/presentationml/2006/main">
+  <p:cSld name="Slide 19">
     <p:spTree>
       <p:nvGrpSpPr>
         <p:cNvPr id="1" name=""/>

--- a/presentation/AI_Career_Coach_Workshop.pptx
+++ b/presentation/AI_Career_Coach_Workshop.pptx
@@ -24,9 +24,10 @@
     <p:sldId id="272" r:id="rId18"/>
     <p:sldId id="273" r:id="rId19"/>
     <p:sldId id="274" r:id="rId20"/>
+    <p:sldId id="275" r:id="rId21"/>
   </p:sldIdLst>
   <p:notesMasterIdLst>
-    <p:notesMasterId r:id="rId21"/>
+    <p:notesMasterId r:id="rId22"/>
   </p:notesMasterIdLst>
   <p:sldSz cx="12192000" cy="6858000"/>
   <p:notesSz cx="6858000" cy="12192000"/>
@@ -125,27 +126,27 @@
   <p:extLst>
     <p:ext uri="{521415D9-36F7-43E2-AB2F-B90AF26B5E84}">
       <p14:sectionLst xmlns:p14="http://schemas.microsoft.com/office/powerpoint/2010/main">
-        <p14:section name="Welcome" id="{84df10ab-4af7-b205-3cf5-0b758dd4956c}">
+        <p14:section name="Welcome" id="{dab86979-da49-c1a2-d31a-55b35f86887b}">
           <p14:sldIdLst>
             <p14:sldId id="256"/>
             <p14:sldId id="257"/>
           </p14:sldIdLst>
         </p14:section>
-        <p14:section name="The Basics" id="{743762dc-03a2-003c-4bcb-6594af46acd5}">
+        <p14:section name="The Basics" id="{4d350d7a-510c-b824-8e44-76bb69ec254b}">
           <p14:sldIdLst>
             <p14:sldId id="258"/>
             <p14:sldId id="259"/>
             <p14:sldId id="260"/>
           </p14:sldIdLst>
         </p14:section>
-        <p14:section name="The Project" id="{2dcbec02-2427-0db7-6484-e60897e67fbf}">
+        <p14:section name="The Project" id="{e8366a13-60a3-4222-0392-be45fc39a0a6}">
           <p14:sldIdLst>
             <p14:sldId id="261"/>
             <p14:sldId id="262"/>
             <p14:sldId id="263"/>
           </p14:sldIdLst>
         </p14:section>
-        <p14:section name="How It Works" id="{2b47adbe-2cbc-f377-1f5e-bc59490c00ce}">
+        <p14:section name="How It Works" id="{337b3c82-7c06-a71f-9d5e-57c72b188707}">
           <p14:sldIdLst>
             <p14:sldId id="264"/>
             <p14:sldId id="265"/>
@@ -154,14 +155,15 @@
             <p14:sldId id="268"/>
             <p14:sldId id="269"/>
             <p14:sldId id="270"/>
+            <p14:sldId id="271"/>
           </p14:sldIdLst>
         </p14:section>
-        <p14:section name="Let's Build" id="{58eadc16-5174-3c58-886d-013b76e71790}">
+        <p14:section name="Let's Build" id="{dd43cd78-402d-a89e-a2eb-28e04ca5e171}">
           <p14:sldIdLst>
-            <p14:sldId id="271"/>
             <p14:sldId id="272"/>
             <p14:sldId id="273"/>
             <p14:sldId id="274"/>
+            <p14:sldId id="275"/>
           </p14:sldIdLst>
         </p14:section>
       </p14:sectionLst>
@@ -1184,7 +1186,7 @@
           <a:p>
             <a:r>
               <a:rPr lang="en-US" dirty="0"/>
-              <a:t>Here's our plan. We'll go step by step, and we'll all move together. If you fall behind, that's okay. We have a backup link so everyone can still finish.</a:t>
+              <a:t>This is the real map of our app. Step 1: your browser opens the website from Amplify. Step 2: when you click Generate, your browser sends your answers to API Gateway. Step 3: API Gateway hands them to Lambda, and our Python code turns them into a prompt. Step 4: Lambda sends the prompt to Bedrock, and the Nova Pro AI writes your roadmap. IAM is the permission that lets Lambda use Nova, and CloudWatch saves logs of what happened. Step 5: the roadmap travels back the same way to your screen. Everything inside the dotted line runs in the AWS cloud.</a:t>
             </a:r>
             <a:endParaRPr lang="en-US" dirty="0"/>
           </a:p>
@@ -1272,7 +1274,7 @@
           <a:p>
             <a:r>
               <a:rPr lang="en-US" dirty="0"/>
-              <a:t>You don't need any coding experience today. We'll copy and paste the code together. Every engineer sees error messages every day. They are clues, not failures. And we build better together, so help your neighbor.</a:t>
+              <a:t>Here's our plan. We'll go step by step, and we'll all move together. If you fall behind, that's okay. We have a backup link so everyone can still finish.</a:t>
             </a:r>
             <a:endParaRPr lang="en-US" dirty="0"/>
           </a:p>
@@ -1360,7 +1362,7 @@
           <a:p>
             <a:r>
               <a:rPr lang="en-US" dirty="0"/>
-              <a:t>The tools you touch today, like cloud services, APIs, serverless code, and AI models, are used every day in these jobs. Try the app with one of these goals and see your own roadmap.</a:t>
+              <a:t>You don't need any coding experience today. We'll copy and paste the code together. Every engineer sees error messages every day. They are clues, not failures. And we build better together, so help your neighbor.</a:t>
             </a:r>
             <a:endParaRPr lang="en-US" dirty="0"/>
           </a:p>
@@ -1448,7 +1450,7 @@
           <a:p>
             <a:r>
               <a:rPr lang="en-US" dirty="0"/>
-              <a:t>Open the GitHub link on your laptop and download the files. Then sign in to the AWS console, and let's build your AI career coach together.</a:t>
+              <a:t>The tools you touch today, like cloud services, APIs, serverless code, and AI models, are used every day in these jobs. Try the app with one of these goals and see your own roadmap.</a:t>
             </a:r>
             <a:endParaRPr lang="en-US" dirty="0"/>
           </a:p>
@@ -1560,6 +1562,94 @@
             <a:fld id="{F7021451-1387-4CA6-816F-3879F97B5CBC}" type="slidenum">
               <a:rPr lang="en-US"/>
               <a:t>2</a:t>
+            </a:fld>
+            <a:endParaRPr lang="en-US"/>
+          </a:p>
+        </p:txBody>
+      </p:sp>
+    </p:spTree>
+    <p:extLst>
+      <p:ext uri="{BB962C8B-B14F-4D97-AF65-F5344CB8AC3E}">
+        <p14:creationId xmlns:p14="http://schemas.microsoft.com/office/powerpoint/2010/main" val="1024086991"/>
+      </p:ext>
+    </p:extLst>
+  </p:cSld>
+  <p:clrMapOvr>
+    <a:masterClrMapping/>
+  </p:clrMapOvr>
+</p:notes>
+</file>
+
+<file path=ppt/notesSlides/notesSlide20.xml><?xml version="1.0" encoding="utf-8"?>
+<p:notes xmlns:a="http://schemas.openxmlformats.org/drawingml/2006/main" xmlns:r="http://schemas.openxmlformats.org/officeDocument/2006/relationships" xmlns:p="http://schemas.openxmlformats.org/presentationml/2006/main">
+  <p:cSld>
+    <p:spTree>
+      <p:nvGrpSpPr>
+        <p:cNvPr id="1" name=""/>
+        <p:cNvGrpSpPr/>
+        <p:nvPr/>
+      </p:nvGrpSpPr>
+      <p:grpSpPr>
+        <a:xfrm>
+          <a:off x="0" y="0"/>
+          <a:ext cx="0" cy="0"/>
+          <a:chOff x="0" y="0"/>
+          <a:chExt cx="0" cy="0"/>
+        </a:xfrm>
+      </p:grpSpPr>
+      <p:sp>
+        <p:nvSpPr>
+          <p:cNvPr id="2" name="Slide Image Placeholder 1"/>
+          <p:cNvSpPr>
+            <a:spLocks noGrp="1" noRot="1" noChangeAspect="1"/>
+          </p:cNvSpPr>
+          <p:nvPr>
+            <p:ph type="sldImg"/>
+          </p:nvPr>
+        </p:nvSpPr>
+        <p:spPr/>
+      </p:sp>
+      <p:sp>
+        <p:nvSpPr>
+          <p:cNvPr id="3" name="Notes Placeholder 2"/>
+          <p:cNvSpPr>
+            <a:spLocks noGrp="1"/>
+          </p:cNvSpPr>
+          <p:nvPr>
+            <p:ph type="body" idx="1"/>
+          </p:nvPr>
+        </p:nvSpPr>
+        <p:spPr/>
+        <p:txBody>
+          <a:bodyPr/>
+          <a:lstStyle/>
+          <a:p>
+            <a:r>
+              <a:rPr lang="en-US" dirty="0"/>
+              <a:t>Open the GitHub link on your laptop and download the files. Then sign in to the AWS console, and let's build your AI career coach together.</a:t>
+            </a:r>
+            <a:endParaRPr lang="en-US" dirty="0"/>
+          </a:p>
+        </p:txBody>
+      </p:sp>
+      <p:sp>
+        <p:nvSpPr>
+          <p:cNvPr id="4" name="Slide Number Placeholder 3"/>
+          <p:cNvSpPr>
+            <a:spLocks noGrp="1"/>
+          </p:cNvSpPr>
+          <p:nvPr>
+            <p:ph type="sldNum" sz="quarter" idx="10"/>
+          </p:nvPr>
+        </p:nvSpPr>
+        <p:spPr/>
+        <p:txBody>
+          <a:bodyPr/>
+          <a:lstStyle/>
+          <a:p>
+            <a:fld id="{F7021451-1387-4CA6-816F-3879F97B5CBC}" type="slidenum">
+              <a:rPr lang="en-US"/>
+              <a:t>20</a:t>
             </a:fld>
             <a:endParaRPr lang="en-US"/>
           </a:p>
@@ -7120,7 +7210,7 @@
                   <a:schemeClr val="tx1"/>
                 </a:solidFill>
               </a:rPr>
-              <a:t>Our plan for the next 45 minutes</a:t>
+              <a:t>The real map: how the pieces connect</a:t>
             </a:r>
             <a:endParaRPr lang="en-US" sz="3600" dirty="0"/>
           </a:p>
@@ -7128,18 +7218,221 @@
       </p:sp>
       <p:sp>
         <p:nvSpPr>
-          <p:cNvPr id="3" name="step 1 card"/>
+          <p:cNvPr id="3" name="AWS Cloud boundary"/>
           <p:cNvSpPr/>
           <p:nvPr/>
         </p:nvSpPr>
         <p:spPr>
           <a:xfrm>
-            <a:off x="548640" y="1463040"/>
-            <a:ext cx="5440680" cy="960120"/>
+            <a:off x="2651760" y="1325880"/>
+            <a:ext cx="8961120" cy="4160520"/>
           </a:xfrm>
           <a:prstGeom prst="roundRect">
             <a:avLst>
-              <a:gd name="adj" fmla="val 14286"/>
+              <a:gd name="adj" fmla="val 2637"/>
+            </a:avLst>
+          </a:prstGeom>
+          <a:solidFill>
+            <a:schemeClr val="bg1"/>
+          </a:solidFill>
+          <a:ln w="19050">
+            <a:solidFill>
+              <a:srgbClr val="8D99AE"/>
+            </a:solidFill>
+            <a:prstDash val="dash"/>
+          </a:ln>
+        </p:spPr>
+      </p:sp>
+      <p:pic>
+        <p:nvPicPr>
+          <p:cNvPr id="4" name="cloud label icon" descr="Cloud">    </p:cNvPr>
+          <p:cNvPicPr>
+            <a:picLocks noChangeAspect="1"/>
+          </p:cNvPicPr>
+          <p:nvPr/>
+        </p:nvPicPr>
+        <p:blipFill>
+          <a:blip r:embed="rId1"/>
+          <a:stretch>
+            <a:fillRect/>
+          </a:stretch>
+        </p:blipFill>
+        <p:spPr>
+          <a:xfrm>
+            <a:off x="2834640" y="1444752"/>
+            <a:ext cx="320040" cy="320040"/>
+          </a:xfrm>
+          <a:prstGeom prst="rect">
+            <a:avLst/>
+          </a:prstGeom>
+        </p:spPr>
+      </p:pic>
+      <p:sp>
+        <p:nvSpPr>
+          <p:cNvPr id="5" name="Text 2"/>
+          <p:cNvSpPr txBox="1"/>
+          <p:nvPr/>
+        </p:nvSpPr>
+        <p:spPr>
+          <a:xfrm>
+            <a:off x="3246120" y="1417320"/>
+            <a:ext cx="2743200" cy="365760"/>
+          </a:xfrm>
+          <a:prstGeom prst="rect">
+            <a:avLst/>
+          </a:prstGeom>
+          <a:noFill/>
+          <a:ln/>
+        </p:spPr>
+        <p:txBody>
+          <a:bodyPr wrap="square" lIns="0" tIns="0" rIns="0" bIns="0" rtlCol="0" anchor="ctr"/>
+          <a:lstStyle/>
+          <a:p>
+            <a:pPr indent="0" marL="0">
+              <a:buNone/>
+            </a:pPr>
+            <a:r>
+              <a:rPr lang="en-US" sz="1400" b="1" dirty="0">
+                <a:solidFill>
+                  <a:schemeClr val="tx2"/>
+                </a:solidFill>
+              </a:rPr>
+              <a:t>AWS Cloud</a:t>
+            </a:r>
+            <a:endParaRPr lang="en-US" sz="1400" dirty="0"/>
+          </a:p>
+        </p:txBody>
+      </p:sp>
+      <p:sp>
+        <p:nvSpPr>
+          <p:cNvPr id="6" name="you circle"/>
+          <p:cNvSpPr/>
+          <p:nvPr/>
+        </p:nvSpPr>
+        <p:spPr>
+          <a:xfrm>
+            <a:off x="868680" y="2743200"/>
+            <a:ext cx="1005840" cy="1005840"/>
+          </a:xfrm>
+          <a:prstGeom prst="ellipse">
+            <a:avLst/>
+          </a:prstGeom>
+          <a:solidFill>
+            <a:schemeClr val="accent1"/>
+          </a:solidFill>
+          <a:ln/>
+        </p:spPr>
+      </p:sp>
+      <p:pic>
+        <p:nvPicPr>
+          <p:cNvPr id="7" name="you icon" descr="you">    </p:cNvPr>
+          <p:cNvPicPr>
+            <a:picLocks noChangeAspect="1"/>
+          </p:cNvPicPr>
+          <p:nvPr/>
+        </p:nvPicPr>
+        <p:blipFill>
+          <a:blip r:embed="rId2"/>
+          <a:stretch>
+            <a:fillRect/>
+          </a:stretch>
+        </p:blipFill>
+        <p:spPr>
+          <a:xfrm>
+            <a:off x="1120140" y="2994660"/>
+            <a:ext cx="502920" cy="502920"/>
+          </a:xfrm>
+          <a:prstGeom prst="rect">
+            <a:avLst/>
+          </a:prstGeom>
+        </p:spPr>
+      </p:pic>
+      <p:sp>
+        <p:nvSpPr>
+          <p:cNvPr id="8" name="Text 4"/>
+          <p:cNvSpPr txBox="1"/>
+          <p:nvPr/>
+        </p:nvSpPr>
+        <p:spPr>
+          <a:xfrm>
+            <a:off x="457200" y="3840480"/>
+            <a:ext cx="1828800" cy="365760"/>
+          </a:xfrm>
+          <a:prstGeom prst="rect">
+            <a:avLst/>
+          </a:prstGeom>
+          <a:noFill/>
+          <a:ln/>
+        </p:spPr>
+        <p:txBody>
+          <a:bodyPr wrap="square" lIns="0" tIns="0" rIns="0" bIns="0" rtlCol="0" anchor="t"/>
+          <a:lstStyle/>
+          <a:p>
+            <a:pPr algn="ctr" indent="0" marL="0">
+              <a:buNone/>
+            </a:pPr>
+            <a:r>
+              <a:rPr lang="en-US" sz="1800" b="1" dirty="0">
+                <a:solidFill>
+                  <a:schemeClr val="tx1"/>
+                </a:solidFill>
+              </a:rPr>
+              <a:t>You</a:t>
+            </a:r>
+            <a:endParaRPr lang="en-US" sz="1800" dirty="0"/>
+          </a:p>
+        </p:txBody>
+      </p:sp>
+      <p:sp>
+        <p:nvSpPr>
+          <p:cNvPr id="9" name="Text 5"/>
+          <p:cNvSpPr txBox="1"/>
+          <p:nvPr/>
+        </p:nvSpPr>
+        <p:spPr>
+          <a:xfrm>
+            <a:off x="457200" y="4206240"/>
+            <a:ext cx="1828800" cy="365760"/>
+          </a:xfrm>
+          <a:prstGeom prst="rect">
+            <a:avLst/>
+          </a:prstGeom>
+          <a:noFill/>
+          <a:ln/>
+        </p:spPr>
+        <p:txBody>
+          <a:bodyPr wrap="square" lIns="0" tIns="0" rIns="0" bIns="0" rtlCol="0" anchor="t"/>
+          <a:lstStyle/>
+          <a:p>
+            <a:pPr algn="ctr" indent="0" marL="0">
+              <a:buNone/>
+            </a:pPr>
+            <a:r>
+              <a:rPr lang="en-US" sz="1400" dirty="0">
+                <a:solidFill>
+                  <a:schemeClr val="tx2"/>
+                </a:solidFill>
+              </a:rPr>
+              <a:t>web browser</a:t>
+            </a:r>
+            <a:endParaRPr lang="en-US" sz="1400" dirty="0"/>
+          </a:p>
+        </p:txBody>
+      </p:sp>
+      <p:sp>
+        <p:nvSpPr>
+          <p:cNvPr id="10" name="amplify node"/>
+          <p:cNvSpPr/>
+          <p:nvPr/>
+        </p:nvSpPr>
+        <p:spPr>
+          <a:xfrm>
+            <a:off x="3017520" y="1783080"/>
+            <a:ext cx="2286000" cy="914400"/>
+          </a:xfrm>
+          <a:prstGeom prst="roundRect">
+            <a:avLst>
+              <a:gd name="adj" fmla="val 15000"/>
             </a:avLst>
           </a:prstGeom>
           <a:solidFill>
@@ -7150,14 +7443,14 @@
       </p:sp>
       <p:sp>
         <p:nvSpPr>
-          <p:cNvPr id="4" name="step 1 number"/>
+          <p:cNvPr id="11" name="amplify circle"/>
           <p:cNvSpPr/>
           <p:nvPr/>
         </p:nvSpPr>
         <p:spPr>
           <a:xfrm>
-            <a:off x="731520" y="1600200"/>
-            <a:ext cx="685800" cy="685800"/>
+            <a:off x="3154680" y="1965960"/>
+            <a:ext cx="548640" cy="548640"/>
           </a:xfrm>
           <a:prstGeom prst="ellipse">
             <a:avLst/>
@@ -7168,16 +7461,40 @@
           <a:ln/>
         </p:spPr>
       </p:sp>
-      <p:sp>
-        <p:nvSpPr>
-          <p:cNvPr id="5" name="Text 3"/>
-          <p:cNvSpPr txBox="1"/>
-          <p:nvPr/>
-        </p:nvSpPr>
-        <p:spPr>
-          <a:xfrm>
-            <a:off x="731520" y="1600200"/>
-            <a:ext cx="685800" cy="685800"/>
+      <p:pic>
+        <p:nvPicPr>
+          <p:cNvPr id="12" name="amplify icon" descr="amplify">    </p:cNvPr>
+          <p:cNvPicPr>
+            <a:picLocks noChangeAspect="1"/>
+          </p:cNvPicPr>
+          <p:nvPr/>
+        </p:nvPicPr>
+        <p:blipFill>
+          <a:blip r:embed="rId3"/>
+          <a:stretch>
+            <a:fillRect/>
+          </a:stretch>
+        </p:blipFill>
+        <p:spPr>
+          <a:xfrm>
+            <a:off x="3291840" y="2103120"/>
+            <a:ext cx="274320" cy="274320"/>
+          </a:xfrm>
+          <a:prstGeom prst="rect">
+            <a:avLst/>
+          </a:prstGeom>
+        </p:spPr>
+      </p:pic>
+      <p:sp>
+        <p:nvSpPr>
+          <p:cNvPr id="13" name="Text 8"/>
+          <p:cNvSpPr txBox="1"/>
+          <p:nvPr/>
+        </p:nvSpPr>
+        <p:spPr>
+          <a:xfrm>
+            <a:off x="3840480" y="1901952"/>
+            <a:ext cx="1417320" cy="365760"/>
           </a:xfrm>
           <a:prstGeom prst="rect">
             <a:avLst/>
@@ -7189,31 +7506,31 @@
           <a:bodyPr wrap="square" lIns="0" tIns="0" rIns="0" bIns="0" rtlCol="0" anchor="ctr"/>
           <a:lstStyle/>
           <a:p>
-            <a:pPr algn="ctr" indent="0" marL="0">
-              <a:buNone/>
-            </a:pPr>
-            <a:r>
-              <a:rPr lang="en-US" sz="2000" b="1" dirty="0">
+            <a:pPr indent="0" marL="0">
+              <a:buNone/>
+            </a:pPr>
+            <a:r>
+              <a:rPr lang="en-US" sz="1500" b="1" dirty="0">
                 <a:solidFill>
                   <a:schemeClr val="tx1"/>
                 </a:solidFill>
               </a:rPr>
-              <a:t>1</a:t>
-            </a:r>
-            <a:endParaRPr lang="en-US" sz="2000" dirty="0"/>
-          </a:p>
-        </p:txBody>
-      </p:sp>
-      <p:sp>
-        <p:nvSpPr>
-          <p:cNvPr id="6" name="Text 4"/>
-          <p:cNvSpPr txBox="1"/>
-          <p:nvPr/>
-        </p:nvSpPr>
-        <p:spPr>
-          <a:xfrm>
-            <a:off x="1645920" y="1600200"/>
-            <a:ext cx="1143000" cy="685800"/>
+              <a:t>Amplify</a:t>
+            </a:r>
+            <a:endParaRPr lang="en-US" sz="1500" dirty="0"/>
+          </a:p>
+        </p:txBody>
+      </p:sp>
+      <p:sp>
+        <p:nvSpPr>
+          <p:cNvPr id="14" name="Text 9"/>
+          <p:cNvSpPr txBox="1"/>
+          <p:nvPr/>
+        </p:nvSpPr>
+        <p:spPr>
+          <a:xfrm>
+            <a:off x="3840480" y="2258568"/>
+            <a:ext cx="1417320" cy="347472"/>
           </a:xfrm>
           <a:prstGeom prst="rect">
             <a:avLst/>
@@ -7229,85 +7546,49 @@
               <a:buNone/>
             </a:pPr>
             <a:r>
-              <a:rPr lang="en-US" sz="1600" b="1" dirty="0">
-                <a:solidFill>
-                  <a:schemeClr val="accent2"/>
-                </a:solidFill>
-              </a:rPr>
-              <a:t>0-5 min</a:t>
-            </a:r>
-            <a:endParaRPr lang="en-US" sz="1600" dirty="0"/>
-          </a:p>
-        </p:txBody>
-      </p:sp>
-      <p:sp>
-        <p:nvSpPr>
-          <p:cNvPr id="7" name="Text 5"/>
-          <p:cNvSpPr txBox="1"/>
-          <p:nvPr/>
-        </p:nvSpPr>
-        <p:spPr>
-          <a:xfrm>
-            <a:off x="2788920" y="1600200"/>
-            <a:ext cx="3063240" cy="685800"/>
-          </a:xfrm>
-          <a:prstGeom prst="rect">
-            <a:avLst/>
-          </a:prstGeom>
-          <a:noFill/>
-          <a:ln/>
-        </p:spPr>
-        <p:txBody>
-          <a:bodyPr wrap="square" lIns="0" tIns="0" rIns="0" bIns="0" rtlCol="0" anchor="ctr"/>
-          <a:lstStyle/>
-          <a:p>
-            <a:pPr indent="0" marL="0">
-              <a:buNone/>
-            </a:pPr>
-            <a:r>
-              <a:rPr lang="en-US" sz="1800" dirty="0">
-                <a:solidFill>
-                  <a:schemeClr val="tx1"/>
-                </a:solidFill>
-              </a:rPr>
-              <a:t>Learn how cloud AI apps work</a:t>
-            </a:r>
-            <a:endParaRPr lang="en-US" sz="1800" dirty="0"/>
-          </a:p>
-        </p:txBody>
-      </p:sp>
-      <p:sp>
-        <p:nvSpPr>
-          <p:cNvPr id="8" name="step 2 card"/>
+              <a:rPr lang="en-US" sz="1400" dirty="0">
+                <a:solidFill>
+                  <a:schemeClr val="tx2"/>
+                </a:solidFill>
+              </a:rPr>
+              <a:t>Website files</a:t>
+            </a:r>
+            <a:endParaRPr lang="en-US" sz="1400" dirty="0"/>
+          </a:p>
+        </p:txBody>
+      </p:sp>
+      <p:sp>
+        <p:nvSpPr>
+          <p:cNvPr id="15" name="api gateway node"/>
           <p:cNvSpPr/>
           <p:nvPr/>
         </p:nvSpPr>
         <p:spPr>
           <a:xfrm>
-            <a:off x="548640" y="2606040"/>
-            <a:ext cx="5440680" cy="960120"/>
+            <a:off x="3017520" y="3063240"/>
+            <a:ext cx="2286000" cy="914400"/>
           </a:xfrm>
           <a:prstGeom prst="roundRect">
             <a:avLst>
-              <a:gd name="adj" fmla="val 14286"/>
+              <a:gd name="adj" fmla="val 15000"/>
             </a:avLst>
           </a:prstGeom>
           <a:solidFill>
-            <a:schemeClr val="bg1"/>
+            <a:schemeClr val="bg2"/>
           </a:solidFill>
           <a:ln/>
         </p:spPr>
       </p:sp>
       <p:sp>
         <p:nvSpPr>
-          <p:cNvPr id="9" name="step 2 number"/>
+          <p:cNvPr id="16" name="api gateway circle"/>
           <p:cNvSpPr/>
           <p:nvPr/>
         </p:nvSpPr>
         <p:spPr>
           <a:xfrm>
-            <a:off x="731520" y="2743200"/>
-            <a:ext cx="685800" cy="685800"/>
+            <a:off x="3154680" y="3246120"/>
+            <a:ext cx="548640" cy="548640"/>
           </a:xfrm>
           <a:prstGeom prst="ellipse">
             <a:avLst/>
@@ -7318,16 +7599,40 @@
           <a:ln/>
         </p:spPr>
       </p:sp>
-      <p:sp>
-        <p:nvSpPr>
-          <p:cNvPr id="10" name="Text 8"/>
-          <p:cNvSpPr txBox="1"/>
-          <p:nvPr/>
-        </p:nvSpPr>
-        <p:spPr>
-          <a:xfrm>
-            <a:off x="731520" y="2743200"/>
-            <a:ext cx="685800" cy="685800"/>
+      <p:pic>
+        <p:nvPicPr>
+          <p:cNvPr id="17" name="api gateway icon" descr="api gateway">    </p:cNvPr>
+          <p:cNvPicPr>
+            <a:picLocks noChangeAspect="1"/>
+          </p:cNvPicPr>
+          <p:nvPr/>
+        </p:nvPicPr>
+        <p:blipFill>
+          <a:blip r:embed="rId4"/>
+          <a:stretch>
+            <a:fillRect/>
+          </a:stretch>
+        </p:blipFill>
+        <p:spPr>
+          <a:xfrm>
+            <a:off x="3291840" y="3383280"/>
+            <a:ext cx="274320" cy="274320"/>
+          </a:xfrm>
+          <a:prstGeom prst="rect">
+            <a:avLst/>
+          </a:prstGeom>
+        </p:spPr>
+      </p:pic>
+      <p:sp>
+        <p:nvSpPr>
+          <p:cNvPr id="18" name="Text 12"/>
+          <p:cNvSpPr txBox="1"/>
+          <p:nvPr/>
+        </p:nvSpPr>
+        <p:spPr>
+          <a:xfrm>
+            <a:off x="3840480" y="3182112"/>
+            <a:ext cx="1417320" cy="365760"/>
           </a:xfrm>
           <a:prstGeom prst="rect">
             <a:avLst/>
@@ -7339,31 +7644,31 @@
           <a:bodyPr wrap="square" lIns="0" tIns="0" rIns="0" bIns="0" rtlCol="0" anchor="ctr"/>
           <a:lstStyle/>
           <a:p>
-            <a:pPr algn="ctr" indent="0" marL="0">
-              <a:buNone/>
-            </a:pPr>
-            <a:r>
-              <a:rPr lang="en-US" sz="2000" b="1" dirty="0">
+            <a:pPr indent="0" marL="0">
+              <a:buNone/>
+            </a:pPr>
+            <a:r>
+              <a:rPr lang="en-US" sz="1500" b="1" dirty="0">
                 <a:solidFill>
                   <a:schemeClr val="tx1"/>
                 </a:solidFill>
               </a:rPr>
-              <a:t>2</a:t>
-            </a:r>
-            <a:endParaRPr lang="en-US" sz="2000" dirty="0"/>
-          </a:p>
-        </p:txBody>
-      </p:sp>
-      <p:sp>
-        <p:nvSpPr>
-          <p:cNvPr id="11" name="Text 9"/>
-          <p:cNvSpPr txBox="1"/>
-          <p:nvPr/>
-        </p:nvSpPr>
-        <p:spPr>
-          <a:xfrm>
-            <a:off x="1645920" y="2743200"/>
-            <a:ext cx="1143000" cy="685800"/>
+              <a:t>API Gateway</a:t>
+            </a:r>
+            <a:endParaRPr lang="en-US" sz="1500" dirty="0"/>
+          </a:p>
+        </p:txBody>
+      </p:sp>
+      <p:sp>
+        <p:nvSpPr>
+          <p:cNvPr id="19" name="Text 13"/>
+          <p:cNvSpPr txBox="1"/>
+          <p:nvPr/>
+        </p:nvSpPr>
+        <p:spPr>
+          <a:xfrm>
+            <a:off x="3840480" y="3538728"/>
+            <a:ext cx="1417320" cy="347472"/>
           </a:xfrm>
           <a:prstGeom prst="rect">
             <a:avLst/>
@@ -7379,67 +7684,31 @@
               <a:buNone/>
             </a:pPr>
             <a:r>
-              <a:rPr lang="en-US" sz="1600" b="1" dirty="0">
-                <a:solidFill>
-                  <a:schemeClr val="accent2"/>
-                </a:solidFill>
-              </a:rPr>
-              <a:t>5-10 min</a:t>
-            </a:r>
-            <a:endParaRPr lang="en-US" sz="1600" dirty="0"/>
-          </a:p>
-        </p:txBody>
-      </p:sp>
-      <p:sp>
-        <p:nvSpPr>
-          <p:cNvPr id="12" name="Text 10"/>
-          <p:cNvSpPr txBox="1"/>
-          <p:nvPr/>
-        </p:nvSpPr>
-        <p:spPr>
-          <a:xfrm>
-            <a:off x="2788920" y="2743200"/>
-            <a:ext cx="3063240" cy="685800"/>
-          </a:xfrm>
-          <a:prstGeom prst="rect">
-            <a:avLst/>
-          </a:prstGeom>
-          <a:noFill/>
-          <a:ln/>
-        </p:spPr>
-        <p:txBody>
-          <a:bodyPr wrap="square" lIns="0" tIns="0" rIns="0" bIns="0" rtlCol="0" anchor="ctr"/>
-          <a:lstStyle/>
-          <a:p>
-            <a:pPr indent="0" marL="0">
-              <a:buNone/>
-            </a:pPr>
-            <a:r>
-              <a:rPr lang="en-US" sz="1800" dirty="0">
-                <a:solidFill>
-                  <a:schemeClr val="tx1"/>
-                </a:solidFill>
-              </a:rPr>
-              <a:t>Try the AI in Amazon Bedrock</a:t>
-            </a:r>
-            <a:endParaRPr lang="en-US" sz="1800" dirty="0"/>
-          </a:p>
-        </p:txBody>
-      </p:sp>
-      <p:sp>
-        <p:nvSpPr>
-          <p:cNvPr id="13" name="step 3 card"/>
+              <a:rPr lang="en-US" sz="1400" dirty="0">
+                <a:solidFill>
+                  <a:schemeClr val="tx2"/>
+                </a:solidFill>
+              </a:rPr>
+              <a:t>Front door</a:t>
+            </a:r>
+            <a:endParaRPr lang="en-US" sz="1400" dirty="0"/>
+          </a:p>
+        </p:txBody>
+      </p:sp>
+      <p:sp>
+        <p:nvSpPr>
+          <p:cNvPr id="20" name="lambda node"/>
           <p:cNvSpPr/>
           <p:nvPr/>
         </p:nvSpPr>
         <p:spPr>
           <a:xfrm>
-            <a:off x="548640" y="3749040"/>
-            <a:ext cx="5440680" cy="960120"/>
+            <a:off x="5989320" y="3063240"/>
+            <a:ext cx="2286000" cy="914400"/>
           </a:xfrm>
           <a:prstGeom prst="roundRect">
             <a:avLst>
-              <a:gd name="adj" fmla="val 14286"/>
+              <a:gd name="adj" fmla="val 15000"/>
             </a:avLst>
           </a:prstGeom>
           <a:solidFill>
@@ -7450,14 +7719,14 @@
       </p:sp>
       <p:sp>
         <p:nvSpPr>
-          <p:cNvPr id="14" name="step 3 number"/>
+          <p:cNvPr id="21" name="lambda circle"/>
           <p:cNvSpPr/>
           <p:nvPr/>
         </p:nvSpPr>
         <p:spPr>
           <a:xfrm>
-            <a:off x="731520" y="3886200"/>
-            <a:ext cx="685800" cy="685800"/>
+            <a:off x="6126480" y="3246120"/>
+            <a:ext cx="548640" cy="548640"/>
           </a:xfrm>
           <a:prstGeom prst="ellipse">
             <a:avLst/>
@@ -7468,16 +7737,40 @@
           <a:ln/>
         </p:spPr>
       </p:sp>
-      <p:sp>
-        <p:nvSpPr>
-          <p:cNvPr id="15" name="Text 13"/>
-          <p:cNvSpPr txBox="1"/>
-          <p:nvPr/>
-        </p:nvSpPr>
-        <p:spPr>
-          <a:xfrm>
-            <a:off x="731520" y="3886200"/>
-            <a:ext cx="685800" cy="685800"/>
+      <p:pic>
+        <p:nvPicPr>
+          <p:cNvPr id="22" name="lambda icon" descr="lambda">    </p:cNvPr>
+          <p:cNvPicPr>
+            <a:picLocks noChangeAspect="1"/>
+          </p:cNvPicPr>
+          <p:nvPr/>
+        </p:nvPicPr>
+        <p:blipFill>
+          <a:blip r:embed="rId5"/>
+          <a:stretch>
+            <a:fillRect/>
+          </a:stretch>
+        </p:blipFill>
+        <p:spPr>
+          <a:xfrm>
+            <a:off x="6263640" y="3383280"/>
+            <a:ext cx="274320" cy="274320"/>
+          </a:xfrm>
+          <a:prstGeom prst="rect">
+            <a:avLst/>
+          </a:prstGeom>
+        </p:spPr>
+      </p:pic>
+      <p:sp>
+        <p:nvSpPr>
+          <p:cNvPr id="23" name="Text 16"/>
+          <p:cNvSpPr txBox="1"/>
+          <p:nvPr/>
+        </p:nvSpPr>
+        <p:spPr>
+          <a:xfrm>
+            <a:off x="6812280" y="3182112"/>
+            <a:ext cx="1417320" cy="365760"/>
           </a:xfrm>
           <a:prstGeom prst="rect">
             <a:avLst/>
@@ -7489,31 +7782,31 @@
           <a:bodyPr wrap="square" lIns="0" tIns="0" rIns="0" bIns="0" rtlCol="0" anchor="ctr"/>
           <a:lstStyle/>
           <a:p>
-            <a:pPr algn="ctr" indent="0" marL="0">
-              <a:buNone/>
-            </a:pPr>
-            <a:r>
-              <a:rPr lang="en-US" sz="2000" b="1" dirty="0">
+            <a:pPr indent="0" marL="0">
+              <a:buNone/>
+            </a:pPr>
+            <a:r>
+              <a:rPr lang="en-US" sz="1500" b="1" dirty="0">
                 <a:solidFill>
                   <a:schemeClr val="tx1"/>
                 </a:solidFill>
               </a:rPr>
-              <a:t>3</a:t>
-            </a:r>
-            <a:endParaRPr lang="en-US" sz="2000" dirty="0"/>
-          </a:p>
-        </p:txBody>
-      </p:sp>
-      <p:sp>
-        <p:nvSpPr>
-          <p:cNvPr id="16" name="Text 14"/>
-          <p:cNvSpPr txBox="1"/>
-          <p:nvPr/>
-        </p:nvSpPr>
-        <p:spPr>
-          <a:xfrm>
-            <a:off x="1645920" y="3886200"/>
-            <a:ext cx="1143000" cy="685800"/>
+              <a:t>Lambda</a:t>
+            </a:r>
+            <a:endParaRPr lang="en-US" sz="1500" dirty="0"/>
+          </a:p>
+        </p:txBody>
+      </p:sp>
+      <p:sp>
+        <p:nvSpPr>
+          <p:cNvPr id="24" name="Text 17"/>
+          <p:cNvSpPr txBox="1"/>
+          <p:nvPr/>
+        </p:nvSpPr>
+        <p:spPr>
+          <a:xfrm>
+            <a:off x="6812280" y="3538728"/>
+            <a:ext cx="1417320" cy="347472"/>
           </a:xfrm>
           <a:prstGeom prst="rect">
             <a:avLst/>
@@ -7529,85 +7822,49 @@
               <a:buNone/>
             </a:pPr>
             <a:r>
-              <a:rPr lang="en-US" sz="1600" b="1" dirty="0">
-                <a:solidFill>
-                  <a:schemeClr val="accent2"/>
-                </a:solidFill>
-              </a:rPr>
-              <a:t>10-20 min</a:t>
-            </a:r>
-            <a:endParaRPr lang="en-US" sz="1600" dirty="0"/>
-          </a:p>
-        </p:txBody>
-      </p:sp>
-      <p:sp>
-        <p:nvSpPr>
-          <p:cNvPr id="17" name="Text 15"/>
-          <p:cNvSpPr txBox="1"/>
-          <p:nvPr/>
-        </p:nvSpPr>
-        <p:spPr>
-          <a:xfrm>
-            <a:off x="2788920" y="3886200"/>
-            <a:ext cx="3063240" cy="685800"/>
-          </a:xfrm>
-          <a:prstGeom prst="rect">
-            <a:avLst/>
-          </a:prstGeom>
-          <a:noFill/>
-          <a:ln/>
-        </p:spPr>
-        <p:txBody>
-          <a:bodyPr wrap="square" lIns="0" tIns="0" rIns="0" bIns="0" rtlCol="0" anchor="ctr"/>
-          <a:lstStyle/>
-          <a:p>
-            <a:pPr indent="0" marL="0">
-              <a:buNone/>
-            </a:pPr>
-            <a:r>
-              <a:rPr lang="en-US" sz="1800" dirty="0">
-                <a:solidFill>
-                  <a:schemeClr val="tx1"/>
-                </a:solidFill>
-              </a:rPr>
-              <a:t>Build the Lambda function</a:t>
-            </a:r>
-            <a:endParaRPr lang="en-US" sz="1800" dirty="0"/>
-          </a:p>
-        </p:txBody>
-      </p:sp>
-      <p:sp>
-        <p:nvSpPr>
-          <p:cNvPr id="18" name="step 4 card"/>
+              <a:rPr lang="en-US" sz="1400" dirty="0">
+                <a:solidFill>
+                  <a:schemeClr val="tx2"/>
+                </a:solidFill>
+              </a:rPr>
+              <a:t>Python code</a:t>
+            </a:r>
+            <a:endParaRPr lang="en-US" sz="1400" dirty="0"/>
+          </a:p>
+        </p:txBody>
+      </p:sp>
+      <p:sp>
+        <p:nvSpPr>
+          <p:cNvPr id="25" name="bedrock node"/>
           <p:cNvSpPr/>
           <p:nvPr/>
         </p:nvSpPr>
         <p:spPr>
           <a:xfrm>
-            <a:off x="548640" y="4892040"/>
-            <a:ext cx="5440680" cy="960120"/>
+            <a:off x="9006840" y="3063240"/>
+            <a:ext cx="2286000" cy="914400"/>
           </a:xfrm>
           <a:prstGeom prst="roundRect">
             <a:avLst>
-              <a:gd name="adj" fmla="val 14286"/>
+              <a:gd name="adj" fmla="val 15000"/>
             </a:avLst>
           </a:prstGeom>
           <a:solidFill>
-            <a:schemeClr val="bg1"/>
+            <a:schemeClr val="bg2"/>
           </a:solidFill>
           <a:ln/>
         </p:spPr>
       </p:sp>
       <p:sp>
         <p:nvSpPr>
-          <p:cNvPr id="19" name="step 4 number"/>
+          <p:cNvPr id="26" name="bedrock circle"/>
           <p:cNvSpPr/>
           <p:nvPr/>
         </p:nvSpPr>
         <p:spPr>
           <a:xfrm>
-            <a:off x="731520" y="5029200"/>
-            <a:ext cx="685800" cy="685800"/>
+            <a:off x="9144000" y="3246120"/>
+            <a:ext cx="548640" cy="548640"/>
           </a:xfrm>
           <a:prstGeom prst="ellipse">
             <a:avLst/>
@@ -7618,16 +7875,40 @@
           <a:ln/>
         </p:spPr>
       </p:sp>
-      <p:sp>
-        <p:nvSpPr>
-          <p:cNvPr id="20" name="Text 18"/>
-          <p:cNvSpPr txBox="1"/>
-          <p:nvPr/>
-        </p:nvSpPr>
-        <p:spPr>
-          <a:xfrm>
-            <a:off x="731520" y="5029200"/>
-            <a:ext cx="685800" cy="685800"/>
+      <p:pic>
+        <p:nvPicPr>
+          <p:cNvPr id="27" name="bedrock icon" descr="bedrock">    </p:cNvPr>
+          <p:cNvPicPr>
+            <a:picLocks noChangeAspect="1"/>
+          </p:cNvPicPr>
+          <p:nvPr/>
+        </p:nvPicPr>
+        <p:blipFill>
+          <a:blip r:embed="rId6"/>
+          <a:stretch>
+            <a:fillRect/>
+          </a:stretch>
+        </p:blipFill>
+        <p:spPr>
+          <a:xfrm>
+            <a:off x="9281160" y="3383280"/>
+            <a:ext cx="274320" cy="274320"/>
+          </a:xfrm>
+          <a:prstGeom prst="rect">
+            <a:avLst/>
+          </a:prstGeom>
+        </p:spPr>
+      </p:pic>
+      <p:sp>
+        <p:nvSpPr>
+          <p:cNvPr id="28" name="Text 20"/>
+          <p:cNvSpPr txBox="1"/>
+          <p:nvPr/>
+        </p:nvSpPr>
+        <p:spPr>
+          <a:xfrm>
+            <a:off x="9829800" y="3182112"/>
+            <a:ext cx="1417320" cy="365760"/>
           </a:xfrm>
           <a:prstGeom prst="rect">
             <a:avLst/>
@@ -7639,31 +7920,31 @@
           <a:bodyPr wrap="square" lIns="0" tIns="0" rIns="0" bIns="0" rtlCol="0" anchor="ctr"/>
           <a:lstStyle/>
           <a:p>
-            <a:pPr algn="ctr" indent="0" marL="0">
-              <a:buNone/>
-            </a:pPr>
-            <a:r>
-              <a:rPr lang="en-US" sz="2000" b="1" dirty="0">
+            <a:pPr indent="0" marL="0">
+              <a:buNone/>
+            </a:pPr>
+            <a:r>
+              <a:rPr lang="en-US" sz="1500" b="1" dirty="0">
                 <a:solidFill>
                   <a:schemeClr val="tx1"/>
                 </a:solidFill>
               </a:rPr>
-              <a:t>4</a:t>
-            </a:r>
-            <a:endParaRPr lang="en-US" sz="2000" dirty="0"/>
-          </a:p>
-        </p:txBody>
-      </p:sp>
-      <p:sp>
-        <p:nvSpPr>
-          <p:cNvPr id="21" name="Text 19"/>
-          <p:cNvSpPr txBox="1"/>
-          <p:nvPr/>
-        </p:nvSpPr>
-        <p:spPr>
-          <a:xfrm>
-            <a:off x="1645920" y="5029200"/>
-            <a:ext cx="1143000" cy="685800"/>
+              <a:t>Bedrock</a:t>
+            </a:r>
+            <a:endParaRPr lang="en-US" sz="1500" dirty="0"/>
+          </a:p>
+        </p:txBody>
+      </p:sp>
+      <p:sp>
+        <p:nvSpPr>
+          <p:cNvPr id="29" name="Text 21"/>
+          <p:cNvSpPr txBox="1"/>
+          <p:nvPr/>
+        </p:nvSpPr>
+        <p:spPr>
+          <a:xfrm>
+            <a:off x="9829800" y="3538728"/>
+            <a:ext cx="1417320" cy="347472"/>
           </a:xfrm>
           <a:prstGeom prst="rect">
             <a:avLst/>
@@ -7679,67 +7960,31 @@
               <a:buNone/>
             </a:pPr>
             <a:r>
-              <a:rPr lang="en-US" sz="1600" b="1" dirty="0">
-                <a:solidFill>
-                  <a:schemeClr val="accent2"/>
-                </a:solidFill>
-              </a:rPr>
-              <a:t>20-28 min</a:t>
-            </a:r>
-            <a:endParaRPr lang="en-US" sz="1600" dirty="0"/>
-          </a:p>
-        </p:txBody>
-      </p:sp>
-      <p:sp>
-        <p:nvSpPr>
-          <p:cNvPr id="22" name="Text 20"/>
-          <p:cNvSpPr txBox="1"/>
-          <p:nvPr/>
-        </p:nvSpPr>
-        <p:spPr>
-          <a:xfrm>
-            <a:off x="2788920" y="5029200"/>
-            <a:ext cx="3063240" cy="685800"/>
-          </a:xfrm>
-          <a:prstGeom prst="rect">
-            <a:avLst/>
-          </a:prstGeom>
-          <a:noFill/>
-          <a:ln/>
-        </p:spPr>
-        <p:txBody>
-          <a:bodyPr wrap="square" lIns="0" tIns="0" rIns="0" bIns="0" rtlCol="0" anchor="ctr"/>
-          <a:lstStyle/>
-          <a:p>
-            <a:pPr indent="0" marL="0">
-              <a:buNone/>
-            </a:pPr>
-            <a:r>
-              <a:rPr lang="en-US" sz="1800" dirty="0">
-                <a:solidFill>
-                  <a:schemeClr val="tx1"/>
-                </a:solidFill>
-              </a:rPr>
-              <a:t>Connect API Gateway</a:t>
-            </a:r>
-            <a:endParaRPr lang="en-US" sz="1800" dirty="0"/>
-          </a:p>
-        </p:txBody>
-      </p:sp>
-      <p:sp>
-        <p:nvSpPr>
-          <p:cNvPr id="23" name="step 5 card"/>
+              <a:rPr lang="en-US" sz="1400" dirty="0">
+                <a:solidFill>
+                  <a:schemeClr val="tx2"/>
+                </a:solidFill>
+              </a:rPr>
+              <a:t>Nova Pro AI</a:t>
+            </a:r>
+            <a:endParaRPr lang="en-US" sz="1400" dirty="0"/>
+          </a:p>
+        </p:txBody>
+      </p:sp>
+      <p:sp>
+        <p:nvSpPr>
+          <p:cNvPr id="30" name="iam node"/>
           <p:cNvSpPr/>
           <p:nvPr/>
         </p:nvSpPr>
         <p:spPr>
           <a:xfrm>
-            <a:off x="6172200" y="1463040"/>
-            <a:ext cx="5440680" cy="960120"/>
+            <a:off x="9006840" y="1783080"/>
+            <a:ext cx="2286000" cy="914400"/>
           </a:xfrm>
           <a:prstGeom prst="roundRect">
             <a:avLst>
-              <a:gd name="adj" fmla="val 14286"/>
+              <a:gd name="adj" fmla="val 15000"/>
             </a:avLst>
           </a:prstGeom>
           <a:solidFill>
@@ -7750,14 +7995,14 @@
       </p:sp>
       <p:sp>
         <p:nvSpPr>
-          <p:cNvPr id="24" name="step 5 number"/>
+          <p:cNvPr id="31" name="iam circle"/>
           <p:cNvSpPr/>
           <p:nvPr/>
         </p:nvSpPr>
         <p:spPr>
           <a:xfrm>
-            <a:off x="6355080" y="1600200"/>
-            <a:ext cx="685800" cy="685800"/>
+            <a:off x="9144000" y="1965960"/>
+            <a:ext cx="548640" cy="548640"/>
           </a:xfrm>
           <a:prstGeom prst="ellipse">
             <a:avLst/>
@@ -7768,16 +8013,40 @@
           <a:ln/>
         </p:spPr>
       </p:sp>
-      <p:sp>
-        <p:nvSpPr>
-          <p:cNvPr id="25" name="Text 23"/>
-          <p:cNvSpPr txBox="1"/>
-          <p:nvPr/>
-        </p:nvSpPr>
-        <p:spPr>
-          <a:xfrm>
-            <a:off x="6355080" y="1600200"/>
-            <a:ext cx="685800" cy="685800"/>
+      <p:pic>
+        <p:nvPicPr>
+          <p:cNvPr id="32" name="iam icon" descr="iam">    </p:cNvPr>
+          <p:cNvPicPr>
+            <a:picLocks noChangeAspect="1"/>
+          </p:cNvPicPr>
+          <p:nvPr/>
+        </p:nvPicPr>
+        <p:blipFill>
+          <a:blip r:embed="rId7"/>
+          <a:stretch>
+            <a:fillRect/>
+          </a:stretch>
+        </p:blipFill>
+        <p:spPr>
+          <a:xfrm>
+            <a:off x="9281160" y="2103120"/>
+            <a:ext cx="274320" cy="274320"/>
+          </a:xfrm>
+          <a:prstGeom prst="rect">
+            <a:avLst/>
+          </a:prstGeom>
+        </p:spPr>
+      </p:pic>
+      <p:sp>
+        <p:nvSpPr>
+          <p:cNvPr id="33" name="Text 24"/>
+          <p:cNvSpPr txBox="1"/>
+          <p:nvPr/>
+        </p:nvSpPr>
+        <p:spPr>
+          <a:xfrm>
+            <a:off x="9829800" y="1901952"/>
+            <a:ext cx="1417320" cy="365760"/>
           </a:xfrm>
           <a:prstGeom prst="rect">
             <a:avLst/>
@@ -7789,31 +8058,31 @@
           <a:bodyPr wrap="square" lIns="0" tIns="0" rIns="0" bIns="0" rtlCol="0" anchor="ctr"/>
           <a:lstStyle/>
           <a:p>
-            <a:pPr algn="ctr" indent="0" marL="0">
-              <a:buNone/>
-            </a:pPr>
-            <a:r>
-              <a:rPr lang="en-US" sz="2000" b="1" dirty="0">
+            <a:pPr indent="0" marL="0">
+              <a:buNone/>
+            </a:pPr>
+            <a:r>
+              <a:rPr lang="en-US" sz="1500" b="1" dirty="0">
                 <a:solidFill>
                   <a:schemeClr val="tx1"/>
                 </a:solidFill>
               </a:rPr>
-              <a:t>5</a:t>
-            </a:r>
-            <a:endParaRPr lang="en-US" sz="2000" dirty="0"/>
-          </a:p>
-        </p:txBody>
-      </p:sp>
-      <p:sp>
-        <p:nvSpPr>
-          <p:cNvPr id="26" name="Text 24"/>
-          <p:cNvSpPr txBox="1"/>
-          <p:nvPr/>
-        </p:nvSpPr>
-        <p:spPr>
-          <a:xfrm>
-            <a:off x="7269480" y="1600200"/>
-            <a:ext cx="1143000" cy="685800"/>
+              <a:t>IAM</a:t>
+            </a:r>
+            <a:endParaRPr lang="en-US" sz="1500" dirty="0"/>
+          </a:p>
+        </p:txBody>
+      </p:sp>
+      <p:sp>
+        <p:nvSpPr>
+          <p:cNvPr id="34" name="Text 25"/>
+          <p:cNvSpPr txBox="1"/>
+          <p:nvPr/>
+        </p:nvSpPr>
+        <p:spPr>
+          <a:xfrm>
+            <a:off x="9829800" y="2258568"/>
+            <a:ext cx="1417320" cy="347472"/>
           </a:xfrm>
           <a:prstGeom prst="rect">
             <a:avLst/>
@@ -7829,85 +8098,49 @@
               <a:buNone/>
             </a:pPr>
             <a:r>
-              <a:rPr lang="en-US" sz="1600" b="1" dirty="0">
-                <a:solidFill>
-                  <a:schemeClr val="accent2"/>
-                </a:solidFill>
-              </a:rPr>
-              <a:t>28-37 min</a:t>
-            </a:r>
-            <a:endParaRPr lang="en-US" sz="1600" dirty="0"/>
-          </a:p>
-        </p:txBody>
-      </p:sp>
-      <p:sp>
-        <p:nvSpPr>
-          <p:cNvPr id="27" name="Text 25"/>
-          <p:cNvSpPr txBox="1"/>
-          <p:nvPr/>
-        </p:nvSpPr>
-        <p:spPr>
-          <a:xfrm>
-            <a:off x="8412480" y="1600200"/>
-            <a:ext cx="3063240" cy="685800"/>
-          </a:xfrm>
-          <a:prstGeom prst="rect">
-            <a:avLst/>
-          </a:prstGeom>
-          <a:noFill/>
-          <a:ln/>
-        </p:spPr>
-        <p:txBody>
-          <a:bodyPr wrap="square" lIns="0" tIns="0" rIns="0" bIns="0" rtlCol="0" anchor="ctr"/>
-          <a:lstStyle/>
-          <a:p>
-            <a:pPr indent="0" marL="0">
-              <a:buNone/>
-            </a:pPr>
-            <a:r>
-              <a:rPr lang="en-US" sz="1800" dirty="0">
-                <a:solidFill>
-                  <a:schemeClr val="tx1"/>
-                </a:solidFill>
-              </a:rPr>
-              <a:t>Connect the website</a:t>
-            </a:r>
-            <a:endParaRPr lang="en-US" sz="1800" dirty="0"/>
-          </a:p>
-        </p:txBody>
-      </p:sp>
-      <p:sp>
-        <p:nvSpPr>
-          <p:cNvPr id="28" name="step 6 card"/>
+              <a:rPr lang="en-US" sz="1400" dirty="0">
+                <a:solidFill>
+                  <a:schemeClr val="tx2"/>
+                </a:solidFill>
+              </a:rPr>
+              <a:t>Permissions</a:t>
+            </a:r>
+            <a:endParaRPr lang="en-US" sz="1400" dirty="0"/>
+          </a:p>
+        </p:txBody>
+      </p:sp>
+      <p:sp>
+        <p:nvSpPr>
+          <p:cNvPr id="35" name="cloudwatch node"/>
           <p:cNvSpPr/>
           <p:nvPr/>
         </p:nvSpPr>
         <p:spPr>
           <a:xfrm>
-            <a:off x="6172200" y="2606040"/>
-            <a:ext cx="5440680" cy="960120"/>
+            <a:off x="5989320" y="4343400"/>
+            <a:ext cx="2286000" cy="914400"/>
           </a:xfrm>
           <a:prstGeom prst="roundRect">
             <a:avLst>
-              <a:gd name="adj" fmla="val 14286"/>
+              <a:gd name="adj" fmla="val 15000"/>
             </a:avLst>
           </a:prstGeom>
           <a:solidFill>
-            <a:schemeClr val="bg1"/>
+            <a:schemeClr val="bg2"/>
           </a:solidFill>
           <a:ln/>
         </p:spPr>
       </p:sp>
       <p:sp>
         <p:nvSpPr>
-          <p:cNvPr id="29" name="step 6 number"/>
+          <p:cNvPr id="36" name="cloudwatch circle"/>
           <p:cNvSpPr/>
           <p:nvPr/>
         </p:nvSpPr>
         <p:spPr>
           <a:xfrm>
-            <a:off x="6355080" y="2743200"/>
-            <a:ext cx="685800" cy="685800"/>
+            <a:off x="6126480" y="4526280"/>
+            <a:ext cx="548640" cy="548640"/>
           </a:xfrm>
           <a:prstGeom prst="ellipse">
             <a:avLst/>
@@ -7918,16 +8151,40 @@
           <a:ln/>
         </p:spPr>
       </p:sp>
-      <p:sp>
-        <p:nvSpPr>
-          <p:cNvPr id="30" name="Text 28"/>
-          <p:cNvSpPr txBox="1"/>
-          <p:nvPr/>
-        </p:nvSpPr>
-        <p:spPr>
-          <a:xfrm>
-            <a:off x="6355080" y="2743200"/>
-            <a:ext cx="685800" cy="685800"/>
+      <p:pic>
+        <p:nvPicPr>
+          <p:cNvPr id="37" name="cloudwatch icon" descr="cloudwatch">    </p:cNvPr>
+          <p:cNvPicPr>
+            <a:picLocks noChangeAspect="1"/>
+          </p:cNvPicPr>
+          <p:nvPr/>
+        </p:nvPicPr>
+        <p:blipFill>
+          <a:blip r:embed="rId8"/>
+          <a:stretch>
+            <a:fillRect/>
+          </a:stretch>
+        </p:blipFill>
+        <p:spPr>
+          <a:xfrm>
+            <a:off x="6263640" y="4663440"/>
+            <a:ext cx="274320" cy="274320"/>
+          </a:xfrm>
+          <a:prstGeom prst="rect">
+            <a:avLst/>
+          </a:prstGeom>
+        </p:spPr>
+      </p:pic>
+      <p:sp>
+        <p:nvSpPr>
+          <p:cNvPr id="38" name="Text 28"/>
+          <p:cNvSpPr txBox="1"/>
+          <p:nvPr/>
+        </p:nvSpPr>
+        <p:spPr>
+          <a:xfrm>
+            <a:off x="6812280" y="4462272"/>
+            <a:ext cx="1417320" cy="365760"/>
           </a:xfrm>
           <a:prstGeom prst="rect">
             <a:avLst/>
@@ -7939,31 +8196,625 @@
           <a:bodyPr wrap="square" lIns="0" tIns="0" rIns="0" bIns="0" rtlCol="0" anchor="ctr"/>
           <a:lstStyle/>
           <a:p>
+            <a:pPr indent="0" marL="0">
+              <a:buNone/>
+            </a:pPr>
+            <a:r>
+              <a:rPr lang="en-US" sz="1500" b="1" dirty="0">
+                <a:solidFill>
+                  <a:schemeClr val="tx1"/>
+                </a:solidFill>
+              </a:rPr>
+              <a:t>CloudWatch</a:t>
+            </a:r>
+            <a:endParaRPr lang="en-US" sz="1500" dirty="0"/>
+          </a:p>
+        </p:txBody>
+      </p:sp>
+      <p:sp>
+        <p:nvSpPr>
+          <p:cNvPr id="39" name="Text 29"/>
+          <p:cNvSpPr txBox="1"/>
+          <p:nvPr/>
+        </p:nvSpPr>
+        <p:spPr>
+          <a:xfrm>
+            <a:off x="6812280" y="4818888"/>
+            <a:ext cx="1417320" cy="347472"/>
+          </a:xfrm>
+          <a:prstGeom prst="rect">
+            <a:avLst/>
+          </a:prstGeom>
+          <a:noFill/>
+          <a:ln/>
+        </p:spPr>
+        <p:txBody>
+          <a:bodyPr wrap="square" lIns="0" tIns="0" rIns="0" bIns="0" rtlCol="0" anchor="ctr"/>
+          <a:lstStyle/>
+          <a:p>
+            <a:pPr indent="0" marL="0">
+              <a:buNone/>
+            </a:pPr>
+            <a:r>
+              <a:rPr lang="en-US" sz="1400" dirty="0">
+                <a:solidFill>
+                  <a:schemeClr val="tx2"/>
+                </a:solidFill>
+              </a:rPr>
+              <a:t>Logs</a:t>
+            </a:r>
+            <a:endParaRPr lang="en-US" sz="1400" dirty="0"/>
+          </a:p>
+        </p:txBody>
+      </p:sp>
+      <p:sp>
+        <p:nvSpPr>
+          <p:cNvPr id="40" name="you to amplify"/>
+          <p:cNvSpPr/>
+          <p:nvPr/>
+        </p:nvSpPr>
+        <p:spPr>
+          <a:xfrm flipV="1">
+            <a:off x="1965960" y="2240280"/>
+            <a:ext cx="1051560" cy="731520"/>
+          </a:xfrm>
+          <a:prstGeom prst="line">
+            <a:avLst/>
+          </a:prstGeom>
+          <a:noFill/>
+          <a:ln w="25400">
+            <a:solidFill>
+              <a:srgbClr val="3A4157"/>
+            </a:solidFill>
+            <a:prstDash val="solid"/>
+            <a:headEnd type="triangle"/>
+            <a:tailEnd type="triangle"/>
+          </a:ln>
+        </p:spPr>
+      </p:sp>
+      <p:sp>
+        <p:nvSpPr>
+          <p:cNvPr id="41" name="step 1 badge"/>
+          <p:cNvSpPr/>
+          <p:nvPr/>
+        </p:nvSpPr>
+        <p:spPr>
+          <a:xfrm>
+            <a:off x="2194560" y="2194560"/>
+            <a:ext cx="384048" cy="384048"/>
+          </a:xfrm>
+          <a:prstGeom prst="ellipse">
+            <a:avLst/>
+          </a:prstGeom>
+          <a:solidFill>
+            <a:schemeClr val="accent3"/>
+          </a:solidFill>
+          <a:ln/>
+        </p:spPr>
+      </p:sp>
+      <p:sp>
+        <p:nvSpPr>
+          <p:cNvPr id="42" name="Text 32"/>
+          <p:cNvSpPr txBox="1"/>
+          <p:nvPr/>
+        </p:nvSpPr>
+        <p:spPr>
+          <a:xfrm>
+            <a:off x="2194560" y="2194560"/>
+            <a:ext cx="384048" cy="384048"/>
+          </a:xfrm>
+          <a:prstGeom prst="rect">
+            <a:avLst/>
+          </a:prstGeom>
+          <a:noFill/>
+          <a:ln/>
+        </p:spPr>
+        <p:txBody>
+          <a:bodyPr wrap="square" lIns="0" tIns="0" rIns="0" bIns="0" rtlCol="0" anchor="ctr"/>
+          <a:lstStyle/>
+          <a:p>
             <a:pPr algn="ctr" indent="0" marL="0">
               <a:buNone/>
             </a:pPr>
             <a:r>
-              <a:rPr lang="en-US" sz="2000" b="1" dirty="0">
+              <a:rPr lang="en-US" sz="1400" b="1" dirty="0">
+                <a:solidFill>
+                  <a:schemeClr val="bg1"/>
+                </a:solidFill>
+              </a:rPr>
+              <a:t>1</a:t>
+            </a:r>
+            <a:endParaRPr lang="en-US" sz="1400" dirty="0"/>
+          </a:p>
+        </p:txBody>
+      </p:sp>
+      <p:sp>
+        <p:nvSpPr>
+          <p:cNvPr id="43" name="you to api gateway"/>
+          <p:cNvSpPr/>
+          <p:nvPr/>
+        </p:nvSpPr>
+        <p:spPr>
+          <a:xfrm>
+            <a:off x="1965960" y="3520440"/>
+            <a:ext cx="1051560" cy="0"/>
+          </a:xfrm>
+          <a:prstGeom prst="line">
+            <a:avLst/>
+          </a:prstGeom>
+          <a:noFill/>
+          <a:ln w="25400">
+            <a:solidFill>
+              <a:srgbClr val="3A4157"/>
+            </a:solidFill>
+            <a:prstDash val="solid"/>
+            <a:headEnd type="triangle"/>
+            <a:tailEnd type="triangle"/>
+          </a:ln>
+        </p:spPr>
+      </p:sp>
+      <p:sp>
+        <p:nvSpPr>
+          <p:cNvPr id="44" name="step 2 badge"/>
+          <p:cNvSpPr/>
+          <p:nvPr/>
+        </p:nvSpPr>
+        <p:spPr>
+          <a:xfrm>
+            <a:off x="2304288" y="3639312"/>
+            <a:ext cx="384048" cy="384048"/>
+          </a:xfrm>
+          <a:prstGeom prst="ellipse">
+            <a:avLst/>
+          </a:prstGeom>
+          <a:solidFill>
+            <a:schemeClr val="accent3"/>
+          </a:solidFill>
+          <a:ln/>
+        </p:spPr>
+      </p:sp>
+      <p:sp>
+        <p:nvSpPr>
+          <p:cNvPr id="45" name="Text 35"/>
+          <p:cNvSpPr txBox="1"/>
+          <p:nvPr/>
+        </p:nvSpPr>
+        <p:spPr>
+          <a:xfrm>
+            <a:off x="2304288" y="3639312"/>
+            <a:ext cx="384048" cy="384048"/>
+          </a:xfrm>
+          <a:prstGeom prst="rect">
+            <a:avLst/>
+          </a:prstGeom>
+          <a:noFill/>
+          <a:ln/>
+        </p:spPr>
+        <p:txBody>
+          <a:bodyPr wrap="square" lIns="0" tIns="0" rIns="0" bIns="0" rtlCol="0" anchor="ctr"/>
+          <a:lstStyle/>
+          <a:p>
+            <a:pPr algn="ctr" indent="0" marL="0">
+              <a:buNone/>
+            </a:pPr>
+            <a:r>
+              <a:rPr lang="en-US" sz="1400" b="1" dirty="0">
+                <a:solidFill>
+                  <a:schemeClr val="bg1"/>
+                </a:solidFill>
+              </a:rPr>
+              <a:t>2</a:t>
+            </a:r>
+            <a:endParaRPr lang="en-US" sz="1400" dirty="0"/>
+          </a:p>
+        </p:txBody>
+      </p:sp>
+      <p:sp>
+        <p:nvSpPr>
+          <p:cNvPr id="46" name="api gateway to lambda"/>
+          <p:cNvSpPr/>
+          <p:nvPr/>
+        </p:nvSpPr>
+        <p:spPr>
+          <a:xfrm>
+            <a:off x="5303520" y="3520440"/>
+            <a:ext cx="685800" cy="0"/>
+          </a:xfrm>
+          <a:prstGeom prst="line">
+            <a:avLst/>
+          </a:prstGeom>
+          <a:noFill/>
+          <a:ln w="25400">
+            <a:solidFill>
+              <a:srgbClr val="3A4157"/>
+            </a:solidFill>
+            <a:prstDash val="solid"/>
+            <a:headEnd type="triangle"/>
+            <a:tailEnd type="triangle"/>
+          </a:ln>
+        </p:spPr>
+      </p:sp>
+      <p:sp>
+        <p:nvSpPr>
+          <p:cNvPr id="47" name="step 3 badge"/>
+          <p:cNvSpPr/>
+          <p:nvPr/>
+        </p:nvSpPr>
+        <p:spPr>
+          <a:xfrm>
+            <a:off x="5458968" y="2971800"/>
+            <a:ext cx="384048" cy="384048"/>
+          </a:xfrm>
+          <a:prstGeom prst="ellipse">
+            <a:avLst/>
+          </a:prstGeom>
+          <a:solidFill>
+            <a:schemeClr val="accent3"/>
+          </a:solidFill>
+          <a:ln/>
+        </p:spPr>
+      </p:sp>
+      <p:sp>
+        <p:nvSpPr>
+          <p:cNvPr id="48" name="Text 38"/>
+          <p:cNvSpPr txBox="1"/>
+          <p:nvPr/>
+        </p:nvSpPr>
+        <p:spPr>
+          <a:xfrm>
+            <a:off x="5458968" y="2971800"/>
+            <a:ext cx="384048" cy="384048"/>
+          </a:xfrm>
+          <a:prstGeom prst="rect">
+            <a:avLst/>
+          </a:prstGeom>
+          <a:noFill/>
+          <a:ln/>
+        </p:spPr>
+        <p:txBody>
+          <a:bodyPr wrap="square" lIns="0" tIns="0" rIns="0" bIns="0" rtlCol="0" anchor="ctr"/>
+          <a:lstStyle/>
+          <a:p>
+            <a:pPr algn="ctr" indent="0" marL="0">
+              <a:buNone/>
+            </a:pPr>
+            <a:r>
+              <a:rPr lang="en-US" sz="1400" b="1" dirty="0">
+                <a:solidFill>
+                  <a:schemeClr val="bg1"/>
+                </a:solidFill>
+              </a:rPr>
+              <a:t>3</a:t>
+            </a:r>
+            <a:endParaRPr lang="en-US" sz="1400" dirty="0"/>
+          </a:p>
+        </p:txBody>
+      </p:sp>
+      <p:sp>
+        <p:nvSpPr>
+          <p:cNvPr id="49" name="lambda to bedrock"/>
+          <p:cNvSpPr/>
+          <p:nvPr/>
+        </p:nvSpPr>
+        <p:spPr>
+          <a:xfrm>
+            <a:off x="8275320" y="3520440"/>
+            <a:ext cx="731520" cy="0"/>
+          </a:xfrm>
+          <a:prstGeom prst="line">
+            <a:avLst/>
+          </a:prstGeom>
+          <a:noFill/>
+          <a:ln w="25400">
+            <a:solidFill>
+              <a:srgbClr val="3A4157"/>
+            </a:solidFill>
+            <a:prstDash val="solid"/>
+            <a:headEnd type="triangle"/>
+            <a:tailEnd type="triangle"/>
+          </a:ln>
+        </p:spPr>
+      </p:sp>
+      <p:sp>
+        <p:nvSpPr>
+          <p:cNvPr id="50" name="step 4 badge"/>
+          <p:cNvSpPr/>
+          <p:nvPr/>
+        </p:nvSpPr>
+        <p:spPr>
+          <a:xfrm>
+            <a:off x="8449056" y="3749040"/>
+            <a:ext cx="384048" cy="384048"/>
+          </a:xfrm>
+          <a:prstGeom prst="ellipse">
+            <a:avLst/>
+          </a:prstGeom>
+          <a:solidFill>
+            <a:schemeClr val="accent3"/>
+          </a:solidFill>
+          <a:ln/>
+        </p:spPr>
+      </p:sp>
+      <p:sp>
+        <p:nvSpPr>
+          <p:cNvPr id="51" name="Text 41"/>
+          <p:cNvSpPr txBox="1"/>
+          <p:nvPr/>
+        </p:nvSpPr>
+        <p:spPr>
+          <a:xfrm>
+            <a:off x="8449056" y="3749040"/>
+            <a:ext cx="384048" cy="384048"/>
+          </a:xfrm>
+          <a:prstGeom prst="rect">
+            <a:avLst/>
+          </a:prstGeom>
+          <a:noFill/>
+          <a:ln/>
+        </p:spPr>
+        <p:txBody>
+          <a:bodyPr wrap="square" lIns="0" tIns="0" rIns="0" bIns="0" rtlCol="0" anchor="ctr"/>
+          <a:lstStyle/>
+          <a:p>
+            <a:pPr algn="ctr" indent="0" marL="0">
+              <a:buNone/>
+            </a:pPr>
+            <a:r>
+              <a:rPr lang="en-US" sz="1400" b="1" dirty="0">
+                <a:solidFill>
+                  <a:schemeClr val="bg1"/>
+                </a:solidFill>
+              </a:rPr>
+              <a:t>4</a:t>
+            </a:r>
+            <a:endParaRPr lang="en-US" sz="1400" dirty="0"/>
+          </a:p>
+        </p:txBody>
+      </p:sp>
+      <p:sp>
+        <p:nvSpPr>
+          <p:cNvPr id="52" name="iam allows lambda to call bedrock"/>
+          <p:cNvSpPr/>
+          <p:nvPr/>
+        </p:nvSpPr>
+        <p:spPr>
+          <a:xfrm flipH="1">
+            <a:off x="8641080" y="2697480"/>
+            <a:ext cx="1051560" cy="731520"/>
+          </a:xfrm>
+          <a:prstGeom prst="line">
+            <a:avLst/>
+          </a:prstGeom>
+          <a:noFill/>
+          <a:ln w="25400">
+            <a:solidFill>
+              <a:srgbClr val="3A4157"/>
+            </a:solidFill>
+            <a:prstDash val="dash"/>
+            <a:headEnd type="none"/>
+            <a:tailEnd type="triangle"/>
+          </a:ln>
+        </p:spPr>
+      </p:sp>
+      <p:sp>
+        <p:nvSpPr>
+          <p:cNvPr id="53" name="Text 43"/>
+          <p:cNvSpPr txBox="1"/>
+          <p:nvPr/>
+        </p:nvSpPr>
+        <p:spPr>
+          <a:xfrm>
+            <a:off x="7863840" y="2724912"/>
+            <a:ext cx="1188720" cy="320040"/>
+          </a:xfrm>
+          <a:prstGeom prst="rect">
+            <a:avLst/>
+          </a:prstGeom>
+          <a:noFill/>
+          <a:ln/>
+        </p:spPr>
+        <p:txBody>
+          <a:bodyPr wrap="square" lIns="0" tIns="0" rIns="0" bIns="0" rtlCol="0" anchor="t"/>
+          <a:lstStyle/>
+          <a:p>
+            <a:pPr algn="r" indent="0" marL="0">
+              <a:buNone/>
+            </a:pPr>
+            <a:r>
+              <a:rPr lang="en-US" sz="1400" i="1" dirty="0">
+                <a:solidFill>
+                  <a:schemeClr val="tx2"/>
+                </a:solidFill>
+              </a:rPr>
+              <a:t>allows</a:t>
+            </a:r>
+            <a:endParaRPr lang="en-US" sz="1400" dirty="0"/>
+          </a:p>
+        </p:txBody>
+      </p:sp>
+      <p:sp>
+        <p:nvSpPr>
+          <p:cNvPr id="54" name="lambda to cloudwatch"/>
+          <p:cNvSpPr/>
+          <p:nvPr/>
+        </p:nvSpPr>
+        <p:spPr>
+          <a:xfrm>
+            <a:off x="7132320" y="3977640"/>
+            <a:ext cx="0" cy="365760"/>
+          </a:xfrm>
+          <a:prstGeom prst="line">
+            <a:avLst/>
+          </a:prstGeom>
+          <a:noFill/>
+          <a:ln w="25400">
+            <a:solidFill>
+              <a:srgbClr val="3A4157"/>
+            </a:solidFill>
+            <a:prstDash val="dash"/>
+            <a:headEnd type="none"/>
+            <a:tailEnd type="triangle"/>
+          </a:ln>
+        </p:spPr>
+      </p:sp>
+      <p:sp>
+        <p:nvSpPr>
+          <p:cNvPr id="55" name="Text 45"/>
+          <p:cNvSpPr txBox="1"/>
+          <p:nvPr/>
+        </p:nvSpPr>
+        <p:spPr>
+          <a:xfrm>
+            <a:off x="7315200" y="3977640"/>
+            <a:ext cx="1463040" cy="365760"/>
+          </a:xfrm>
+          <a:prstGeom prst="rect">
+            <a:avLst/>
+          </a:prstGeom>
+          <a:noFill/>
+          <a:ln/>
+        </p:spPr>
+        <p:txBody>
+          <a:bodyPr wrap="square" lIns="0" tIns="0" rIns="0" bIns="0" rtlCol="0" anchor="ctr"/>
+          <a:lstStyle/>
+          <a:p>
+            <a:pPr indent="0" marL="0">
+              <a:buNone/>
+            </a:pPr>
+            <a:r>
+              <a:rPr lang="en-US" sz="1400" i="1" dirty="0">
+                <a:solidFill>
+                  <a:schemeClr val="tx2"/>
+                </a:solidFill>
+              </a:rPr>
+              <a:t>writes logs</a:t>
+            </a:r>
+            <a:endParaRPr lang="en-US" sz="1400" dirty="0"/>
+          </a:p>
+        </p:txBody>
+      </p:sp>
+      <p:sp>
+        <p:nvSpPr>
+          <p:cNvPr id="56" name="step 1 badge"/>
+          <p:cNvSpPr/>
+          <p:nvPr/>
+        </p:nvSpPr>
+        <p:spPr>
+          <a:xfrm>
+            <a:off x="548640" y="5687568"/>
+            <a:ext cx="384048" cy="384048"/>
+          </a:xfrm>
+          <a:prstGeom prst="ellipse">
+            <a:avLst/>
+          </a:prstGeom>
+          <a:solidFill>
+            <a:schemeClr val="accent3"/>
+          </a:solidFill>
+          <a:ln/>
+        </p:spPr>
+      </p:sp>
+      <p:sp>
+        <p:nvSpPr>
+          <p:cNvPr id="57" name="Text 47"/>
+          <p:cNvSpPr txBox="1"/>
+          <p:nvPr/>
+        </p:nvSpPr>
+        <p:spPr>
+          <a:xfrm>
+            <a:off x="548640" y="5687568"/>
+            <a:ext cx="384048" cy="384048"/>
+          </a:xfrm>
+          <a:prstGeom prst="rect">
+            <a:avLst/>
+          </a:prstGeom>
+          <a:noFill/>
+          <a:ln/>
+        </p:spPr>
+        <p:txBody>
+          <a:bodyPr wrap="square" lIns="0" tIns="0" rIns="0" bIns="0" rtlCol="0" anchor="ctr"/>
+          <a:lstStyle/>
+          <a:p>
+            <a:pPr algn="ctr" indent="0" marL="0">
+              <a:buNone/>
+            </a:pPr>
+            <a:r>
+              <a:rPr lang="en-US" sz="1400" b="1" dirty="0">
+                <a:solidFill>
+                  <a:schemeClr val="bg1"/>
+                </a:solidFill>
+              </a:rPr>
+              <a:t>1</a:t>
+            </a:r>
+            <a:endParaRPr lang="en-US" sz="1400" dirty="0"/>
+          </a:p>
+        </p:txBody>
+      </p:sp>
+      <p:sp>
+        <p:nvSpPr>
+          <p:cNvPr id="58" name="Text 48"/>
+          <p:cNvSpPr txBox="1"/>
+          <p:nvPr/>
+        </p:nvSpPr>
+        <p:spPr>
+          <a:xfrm>
+            <a:off x="1024128" y="5605272"/>
+            <a:ext cx="1691640" cy="548640"/>
+          </a:xfrm>
+          <a:prstGeom prst="rect">
+            <a:avLst/>
+          </a:prstGeom>
+          <a:noFill/>
+          <a:ln/>
+        </p:spPr>
+        <p:txBody>
+          <a:bodyPr wrap="square" lIns="0" tIns="0" rIns="0" bIns="0" rtlCol="0" anchor="ctr"/>
+          <a:lstStyle/>
+          <a:p>
+            <a:pPr indent="0" marL="0">
+              <a:buNone/>
+            </a:pPr>
+            <a:r>
+              <a:rPr lang="en-US" sz="1400" dirty="0">
                 <a:solidFill>
                   <a:schemeClr val="tx1"/>
                 </a:solidFill>
               </a:rPr>
-              <a:t>6</a:t>
-            </a:r>
-            <a:endParaRPr lang="en-US" sz="2000" dirty="0"/>
-          </a:p>
-        </p:txBody>
-      </p:sp>
-      <p:sp>
-        <p:nvSpPr>
-          <p:cNvPr id="31" name="Text 29"/>
-          <p:cNvSpPr txBox="1"/>
-          <p:nvPr/>
-        </p:nvSpPr>
-        <p:spPr>
-          <a:xfrm>
-            <a:off x="7269480" y="2743200"/>
-            <a:ext cx="1143000" cy="685800"/>
+              <a:t>Open the website</a:t>
+            </a:r>
+            <a:endParaRPr lang="en-US" sz="1400" dirty="0"/>
+          </a:p>
+        </p:txBody>
+      </p:sp>
+      <p:sp>
+        <p:nvSpPr>
+          <p:cNvPr id="59" name="step 2 badge"/>
+          <p:cNvSpPr/>
+          <p:nvPr/>
+        </p:nvSpPr>
+        <p:spPr>
+          <a:xfrm>
+            <a:off x="2788920" y="5687568"/>
+            <a:ext cx="384048" cy="384048"/>
+          </a:xfrm>
+          <a:prstGeom prst="ellipse">
+            <a:avLst/>
+          </a:prstGeom>
+          <a:solidFill>
+            <a:schemeClr val="accent3"/>
+          </a:solidFill>
+          <a:ln/>
+        </p:spPr>
+      </p:sp>
+      <p:sp>
+        <p:nvSpPr>
+          <p:cNvPr id="60" name="Text 50"/>
+          <p:cNvSpPr txBox="1"/>
+          <p:nvPr/>
+        </p:nvSpPr>
+        <p:spPr>
+          <a:xfrm>
+            <a:off x="2788920" y="5687568"/>
+            <a:ext cx="384048" cy="384048"/>
           </a:xfrm>
           <a:prstGeom prst="rect">
             <a:avLst/>
@@ -7975,31 +8826,31 @@
           <a:bodyPr wrap="square" lIns="0" tIns="0" rIns="0" bIns="0" rtlCol="0" anchor="ctr"/>
           <a:lstStyle/>
           <a:p>
-            <a:pPr indent="0" marL="0">
-              <a:buNone/>
-            </a:pPr>
-            <a:r>
-              <a:rPr lang="en-US" sz="1600" b="1" dirty="0">
-                <a:solidFill>
-                  <a:schemeClr val="accent2"/>
-                </a:solidFill>
-              </a:rPr>
-              <a:t>37-41 min</a:t>
-            </a:r>
-            <a:endParaRPr lang="en-US" sz="1600" dirty="0"/>
-          </a:p>
-        </p:txBody>
-      </p:sp>
-      <p:sp>
-        <p:nvSpPr>
-          <p:cNvPr id="32" name="Text 30"/>
-          <p:cNvSpPr txBox="1"/>
-          <p:nvPr/>
-        </p:nvSpPr>
-        <p:spPr>
-          <a:xfrm>
-            <a:off x="8412480" y="2743200"/>
-            <a:ext cx="3063240" cy="685800"/>
+            <a:pPr algn="ctr" indent="0" marL="0">
+              <a:buNone/>
+            </a:pPr>
+            <a:r>
+              <a:rPr lang="en-US" sz="1400" b="1" dirty="0">
+                <a:solidFill>
+                  <a:schemeClr val="bg1"/>
+                </a:solidFill>
+              </a:rPr>
+              <a:t>2</a:t>
+            </a:r>
+            <a:endParaRPr lang="en-US" sz="1400" dirty="0"/>
+          </a:p>
+        </p:txBody>
+      </p:sp>
+      <p:sp>
+        <p:nvSpPr>
+          <p:cNvPr id="61" name="Text 51"/>
+          <p:cNvSpPr txBox="1"/>
+          <p:nvPr/>
+        </p:nvSpPr>
+        <p:spPr>
+          <a:xfrm>
+            <a:off x="3264408" y="5605272"/>
+            <a:ext cx="1691640" cy="548640"/>
           </a:xfrm>
           <a:prstGeom prst="rect">
             <a:avLst/>
@@ -8015,69 +8866,139 @@
               <a:buNone/>
             </a:pPr>
             <a:r>
-              <a:rPr lang="en-US" sz="1800" dirty="0">
+              <a:rPr lang="en-US" sz="1400" dirty="0">
                 <a:solidFill>
                   <a:schemeClr val="tx1"/>
                 </a:solidFill>
               </a:rPr>
-              <a:t>Test your app</a:t>
-            </a:r>
-            <a:endParaRPr lang="en-US" sz="1800" dirty="0"/>
-          </a:p>
-        </p:txBody>
-      </p:sp>
-      <p:sp>
-        <p:nvSpPr>
-          <p:cNvPr id="33" name="step 7 card"/>
+              <a:t>Send your answers</a:t>
+            </a:r>
+            <a:endParaRPr lang="en-US" sz="1400" dirty="0"/>
+          </a:p>
+        </p:txBody>
+      </p:sp>
+      <p:sp>
+        <p:nvSpPr>
+          <p:cNvPr id="62" name="step 3 badge"/>
           <p:cNvSpPr/>
           <p:nvPr/>
         </p:nvSpPr>
         <p:spPr>
           <a:xfrm>
-            <a:off x="6172200" y="3749040"/>
-            <a:ext cx="5440680" cy="960120"/>
-          </a:xfrm>
-          <a:prstGeom prst="roundRect">
-            <a:avLst>
-              <a:gd name="adj" fmla="val 14286"/>
-            </a:avLst>
+            <a:off x="5029200" y="5687568"/>
+            <a:ext cx="384048" cy="384048"/>
+          </a:xfrm>
+          <a:prstGeom prst="ellipse">
+            <a:avLst/>
           </a:prstGeom>
           <a:solidFill>
-            <a:schemeClr val="bg2"/>
+            <a:schemeClr val="accent3"/>
           </a:solidFill>
           <a:ln/>
         </p:spPr>
       </p:sp>
       <p:sp>
         <p:nvSpPr>
-          <p:cNvPr id="34" name="step 7 number"/>
+          <p:cNvPr id="63" name="Text 53"/>
+          <p:cNvSpPr txBox="1"/>
+          <p:nvPr/>
+        </p:nvSpPr>
+        <p:spPr>
+          <a:xfrm>
+            <a:off x="5029200" y="5687568"/>
+            <a:ext cx="384048" cy="384048"/>
+          </a:xfrm>
+          <a:prstGeom prst="rect">
+            <a:avLst/>
+          </a:prstGeom>
+          <a:noFill/>
+          <a:ln/>
+        </p:spPr>
+        <p:txBody>
+          <a:bodyPr wrap="square" lIns="0" tIns="0" rIns="0" bIns="0" rtlCol="0" anchor="ctr"/>
+          <a:lstStyle/>
+          <a:p>
+            <a:pPr algn="ctr" indent="0" marL="0">
+              <a:buNone/>
+            </a:pPr>
+            <a:r>
+              <a:rPr lang="en-US" sz="1400" b="1" dirty="0">
+                <a:solidFill>
+                  <a:schemeClr val="bg1"/>
+                </a:solidFill>
+              </a:rPr>
+              <a:t>3</a:t>
+            </a:r>
+            <a:endParaRPr lang="en-US" sz="1400" dirty="0"/>
+          </a:p>
+        </p:txBody>
+      </p:sp>
+      <p:sp>
+        <p:nvSpPr>
+          <p:cNvPr id="64" name="Text 54"/>
+          <p:cNvSpPr txBox="1"/>
+          <p:nvPr/>
+        </p:nvSpPr>
+        <p:spPr>
+          <a:xfrm>
+            <a:off x="5504688" y="5605272"/>
+            <a:ext cx="1691640" cy="548640"/>
+          </a:xfrm>
+          <a:prstGeom prst="rect">
+            <a:avLst/>
+          </a:prstGeom>
+          <a:noFill/>
+          <a:ln/>
+        </p:spPr>
+        <p:txBody>
+          <a:bodyPr wrap="square" lIns="0" tIns="0" rIns="0" bIns="0" rtlCol="0" anchor="ctr"/>
+          <a:lstStyle/>
+          <a:p>
+            <a:pPr indent="0" marL="0">
+              <a:buNone/>
+            </a:pPr>
+            <a:r>
+              <a:rPr lang="en-US" sz="1400" dirty="0">
+                <a:solidFill>
+                  <a:schemeClr val="tx1"/>
+                </a:solidFill>
+              </a:rPr>
+              <a:t>Lambda writes the prompt</a:t>
+            </a:r>
+            <a:endParaRPr lang="en-US" sz="1400" dirty="0"/>
+          </a:p>
+        </p:txBody>
+      </p:sp>
+      <p:sp>
+        <p:nvSpPr>
+          <p:cNvPr id="65" name="step 4 badge"/>
           <p:cNvSpPr/>
           <p:nvPr/>
         </p:nvSpPr>
         <p:spPr>
           <a:xfrm>
-            <a:off x="6355080" y="3886200"/>
-            <a:ext cx="685800" cy="685800"/>
+            <a:off x="7269480" y="5687568"/>
+            <a:ext cx="384048" cy="384048"/>
           </a:xfrm>
           <a:prstGeom prst="ellipse">
             <a:avLst/>
           </a:prstGeom>
           <a:solidFill>
-            <a:schemeClr val="accent1"/>
+            <a:schemeClr val="accent3"/>
           </a:solidFill>
           <a:ln/>
         </p:spPr>
       </p:sp>
       <p:sp>
         <p:nvSpPr>
-          <p:cNvPr id="35" name="Text 33"/>
-          <p:cNvSpPr txBox="1"/>
-          <p:nvPr/>
-        </p:nvSpPr>
-        <p:spPr>
-          <a:xfrm>
-            <a:off x="6355080" y="3886200"/>
-            <a:ext cx="685800" cy="685800"/>
+          <p:cNvPr id="66" name="Text 56"/>
+          <p:cNvSpPr txBox="1"/>
+          <p:nvPr/>
+        </p:nvSpPr>
+        <p:spPr>
+          <a:xfrm>
+            <a:off x="7269480" y="5687568"/>
+            <a:ext cx="384048" cy="384048"/>
           </a:xfrm>
           <a:prstGeom prst="rect">
             <a:avLst/>
@@ -8093,27 +9014,83 @@
               <a:buNone/>
             </a:pPr>
             <a:r>
-              <a:rPr lang="en-US" sz="2000" b="1" dirty="0">
+              <a:rPr lang="en-US" sz="1400" b="1" dirty="0">
+                <a:solidFill>
+                  <a:schemeClr val="bg1"/>
+                </a:solidFill>
+              </a:rPr>
+              <a:t>4</a:t>
+            </a:r>
+            <a:endParaRPr lang="en-US" sz="1400" dirty="0"/>
+          </a:p>
+        </p:txBody>
+      </p:sp>
+      <p:sp>
+        <p:nvSpPr>
+          <p:cNvPr id="67" name="Text 57"/>
+          <p:cNvSpPr txBox="1"/>
+          <p:nvPr/>
+        </p:nvSpPr>
+        <p:spPr>
+          <a:xfrm>
+            <a:off x="7744968" y="5605272"/>
+            <a:ext cx="1691640" cy="548640"/>
+          </a:xfrm>
+          <a:prstGeom prst="rect">
+            <a:avLst/>
+          </a:prstGeom>
+          <a:noFill/>
+          <a:ln/>
+        </p:spPr>
+        <p:txBody>
+          <a:bodyPr wrap="square" lIns="0" tIns="0" rIns="0" bIns="0" rtlCol="0" anchor="ctr"/>
+          <a:lstStyle/>
+          <a:p>
+            <a:pPr indent="0" marL="0">
+              <a:buNone/>
+            </a:pPr>
+            <a:r>
+              <a:rPr lang="en-US" sz="1400" dirty="0">
                 <a:solidFill>
                   <a:schemeClr val="tx1"/>
                 </a:solidFill>
               </a:rPr>
-              <a:t>7</a:t>
-            </a:r>
-            <a:endParaRPr lang="en-US" sz="2000" dirty="0"/>
-          </a:p>
-        </p:txBody>
-      </p:sp>
-      <p:sp>
-        <p:nvSpPr>
-          <p:cNvPr id="36" name="Text 34"/>
-          <p:cNvSpPr txBox="1"/>
-          <p:nvPr/>
-        </p:nvSpPr>
-        <p:spPr>
-          <a:xfrm>
-            <a:off x="7269480" y="3886200"/>
-            <a:ext cx="1143000" cy="685800"/>
+              <a:t>Nova writes your roadmap</a:t>
+            </a:r>
+            <a:endParaRPr lang="en-US" sz="1400" dirty="0"/>
+          </a:p>
+        </p:txBody>
+      </p:sp>
+      <p:sp>
+        <p:nvSpPr>
+          <p:cNvPr id="68" name="step 5 badge"/>
+          <p:cNvSpPr/>
+          <p:nvPr/>
+        </p:nvSpPr>
+        <p:spPr>
+          <a:xfrm>
+            <a:off x="9509760" y="5687568"/>
+            <a:ext cx="384048" cy="384048"/>
+          </a:xfrm>
+          <a:prstGeom prst="ellipse">
+            <a:avLst/>
+          </a:prstGeom>
+          <a:solidFill>
+            <a:schemeClr val="accent3"/>
+          </a:solidFill>
+          <a:ln/>
+        </p:spPr>
+      </p:sp>
+      <p:sp>
+        <p:nvSpPr>
+          <p:cNvPr id="69" name="Text 59"/>
+          <p:cNvSpPr txBox="1"/>
+          <p:nvPr/>
+        </p:nvSpPr>
+        <p:spPr>
+          <a:xfrm>
+            <a:off x="9509760" y="5687568"/>
+            <a:ext cx="384048" cy="384048"/>
           </a:xfrm>
           <a:prstGeom prst="rect">
             <a:avLst/>
@@ -8125,31 +9102,31 @@
           <a:bodyPr wrap="square" lIns="0" tIns="0" rIns="0" bIns="0" rtlCol="0" anchor="ctr"/>
           <a:lstStyle/>
           <a:p>
-            <a:pPr indent="0" marL="0">
-              <a:buNone/>
-            </a:pPr>
-            <a:r>
-              <a:rPr lang="en-US" sz="1600" b="1" dirty="0">
-                <a:solidFill>
-                  <a:schemeClr val="accent2"/>
-                </a:solidFill>
-              </a:rPr>
-              <a:t>41-44 min</a:t>
-            </a:r>
-            <a:endParaRPr lang="en-US" sz="1600" dirty="0"/>
-          </a:p>
-        </p:txBody>
-      </p:sp>
-      <p:sp>
-        <p:nvSpPr>
-          <p:cNvPr id="37" name="Text 35"/>
-          <p:cNvSpPr txBox="1"/>
-          <p:nvPr/>
-        </p:nvSpPr>
-        <p:spPr>
-          <a:xfrm>
-            <a:off x="8412480" y="3886200"/>
-            <a:ext cx="3063240" cy="685800"/>
+            <a:pPr algn="ctr" indent="0" marL="0">
+              <a:buNone/>
+            </a:pPr>
+            <a:r>
+              <a:rPr lang="en-US" sz="1400" b="1" dirty="0">
+                <a:solidFill>
+                  <a:schemeClr val="bg1"/>
+                </a:solidFill>
+              </a:rPr>
+              <a:t>5</a:t>
+            </a:r>
+            <a:endParaRPr lang="en-US" sz="1400" dirty="0"/>
+          </a:p>
+        </p:txBody>
+      </p:sp>
+      <p:sp>
+        <p:nvSpPr>
+          <p:cNvPr id="70" name="Text 60"/>
+          <p:cNvSpPr txBox="1"/>
+          <p:nvPr/>
+        </p:nvSpPr>
+        <p:spPr>
+          <a:xfrm>
+            <a:off x="9985248" y="5605272"/>
+            <a:ext cx="1691640" cy="548640"/>
           </a:xfrm>
           <a:prstGeom prst="rect">
             <a:avLst/>
@@ -8165,164 +9142,14 @@
               <a:buNone/>
             </a:pPr>
             <a:r>
-              <a:rPr lang="en-US" sz="1800" dirty="0">
+              <a:rPr lang="en-US" sz="1400" dirty="0">
                 <a:solidFill>
                   <a:schemeClr val="tx1"/>
                 </a:solidFill>
               </a:rPr>
-              <a:t>Put it online with Amplify</a:t>
-            </a:r>
-            <a:endParaRPr lang="en-US" sz="1800" dirty="0"/>
-          </a:p>
-        </p:txBody>
-      </p:sp>
-      <p:sp>
-        <p:nvSpPr>
-          <p:cNvPr id="38" name="step 8 card"/>
-          <p:cNvSpPr/>
-          <p:nvPr/>
-        </p:nvSpPr>
-        <p:spPr>
-          <a:xfrm>
-            <a:off x="6172200" y="4892040"/>
-            <a:ext cx="5440680" cy="960120"/>
-          </a:xfrm>
-          <a:prstGeom prst="roundRect">
-            <a:avLst>
-              <a:gd name="adj" fmla="val 14286"/>
-            </a:avLst>
-          </a:prstGeom>
-          <a:solidFill>
-            <a:schemeClr val="bg1"/>
-          </a:solidFill>
-          <a:ln/>
-        </p:spPr>
-      </p:sp>
-      <p:sp>
-        <p:nvSpPr>
-          <p:cNvPr id="39" name="step 8 number"/>
-          <p:cNvSpPr/>
-          <p:nvPr/>
-        </p:nvSpPr>
-        <p:spPr>
-          <a:xfrm>
-            <a:off x="6355080" y="5029200"/>
-            <a:ext cx="685800" cy="685800"/>
-          </a:xfrm>
-          <a:prstGeom prst="ellipse">
-            <a:avLst/>
-          </a:prstGeom>
-          <a:solidFill>
-            <a:schemeClr val="accent1"/>
-          </a:solidFill>
-          <a:ln/>
-        </p:spPr>
-      </p:sp>
-      <p:sp>
-        <p:nvSpPr>
-          <p:cNvPr id="40" name="Text 38"/>
-          <p:cNvSpPr txBox="1"/>
-          <p:nvPr/>
-        </p:nvSpPr>
-        <p:spPr>
-          <a:xfrm>
-            <a:off x="6355080" y="5029200"/>
-            <a:ext cx="685800" cy="685800"/>
-          </a:xfrm>
-          <a:prstGeom prst="rect">
-            <a:avLst/>
-          </a:prstGeom>
-          <a:noFill/>
-          <a:ln/>
-        </p:spPr>
-        <p:txBody>
-          <a:bodyPr wrap="square" lIns="0" tIns="0" rIns="0" bIns="0" rtlCol="0" anchor="ctr"/>
-          <a:lstStyle/>
-          <a:p>
-            <a:pPr algn="ctr" indent="0" marL="0">
-              <a:buNone/>
-            </a:pPr>
-            <a:r>
-              <a:rPr lang="en-US" sz="2000" b="1" dirty="0">
-                <a:solidFill>
-                  <a:schemeClr val="tx1"/>
-                </a:solidFill>
-              </a:rPr>
-              <a:t>8</a:t>
-            </a:r>
-            <a:endParaRPr lang="en-US" sz="2000" dirty="0"/>
-          </a:p>
-        </p:txBody>
-      </p:sp>
-      <p:sp>
-        <p:nvSpPr>
-          <p:cNvPr id="41" name="Text 39"/>
-          <p:cNvSpPr txBox="1"/>
-          <p:nvPr/>
-        </p:nvSpPr>
-        <p:spPr>
-          <a:xfrm>
-            <a:off x="7269480" y="5029200"/>
-            <a:ext cx="1143000" cy="685800"/>
-          </a:xfrm>
-          <a:prstGeom prst="rect">
-            <a:avLst/>
-          </a:prstGeom>
-          <a:noFill/>
-          <a:ln/>
-        </p:spPr>
-        <p:txBody>
-          <a:bodyPr wrap="square" lIns="0" tIns="0" rIns="0" bIns="0" rtlCol="0" anchor="ctr"/>
-          <a:lstStyle/>
-          <a:p>
-            <a:pPr indent="0" marL="0">
-              <a:buNone/>
-            </a:pPr>
-            <a:r>
-              <a:rPr lang="en-US" sz="1600" b="1" dirty="0">
-                <a:solidFill>
-                  <a:schemeClr val="accent2"/>
-                </a:solidFill>
-              </a:rPr>
-              <a:t>44-45 min</a:t>
-            </a:r>
-            <a:endParaRPr lang="en-US" sz="1600" dirty="0"/>
-          </a:p>
-        </p:txBody>
-      </p:sp>
-      <p:sp>
-        <p:nvSpPr>
-          <p:cNvPr id="42" name="Text 40"/>
-          <p:cNvSpPr txBox="1"/>
-          <p:nvPr/>
-        </p:nvSpPr>
-        <p:spPr>
-          <a:xfrm>
-            <a:off x="8412480" y="5029200"/>
-            <a:ext cx="3063240" cy="685800"/>
-          </a:xfrm>
-          <a:prstGeom prst="rect">
-            <a:avLst/>
-          </a:prstGeom>
-          <a:noFill/>
-          <a:ln/>
-        </p:spPr>
-        <p:txBody>
-          <a:bodyPr wrap="square" lIns="0" tIns="0" rIns="0" bIns="0" rtlCol="0" anchor="ctr"/>
-          <a:lstStyle/>
-          <a:p>
-            <a:pPr indent="0" marL="0">
-              <a:buNone/>
-            </a:pPr>
-            <a:r>
-              <a:rPr lang="en-US" sz="1800" dirty="0">
-                <a:solidFill>
-                  <a:schemeClr val="tx1"/>
-                </a:solidFill>
-              </a:rPr>
-              <a:t>Wrap up and celebrate</a:t>
-            </a:r>
-            <a:endParaRPr lang="en-US" sz="1800" dirty="0"/>
+              <a:t>Roadmap comes back to you</a:t>
+            </a:r>
+            <a:endParaRPr lang="en-US" sz="1400" dirty="0"/>
           </a:p>
         </p:txBody>
       </p:sp>
@@ -8428,7 +9255,7 @@
                   <a:schemeClr val="tx1"/>
                 </a:solidFill>
               </a:rPr>
-              <a:t>You don't need to be an expert</a:t>
+              <a:t>Our plan for the next 45 minutes</a:t>
             </a:r>
             <a:endParaRPr lang="en-US" sz="3600" dirty="0"/>
           </a:p>
@@ -8436,18 +9263,18 @@
       </p:sp>
       <p:sp>
         <p:nvSpPr>
-          <p:cNvPr id="3" name="need 1 card"/>
+          <p:cNvPr id="3" name="step 1 card"/>
           <p:cNvSpPr/>
           <p:nvPr/>
         </p:nvSpPr>
         <p:spPr>
           <a:xfrm>
-            <a:off x="548640" y="1645920"/>
-            <a:ext cx="3520440" cy="3474720"/>
+            <a:off x="548640" y="1463040"/>
+            <a:ext cx="5440680" cy="960120"/>
           </a:xfrm>
           <a:prstGeom prst="roundRect">
             <a:avLst>
-              <a:gd name="adj" fmla="val 3947"/>
+              <a:gd name="adj" fmla="val 14286"/>
             </a:avLst>
           </a:prstGeom>
           <a:solidFill>
@@ -8458,14 +9285,14 @@
       </p:sp>
       <p:sp>
         <p:nvSpPr>
-          <p:cNvPr id="4" name="need 1 circle"/>
+          <p:cNvPr id="4" name="step 1 number"/>
           <p:cNvSpPr/>
           <p:nvPr/>
         </p:nvSpPr>
         <p:spPr>
           <a:xfrm>
-            <a:off x="822960" y="1920240"/>
-            <a:ext cx="731520" cy="731520"/>
+            <a:off x="731520" y="1600200"/>
+            <a:ext cx="685800" cy="685800"/>
           </a:xfrm>
           <a:prstGeom prst="ellipse">
             <a:avLst/>
@@ -8476,85 +9303,97 @@
           <a:ln/>
         </p:spPr>
       </p:sp>
-      <p:pic>
-        <p:nvPicPr>
-          <p:cNvPr id="5" name="need 1 icon" descr="need 1">    </p:cNvPr>
-          <p:cNvPicPr>
-            <a:picLocks noChangeAspect="1"/>
-          </p:cNvPicPr>
-          <p:nvPr/>
-        </p:nvPicPr>
-        <p:blipFill>
-          <a:blip r:embed="rId1"/>
-          <a:stretch>
-            <a:fillRect/>
-          </a:stretch>
-        </p:blipFill>
-        <p:spPr>
-          <a:xfrm>
-            <a:off x="1005840" y="2103120"/>
-            <a:ext cx="365760" cy="365760"/>
-          </a:xfrm>
-          <a:prstGeom prst="rect">
-            <a:avLst/>
-          </a:prstGeom>
-        </p:spPr>
-      </p:pic>
-      <p:sp>
-        <p:nvSpPr>
-          <p:cNvPr id="6" name="need 1 head"/>
-          <p:cNvSpPr txBox="1"/>
-          <p:nvPr/>
-        </p:nvSpPr>
-        <p:spPr>
-          <a:xfrm>
-            <a:off x="822960" y="2834640"/>
-            <a:ext cx="2971800" cy="457200"/>
-          </a:xfrm>
-          <a:prstGeom prst="rect">
-            <a:avLst/>
-          </a:prstGeom>
-          <a:noFill/>
-          <a:ln/>
-        </p:spPr>
-        <p:txBody>
-          <a:bodyPr wrap="square" lIns="0" tIns="0" rIns="0" bIns="0" rtlCol="0" anchor="t"/>
-          <a:lstStyle/>
-          <a:p>
-            <a:pPr indent="0" marL="0">
-              <a:buNone/>
-            </a:pPr>
-            <a:r>
-              <a:rPr lang="en-US" sz="2200" b="1" dirty="0">
+      <p:sp>
+        <p:nvSpPr>
+          <p:cNvPr id="5" name="Text 3"/>
+          <p:cNvSpPr txBox="1"/>
+          <p:nvPr/>
+        </p:nvSpPr>
+        <p:spPr>
+          <a:xfrm>
+            <a:off x="731520" y="1600200"/>
+            <a:ext cx="685800" cy="685800"/>
+          </a:xfrm>
+          <a:prstGeom prst="rect">
+            <a:avLst/>
+          </a:prstGeom>
+          <a:noFill/>
+          <a:ln/>
+        </p:spPr>
+        <p:txBody>
+          <a:bodyPr wrap="square" lIns="0" tIns="0" rIns="0" bIns="0" rtlCol="0" anchor="ctr"/>
+          <a:lstStyle/>
+          <a:p>
+            <a:pPr algn="ctr" indent="0" marL="0">
+              <a:buNone/>
+            </a:pPr>
+            <a:r>
+              <a:rPr lang="en-US" sz="2000" b="1" dirty="0">
                 <a:solidFill>
                   <a:schemeClr val="tx1"/>
                 </a:solidFill>
               </a:rPr>
-              <a:t>What you need</a:t>
-            </a:r>
-            <a:endParaRPr lang="en-US" sz="2200" dirty="0"/>
-          </a:p>
-        </p:txBody>
-      </p:sp>
-      <p:sp>
-        <p:nvSpPr>
-          <p:cNvPr id="7" name="need 1 body"/>
-          <p:cNvSpPr txBox="1"/>
-          <p:nvPr/>
-        </p:nvSpPr>
-        <p:spPr>
-          <a:xfrm>
-            <a:off x="822960" y="3337560"/>
-            <a:ext cx="2971800" cy="1554480"/>
-          </a:xfrm>
-          <a:prstGeom prst="rect">
-            <a:avLst/>
-          </a:prstGeom>
-          <a:noFill/>
-          <a:ln/>
-        </p:spPr>
-        <p:txBody>
-          <a:bodyPr wrap="square" lIns="0" tIns="0" rIns="0" bIns="0" rtlCol="0" anchor="t"/>
+              <a:t>1</a:t>
+            </a:r>
+            <a:endParaRPr lang="en-US" sz="2000" dirty="0"/>
+          </a:p>
+        </p:txBody>
+      </p:sp>
+      <p:sp>
+        <p:nvSpPr>
+          <p:cNvPr id="6" name="Text 4"/>
+          <p:cNvSpPr txBox="1"/>
+          <p:nvPr/>
+        </p:nvSpPr>
+        <p:spPr>
+          <a:xfrm>
+            <a:off x="1645920" y="1600200"/>
+            <a:ext cx="1143000" cy="685800"/>
+          </a:xfrm>
+          <a:prstGeom prst="rect">
+            <a:avLst/>
+          </a:prstGeom>
+          <a:noFill/>
+          <a:ln/>
+        </p:spPr>
+        <p:txBody>
+          <a:bodyPr wrap="square" lIns="0" tIns="0" rIns="0" bIns="0" rtlCol="0" anchor="ctr"/>
+          <a:lstStyle/>
+          <a:p>
+            <a:pPr indent="0" marL="0">
+              <a:buNone/>
+            </a:pPr>
+            <a:r>
+              <a:rPr lang="en-US" sz="1600" b="1" dirty="0">
+                <a:solidFill>
+                  <a:schemeClr val="accent2"/>
+                </a:solidFill>
+              </a:rPr>
+              <a:t>0-5 min</a:t>
+            </a:r>
+            <a:endParaRPr lang="en-US" sz="1600" dirty="0"/>
+          </a:p>
+        </p:txBody>
+      </p:sp>
+      <p:sp>
+        <p:nvSpPr>
+          <p:cNvPr id="7" name="Text 5"/>
+          <p:cNvSpPr txBox="1"/>
+          <p:nvPr/>
+        </p:nvSpPr>
+        <p:spPr>
+          <a:xfrm>
+            <a:off x="2788920" y="1600200"/>
+            <a:ext cx="3063240" cy="685800"/>
+          </a:xfrm>
+          <a:prstGeom prst="rect">
+            <a:avLst/>
+          </a:prstGeom>
+          <a:noFill/>
+          <a:ln/>
+        </p:spPr>
+        <p:txBody>
+          <a:bodyPr wrap="square" lIns="0" tIns="0" rIns="0" bIns="0" rtlCol="0" anchor="ctr"/>
           <a:lstStyle/>
           <a:p>
             <a:pPr indent="0" marL="0">
@@ -8563,10 +9402,10 @@
             <a:r>
               <a:rPr lang="en-US" sz="1800" dirty="0">
                 <a:solidFill>
-                  <a:schemeClr val="tx2"/>
-                </a:solidFill>
-              </a:rPr>
-              <a:t>A laptop, an AWS account, and your curiosity. That's it.</a:t>
+                  <a:schemeClr val="tx1"/>
+                </a:solidFill>
+              </a:rPr>
+              <a:t>Learn how cloud AI apps work</a:t>
             </a:r>
             <a:endParaRPr lang="en-US" sz="1800" dirty="0"/>
           </a:p>
@@ -8574,18 +9413,168 @@
       </p:sp>
       <p:sp>
         <p:nvSpPr>
-          <p:cNvPr id="8" name="need 2 card"/>
+          <p:cNvPr id="8" name="step 2 card"/>
           <p:cNvSpPr/>
           <p:nvPr/>
         </p:nvSpPr>
         <p:spPr>
           <a:xfrm>
-            <a:off x="4343400" y="1645920"/>
-            <a:ext cx="3520440" cy="3474720"/>
+            <a:off x="548640" y="2606040"/>
+            <a:ext cx="5440680" cy="960120"/>
           </a:xfrm>
           <a:prstGeom prst="roundRect">
             <a:avLst>
-              <a:gd name="adj" fmla="val 3947"/>
+              <a:gd name="adj" fmla="val 14286"/>
+            </a:avLst>
+          </a:prstGeom>
+          <a:solidFill>
+            <a:schemeClr val="bg1"/>
+          </a:solidFill>
+          <a:ln/>
+        </p:spPr>
+      </p:sp>
+      <p:sp>
+        <p:nvSpPr>
+          <p:cNvPr id="9" name="step 2 number"/>
+          <p:cNvSpPr/>
+          <p:nvPr/>
+        </p:nvSpPr>
+        <p:spPr>
+          <a:xfrm>
+            <a:off x="731520" y="2743200"/>
+            <a:ext cx="685800" cy="685800"/>
+          </a:xfrm>
+          <a:prstGeom prst="ellipse">
+            <a:avLst/>
+          </a:prstGeom>
+          <a:solidFill>
+            <a:schemeClr val="accent1"/>
+          </a:solidFill>
+          <a:ln/>
+        </p:spPr>
+      </p:sp>
+      <p:sp>
+        <p:nvSpPr>
+          <p:cNvPr id="10" name="Text 8"/>
+          <p:cNvSpPr txBox="1"/>
+          <p:nvPr/>
+        </p:nvSpPr>
+        <p:spPr>
+          <a:xfrm>
+            <a:off x="731520" y="2743200"/>
+            <a:ext cx="685800" cy="685800"/>
+          </a:xfrm>
+          <a:prstGeom prst="rect">
+            <a:avLst/>
+          </a:prstGeom>
+          <a:noFill/>
+          <a:ln/>
+        </p:spPr>
+        <p:txBody>
+          <a:bodyPr wrap="square" lIns="0" tIns="0" rIns="0" bIns="0" rtlCol="0" anchor="ctr"/>
+          <a:lstStyle/>
+          <a:p>
+            <a:pPr algn="ctr" indent="0" marL="0">
+              <a:buNone/>
+            </a:pPr>
+            <a:r>
+              <a:rPr lang="en-US" sz="2000" b="1" dirty="0">
+                <a:solidFill>
+                  <a:schemeClr val="tx1"/>
+                </a:solidFill>
+              </a:rPr>
+              <a:t>2</a:t>
+            </a:r>
+            <a:endParaRPr lang="en-US" sz="2000" dirty="0"/>
+          </a:p>
+        </p:txBody>
+      </p:sp>
+      <p:sp>
+        <p:nvSpPr>
+          <p:cNvPr id="11" name="Text 9"/>
+          <p:cNvSpPr txBox="1"/>
+          <p:nvPr/>
+        </p:nvSpPr>
+        <p:spPr>
+          <a:xfrm>
+            <a:off x="1645920" y="2743200"/>
+            <a:ext cx="1143000" cy="685800"/>
+          </a:xfrm>
+          <a:prstGeom prst="rect">
+            <a:avLst/>
+          </a:prstGeom>
+          <a:noFill/>
+          <a:ln/>
+        </p:spPr>
+        <p:txBody>
+          <a:bodyPr wrap="square" lIns="0" tIns="0" rIns="0" bIns="0" rtlCol="0" anchor="ctr"/>
+          <a:lstStyle/>
+          <a:p>
+            <a:pPr indent="0" marL="0">
+              <a:buNone/>
+            </a:pPr>
+            <a:r>
+              <a:rPr lang="en-US" sz="1600" b="1" dirty="0">
+                <a:solidFill>
+                  <a:schemeClr val="accent2"/>
+                </a:solidFill>
+              </a:rPr>
+              <a:t>5-10 min</a:t>
+            </a:r>
+            <a:endParaRPr lang="en-US" sz="1600" dirty="0"/>
+          </a:p>
+        </p:txBody>
+      </p:sp>
+      <p:sp>
+        <p:nvSpPr>
+          <p:cNvPr id="12" name="Text 10"/>
+          <p:cNvSpPr txBox="1"/>
+          <p:nvPr/>
+        </p:nvSpPr>
+        <p:spPr>
+          <a:xfrm>
+            <a:off x="2788920" y="2743200"/>
+            <a:ext cx="3063240" cy="685800"/>
+          </a:xfrm>
+          <a:prstGeom prst="rect">
+            <a:avLst/>
+          </a:prstGeom>
+          <a:noFill/>
+          <a:ln/>
+        </p:spPr>
+        <p:txBody>
+          <a:bodyPr wrap="square" lIns="0" tIns="0" rIns="0" bIns="0" rtlCol="0" anchor="ctr"/>
+          <a:lstStyle/>
+          <a:p>
+            <a:pPr indent="0" marL="0">
+              <a:buNone/>
+            </a:pPr>
+            <a:r>
+              <a:rPr lang="en-US" sz="1800" dirty="0">
+                <a:solidFill>
+                  <a:schemeClr val="tx1"/>
+                </a:solidFill>
+              </a:rPr>
+              <a:t>Try the AI in Amazon Bedrock</a:t>
+            </a:r>
+            <a:endParaRPr lang="en-US" sz="1800" dirty="0"/>
+          </a:p>
+        </p:txBody>
+      </p:sp>
+      <p:sp>
+        <p:nvSpPr>
+          <p:cNvPr id="13" name="step 3 card"/>
+          <p:cNvSpPr/>
+          <p:nvPr/>
+        </p:nvSpPr>
+        <p:spPr>
+          <a:xfrm>
+            <a:off x="548640" y="3749040"/>
+            <a:ext cx="5440680" cy="960120"/>
+          </a:xfrm>
+          <a:prstGeom prst="roundRect">
+            <a:avLst>
+              <a:gd name="adj" fmla="val 14286"/>
             </a:avLst>
           </a:prstGeom>
           <a:solidFill>
@@ -8596,14 +9585,14 @@
       </p:sp>
       <p:sp>
         <p:nvSpPr>
-          <p:cNvPr id="9" name="need 2 circle"/>
+          <p:cNvPr id="14" name="step 3 number"/>
           <p:cNvSpPr/>
           <p:nvPr/>
         </p:nvSpPr>
         <p:spPr>
           <a:xfrm>
-            <a:off x="4617720" y="1920240"/>
-            <a:ext cx="731520" cy="731520"/>
+            <a:off x="731520" y="3886200"/>
+            <a:ext cx="685800" cy="685800"/>
           </a:xfrm>
           <a:prstGeom prst="ellipse">
             <a:avLst/>
@@ -8614,85 +9603,97 @@
           <a:ln/>
         </p:spPr>
       </p:sp>
-      <p:pic>
-        <p:nvPicPr>
-          <p:cNvPr id="10" name="need 2 icon" descr="need 2">    </p:cNvPr>
-          <p:cNvPicPr>
-            <a:picLocks noChangeAspect="1"/>
-          </p:cNvPicPr>
-          <p:nvPr/>
-        </p:nvPicPr>
-        <p:blipFill>
-          <a:blip r:embed="rId2"/>
-          <a:stretch>
-            <a:fillRect/>
-          </a:stretch>
-        </p:blipFill>
-        <p:spPr>
-          <a:xfrm>
-            <a:off x="4800600" y="2103120"/>
-            <a:ext cx="365760" cy="365760"/>
-          </a:xfrm>
-          <a:prstGeom prst="rect">
-            <a:avLst/>
-          </a:prstGeom>
-        </p:spPr>
-      </p:pic>
-      <p:sp>
-        <p:nvSpPr>
-          <p:cNvPr id="11" name="need 2 head"/>
-          <p:cNvSpPr txBox="1"/>
-          <p:nvPr/>
-        </p:nvSpPr>
-        <p:spPr>
-          <a:xfrm>
-            <a:off x="4617720" y="2834640"/>
-            <a:ext cx="2971800" cy="457200"/>
-          </a:xfrm>
-          <a:prstGeom prst="rect">
-            <a:avLst/>
-          </a:prstGeom>
-          <a:noFill/>
-          <a:ln/>
-        </p:spPr>
-        <p:txBody>
-          <a:bodyPr wrap="square" lIns="0" tIns="0" rIns="0" bIns="0" rtlCol="0" anchor="t"/>
-          <a:lstStyle/>
-          <a:p>
-            <a:pPr indent="0" marL="0">
-              <a:buNone/>
-            </a:pPr>
-            <a:r>
-              <a:rPr lang="en-US" sz="2200" b="1" dirty="0">
+      <p:sp>
+        <p:nvSpPr>
+          <p:cNvPr id="15" name="Text 13"/>
+          <p:cNvSpPr txBox="1"/>
+          <p:nvPr/>
+        </p:nvSpPr>
+        <p:spPr>
+          <a:xfrm>
+            <a:off x="731520" y="3886200"/>
+            <a:ext cx="685800" cy="685800"/>
+          </a:xfrm>
+          <a:prstGeom prst="rect">
+            <a:avLst/>
+          </a:prstGeom>
+          <a:noFill/>
+          <a:ln/>
+        </p:spPr>
+        <p:txBody>
+          <a:bodyPr wrap="square" lIns="0" tIns="0" rIns="0" bIns="0" rtlCol="0" anchor="ctr"/>
+          <a:lstStyle/>
+          <a:p>
+            <a:pPr algn="ctr" indent="0" marL="0">
+              <a:buNone/>
+            </a:pPr>
+            <a:r>
+              <a:rPr lang="en-US" sz="2000" b="1" dirty="0">
                 <a:solidFill>
                   <a:schemeClr val="tx1"/>
                 </a:solidFill>
               </a:rPr>
-              <a:t>Errors are clues</a:t>
-            </a:r>
-            <a:endParaRPr lang="en-US" sz="2200" dirty="0"/>
-          </a:p>
-        </p:txBody>
-      </p:sp>
-      <p:sp>
-        <p:nvSpPr>
-          <p:cNvPr id="12" name="need 2 body"/>
-          <p:cNvSpPr txBox="1"/>
-          <p:nvPr/>
-        </p:nvSpPr>
-        <p:spPr>
-          <a:xfrm>
-            <a:off x="4617720" y="3337560"/>
-            <a:ext cx="2971800" cy="1554480"/>
-          </a:xfrm>
-          <a:prstGeom prst="rect">
-            <a:avLst/>
-          </a:prstGeom>
-          <a:noFill/>
-          <a:ln/>
-        </p:spPr>
-        <p:txBody>
-          <a:bodyPr wrap="square" lIns="0" tIns="0" rIns="0" bIns="0" rtlCol="0" anchor="t"/>
+              <a:t>3</a:t>
+            </a:r>
+            <a:endParaRPr lang="en-US" sz="2000" dirty="0"/>
+          </a:p>
+        </p:txBody>
+      </p:sp>
+      <p:sp>
+        <p:nvSpPr>
+          <p:cNvPr id="16" name="Text 14"/>
+          <p:cNvSpPr txBox="1"/>
+          <p:nvPr/>
+        </p:nvSpPr>
+        <p:spPr>
+          <a:xfrm>
+            <a:off x="1645920" y="3886200"/>
+            <a:ext cx="1143000" cy="685800"/>
+          </a:xfrm>
+          <a:prstGeom prst="rect">
+            <a:avLst/>
+          </a:prstGeom>
+          <a:noFill/>
+          <a:ln/>
+        </p:spPr>
+        <p:txBody>
+          <a:bodyPr wrap="square" lIns="0" tIns="0" rIns="0" bIns="0" rtlCol="0" anchor="ctr"/>
+          <a:lstStyle/>
+          <a:p>
+            <a:pPr indent="0" marL="0">
+              <a:buNone/>
+            </a:pPr>
+            <a:r>
+              <a:rPr lang="en-US" sz="1600" b="1" dirty="0">
+                <a:solidFill>
+                  <a:schemeClr val="accent2"/>
+                </a:solidFill>
+              </a:rPr>
+              <a:t>10-20 min</a:t>
+            </a:r>
+            <a:endParaRPr lang="en-US" sz="1600" dirty="0"/>
+          </a:p>
+        </p:txBody>
+      </p:sp>
+      <p:sp>
+        <p:nvSpPr>
+          <p:cNvPr id="17" name="Text 15"/>
+          <p:cNvSpPr txBox="1"/>
+          <p:nvPr/>
+        </p:nvSpPr>
+        <p:spPr>
+          <a:xfrm>
+            <a:off x="2788920" y="3886200"/>
+            <a:ext cx="3063240" cy="685800"/>
+          </a:xfrm>
+          <a:prstGeom prst="rect">
+            <a:avLst/>
+          </a:prstGeom>
+          <a:noFill/>
+          <a:ln/>
+        </p:spPr>
+        <p:txBody>
+          <a:bodyPr wrap="square" lIns="0" tIns="0" rIns="0" bIns="0" rtlCol="0" anchor="ctr"/>
           <a:lstStyle/>
           <a:p>
             <a:pPr indent="0" marL="0">
@@ -8701,10 +9702,10 @@
             <a:r>
               <a:rPr lang="en-US" sz="1800" dirty="0">
                 <a:solidFill>
-                  <a:schemeClr val="tx2"/>
-                </a:solidFill>
-              </a:rPr>
-              <a:t>Red error messages are normal. They tell us what to fix. They don't mean you failed.</a:t>
+                  <a:schemeClr val="tx1"/>
+                </a:solidFill>
+              </a:rPr>
+              <a:t>Build the Lambda function</a:t>
             </a:r>
             <a:endParaRPr lang="en-US" sz="1800" dirty="0"/>
           </a:p>
@@ -8712,18 +9713,168 @@
       </p:sp>
       <p:sp>
         <p:nvSpPr>
-          <p:cNvPr id="13" name="need 3 card"/>
+          <p:cNvPr id="18" name="step 4 card"/>
           <p:cNvSpPr/>
           <p:nvPr/>
         </p:nvSpPr>
         <p:spPr>
           <a:xfrm>
-            <a:off x="8138160" y="1645920"/>
-            <a:ext cx="3520440" cy="3474720"/>
+            <a:off x="548640" y="4892040"/>
+            <a:ext cx="5440680" cy="960120"/>
           </a:xfrm>
           <a:prstGeom prst="roundRect">
             <a:avLst>
-              <a:gd name="adj" fmla="val 3947"/>
+              <a:gd name="adj" fmla="val 14286"/>
+            </a:avLst>
+          </a:prstGeom>
+          <a:solidFill>
+            <a:schemeClr val="bg1"/>
+          </a:solidFill>
+          <a:ln/>
+        </p:spPr>
+      </p:sp>
+      <p:sp>
+        <p:nvSpPr>
+          <p:cNvPr id="19" name="step 4 number"/>
+          <p:cNvSpPr/>
+          <p:nvPr/>
+        </p:nvSpPr>
+        <p:spPr>
+          <a:xfrm>
+            <a:off x="731520" y="5029200"/>
+            <a:ext cx="685800" cy="685800"/>
+          </a:xfrm>
+          <a:prstGeom prst="ellipse">
+            <a:avLst/>
+          </a:prstGeom>
+          <a:solidFill>
+            <a:schemeClr val="accent1"/>
+          </a:solidFill>
+          <a:ln/>
+        </p:spPr>
+      </p:sp>
+      <p:sp>
+        <p:nvSpPr>
+          <p:cNvPr id="20" name="Text 18"/>
+          <p:cNvSpPr txBox="1"/>
+          <p:nvPr/>
+        </p:nvSpPr>
+        <p:spPr>
+          <a:xfrm>
+            <a:off x="731520" y="5029200"/>
+            <a:ext cx="685800" cy="685800"/>
+          </a:xfrm>
+          <a:prstGeom prst="rect">
+            <a:avLst/>
+          </a:prstGeom>
+          <a:noFill/>
+          <a:ln/>
+        </p:spPr>
+        <p:txBody>
+          <a:bodyPr wrap="square" lIns="0" tIns="0" rIns="0" bIns="0" rtlCol="0" anchor="ctr"/>
+          <a:lstStyle/>
+          <a:p>
+            <a:pPr algn="ctr" indent="0" marL="0">
+              <a:buNone/>
+            </a:pPr>
+            <a:r>
+              <a:rPr lang="en-US" sz="2000" b="1" dirty="0">
+                <a:solidFill>
+                  <a:schemeClr val="tx1"/>
+                </a:solidFill>
+              </a:rPr>
+              <a:t>4</a:t>
+            </a:r>
+            <a:endParaRPr lang="en-US" sz="2000" dirty="0"/>
+          </a:p>
+        </p:txBody>
+      </p:sp>
+      <p:sp>
+        <p:nvSpPr>
+          <p:cNvPr id="21" name="Text 19"/>
+          <p:cNvSpPr txBox="1"/>
+          <p:nvPr/>
+        </p:nvSpPr>
+        <p:spPr>
+          <a:xfrm>
+            <a:off x="1645920" y="5029200"/>
+            <a:ext cx="1143000" cy="685800"/>
+          </a:xfrm>
+          <a:prstGeom prst="rect">
+            <a:avLst/>
+          </a:prstGeom>
+          <a:noFill/>
+          <a:ln/>
+        </p:spPr>
+        <p:txBody>
+          <a:bodyPr wrap="square" lIns="0" tIns="0" rIns="0" bIns="0" rtlCol="0" anchor="ctr"/>
+          <a:lstStyle/>
+          <a:p>
+            <a:pPr indent="0" marL="0">
+              <a:buNone/>
+            </a:pPr>
+            <a:r>
+              <a:rPr lang="en-US" sz="1600" b="1" dirty="0">
+                <a:solidFill>
+                  <a:schemeClr val="accent2"/>
+                </a:solidFill>
+              </a:rPr>
+              <a:t>20-28 min</a:t>
+            </a:r>
+            <a:endParaRPr lang="en-US" sz="1600" dirty="0"/>
+          </a:p>
+        </p:txBody>
+      </p:sp>
+      <p:sp>
+        <p:nvSpPr>
+          <p:cNvPr id="22" name="Text 20"/>
+          <p:cNvSpPr txBox="1"/>
+          <p:nvPr/>
+        </p:nvSpPr>
+        <p:spPr>
+          <a:xfrm>
+            <a:off x="2788920" y="5029200"/>
+            <a:ext cx="3063240" cy="685800"/>
+          </a:xfrm>
+          <a:prstGeom prst="rect">
+            <a:avLst/>
+          </a:prstGeom>
+          <a:noFill/>
+          <a:ln/>
+        </p:spPr>
+        <p:txBody>
+          <a:bodyPr wrap="square" lIns="0" tIns="0" rIns="0" bIns="0" rtlCol="0" anchor="ctr"/>
+          <a:lstStyle/>
+          <a:p>
+            <a:pPr indent="0" marL="0">
+              <a:buNone/>
+            </a:pPr>
+            <a:r>
+              <a:rPr lang="en-US" sz="1800" dirty="0">
+                <a:solidFill>
+                  <a:schemeClr val="tx1"/>
+                </a:solidFill>
+              </a:rPr>
+              <a:t>Connect API Gateway</a:t>
+            </a:r>
+            <a:endParaRPr lang="en-US" sz="1800" dirty="0"/>
+          </a:p>
+        </p:txBody>
+      </p:sp>
+      <p:sp>
+        <p:nvSpPr>
+          <p:cNvPr id="23" name="step 5 card"/>
+          <p:cNvSpPr/>
+          <p:nvPr/>
+        </p:nvSpPr>
+        <p:spPr>
+          <a:xfrm>
+            <a:off x="6172200" y="1463040"/>
+            <a:ext cx="5440680" cy="960120"/>
+          </a:xfrm>
+          <a:prstGeom prst="roundRect">
+            <a:avLst>
+              <a:gd name="adj" fmla="val 14286"/>
             </a:avLst>
           </a:prstGeom>
           <a:solidFill>
@@ -8734,14 +9885,14 @@
       </p:sp>
       <p:sp>
         <p:nvSpPr>
-          <p:cNvPr id="14" name="need 3 circle"/>
+          <p:cNvPr id="24" name="step 5 number"/>
           <p:cNvSpPr/>
           <p:nvPr/>
         </p:nvSpPr>
         <p:spPr>
           <a:xfrm>
-            <a:off x="8412480" y="1920240"/>
-            <a:ext cx="731520" cy="731520"/>
+            <a:off x="6355080" y="1600200"/>
+            <a:ext cx="685800" cy="685800"/>
           </a:xfrm>
           <a:prstGeom prst="ellipse">
             <a:avLst/>
@@ -8752,85 +9903,97 @@
           <a:ln/>
         </p:spPr>
       </p:sp>
-      <p:pic>
-        <p:nvPicPr>
-          <p:cNvPr id="15" name="need 3 icon" descr="need 3">    </p:cNvPr>
-          <p:cNvPicPr>
-            <a:picLocks noChangeAspect="1"/>
-          </p:cNvPicPr>
-          <p:nvPr/>
-        </p:nvPicPr>
-        <p:blipFill>
-          <a:blip r:embed="rId3"/>
-          <a:stretch>
-            <a:fillRect/>
-          </a:stretch>
-        </p:blipFill>
-        <p:spPr>
-          <a:xfrm>
-            <a:off x="8595360" y="2103120"/>
-            <a:ext cx="365760" cy="365760"/>
-          </a:xfrm>
-          <a:prstGeom prst="rect">
-            <a:avLst/>
-          </a:prstGeom>
-        </p:spPr>
-      </p:pic>
-      <p:sp>
-        <p:nvSpPr>
-          <p:cNvPr id="16" name="need 3 head"/>
-          <p:cNvSpPr txBox="1"/>
-          <p:nvPr/>
-        </p:nvSpPr>
-        <p:spPr>
-          <a:xfrm>
-            <a:off x="8412480" y="2834640"/>
-            <a:ext cx="2971800" cy="457200"/>
-          </a:xfrm>
-          <a:prstGeom prst="rect">
-            <a:avLst/>
-          </a:prstGeom>
-          <a:noFill/>
-          <a:ln/>
-        </p:spPr>
-        <p:txBody>
-          <a:bodyPr wrap="square" lIns="0" tIns="0" rIns="0" bIns="0" rtlCol="0" anchor="t"/>
-          <a:lstStyle/>
-          <a:p>
-            <a:pPr indent="0" marL="0">
-              <a:buNone/>
-            </a:pPr>
-            <a:r>
-              <a:rPr lang="en-US" sz="2200" b="1" dirty="0">
+      <p:sp>
+        <p:nvSpPr>
+          <p:cNvPr id="25" name="Text 23"/>
+          <p:cNvSpPr txBox="1"/>
+          <p:nvPr/>
+        </p:nvSpPr>
+        <p:spPr>
+          <a:xfrm>
+            <a:off x="6355080" y="1600200"/>
+            <a:ext cx="685800" cy="685800"/>
+          </a:xfrm>
+          <a:prstGeom prst="rect">
+            <a:avLst/>
+          </a:prstGeom>
+          <a:noFill/>
+          <a:ln/>
+        </p:spPr>
+        <p:txBody>
+          <a:bodyPr wrap="square" lIns="0" tIns="0" rIns="0" bIns="0" rtlCol="0" anchor="ctr"/>
+          <a:lstStyle/>
+          <a:p>
+            <a:pPr algn="ctr" indent="0" marL="0">
+              <a:buNone/>
+            </a:pPr>
+            <a:r>
+              <a:rPr lang="en-US" sz="2000" b="1" dirty="0">
                 <a:solidFill>
                   <a:schemeClr val="tx1"/>
                 </a:solidFill>
               </a:rPr>
-              <a:t>Help each other</a:t>
-            </a:r>
-            <a:endParaRPr lang="en-US" sz="2200" dirty="0"/>
-          </a:p>
-        </p:txBody>
-      </p:sp>
-      <p:sp>
-        <p:nvSpPr>
-          <p:cNvPr id="17" name="need 3 body"/>
-          <p:cNvSpPr txBox="1"/>
-          <p:nvPr/>
-        </p:nvSpPr>
-        <p:spPr>
-          <a:xfrm>
-            <a:off x="8412480" y="3337560"/>
-            <a:ext cx="2971800" cy="1554480"/>
-          </a:xfrm>
-          <a:prstGeom prst="rect">
-            <a:avLst/>
-          </a:prstGeom>
-          <a:noFill/>
-          <a:ln/>
-        </p:spPr>
-        <p:txBody>
-          <a:bodyPr wrap="square" lIns="0" tIns="0" rIns="0" bIns="0" rtlCol="0" anchor="t"/>
+              <a:t>5</a:t>
+            </a:r>
+            <a:endParaRPr lang="en-US" sz="2000" dirty="0"/>
+          </a:p>
+        </p:txBody>
+      </p:sp>
+      <p:sp>
+        <p:nvSpPr>
+          <p:cNvPr id="26" name="Text 24"/>
+          <p:cNvSpPr txBox="1"/>
+          <p:nvPr/>
+        </p:nvSpPr>
+        <p:spPr>
+          <a:xfrm>
+            <a:off x="7269480" y="1600200"/>
+            <a:ext cx="1143000" cy="685800"/>
+          </a:xfrm>
+          <a:prstGeom prst="rect">
+            <a:avLst/>
+          </a:prstGeom>
+          <a:noFill/>
+          <a:ln/>
+        </p:spPr>
+        <p:txBody>
+          <a:bodyPr wrap="square" lIns="0" tIns="0" rIns="0" bIns="0" rtlCol="0" anchor="ctr"/>
+          <a:lstStyle/>
+          <a:p>
+            <a:pPr indent="0" marL="0">
+              <a:buNone/>
+            </a:pPr>
+            <a:r>
+              <a:rPr lang="en-US" sz="1600" b="1" dirty="0">
+                <a:solidFill>
+                  <a:schemeClr val="accent2"/>
+                </a:solidFill>
+              </a:rPr>
+              <a:t>28-37 min</a:t>
+            </a:r>
+            <a:endParaRPr lang="en-US" sz="1600" dirty="0"/>
+          </a:p>
+        </p:txBody>
+      </p:sp>
+      <p:sp>
+        <p:nvSpPr>
+          <p:cNvPr id="27" name="Text 25"/>
+          <p:cNvSpPr txBox="1"/>
+          <p:nvPr/>
+        </p:nvSpPr>
+        <p:spPr>
+          <a:xfrm>
+            <a:off x="8412480" y="1600200"/>
+            <a:ext cx="3063240" cy="685800"/>
+          </a:xfrm>
+          <a:prstGeom prst="rect">
+            <a:avLst/>
+          </a:prstGeom>
+          <a:noFill/>
+          <a:ln/>
+        </p:spPr>
+        <p:txBody>
+          <a:bodyPr wrap="square" lIns="0" tIns="0" rIns="0" bIns="0" rtlCol="0" anchor="ctr"/>
           <a:lstStyle/>
           <a:p>
             <a:pPr indent="0" marL="0">
@@ -8839,10 +10002,460 @@
             <a:r>
               <a:rPr lang="en-US" sz="1800" dirty="0">
                 <a:solidFill>
-                  <a:schemeClr val="tx2"/>
-                </a:solidFill>
-              </a:rPr>
-              <a:t>Stuck? Raise your hand. Finished early? Help your neighbor.</a:t>
+                  <a:schemeClr val="tx1"/>
+                </a:solidFill>
+              </a:rPr>
+              <a:t>Connect the website</a:t>
+            </a:r>
+            <a:endParaRPr lang="en-US" sz="1800" dirty="0"/>
+          </a:p>
+        </p:txBody>
+      </p:sp>
+      <p:sp>
+        <p:nvSpPr>
+          <p:cNvPr id="28" name="step 6 card"/>
+          <p:cNvSpPr/>
+          <p:nvPr/>
+        </p:nvSpPr>
+        <p:spPr>
+          <a:xfrm>
+            <a:off x="6172200" y="2606040"/>
+            <a:ext cx="5440680" cy="960120"/>
+          </a:xfrm>
+          <a:prstGeom prst="roundRect">
+            <a:avLst>
+              <a:gd name="adj" fmla="val 14286"/>
+            </a:avLst>
+          </a:prstGeom>
+          <a:solidFill>
+            <a:schemeClr val="bg1"/>
+          </a:solidFill>
+          <a:ln/>
+        </p:spPr>
+      </p:sp>
+      <p:sp>
+        <p:nvSpPr>
+          <p:cNvPr id="29" name="step 6 number"/>
+          <p:cNvSpPr/>
+          <p:nvPr/>
+        </p:nvSpPr>
+        <p:spPr>
+          <a:xfrm>
+            <a:off x="6355080" y="2743200"/>
+            <a:ext cx="685800" cy="685800"/>
+          </a:xfrm>
+          <a:prstGeom prst="ellipse">
+            <a:avLst/>
+          </a:prstGeom>
+          <a:solidFill>
+            <a:schemeClr val="accent1"/>
+          </a:solidFill>
+          <a:ln/>
+        </p:spPr>
+      </p:sp>
+      <p:sp>
+        <p:nvSpPr>
+          <p:cNvPr id="30" name="Text 28"/>
+          <p:cNvSpPr txBox="1"/>
+          <p:nvPr/>
+        </p:nvSpPr>
+        <p:spPr>
+          <a:xfrm>
+            <a:off x="6355080" y="2743200"/>
+            <a:ext cx="685800" cy="685800"/>
+          </a:xfrm>
+          <a:prstGeom prst="rect">
+            <a:avLst/>
+          </a:prstGeom>
+          <a:noFill/>
+          <a:ln/>
+        </p:spPr>
+        <p:txBody>
+          <a:bodyPr wrap="square" lIns="0" tIns="0" rIns="0" bIns="0" rtlCol="0" anchor="ctr"/>
+          <a:lstStyle/>
+          <a:p>
+            <a:pPr algn="ctr" indent="0" marL="0">
+              <a:buNone/>
+            </a:pPr>
+            <a:r>
+              <a:rPr lang="en-US" sz="2000" b="1" dirty="0">
+                <a:solidFill>
+                  <a:schemeClr val="tx1"/>
+                </a:solidFill>
+              </a:rPr>
+              <a:t>6</a:t>
+            </a:r>
+            <a:endParaRPr lang="en-US" sz="2000" dirty="0"/>
+          </a:p>
+        </p:txBody>
+      </p:sp>
+      <p:sp>
+        <p:nvSpPr>
+          <p:cNvPr id="31" name="Text 29"/>
+          <p:cNvSpPr txBox="1"/>
+          <p:nvPr/>
+        </p:nvSpPr>
+        <p:spPr>
+          <a:xfrm>
+            <a:off x="7269480" y="2743200"/>
+            <a:ext cx="1143000" cy="685800"/>
+          </a:xfrm>
+          <a:prstGeom prst="rect">
+            <a:avLst/>
+          </a:prstGeom>
+          <a:noFill/>
+          <a:ln/>
+        </p:spPr>
+        <p:txBody>
+          <a:bodyPr wrap="square" lIns="0" tIns="0" rIns="0" bIns="0" rtlCol="0" anchor="ctr"/>
+          <a:lstStyle/>
+          <a:p>
+            <a:pPr indent="0" marL="0">
+              <a:buNone/>
+            </a:pPr>
+            <a:r>
+              <a:rPr lang="en-US" sz="1600" b="1" dirty="0">
+                <a:solidFill>
+                  <a:schemeClr val="accent2"/>
+                </a:solidFill>
+              </a:rPr>
+              <a:t>37-41 min</a:t>
+            </a:r>
+            <a:endParaRPr lang="en-US" sz="1600" dirty="0"/>
+          </a:p>
+        </p:txBody>
+      </p:sp>
+      <p:sp>
+        <p:nvSpPr>
+          <p:cNvPr id="32" name="Text 30"/>
+          <p:cNvSpPr txBox="1"/>
+          <p:nvPr/>
+        </p:nvSpPr>
+        <p:spPr>
+          <a:xfrm>
+            <a:off x="8412480" y="2743200"/>
+            <a:ext cx="3063240" cy="685800"/>
+          </a:xfrm>
+          <a:prstGeom prst="rect">
+            <a:avLst/>
+          </a:prstGeom>
+          <a:noFill/>
+          <a:ln/>
+        </p:spPr>
+        <p:txBody>
+          <a:bodyPr wrap="square" lIns="0" tIns="0" rIns="0" bIns="0" rtlCol="0" anchor="ctr"/>
+          <a:lstStyle/>
+          <a:p>
+            <a:pPr indent="0" marL="0">
+              <a:buNone/>
+            </a:pPr>
+            <a:r>
+              <a:rPr lang="en-US" sz="1800" dirty="0">
+                <a:solidFill>
+                  <a:schemeClr val="tx1"/>
+                </a:solidFill>
+              </a:rPr>
+              <a:t>Test your app</a:t>
+            </a:r>
+            <a:endParaRPr lang="en-US" sz="1800" dirty="0"/>
+          </a:p>
+        </p:txBody>
+      </p:sp>
+      <p:sp>
+        <p:nvSpPr>
+          <p:cNvPr id="33" name="step 7 card"/>
+          <p:cNvSpPr/>
+          <p:nvPr/>
+        </p:nvSpPr>
+        <p:spPr>
+          <a:xfrm>
+            <a:off x="6172200" y="3749040"/>
+            <a:ext cx="5440680" cy="960120"/>
+          </a:xfrm>
+          <a:prstGeom prst="roundRect">
+            <a:avLst>
+              <a:gd name="adj" fmla="val 14286"/>
+            </a:avLst>
+          </a:prstGeom>
+          <a:solidFill>
+            <a:schemeClr val="bg2"/>
+          </a:solidFill>
+          <a:ln/>
+        </p:spPr>
+      </p:sp>
+      <p:sp>
+        <p:nvSpPr>
+          <p:cNvPr id="34" name="step 7 number"/>
+          <p:cNvSpPr/>
+          <p:nvPr/>
+        </p:nvSpPr>
+        <p:spPr>
+          <a:xfrm>
+            <a:off x="6355080" y="3886200"/>
+            <a:ext cx="685800" cy="685800"/>
+          </a:xfrm>
+          <a:prstGeom prst="ellipse">
+            <a:avLst/>
+          </a:prstGeom>
+          <a:solidFill>
+            <a:schemeClr val="accent1"/>
+          </a:solidFill>
+          <a:ln/>
+        </p:spPr>
+      </p:sp>
+      <p:sp>
+        <p:nvSpPr>
+          <p:cNvPr id="35" name="Text 33"/>
+          <p:cNvSpPr txBox="1"/>
+          <p:nvPr/>
+        </p:nvSpPr>
+        <p:spPr>
+          <a:xfrm>
+            <a:off x="6355080" y="3886200"/>
+            <a:ext cx="685800" cy="685800"/>
+          </a:xfrm>
+          <a:prstGeom prst="rect">
+            <a:avLst/>
+          </a:prstGeom>
+          <a:noFill/>
+          <a:ln/>
+        </p:spPr>
+        <p:txBody>
+          <a:bodyPr wrap="square" lIns="0" tIns="0" rIns="0" bIns="0" rtlCol="0" anchor="ctr"/>
+          <a:lstStyle/>
+          <a:p>
+            <a:pPr algn="ctr" indent="0" marL="0">
+              <a:buNone/>
+            </a:pPr>
+            <a:r>
+              <a:rPr lang="en-US" sz="2000" b="1" dirty="0">
+                <a:solidFill>
+                  <a:schemeClr val="tx1"/>
+                </a:solidFill>
+              </a:rPr>
+              <a:t>7</a:t>
+            </a:r>
+            <a:endParaRPr lang="en-US" sz="2000" dirty="0"/>
+          </a:p>
+        </p:txBody>
+      </p:sp>
+      <p:sp>
+        <p:nvSpPr>
+          <p:cNvPr id="36" name="Text 34"/>
+          <p:cNvSpPr txBox="1"/>
+          <p:nvPr/>
+        </p:nvSpPr>
+        <p:spPr>
+          <a:xfrm>
+            <a:off x="7269480" y="3886200"/>
+            <a:ext cx="1143000" cy="685800"/>
+          </a:xfrm>
+          <a:prstGeom prst="rect">
+            <a:avLst/>
+          </a:prstGeom>
+          <a:noFill/>
+          <a:ln/>
+        </p:spPr>
+        <p:txBody>
+          <a:bodyPr wrap="square" lIns="0" tIns="0" rIns="0" bIns="0" rtlCol="0" anchor="ctr"/>
+          <a:lstStyle/>
+          <a:p>
+            <a:pPr indent="0" marL="0">
+              <a:buNone/>
+            </a:pPr>
+            <a:r>
+              <a:rPr lang="en-US" sz="1600" b="1" dirty="0">
+                <a:solidFill>
+                  <a:schemeClr val="accent2"/>
+                </a:solidFill>
+              </a:rPr>
+              <a:t>41-44 min</a:t>
+            </a:r>
+            <a:endParaRPr lang="en-US" sz="1600" dirty="0"/>
+          </a:p>
+        </p:txBody>
+      </p:sp>
+      <p:sp>
+        <p:nvSpPr>
+          <p:cNvPr id="37" name="Text 35"/>
+          <p:cNvSpPr txBox="1"/>
+          <p:nvPr/>
+        </p:nvSpPr>
+        <p:spPr>
+          <a:xfrm>
+            <a:off x="8412480" y="3886200"/>
+            <a:ext cx="3063240" cy="685800"/>
+          </a:xfrm>
+          <a:prstGeom prst="rect">
+            <a:avLst/>
+          </a:prstGeom>
+          <a:noFill/>
+          <a:ln/>
+        </p:spPr>
+        <p:txBody>
+          <a:bodyPr wrap="square" lIns="0" tIns="0" rIns="0" bIns="0" rtlCol="0" anchor="ctr"/>
+          <a:lstStyle/>
+          <a:p>
+            <a:pPr indent="0" marL="0">
+              <a:buNone/>
+            </a:pPr>
+            <a:r>
+              <a:rPr lang="en-US" sz="1800" dirty="0">
+                <a:solidFill>
+                  <a:schemeClr val="tx1"/>
+                </a:solidFill>
+              </a:rPr>
+              <a:t>Put it online with Amplify</a:t>
+            </a:r>
+            <a:endParaRPr lang="en-US" sz="1800" dirty="0"/>
+          </a:p>
+        </p:txBody>
+      </p:sp>
+      <p:sp>
+        <p:nvSpPr>
+          <p:cNvPr id="38" name="step 8 card"/>
+          <p:cNvSpPr/>
+          <p:nvPr/>
+        </p:nvSpPr>
+        <p:spPr>
+          <a:xfrm>
+            <a:off x="6172200" y="4892040"/>
+            <a:ext cx="5440680" cy="960120"/>
+          </a:xfrm>
+          <a:prstGeom prst="roundRect">
+            <a:avLst>
+              <a:gd name="adj" fmla="val 14286"/>
+            </a:avLst>
+          </a:prstGeom>
+          <a:solidFill>
+            <a:schemeClr val="bg1"/>
+          </a:solidFill>
+          <a:ln/>
+        </p:spPr>
+      </p:sp>
+      <p:sp>
+        <p:nvSpPr>
+          <p:cNvPr id="39" name="step 8 number"/>
+          <p:cNvSpPr/>
+          <p:nvPr/>
+        </p:nvSpPr>
+        <p:spPr>
+          <a:xfrm>
+            <a:off x="6355080" y="5029200"/>
+            <a:ext cx="685800" cy="685800"/>
+          </a:xfrm>
+          <a:prstGeom prst="ellipse">
+            <a:avLst/>
+          </a:prstGeom>
+          <a:solidFill>
+            <a:schemeClr val="accent1"/>
+          </a:solidFill>
+          <a:ln/>
+        </p:spPr>
+      </p:sp>
+      <p:sp>
+        <p:nvSpPr>
+          <p:cNvPr id="40" name="Text 38"/>
+          <p:cNvSpPr txBox="1"/>
+          <p:nvPr/>
+        </p:nvSpPr>
+        <p:spPr>
+          <a:xfrm>
+            <a:off x="6355080" y="5029200"/>
+            <a:ext cx="685800" cy="685800"/>
+          </a:xfrm>
+          <a:prstGeom prst="rect">
+            <a:avLst/>
+          </a:prstGeom>
+          <a:noFill/>
+          <a:ln/>
+        </p:spPr>
+        <p:txBody>
+          <a:bodyPr wrap="square" lIns="0" tIns="0" rIns="0" bIns="0" rtlCol="0" anchor="ctr"/>
+          <a:lstStyle/>
+          <a:p>
+            <a:pPr algn="ctr" indent="0" marL="0">
+              <a:buNone/>
+            </a:pPr>
+            <a:r>
+              <a:rPr lang="en-US" sz="2000" b="1" dirty="0">
+                <a:solidFill>
+                  <a:schemeClr val="tx1"/>
+                </a:solidFill>
+              </a:rPr>
+              <a:t>8</a:t>
+            </a:r>
+            <a:endParaRPr lang="en-US" sz="2000" dirty="0"/>
+          </a:p>
+        </p:txBody>
+      </p:sp>
+      <p:sp>
+        <p:nvSpPr>
+          <p:cNvPr id="41" name="Text 39"/>
+          <p:cNvSpPr txBox="1"/>
+          <p:nvPr/>
+        </p:nvSpPr>
+        <p:spPr>
+          <a:xfrm>
+            <a:off x="7269480" y="5029200"/>
+            <a:ext cx="1143000" cy="685800"/>
+          </a:xfrm>
+          <a:prstGeom prst="rect">
+            <a:avLst/>
+          </a:prstGeom>
+          <a:noFill/>
+          <a:ln/>
+        </p:spPr>
+        <p:txBody>
+          <a:bodyPr wrap="square" lIns="0" tIns="0" rIns="0" bIns="0" rtlCol="0" anchor="ctr"/>
+          <a:lstStyle/>
+          <a:p>
+            <a:pPr indent="0" marL="0">
+              <a:buNone/>
+            </a:pPr>
+            <a:r>
+              <a:rPr lang="en-US" sz="1600" b="1" dirty="0">
+                <a:solidFill>
+                  <a:schemeClr val="accent2"/>
+                </a:solidFill>
+              </a:rPr>
+              <a:t>44-45 min</a:t>
+            </a:r>
+            <a:endParaRPr lang="en-US" sz="1600" dirty="0"/>
+          </a:p>
+        </p:txBody>
+      </p:sp>
+      <p:sp>
+        <p:nvSpPr>
+          <p:cNvPr id="42" name="Text 40"/>
+          <p:cNvSpPr txBox="1"/>
+          <p:nvPr/>
+        </p:nvSpPr>
+        <p:spPr>
+          <a:xfrm>
+            <a:off x="8412480" y="5029200"/>
+            <a:ext cx="3063240" cy="685800"/>
+          </a:xfrm>
+          <a:prstGeom prst="rect">
+            <a:avLst/>
+          </a:prstGeom>
+          <a:noFill/>
+          <a:ln/>
+        </p:spPr>
+        <p:txBody>
+          <a:bodyPr wrap="square" lIns="0" tIns="0" rIns="0" bIns="0" rtlCol="0" anchor="ctr"/>
+          <a:lstStyle/>
+          <a:p>
+            <a:pPr indent="0" marL="0">
+              <a:buNone/>
+            </a:pPr>
+            <a:r>
+              <a:rPr lang="en-US" sz="1800" dirty="0">
+                <a:solidFill>
+                  <a:schemeClr val="tx1"/>
+                </a:solidFill>
+              </a:rPr>
+              <a:t>Wrap up and celebrate</a:t>
             </a:r>
             <a:endParaRPr lang="en-US" sz="1800" dirty="0"/>
           </a:p>
@@ -8950,7 +10563,7 @@
                   <a:schemeClr val="tx1"/>
                 </a:solidFill>
               </a:rPr>
-              <a:t>Where these skills can take you</a:t>
+              <a:t>You don't need to be an expert</a:t>
             </a:r>
             <a:endParaRPr lang="en-US" sz="3600" dirty="0"/>
           </a:p>
@@ -8958,18 +10571,18 @@
       </p:sp>
       <p:sp>
         <p:nvSpPr>
-          <p:cNvPr id="3" name="job 1 card"/>
+          <p:cNvPr id="3" name="need 1 card"/>
           <p:cNvSpPr/>
           <p:nvPr/>
         </p:nvSpPr>
         <p:spPr>
           <a:xfrm>
             <a:off x="548640" y="1645920"/>
-            <a:ext cx="3520440" cy="1737360"/>
+            <a:ext cx="3520440" cy="3474720"/>
           </a:xfrm>
           <a:prstGeom prst="roundRect">
             <a:avLst>
-              <a:gd name="adj" fmla="val 7895"/>
+              <a:gd name="adj" fmla="val 3947"/>
             </a:avLst>
           </a:prstGeom>
           <a:solidFill>
@@ -8980,14 +10593,14 @@
       </p:sp>
       <p:sp>
         <p:nvSpPr>
-          <p:cNvPr id="4" name="job 1 circle"/>
+          <p:cNvPr id="4" name="need 1 circle"/>
           <p:cNvSpPr/>
           <p:nvPr/>
         </p:nvSpPr>
         <p:spPr>
           <a:xfrm>
-            <a:off x="822960" y="2057400"/>
-            <a:ext cx="914400" cy="914400"/>
+            <a:off x="822960" y="1920240"/>
+            <a:ext cx="731520" cy="731520"/>
           </a:xfrm>
           <a:prstGeom prst="ellipse">
             <a:avLst/>
@@ -9000,7 +10613,7 @@
       </p:sp>
       <p:pic>
         <p:nvPicPr>
-          <p:cNvPr id="5" name="job 1 icon" descr="job 1">    </p:cNvPr>
+          <p:cNvPr id="5" name="need 1 icon" descr="need 1">    </p:cNvPr>
           <p:cNvPicPr>
             <a:picLocks noChangeAspect="1"/>
           </p:cNvPicPr>
@@ -9014,8 +10627,8 @@
         </p:blipFill>
         <p:spPr>
           <a:xfrm>
-            <a:off x="1051560" y="2286000"/>
-            <a:ext cx="457200" cy="457200"/>
+            <a:off x="1005840" y="2103120"/>
+            <a:ext cx="365760" cy="365760"/>
           </a:xfrm>
           <a:prstGeom prst="rect">
             <a:avLst/>
@@ -9024,54 +10637,90 @@
       </p:pic>
       <p:sp>
         <p:nvSpPr>
-          <p:cNvPr id="6" name="Text 3"/>
-          <p:cNvSpPr txBox="1"/>
-          <p:nvPr/>
-        </p:nvSpPr>
-        <p:spPr>
-          <a:xfrm>
-            <a:off x="1965960" y="2057400"/>
-            <a:ext cx="1965960" cy="914400"/>
-          </a:xfrm>
-          <a:prstGeom prst="rect">
-            <a:avLst/>
-          </a:prstGeom>
-          <a:noFill/>
-          <a:ln/>
-        </p:spPr>
-        <p:txBody>
-          <a:bodyPr wrap="square" lIns="0" tIns="0" rIns="0" bIns="0" rtlCol="0" anchor="ctr"/>
-          <a:lstStyle/>
-          <a:p>
-            <a:pPr indent="0" marL="0">
-              <a:buNone/>
-            </a:pPr>
-            <a:r>
-              <a:rPr lang="en-US" sz="2000" b="1" dirty="0">
+          <p:cNvPr id="6" name="need 1 head"/>
+          <p:cNvSpPr txBox="1"/>
+          <p:nvPr/>
+        </p:nvSpPr>
+        <p:spPr>
+          <a:xfrm>
+            <a:off x="822960" y="2834640"/>
+            <a:ext cx="2971800" cy="457200"/>
+          </a:xfrm>
+          <a:prstGeom prst="rect">
+            <a:avLst/>
+          </a:prstGeom>
+          <a:noFill/>
+          <a:ln/>
+        </p:spPr>
+        <p:txBody>
+          <a:bodyPr wrap="square" lIns="0" tIns="0" rIns="0" bIns="0" rtlCol="0" anchor="t"/>
+          <a:lstStyle/>
+          <a:p>
+            <a:pPr indent="0" marL="0">
+              <a:buNone/>
+            </a:pPr>
+            <a:r>
+              <a:rPr lang="en-US" sz="2200" b="1" dirty="0">
                 <a:solidFill>
                   <a:schemeClr val="tx1"/>
                 </a:solidFill>
               </a:rPr>
-              <a:t>Cloud Engineer</a:t>
-            </a:r>
-            <a:endParaRPr lang="en-US" sz="2000" dirty="0"/>
-          </a:p>
-        </p:txBody>
-      </p:sp>
-      <p:sp>
-        <p:nvSpPr>
-          <p:cNvPr id="7" name="job 2 card"/>
+              <a:t>What you need</a:t>
+            </a:r>
+            <a:endParaRPr lang="en-US" sz="2200" dirty="0"/>
+          </a:p>
+        </p:txBody>
+      </p:sp>
+      <p:sp>
+        <p:nvSpPr>
+          <p:cNvPr id="7" name="need 1 body"/>
+          <p:cNvSpPr txBox="1"/>
+          <p:nvPr/>
+        </p:nvSpPr>
+        <p:spPr>
+          <a:xfrm>
+            <a:off x="822960" y="3337560"/>
+            <a:ext cx="2971800" cy="1554480"/>
+          </a:xfrm>
+          <a:prstGeom prst="rect">
+            <a:avLst/>
+          </a:prstGeom>
+          <a:noFill/>
+          <a:ln/>
+        </p:spPr>
+        <p:txBody>
+          <a:bodyPr wrap="square" lIns="0" tIns="0" rIns="0" bIns="0" rtlCol="0" anchor="t"/>
+          <a:lstStyle/>
+          <a:p>
+            <a:pPr indent="0" marL="0">
+              <a:buNone/>
+            </a:pPr>
+            <a:r>
+              <a:rPr lang="en-US" sz="1800" dirty="0">
+                <a:solidFill>
+                  <a:schemeClr val="tx2"/>
+                </a:solidFill>
+              </a:rPr>
+              <a:t>A laptop, an AWS account, and your curiosity. That's it.</a:t>
+            </a:r>
+            <a:endParaRPr lang="en-US" sz="1800" dirty="0"/>
+          </a:p>
+        </p:txBody>
+      </p:sp>
+      <p:sp>
+        <p:nvSpPr>
+          <p:cNvPr id="8" name="need 2 card"/>
           <p:cNvSpPr/>
           <p:nvPr/>
         </p:nvSpPr>
         <p:spPr>
           <a:xfrm>
             <a:off x="4343400" y="1645920"/>
-            <a:ext cx="3520440" cy="1737360"/>
+            <a:ext cx="3520440" cy="3474720"/>
           </a:xfrm>
           <a:prstGeom prst="roundRect">
             <a:avLst>
-              <a:gd name="adj" fmla="val 7895"/>
+              <a:gd name="adj" fmla="val 3947"/>
             </a:avLst>
           </a:prstGeom>
           <a:solidFill>
@@ -9082,14 +10731,14 @@
       </p:sp>
       <p:sp>
         <p:nvSpPr>
-          <p:cNvPr id="8" name="job 2 circle"/>
+          <p:cNvPr id="9" name="need 2 circle"/>
           <p:cNvSpPr/>
           <p:nvPr/>
         </p:nvSpPr>
         <p:spPr>
           <a:xfrm>
-            <a:off x="4617720" y="2057400"/>
-            <a:ext cx="914400" cy="914400"/>
+            <a:off x="4617720" y="1920240"/>
+            <a:ext cx="731520" cy="731520"/>
           </a:xfrm>
           <a:prstGeom prst="ellipse">
             <a:avLst/>
@@ -9102,7 +10751,7 @@
       </p:sp>
       <p:pic>
         <p:nvPicPr>
-          <p:cNvPr id="9" name="job 2 icon" descr="job 2">    </p:cNvPr>
+          <p:cNvPr id="10" name="need 2 icon" descr="need 2">    </p:cNvPr>
           <p:cNvPicPr>
             <a:picLocks noChangeAspect="1"/>
           </p:cNvPicPr>
@@ -9116,8 +10765,8 @@
         </p:blipFill>
         <p:spPr>
           <a:xfrm>
-            <a:off x="4846320" y="2286000"/>
-            <a:ext cx="457200" cy="457200"/>
+            <a:off x="4800600" y="2103120"/>
+            <a:ext cx="365760" cy="365760"/>
           </a:xfrm>
           <a:prstGeom prst="rect">
             <a:avLst/>
@@ -9126,54 +10775,90 @@
       </p:pic>
       <p:sp>
         <p:nvSpPr>
-          <p:cNvPr id="10" name="Text 6"/>
-          <p:cNvSpPr txBox="1"/>
-          <p:nvPr/>
-        </p:nvSpPr>
-        <p:spPr>
-          <a:xfrm>
-            <a:off x="5760720" y="2057400"/>
-            <a:ext cx="1965960" cy="914400"/>
-          </a:xfrm>
-          <a:prstGeom prst="rect">
-            <a:avLst/>
-          </a:prstGeom>
-          <a:noFill/>
-          <a:ln/>
-        </p:spPr>
-        <p:txBody>
-          <a:bodyPr wrap="square" lIns="0" tIns="0" rIns="0" bIns="0" rtlCol="0" anchor="ctr"/>
-          <a:lstStyle/>
-          <a:p>
-            <a:pPr indent="0" marL="0">
-              <a:buNone/>
-            </a:pPr>
-            <a:r>
-              <a:rPr lang="en-US" sz="2000" b="1" dirty="0">
+          <p:cNvPr id="11" name="need 2 head"/>
+          <p:cNvSpPr txBox="1"/>
+          <p:nvPr/>
+        </p:nvSpPr>
+        <p:spPr>
+          <a:xfrm>
+            <a:off x="4617720" y="2834640"/>
+            <a:ext cx="2971800" cy="457200"/>
+          </a:xfrm>
+          <a:prstGeom prst="rect">
+            <a:avLst/>
+          </a:prstGeom>
+          <a:noFill/>
+          <a:ln/>
+        </p:spPr>
+        <p:txBody>
+          <a:bodyPr wrap="square" lIns="0" tIns="0" rIns="0" bIns="0" rtlCol="0" anchor="t"/>
+          <a:lstStyle/>
+          <a:p>
+            <a:pPr indent="0" marL="0">
+              <a:buNone/>
+            </a:pPr>
+            <a:r>
+              <a:rPr lang="en-US" sz="2200" b="1" dirty="0">
                 <a:solidFill>
                   <a:schemeClr val="tx1"/>
                 </a:solidFill>
               </a:rPr>
-              <a:t>AI Engineer</a:t>
-            </a:r>
-            <a:endParaRPr lang="en-US" sz="2000" dirty="0"/>
-          </a:p>
-        </p:txBody>
-      </p:sp>
-      <p:sp>
-        <p:nvSpPr>
-          <p:cNvPr id="11" name="job 3 card"/>
+              <a:t>Errors are clues</a:t>
+            </a:r>
+            <a:endParaRPr lang="en-US" sz="2200" dirty="0"/>
+          </a:p>
+        </p:txBody>
+      </p:sp>
+      <p:sp>
+        <p:nvSpPr>
+          <p:cNvPr id="12" name="need 2 body"/>
+          <p:cNvSpPr txBox="1"/>
+          <p:nvPr/>
+        </p:nvSpPr>
+        <p:spPr>
+          <a:xfrm>
+            <a:off x="4617720" y="3337560"/>
+            <a:ext cx="2971800" cy="1554480"/>
+          </a:xfrm>
+          <a:prstGeom prst="rect">
+            <a:avLst/>
+          </a:prstGeom>
+          <a:noFill/>
+          <a:ln/>
+        </p:spPr>
+        <p:txBody>
+          <a:bodyPr wrap="square" lIns="0" tIns="0" rIns="0" bIns="0" rtlCol="0" anchor="t"/>
+          <a:lstStyle/>
+          <a:p>
+            <a:pPr indent="0" marL="0">
+              <a:buNone/>
+            </a:pPr>
+            <a:r>
+              <a:rPr lang="en-US" sz="1800" dirty="0">
+                <a:solidFill>
+                  <a:schemeClr val="tx2"/>
+                </a:solidFill>
+              </a:rPr>
+              <a:t>Red error messages are normal. They tell us what to fix. They don't mean you failed.</a:t>
+            </a:r>
+            <a:endParaRPr lang="en-US" sz="1800" dirty="0"/>
+          </a:p>
+        </p:txBody>
+      </p:sp>
+      <p:sp>
+        <p:nvSpPr>
+          <p:cNvPr id="13" name="need 3 card"/>
           <p:cNvSpPr/>
           <p:nvPr/>
         </p:nvSpPr>
         <p:spPr>
           <a:xfrm>
             <a:off x="8138160" y="1645920"/>
-            <a:ext cx="3520440" cy="1737360"/>
+            <a:ext cx="3520440" cy="3474720"/>
           </a:xfrm>
           <a:prstGeom prst="roundRect">
             <a:avLst>
-              <a:gd name="adj" fmla="val 7895"/>
+              <a:gd name="adj" fmla="val 3947"/>
             </a:avLst>
           </a:prstGeom>
           <a:solidFill>
@@ -9184,14 +10869,14 @@
       </p:sp>
       <p:sp>
         <p:nvSpPr>
-          <p:cNvPr id="12" name="job 3 circle"/>
+          <p:cNvPr id="14" name="need 3 circle"/>
           <p:cNvSpPr/>
           <p:nvPr/>
         </p:nvSpPr>
         <p:spPr>
           <a:xfrm>
-            <a:off x="8412480" y="2057400"/>
-            <a:ext cx="914400" cy="914400"/>
+            <a:off x="8412480" y="1920240"/>
+            <a:ext cx="731520" cy="731520"/>
           </a:xfrm>
           <a:prstGeom prst="ellipse">
             <a:avLst/>
@@ -9204,7 +10889,7 @@
       </p:sp>
       <p:pic>
         <p:nvPicPr>
-          <p:cNvPr id="13" name="job 3 icon" descr="job 3">    </p:cNvPr>
+          <p:cNvPr id="15" name="need 3 icon" descr="need 3">    </p:cNvPr>
           <p:cNvPicPr>
             <a:picLocks noChangeAspect="1"/>
           </p:cNvPicPr>
@@ -9218,8 +10903,8 @@
         </p:blipFill>
         <p:spPr>
           <a:xfrm>
-            <a:off x="8641080" y="2286000"/>
-            <a:ext cx="457200" cy="457200"/>
+            <a:off x="8595360" y="2103120"/>
+            <a:ext cx="365760" cy="365760"/>
           </a:xfrm>
           <a:prstGeom prst="rect">
             <a:avLst/>
@@ -9228,356 +10913,50 @@
       </p:pic>
       <p:sp>
         <p:nvSpPr>
-          <p:cNvPr id="14" name="Text 9"/>
-          <p:cNvSpPr txBox="1"/>
-          <p:nvPr/>
-        </p:nvSpPr>
-        <p:spPr>
-          <a:xfrm>
-            <a:off x="9555480" y="2057400"/>
-            <a:ext cx="1965960" cy="914400"/>
-          </a:xfrm>
-          <a:prstGeom prst="rect">
-            <a:avLst/>
-          </a:prstGeom>
-          <a:noFill/>
-          <a:ln/>
-        </p:spPr>
-        <p:txBody>
-          <a:bodyPr wrap="square" lIns="0" tIns="0" rIns="0" bIns="0" rtlCol="0" anchor="ctr"/>
-          <a:lstStyle/>
-          <a:p>
-            <a:pPr indent="0" marL="0">
-              <a:buNone/>
-            </a:pPr>
-            <a:r>
-              <a:rPr lang="en-US" sz="2000" b="1" dirty="0">
+          <p:cNvPr id="16" name="need 3 head"/>
+          <p:cNvSpPr txBox="1"/>
+          <p:nvPr/>
+        </p:nvSpPr>
+        <p:spPr>
+          <a:xfrm>
+            <a:off x="8412480" y="2834640"/>
+            <a:ext cx="2971800" cy="457200"/>
+          </a:xfrm>
+          <a:prstGeom prst="rect">
+            <a:avLst/>
+          </a:prstGeom>
+          <a:noFill/>
+          <a:ln/>
+        </p:spPr>
+        <p:txBody>
+          <a:bodyPr wrap="square" lIns="0" tIns="0" rIns="0" bIns="0" rtlCol="0" anchor="t"/>
+          <a:lstStyle/>
+          <a:p>
+            <a:pPr indent="0" marL="0">
+              <a:buNone/>
+            </a:pPr>
+            <a:r>
+              <a:rPr lang="en-US" sz="2200" b="1" dirty="0">
                 <a:solidFill>
                   <a:schemeClr val="tx1"/>
                 </a:solidFill>
               </a:rPr>
-              <a:t>Cybersecurity Analyst</a:t>
-            </a:r>
-            <a:endParaRPr lang="en-US" sz="2000" dirty="0"/>
-          </a:p>
-        </p:txBody>
-      </p:sp>
-      <p:sp>
-        <p:nvSpPr>
-          <p:cNvPr id="15" name="job 4 card"/>
-          <p:cNvSpPr/>
-          <p:nvPr/>
-        </p:nvSpPr>
-        <p:spPr>
-          <a:xfrm>
-            <a:off x="548640" y="3657600"/>
-            <a:ext cx="3520440" cy="1737360"/>
-          </a:xfrm>
-          <a:prstGeom prst="roundRect">
-            <a:avLst>
-              <a:gd name="adj" fmla="val 7895"/>
-            </a:avLst>
-          </a:prstGeom>
-          <a:solidFill>
-            <a:schemeClr val="bg2"/>
-          </a:solidFill>
-          <a:ln/>
-        </p:spPr>
-      </p:sp>
-      <p:sp>
-        <p:nvSpPr>
-          <p:cNvPr id="16" name="job 4 circle"/>
-          <p:cNvSpPr/>
-          <p:nvPr/>
-        </p:nvSpPr>
-        <p:spPr>
-          <a:xfrm>
-            <a:off x="822960" y="4069080"/>
-            <a:ext cx="914400" cy="914400"/>
-          </a:xfrm>
-          <a:prstGeom prst="ellipse">
-            <a:avLst/>
-          </a:prstGeom>
-          <a:solidFill>
-            <a:schemeClr val="accent1"/>
-          </a:solidFill>
-          <a:ln/>
-        </p:spPr>
-      </p:sp>
-      <p:pic>
-        <p:nvPicPr>
-          <p:cNvPr id="17" name="job 4 icon" descr="job 4">    </p:cNvPr>
-          <p:cNvPicPr>
-            <a:picLocks noChangeAspect="1"/>
-          </p:cNvPicPr>
-          <p:nvPr/>
-        </p:nvPicPr>
-        <p:blipFill>
-          <a:blip r:embed="rId4"/>
-          <a:stretch>
-            <a:fillRect/>
-          </a:stretch>
-        </p:blipFill>
-        <p:spPr>
-          <a:xfrm>
-            <a:off x="1051560" y="4297680"/>
-            <a:ext cx="457200" cy="457200"/>
-          </a:xfrm>
-          <a:prstGeom prst="rect">
-            <a:avLst/>
-          </a:prstGeom>
-        </p:spPr>
-      </p:pic>
-      <p:sp>
-        <p:nvSpPr>
-          <p:cNvPr id="18" name="Text 12"/>
-          <p:cNvSpPr txBox="1"/>
-          <p:nvPr/>
-        </p:nvSpPr>
-        <p:spPr>
-          <a:xfrm>
-            <a:off x="1965960" y="4069080"/>
-            <a:ext cx="1965960" cy="914400"/>
-          </a:xfrm>
-          <a:prstGeom prst="rect">
-            <a:avLst/>
-          </a:prstGeom>
-          <a:noFill/>
-          <a:ln/>
-        </p:spPr>
-        <p:txBody>
-          <a:bodyPr wrap="square" lIns="0" tIns="0" rIns="0" bIns="0" rtlCol="0" anchor="ctr"/>
-          <a:lstStyle/>
-          <a:p>
-            <a:pPr indent="0" marL="0">
-              <a:buNone/>
-            </a:pPr>
-            <a:r>
-              <a:rPr lang="en-US" sz="2000" b="1" dirty="0">
-                <a:solidFill>
-                  <a:schemeClr val="tx1"/>
-                </a:solidFill>
-              </a:rPr>
-              <a:t>Data Analyst</a:t>
-            </a:r>
-            <a:endParaRPr lang="en-US" sz="2000" dirty="0"/>
-          </a:p>
-        </p:txBody>
-      </p:sp>
-      <p:sp>
-        <p:nvSpPr>
-          <p:cNvPr id="19" name="job 5 card"/>
-          <p:cNvSpPr/>
-          <p:nvPr/>
-        </p:nvSpPr>
-        <p:spPr>
-          <a:xfrm>
-            <a:off x="4343400" y="3657600"/>
-            <a:ext cx="3520440" cy="1737360"/>
-          </a:xfrm>
-          <a:prstGeom prst="roundRect">
-            <a:avLst>
-              <a:gd name="adj" fmla="val 7895"/>
-            </a:avLst>
-          </a:prstGeom>
-          <a:solidFill>
-            <a:schemeClr val="bg2"/>
-          </a:solidFill>
-          <a:ln/>
-        </p:spPr>
-      </p:sp>
-      <p:sp>
-        <p:nvSpPr>
-          <p:cNvPr id="20" name="job 5 circle"/>
-          <p:cNvSpPr/>
-          <p:nvPr/>
-        </p:nvSpPr>
-        <p:spPr>
-          <a:xfrm>
-            <a:off x="4617720" y="4069080"/>
-            <a:ext cx="914400" cy="914400"/>
-          </a:xfrm>
-          <a:prstGeom prst="ellipse">
-            <a:avLst/>
-          </a:prstGeom>
-          <a:solidFill>
-            <a:schemeClr val="accent1"/>
-          </a:solidFill>
-          <a:ln/>
-        </p:spPr>
-      </p:sp>
-      <p:pic>
-        <p:nvPicPr>
-          <p:cNvPr id="21" name="job 5 icon" descr="job 5">    </p:cNvPr>
-          <p:cNvPicPr>
-            <a:picLocks noChangeAspect="1"/>
-          </p:cNvPicPr>
-          <p:nvPr/>
-        </p:nvPicPr>
-        <p:blipFill>
-          <a:blip r:embed="rId5"/>
-          <a:stretch>
-            <a:fillRect/>
-          </a:stretch>
-        </p:blipFill>
-        <p:spPr>
-          <a:xfrm>
-            <a:off x="4846320" y="4297680"/>
-            <a:ext cx="457200" cy="457200"/>
-          </a:xfrm>
-          <a:prstGeom prst="rect">
-            <a:avLst/>
-          </a:prstGeom>
-        </p:spPr>
-      </p:pic>
-      <p:sp>
-        <p:nvSpPr>
-          <p:cNvPr id="22" name="Text 15"/>
-          <p:cNvSpPr txBox="1"/>
-          <p:nvPr/>
-        </p:nvSpPr>
-        <p:spPr>
-          <a:xfrm>
-            <a:off x="5760720" y="4069080"/>
-            <a:ext cx="1965960" cy="914400"/>
-          </a:xfrm>
-          <a:prstGeom prst="rect">
-            <a:avLst/>
-          </a:prstGeom>
-          <a:noFill/>
-          <a:ln/>
-        </p:spPr>
-        <p:txBody>
-          <a:bodyPr wrap="square" lIns="0" tIns="0" rIns="0" bIns="0" rtlCol="0" anchor="ctr"/>
-          <a:lstStyle/>
-          <a:p>
-            <a:pPr indent="0" marL="0">
-              <a:buNone/>
-            </a:pPr>
-            <a:r>
-              <a:rPr lang="en-US" sz="2000" b="1" dirty="0">
-                <a:solidFill>
-                  <a:schemeClr val="tx1"/>
-                </a:solidFill>
-              </a:rPr>
-              <a:t>Solutions Architect</a:t>
-            </a:r>
-            <a:endParaRPr lang="en-US" sz="2000" dirty="0"/>
-          </a:p>
-        </p:txBody>
-      </p:sp>
-      <p:sp>
-        <p:nvSpPr>
-          <p:cNvPr id="23" name="job 6 card"/>
-          <p:cNvSpPr/>
-          <p:nvPr/>
-        </p:nvSpPr>
-        <p:spPr>
-          <a:xfrm>
-            <a:off x="8138160" y="3657600"/>
-            <a:ext cx="3520440" cy="1737360"/>
-          </a:xfrm>
-          <a:prstGeom prst="roundRect">
-            <a:avLst>
-              <a:gd name="adj" fmla="val 7895"/>
-            </a:avLst>
-          </a:prstGeom>
-          <a:solidFill>
-            <a:schemeClr val="bg2"/>
-          </a:solidFill>
-          <a:ln/>
-        </p:spPr>
-      </p:sp>
-      <p:sp>
-        <p:nvSpPr>
-          <p:cNvPr id="24" name="job 6 circle"/>
-          <p:cNvSpPr/>
-          <p:nvPr/>
-        </p:nvSpPr>
-        <p:spPr>
-          <a:xfrm>
-            <a:off x="8412480" y="4069080"/>
-            <a:ext cx="914400" cy="914400"/>
-          </a:xfrm>
-          <a:prstGeom prst="ellipse">
-            <a:avLst/>
-          </a:prstGeom>
-          <a:solidFill>
-            <a:schemeClr val="accent1"/>
-          </a:solidFill>
-          <a:ln/>
-        </p:spPr>
-      </p:sp>
-      <p:pic>
-        <p:nvPicPr>
-          <p:cNvPr id="25" name="job 6 icon" descr="job 6">    </p:cNvPr>
-          <p:cNvPicPr>
-            <a:picLocks noChangeAspect="1"/>
-          </p:cNvPicPr>
-          <p:nvPr/>
-        </p:nvPicPr>
-        <p:blipFill>
-          <a:blip r:embed="rId6"/>
-          <a:stretch>
-            <a:fillRect/>
-          </a:stretch>
-        </p:blipFill>
-        <p:spPr>
-          <a:xfrm>
-            <a:off x="8641080" y="4297680"/>
-            <a:ext cx="457200" cy="457200"/>
-          </a:xfrm>
-          <a:prstGeom prst="rect">
-            <a:avLst/>
-          </a:prstGeom>
-        </p:spPr>
-      </p:pic>
-      <p:sp>
-        <p:nvSpPr>
-          <p:cNvPr id="26" name="Text 18"/>
-          <p:cNvSpPr txBox="1"/>
-          <p:nvPr/>
-        </p:nvSpPr>
-        <p:spPr>
-          <a:xfrm>
-            <a:off x="9555480" y="4069080"/>
-            <a:ext cx="1965960" cy="914400"/>
-          </a:xfrm>
-          <a:prstGeom prst="rect">
-            <a:avLst/>
-          </a:prstGeom>
-          <a:noFill/>
-          <a:ln/>
-        </p:spPr>
-        <p:txBody>
-          <a:bodyPr wrap="square" lIns="0" tIns="0" rIns="0" bIns="0" rtlCol="0" anchor="ctr"/>
-          <a:lstStyle/>
-          <a:p>
-            <a:pPr indent="0" marL="0">
-              <a:buNone/>
-            </a:pPr>
-            <a:r>
-              <a:rPr lang="en-US" sz="2000" b="1" dirty="0">
-                <a:solidFill>
-                  <a:schemeClr val="tx1"/>
-                </a:solidFill>
-              </a:rPr>
-              <a:t>Software Developer</a:t>
-            </a:r>
-            <a:endParaRPr lang="en-US" sz="2000" dirty="0"/>
-          </a:p>
-        </p:txBody>
-      </p:sp>
-      <p:sp>
-        <p:nvSpPr>
-          <p:cNvPr id="27" name="Text 19"/>
-          <p:cNvSpPr txBox="1"/>
-          <p:nvPr/>
-        </p:nvSpPr>
-        <p:spPr>
-          <a:xfrm>
-            <a:off x="548640" y="5623560"/>
-            <a:ext cx="11064240" cy="548640"/>
+              <a:t>Help each other</a:t>
+            </a:r>
+            <a:endParaRPr lang="en-US" sz="2200" dirty="0"/>
+          </a:p>
+        </p:txBody>
+      </p:sp>
+      <p:sp>
+        <p:nvSpPr>
+          <p:cNvPr id="17" name="need 3 body"/>
+          <p:cNvSpPr txBox="1"/>
+          <p:nvPr/>
+        </p:nvSpPr>
+        <p:spPr>
+          <a:xfrm>
+            <a:off x="8412480" y="3337560"/>
+            <a:ext cx="2971800" cy="1554480"/>
           </a:xfrm>
           <a:prstGeom prst="rect">
             <a:avLst/>
@@ -9593,12 +10972,12 @@
               <a:buNone/>
             </a:pPr>
             <a:r>
-              <a:rPr lang="en-US" sz="1800" i="1" dirty="0">
+              <a:rPr lang="en-US" sz="1800" dirty="0">
                 <a:solidFill>
                   <a:schemeClr val="tx2"/>
                 </a:solidFill>
               </a:rPr>
-              <a:t>Today you use the same kinds of tools people in these jobs use.</a:t>
+              <a:t>Stuck? Raise your hand. Finished early? Help your neighbor.</a:t>
             </a:r>
             <a:endParaRPr lang="en-US" sz="1800" dirty="0"/>
           </a:p>
@@ -9684,75 +11063,79 @@
         </p:nvSpPr>
         <p:spPr>
           <a:xfrm>
-            <a:off x="731520" y="2103120"/>
-            <a:ext cx="7680960" cy="1737360"/>
-          </a:xfrm>
-          <a:prstGeom prst="rect">
-            <a:avLst/>
-          </a:prstGeom>
-          <a:noFill/>
-          <a:ln/>
-        </p:spPr>
-        <p:txBody>
-          <a:bodyPr wrap="square" lIns="0" tIns="0" rIns="0" bIns="0" rtlCol="0" anchor="b"/>
-          <a:lstStyle/>
-          <a:p>
-            <a:pPr algn="l" indent="0" marL="0">
-              <a:buNone/>
-            </a:pPr>
-            <a:r>
-              <a:rPr lang="en-US" sz="4800" b="1" dirty="0">
-                <a:solidFill>
-                  <a:schemeClr val="bg1"/>
-                </a:solidFill>
-              </a:rPr>
-              <a:t>Let's build.</a:t>
-            </a:r>
-            <a:endParaRPr lang="en-US" sz="4800" dirty="0"/>
-          </a:p>
-        </p:txBody>
-      </p:sp>
-      <p:sp>
-        <p:nvSpPr>
-          <p:cNvPr id="3" name="Text 0"/>
+            <a:off x="548640" y="365760"/>
+            <a:ext cx="11064240" cy="822960"/>
+          </a:xfrm>
+          <a:prstGeom prst="rect">
+            <a:avLst/>
+          </a:prstGeom>
+          <a:noFill/>
+          <a:ln/>
+        </p:spPr>
+        <p:txBody>
+          <a:bodyPr wrap="square" lIns="0" tIns="0" rIns="0" bIns="0" rtlCol="0" anchor="ctr"/>
+          <a:lstStyle/>
+          <a:p>
+            <a:pPr indent="0" marL="0">
+              <a:buNone/>
+            </a:pPr>
+            <a:r>
+              <a:rPr lang="en-US" sz="3600" b="1" dirty="0">
+                <a:solidFill>
+                  <a:schemeClr val="tx1"/>
+                </a:solidFill>
+              </a:rPr>
+              <a:t>Where these skills can take you</a:t>
+            </a:r>
+            <a:endParaRPr lang="en-US" sz="3600" dirty="0"/>
+          </a:p>
+        </p:txBody>
+      </p:sp>
+      <p:sp>
+        <p:nvSpPr>
+          <p:cNvPr id="3" name="job 1 card"/>
           <p:cNvSpPr/>
-          <p:nvPr>
-            <p:ph idx="101" type="body" hasCustomPrompt="1"/>
-          </p:nvPr>
-        </p:nvSpPr>
-        <p:spPr>
-          <a:xfrm>
-            <a:off x="731520" y="3977640"/>
-            <a:ext cx="7680960" cy="1280160"/>
-          </a:xfrm>
-          <a:prstGeom prst="rect">
-            <a:avLst/>
-          </a:prstGeom>
-          <a:noFill/>
-          <a:ln/>
-        </p:spPr>
-        <p:txBody>
-          <a:bodyPr wrap="square" lIns="0" tIns="0" rIns="0" bIns="0" rtlCol="0" anchor="t"/>
-          <a:lstStyle/>
-          <a:p>
-            <a:pPr algn="l" indent="0" marL="0">
-              <a:buNone/>
-            </a:pPr>
-            <a:r>
-              <a:rPr lang="en-US" sz="2200" dirty="0">
-                <a:solidFill>
-                  <a:schemeClr val="accent1"/>
-                </a:solidFill>
-              </a:rPr>
-              <a:t>Get the files: github.com/kingmellow08/ai-career-navigator</a:t>
-            </a:r>
-            <a:endParaRPr lang="en-US" sz="2200" dirty="0"/>
-          </a:p>
-        </p:txBody>
+          <p:nvPr/>
+        </p:nvSpPr>
+        <p:spPr>
+          <a:xfrm>
+            <a:off x="548640" y="1645920"/>
+            <a:ext cx="3520440" cy="1737360"/>
+          </a:xfrm>
+          <a:prstGeom prst="roundRect">
+            <a:avLst>
+              <a:gd name="adj" fmla="val 7895"/>
+            </a:avLst>
+          </a:prstGeom>
+          <a:solidFill>
+            <a:schemeClr val="bg2"/>
+          </a:solidFill>
+          <a:ln/>
+        </p:spPr>
+      </p:sp>
+      <p:sp>
+        <p:nvSpPr>
+          <p:cNvPr id="4" name="job 1 circle"/>
+          <p:cNvSpPr/>
+          <p:nvPr/>
+        </p:nvSpPr>
+        <p:spPr>
+          <a:xfrm>
+            <a:off x="822960" y="2057400"/>
+            <a:ext cx="914400" cy="914400"/>
+          </a:xfrm>
+          <a:prstGeom prst="ellipse">
+            <a:avLst/>
+          </a:prstGeom>
+          <a:solidFill>
+            <a:schemeClr val="accent1"/>
+          </a:solidFill>
+          <a:ln/>
+        </p:spPr>
       </p:sp>
       <p:pic>
         <p:nvPicPr>
-          <p:cNvPr id="4" name="closing icon" descr="Tools">    </p:cNvPr>
+          <p:cNvPr id="5" name="job 1 icon" descr="job 1">    </p:cNvPr>
           <p:cNvPicPr>
             <a:picLocks noChangeAspect="1"/>
           </p:cNvPicPr>
@@ -9766,14 +11149,641 @@
         </p:blipFill>
         <p:spPr>
           <a:xfrm>
-            <a:off x="9144000" y="2377440"/>
-            <a:ext cx="2194560" cy="2194560"/>
+            <a:off x="1051560" y="2286000"/>
+            <a:ext cx="457200" cy="457200"/>
           </a:xfrm>
           <a:prstGeom prst="rect">
             <a:avLst/>
           </a:prstGeom>
         </p:spPr>
       </p:pic>
+      <p:sp>
+        <p:nvSpPr>
+          <p:cNvPr id="6" name="Text 3"/>
+          <p:cNvSpPr txBox="1"/>
+          <p:nvPr/>
+        </p:nvSpPr>
+        <p:spPr>
+          <a:xfrm>
+            <a:off x="1965960" y="2057400"/>
+            <a:ext cx="1965960" cy="914400"/>
+          </a:xfrm>
+          <a:prstGeom prst="rect">
+            <a:avLst/>
+          </a:prstGeom>
+          <a:noFill/>
+          <a:ln/>
+        </p:spPr>
+        <p:txBody>
+          <a:bodyPr wrap="square" lIns="0" tIns="0" rIns="0" bIns="0" rtlCol="0" anchor="ctr"/>
+          <a:lstStyle/>
+          <a:p>
+            <a:pPr indent="0" marL="0">
+              <a:buNone/>
+            </a:pPr>
+            <a:r>
+              <a:rPr lang="en-US" sz="2000" b="1" dirty="0">
+                <a:solidFill>
+                  <a:schemeClr val="tx1"/>
+                </a:solidFill>
+              </a:rPr>
+              <a:t>Cloud Engineer</a:t>
+            </a:r>
+            <a:endParaRPr lang="en-US" sz="2000" dirty="0"/>
+          </a:p>
+        </p:txBody>
+      </p:sp>
+      <p:sp>
+        <p:nvSpPr>
+          <p:cNvPr id="7" name="job 2 card"/>
+          <p:cNvSpPr/>
+          <p:nvPr/>
+        </p:nvSpPr>
+        <p:spPr>
+          <a:xfrm>
+            <a:off x="4343400" y="1645920"/>
+            <a:ext cx="3520440" cy="1737360"/>
+          </a:xfrm>
+          <a:prstGeom prst="roundRect">
+            <a:avLst>
+              <a:gd name="adj" fmla="val 7895"/>
+            </a:avLst>
+          </a:prstGeom>
+          <a:solidFill>
+            <a:schemeClr val="bg2"/>
+          </a:solidFill>
+          <a:ln/>
+        </p:spPr>
+      </p:sp>
+      <p:sp>
+        <p:nvSpPr>
+          <p:cNvPr id="8" name="job 2 circle"/>
+          <p:cNvSpPr/>
+          <p:nvPr/>
+        </p:nvSpPr>
+        <p:spPr>
+          <a:xfrm>
+            <a:off x="4617720" y="2057400"/>
+            <a:ext cx="914400" cy="914400"/>
+          </a:xfrm>
+          <a:prstGeom prst="ellipse">
+            <a:avLst/>
+          </a:prstGeom>
+          <a:solidFill>
+            <a:schemeClr val="accent1"/>
+          </a:solidFill>
+          <a:ln/>
+        </p:spPr>
+      </p:sp>
+      <p:pic>
+        <p:nvPicPr>
+          <p:cNvPr id="9" name="job 2 icon" descr="job 2">    </p:cNvPr>
+          <p:cNvPicPr>
+            <a:picLocks noChangeAspect="1"/>
+          </p:cNvPicPr>
+          <p:nvPr/>
+        </p:nvPicPr>
+        <p:blipFill>
+          <a:blip r:embed="rId2"/>
+          <a:stretch>
+            <a:fillRect/>
+          </a:stretch>
+        </p:blipFill>
+        <p:spPr>
+          <a:xfrm>
+            <a:off x="4846320" y="2286000"/>
+            <a:ext cx="457200" cy="457200"/>
+          </a:xfrm>
+          <a:prstGeom prst="rect">
+            <a:avLst/>
+          </a:prstGeom>
+        </p:spPr>
+      </p:pic>
+      <p:sp>
+        <p:nvSpPr>
+          <p:cNvPr id="10" name="Text 6"/>
+          <p:cNvSpPr txBox="1"/>
+          <p:nvPr/>
+        </p:nvSpPr>
+        <p:spPr>
+          <a:xfrm>
+            <a:off x="5760720" y="2057400"/>
+            <a:ext cx="1965960" cy="914400"/>
+          </a:xfrm>
+          <a:prstGeom prst="rect">
+            <a:avLst/>
+          </a:prstGeom>
+          <a:noFill/>
+          <a:ln/>
+        </p:spPr>
+        <p:txBody>
+          <a:bodyPr wrap="square" lIns="0" tIns="0" rIns="0" bIns="0" rtlCol="0" anchor="ctr"/>
+          <a:lstStyle/>
+          <a:p>
+            <a:pPr indent="0" marL="0">
+              <a:buNone/>
+            </a:pPr>
+            <a:r>
+              <a:rPr lang="en-US" sz="2000" b="1" dirty="0">
+                <a:solidFill>
+                  <a:schemeClr val="tx1"/>
+                </a:solidFill>
+              </a:rPr>
+              <a:t>AI Engineer</a:t>
+            </a:r>
+            <a:endParaRPr lang="en-US" sz="2000" dirty="0"/>
+          </a:p>
+        </p:txBody>
+      </p:sp>
+      <p:sp>
+        <p:nvSpPr>
+          <p:cNvPr id="11" name="job 3 card"/>
+          <p:cNvSpPr/>
+          <p:nvPr/>
+        </p:nvSpPr>
+        <p:spPr>
+          <a:xfrm>
+            <a:off x="8138160" y="1645920"/>
+            <a:ext cx="3520440" cy="1737360"/>
+          </a:xfrm>
+          <a:prstGeom prst="roundRect">
+            <a:avLst>
+              <a:gd name="adj" fmla="val 7895"/>
+            </a:avLst>
+          </a:prstGeom>
+          <a:solidFill>
+            <a:schemeClr val="bg2"/>
+          </a:solidFill>
+          <a:ln/>
+        </p:spPr>
+      </p:sp>
+      <p:sp>
+        <p:nvSpPr>
+          <p:cNvPr id="12" name="job 3 circle"/>
+          <p:cNvSpPr/>
+          <p:nvPr/>
+        </p:nvSpPr>
+        <p:spPr>
+          <a:xfrm>
+            <a:off x="8412480" y="2057400"/>
+            <a:ext cx="914400" cy="914400"/>
+          </a:xfrm>
+          <a:prstGeom prst="ellipse">
+            <a:avLst/>
+          </a:prstGeom>
+          <a:solidFill>
+            <a:schemeClr val="accent1"/>
+          </a:solidFill>
+          <a:ln/>
+        </p:spPr>
+      </p:sp>
+      <p:pic>
+        <p:nvPicPr>
+          <p:cNvPr id="13" name="job 3 icon" descr="job 3">    </p:cNvPr>
+          <p:cNvPicPr>
+            <a:picLocks noChangeAspect="1"/>
+          </p:cNvPicPr>
+          <p:nvPr/>
+        </p:nvPicPr>
+        <p:blipFill>
+          <a:blip r:embed="rId3"/>
+          <a:stretch>
+            <a:fillRect/>
+          </a:stretch>
+        </p:blipFill>
+        <p:spPr>
+          <a:xfrm>
+            <a:off x="8641080" y="2286000"/>
+            <a:ext cx="457200" cy="457200"/>
+          </a:xfrm>
+          <a:prstGeom prst="rect">
+            <a:avLst/>
+          </a:prstGeom>
+        </p:spPr>
+      </p:pic>
+      <p:sp>
+        <p:nvSpPr>
+          <p:cNvPr id="14" name="Text 9"/>
+          <p:cNvSpPr txBox="1"/>
+          <p:nvPr/>
+        </p:nvSpPr>
+        <p:spPr>
+          <a:xfrm>
+            <a:off x="9555480" y="2057400"/>
+            <a:ext cx="1965960" cy="914400"/>
+          </a:xfrm>
+          <a:prstGeom prst="rect">
+            <a:avLst/>
+          </a:prstGeom>
+          <a:noFill/>
+          <a:ln/>
+        </p:spPr>
+        <p:txBody>
+          <a:bodyPr wrap="square" lIns="0" tIns="0" rIns="0" bIns="0" rtlCol="0" anchor="ctr"/>
+          <a:lstStyle/>
+          <a:p>
+            <a:pPr indent="0" marL="0">
+              <a:buNone/>
+            </a:pPr>
+            <a:r>
+              <a:rPr lang="en-US" sz="2000" b="1" dirty="0">
+                <a:solidFill>
+                  <a:schemeClr val="tx1"/>
+                </a:solidFill>
+              </a:rPr>
+              <a:t>Cybersecurity Analyst</a:t>
+            </a:r>
+            <a:endParaRPr lang="en-US" sz="2000" dirty="0"/>
+          </a:p>
+        </p:txBody>
+      </p:sp>
+      <p:sp>
+        <p:nvSpPr>
+          <p:cNvPr id="15" name="job 4 card"/>
+          <p:cNvSpPr/>
+          <p:nvPr/>
+        </p:nvSpPr>
+        <p:spPr>
+          <a:xfrm>
+            <a:off x="548640" y="3657600"/>
+            <a:ext cx="3520440" cy="1737360"/>
+          </a:xfrm>
+          <a:prstGeom prst="roundRect">
+            <a:avLst>
+              <a:gd name="adj" fmla="val 7895"/>
+            </a:avLst>
+          </a:prstGeom>
+          <a:solidFill>
+            <a:schemeClr val="bg2"/>
+          </a:solidFill>
+          <a:ln/>
+        </p:spPr>
+      </p:sp>
+      <p:sp>
+        <p:nvSpPr>
+          <p:cNvPr id="16" name="job 4 circle"/>
+          <p:cNvSpPr/>
+          <p:nvPr/>
+        </p:nvSpPr>
+        <p:spPr>
+          <a:xfrm>
+            <a:off x="822960" y="4069080"/>
+            <a:ext cx="914400" cy="914400"/>
+          </a:xfrm>
+          <a:prstGeom prst="ellipse">
+            <a:avLst/>
+          </a:prstGeom>
+          <a:solidFill>
+            <a:schemeClr val="accent1"/>
+          </a:solidFill>
+          <a:ln/>
+        </p:spPr>
+      </p:sp>
+      <p:pic>
+        <p:nvPicPr>
+          <p:cNvPr id="17" name="job 4 icon" descr="job 4">    </p:cNvPr>
+          <p:cNvPicPr>
+            <a:picLocks noChangeAspect="1"/>
+          </p:cNvPicPr>
+          <p:nvPr/>
+        </p:nvPicPr>
+        <p:blipFill>
+          <a:blip r:embed="rId4"/>
+          <a:stretch>
+            <a:fillRect/>
+          </a:stretch>
+        </p:blipFill>
+        <p:spPr>
+          <a:xfrm>
+            <a:off x="1051560" y="4297680"/>
+            <a:ext cx="457200" cy="457200"/>
+          </a:xfrm>
+          <a:prstGeom prst="rect">
+            <a:avLst/>
+          </a:prstGeom>
+        </p:spPr>
+      </p:pic>
+      <p:sp>
+        <p:nvSpPr>
+          <p:cNvPr id="18" name="Text 12"/>
+          <p:cNvSpPr txBox="1"/>
+          <p:nvPr/>
+        </p:nvSpPr>
+        <p:spPr>
+          <a:xfrm>
+            <a:off x="1965960" y="4069080"/>
+            <a:ext cx="1965960" cy="914400"/>
+          </a:xfrm>
+          <a:prstGeom prst="rect">
+            <a:avLst/>
+          </a:prstGeom>
+          <a:noFill/>
+          <a:ln/>
+        </p:spPr>
+        <p:txBody>
+          <a:bodyPr wrap="square" lIns="0" tIns="0" rIns="0" bIns="0" rtlCol="0" anchor="ctr"/>
+          <a:lstStyle/>
+          <a:p>
+            <a:pPr indent="0" marL="0">
+              <a:buNone/>
+            </a:pPr>
+            <a:r>
+              <a:rPr lang="en-US" sz="2000" b="1" dirty="0">
+                <a:solidFill>
+                  <a:schemeClr val="tx1"/>
+                </a:solidFill>
+              </a:rPr>
+              <a:t>Data Analyst</a:t>
+            </a:r>
+            <a:endParaRPr lang="en-US" sz="2000" dirty="0"/>
+          </a:p>
+        </p:txBody>
+      </p:sp>
+      <p:sp>
+        <p:nvSpPr>
+          <p:cNvPr id="19" name="job 5 card"/>
+          <p:cNvSpPr/>
+          <p:nvPr/>
+        </p:nvSpPr>
+        <p:spPr>
+          <a:xfrm>
+            <a:off x="4343400" y="3657600"/>
+            <a:ext cx="3520440" cy="1737360"/>
+          </a:xfrm>
+          <a:prstGeom prst="roundRect">
+            <a:avLst>
+              <a:gd name="adj" fmla="val 7895"/>
+            </a:avLst>
+          </a:prstGeom>
+          <a:solidFill>
+            <a:schemeClr val="bg2"/>
+          </a:solidFill>
+          <a:ln/>
+        </p:spPr>
+      </p:sp>
+      <p:sp>
+        <p:nvSpPr>
+          <p:cNvPr id="20" name="job 5 circle"/>
+          <p:cNvSpPr/>
+          <p:nvPr/>
+        </p:nvSpPr>
+        <p:spPr>
+          <a:xfrm>
+            <a:off x="4617720" y="4069080"/>
+            <a:ext cx="914400" cy="914400"/>
+          </a:xfrm>
+          <a:prstGeom prst="ellipse">
+            <a:avLst/>
+          </a:prstGeom>
+          <a:solidFill>
+            <a:schemeClr val="accent1"/>
+          </a:solidFill>
+          <a:ln/>
+        </p:spPr>
+      </p:sp>
+      <p:pic>
+        <p:nvPicPr>
+          <p:cNvPr id="21" name="job 5 icon" descr="job 5">    </p:cNvPr>
+          <p:cNvPicPr>
+            <a:picLocks noChangeAspect="1"/>
+          </p:cNvPicPr>
+          <p:nvPr/>
+        </p:nvPicPr>
+        <p:blipFill>
+          <a:blip r:embed="rId5"/>
+          <a:stretch>
+            <a:fillRect/>
+          </a:stretch>
+        </p:blipFill>
+        <p:spPr>
+          <a:xfrm>
+            <a:off x="4846320" y="4297680"/>
+            <a:ext cx="457200" cy="457200"/>
+          </a:xfrm>
+          <a:prstGeom prst="rect">
+            <a:avLst/>
+          </a:prstGeom>
+        </p:spPr>
+      </p:pic>
+      <p:sp>
+        <p:nvSpPr>
+          <p:cNvPr id="22" name="Text 15"/>
+          <p:cNvSpPr txBox="1"/>
+          <p:nvPr/>
+        </p:nvSpPr>
+        <p:spPr>
+          <a:xfrm>
+            <a:off x="5760720" y="4069080"/>
+            <a:ext cx="1965960" cy="914400"/>
+          </a:xfrm>
+          <a:prstGeom prst="rect">
+            <a:avLst/>
+          </a:prstGeom>
+          <a:noFill/>
+          <a:ln/>
+        </p:spPr>
+        <p:txBody>
+          <a:bodyPr wrap="square" lIns="0" tIns="0" rIns="0" bIns="0" rtlCol="0" anchor="ctr"/>
+          <a:lstStyle/>
+          <a:p>
+            <a:pPr indent="0" marL="0">
+              <a:buNone/>
+            </a:pPr>
+            <a:r>
+              <a:rPr lang="en-US" sz="2000" b="1" dirty="0">
+                <a:solidFill>
+                  <a:schemeClr val="tx1"/>
+                </a:solidFill>
+              </a:rPr>
+              <a:t>Solutions Architect</a:t>
+            </a:r>
+            <a:endParaRPr lang="en-US" sz="2000" dirty="0"/>
+          </a:p>
+        </p:txBody>
+      </p:sp>
+      <p:sp>
+        <p:nvSpPr>
+          <p:cNvPr id="23" name="job 6 card"/>
+          <p:cNvSpPr/>
+          <p:nvPr/>
+        </p:nvSpPr>
+        <p:spPr>
+          <a:xfrm>
+            <a:off x="8138160" y="3657600"/>
+            <a:ext cx="3520440" cy="1737360"/>
+          </a:xfrm>
+          <a:prstGeom prst="roundRect">
+            <a:avLst>
+              <a:gd name="adj" fmla="val 7895"/>
+            </a:avLst>
+          </a:prstGeom>
+          <a:solidFill>
+            <a:schemeClr val="bg2"/>
+          </a:solidFill>
+          <a:ln/>
+        </p:spPr>
+      </p:sp>
+      <p:sp>
+        <p:nvSpPr>
+          <p:cNvPr id="24" name="job 6 circle"/>
+          <p:cNvSpPr/>
+          <p:nvPr/>
+        </p:nvSpPr>
+        <p:spPr>
+          <a:xfrm>
+            <a:off x="8412480" y="4069080"/>
+            <a:ext cx="914400" cy="914400"/>
+          </a:xfrm>
+          <a:prstGeom prst="ellipse">
+            <a:avLst/>
+          </a:prstGeom>
+          <a:solidFill>
+            <a:schemeClr val="accent1"/>
+          </a:solidFill>
+          <a:ln/>
+        </p:spPr>
+      </p:sp>
+      <p:pic>
+        <p:nvPicPr>
+          <p:cNvPr id="25" name="job 6 icon" descr="job 6">    </p:cNvPr>
+          <p:cNvPicPr>
+            <a:picLocks noChangeAspect="1"/>
+          </p:cNvPicPr>
+          <p:nvPr/>
+        </p:nvPicPr>
+        <p:blipFill>
+          <a:blip r:embed="rId6"/>
+          <a:stretch>
+            <a:fillRect/>
+          </a:stretch>
+        </p:blipFill>
+        <p:spPr>
+          <a:xfrm>
+            <a:off x="8641080" y="4297680"/>
+            <a:ext cx="457200" cy="457200"/>
+          </a:xfrm>
+          <a:prstGeom prst="rect">
+            <a:avLst/>
+          </a:prstGeom>
+        </p:spPr>
+      </p:pic>
+      <p:sp>
+        <p:nvSpPr>
+          <p:cNvPr id="26" name="Text 18"/>
+          <p:cNvSpPr txBox="1"/>
+          <p:nvPr/>
+        </p:nvSpPr>
+        <p:spPr>
+          <a:xfrm>
+            <a:off x="9555480" y="4069080"/>
+            <a:ext cx="1965960" cy="914400"/>
+          </a:xfrm>
+          <a:prstGeom prst="rect">
+            <a:avLst/>
+          </a:prstGeom>
+          <a:noFill/>
+          <a:ln/>
+        </p:spPr>
+        <p:txBody>
+          <a:bodyPr wrap="square" lIns="0" tIns="0" rIns="0" bIns="0" rtlCol="0" anchor="ctr"/>
+          <a:lstStyle/>
+          <a:p>
+            <a:pPr indent="0" marL="0">
+              <a:buNone/>
+            </a:pPr>
+            <a:r>
+              <a:rPr lang="en-US" sz="2000" b="1" dirty="0">
+                <a:solidFill>
+                  <a:schemeClr val="tx1"/>
+                </a:solidFill>
+              </a:rPr>
+              <a:t>Software Developer</a:t>
+            </a:r>
+            <a:endParaRPr lang="en-US" sz="2000" dirty="0"/>
+          </a:p>
+        </p:txBody>
+      </p:sp>
+      <p:sp>
+        <p:nvSpPr>
+          <p:cNvPr id="27" name="Text 19"/>
+          <p:cNvSpPr txBox="1"/>
+          <p:nvPr/>
+        </p:nvSpPr>
+        <p:spPr>
+          <a:xfrm>
+            <a:off x="548640" y="5623560"/>
+            <a:ext cx="11064240" cy="548640"/>
+          </a:xfrm>
+          <a:prstGeom prst="rect">
+            <a:avLst/>
+          </a:prstGeom>
+          <a:noFill/>
+          <a:ln/>
+        </p:spPr>
+        <p:txBody>
+          <a:bodyPr wrap="square" lIns="0" tIns="0" rIns="0" bIns="0" rtlCol="0" anchor="t"/>
+          <a:lstStyle/>
+          <a:p>
+            <a:pPr indent="0" marL="0">
+              <a:buNone/>
+            </a:pPr>
+            <a:r>
+              <a:rPr lang="en-US" sz="1800" i="1" dirty="0">
+                <a:solidFill>
+                  <a:schemeClr val="tx2"/>
+                </a:solidFill>
+              </a:rPr>
+              <a:t>Today you use the same kinds of tools people in these jobs use.</a:t>
+            </a:r>
+            <a:endParaRPr lang="en-US" sz="1800" dirty="0"/>
+          </a:p>
+        </p:txBody>
+      </p:sp>
+      <p:sp>
+        <p:nvSpPr>
+          <p:cNvPr id="25" name="Slide Number Placeholder 0"/>
+          <p:cNvSpPr>
+            <a:spLocks noGrp="1"/>
+          </p:cNvSpPr>
+          <p:nvPr>
+            <p:ph type="sldNum" sz="quarter" idx="4294967295"/>
+          </p:nvPr>
+        </p:nvSpPr>
+        <p:spPr>
+          <a:xfrm>
+            <a:off x="11247120" y="6400800"/>
+            <a:ext cx="457200" cy="274320"/>
+          </a:xfrm>
+          <a:prstGeom prst="rect">
+            <a:avLst/>
+          </a:prstGeom>
+          <a:extLst>
+            <a:ext uri="{C572A759-6A51-4108-AA02-DFA0A04FC94B}">
+              <ma14:wrappingTextBoxFlag xmlns:ma14="http://schemas.microsoft.com/office/mac/drawingml/2011/main" val="0"/>
+            </a:ext>
+          </a:extLst>
+        </p:spPr>
+        <p:txBody>
+          <a:bodyPr/>
+          <a:lstStyle>
+            <a:lvl1pPr>
+              <a:defRPr sz="1000">
+                <a:solidFill>
+                  <a:schemeClr val="tx2"/>
+                </a:solidFill>
+              </a:defRPr>
+            </a:lvl1pPr>
+          </a:lstStyle>
+          <a:p>
+            <a:pPr algn="r"/>
+            <a:fld id="{F7021451-1387-4CA6-816F-3879F97B5CBC}" type="slidenum">
+              <a:rPr b="0" lang="en-US"/>
+              <a:t>19</a:t>
+            </a:fld>
+            <a:endParaRPr lang="en-US"/>
+          </a:p>
+        </p:txBody>
+      </p:sp>
     </p:spTree>
   </p:cSld>
   <p:clrMapOvr>
@@ -10296,6 +12306,131 @@
           </a:p>
         </p:txBody>
       </p:sp>
+    </p:spTree>
+  </p:cSld>
+  <p:clrMapOvr>
+    <a:masterClrMapping/>
+  </p:clrMapOvr>
+</p:sld>
+</file>
+
+<file path=ppt/slides/slide20.xml><?xml version="1.0" encoding="utf-8"?>
+<p:sld xmlns:a="http://schemas.openxmlformats.org/drawingml/2006/main" xmlns:r="http://schemas.openxmlformats.org/officeDocument/2006/relationships" xmlns:p="http://schemas.openxmlformats.org/presentationml/2006/main">
+  <p:cSld name="Slide 20">
+    <p:spTree>
+      <p:nvGrpSpPr>
+        <p:cNvPr id="1" name=""/>
+        <p:cNvGrpSpPr/>
+        <p:nvPr/>
+      </p:nvGrpSpPr>
+      <p:grpSpPr>
+        <a:xfrm>
+          <a:off x="0" y="0"/>
+          <a:ext cx="0" cy="0"/>
+          <a:chOff x="0" y="0"/>
+          <a:chExt cx="0" cy="0"/>
+        </a:xfrm>
+      </p:grpSpPr>
+      <p:sp>
+        <p:nvSpPr>
+          <p:cNvPr id="2" name="Text 0"/>
+          <p:cNvSpPr/>
+          <p:nvPr>
+            <p:ph idx="100" type="title" hasCustomPrompt="1"/>
+          </p:nvPr>
+        </p:nvSpPr>
+        <p:spPr>
+          <a:xfrm>
+            <a:off x="731520" y="2103120"/>
+            <a:ext cx="7680960" cy="1737360"/>
+          </a:xfrm>
+          <a:prstGeom prst="rect">
+            <a:avLst/>
+          </a:prstGeom>
+          <a:noFill/>
+          <a:ln/>
+        </p:spPr>
+        <p:txBody>
+          <a:bodyPr wrap="square" lIns="0" tIns="0" rIns="0" bIns="0" rtlCol="0" anchor="b"/>
+          <a:lstStyle/>
+          <a:p>
+            <a:pPr algn="l" indent="0" marL="0">
+              <a:buNone/>
+            </a:pPr>
+            <a:r>
+              <a:rPr lang="en-US" sz="4800" b="1" dirty="0">
+                <a:solidFill>
+                  <a:schemeClr val="bg1"/>
+                </a:solidFill>
+              </a:rPr>
+              <a:t>Let's build.</a:t>
+            </a:r>
+            <a:endParaRPr lang="en-US" sz="4800" dirty="0"/>
+          </a:p>
+        </p:txBody>
+      </p:sp>
+      <p:sp>
+        <p:nvSpPr>
+          <p:cNvPr id="3" name="Text 0"/>
+          <p:cNvSpPr/>
+          <p:nvPr>
+            <p:ph idx="101" type="body" hasCustomPrompt="1"/>
+          </p:nvPr>
+        </p:nvSpPr>
+        <p:spPr>
+          <a:xfrm>
+            <a:off x="731520" y="3977640"/>
+            <a:ext cx="7680960" cy="1280160"/>
+          </a:xfrm>
+          <a:prstGeom prst="rect">
+            <a:avLst/>
+          </a:prstGeom>
+          <a:noFill/>
+          <a:ln/>
+        </p:spPr>
+        <p:txBody>
+          <a:bodyPr wrap="square" lIns="0" tIns="0" rIns="0" bIns="0" rtlCol="0" anchor="t"/>
+          <a:lstStyle/>
+          <a:p>
+            <a:pPr algn="l" indent="0" marL="0">
+              <a:buNone/>
+            </a:pPr>
+            <a:r>
+              <a:rPr lang="en-US" sz="2200" dirty="0">
+                <a:solidFill>
+                  <a:schemeClr val="accent1"/>
+                </a:solidFill>
+              </a:rPr>
+              <a:t>Get the files: github.com/kingmellow08/ai-career-navigator</a:t>
+            </a:r>
+            <a:endParaRPr lang="en-US" sz="2200" dirty="0"/>
+          </a:p>
+        </p:txBody>
+      </p:sp>
+      <p:pic>
+        <p:nvPicPr>
+          <p:cNvPr id="4" name="closing icon" descr="Tools">    </p:cNvPr>
+          <p:cNvPicPr>
+            <a:picLocks noChangeAspect="1"/>
+          </p:cNvPicPr>
+          <p:nvPr/>
+        </p:nvPicPr>
+        <p:blipFill>
+          <a:blip r:embed="rId1"/>
+          <a:stretch>
+            <a:fillRect/>
+          </a:stretch>
+        </p:blipFill>
+        <p:spPr>
+          <a:xfrm>
+            <a:off x="9144000" y="2377440"/>
+            <a:ext cx="2194560" cy="2194560"/>
+          </a:xfrm>
+          <a:prstGeom prst="rect">
+            <a:avLst/>
+          </a:prstGeom>
+        </p:spPr>
+      </p:pic>
     </p:spTree>
   </p:cSld>
   <p:clrMapOvr>
